--- a/slides/cmapss_fd001_presentation.pptx
+++ b/slides/cmapss_fd001_presentation.pptx
@@ -2,27 +2,30 @@
 <file path=ppt/presentation.xml><?xml version="1.0" encoding="utf-8"?>
 <p:presentation xmlns:p="http://schemas.openxmlformats.org/presentationml/2006/main">
   <p:sldMasterIdLst>
-    <p:sldMasterId xmlns:r="http://schemas.openxmlformats.org/officeDocument/2006/relationships" id="2147483648" r:id="R43069f59d5504176"/>
+    <p:sldMasterId xmlns:r="http://schemas.openxmlformats.org/officeDocument/2006/relationships" id="2147483648" r:id="Re58b5c0bddde4125"/>
   </p:sldMasterIdLst>
   <p:notesMasterIdLst>
-    <p:notesMasterId xmlns:r="http://schemas.openxmlformats.org/officeDocument/2006/relationships" r:id="R2ce9423164db42fd"/>
+    <p:notesMasterId xmlns:r="http://schemas.openxmlformats.org/officeDocument/2006/relationships" r:id="Rcd79f44ee7704b31"/>
   </p:notesMasterIdLst>
   <p:sldIdLst>
-    <p:sldId xmlns:r="http://schemas.openxmlformats.org/officeDocument/2006/relationships" id="256" r:id="Rab90cef39654472e"/>
-    <p:sldId xmlns:r="http://schemas.openxmlformats.org/officeDocument/2006/relationships" id="257" r:id="R64425e2d2614412b"/>
-    <p:sldId xmlns:r="http://schemas.openxmlformats.org/officeDocument/2006/relationships" id="258" r:id="R3b84993b311d47f4"/>
-    <p:sldId xmlns:r="http://schemas.openxmlformats.org/officeDocument/2006/relationships" id="259" r:id="R419e7a56efd8496d"/>
-    <p:sldId xmlns:r="http://schemas.openxmlformats.org/officeDocument/2006/relationships" id="260" r:id="Rf9b69426ad6748f2"/>
-    <p:sldId xmlns:r="http://schemas.openxmlformats.org/officeDocument/2006/relationships" id="261" r:id="R4dc9375b883740e5"/>
-    <p:sldId xmlns:r="http://schemas.openxmlformats.org/officeDocument/2006/relationships" id="262" r:id="R107f874a600e40e9"/>
-    <p:sldId xmlns:r="http://schemas.openxmlformats.org/officeDocument/2006/relationships" id="263" r:id="R720a8d47a9c64480"/>
-    <p:sldId xmlns:r="http://schemas.openxmlformats.org/officeDocument/2006/relationships" id="264" r:id="Rdf59772fd4dc4b67"/>
-    <p:sldId xmlns:r="http://schemas.openxmlformats.org/officeDocument/2006/relationships" id="265" r:id="Rdeb0c28602e2461d"/>
-    <p:sldId xmlns:r="http://schemas.openxmlformats.org/officeDocument/2006/relationships" id="266" r:id="R31ae476e0ff4435c"/>
-    <p:sldId xmlns:r="http://schemas.openxmlformats.org/officeDocument/2006/relationships" id="267" r:id="Rab57abaae21f484b"/>
-    <p:sldId xmlns:r="http://schemas.openxmlformats.org/officeDocument/2006/relationships" id="268" r:id="Rbf10ba3e37694dab"/>
-    <p:sldId xmlns:r="http://schemas.openxmlformats.org/officeDocument/2006/relationships" id="269" r:id="Re6e9cff3d423405a"/>
-    <p:sldId xmlns:r="http://schemas.openxmlformats.org/officeDocument/2006/relationships" id="270" r:id="Rd974207a689a441a"/>
+    <p:sldId xmlns:r="http://schemas.openxmlformats.org/officeDocument/2006/relationships" id="256" r:id="R943f942bb23f4e94"/>
+    <p:sldId xmlns:r="http://schemas.openxmlformats.org/officeDocument/2006/relationships" id="257" r:id="Rf42a1872f4154377"/>
+    <p:sldId xmlns:r="http://schemas.openxmlformats.org/officeDocument/2006/relationships" id="258" r:id="R35381d84789240f2"/>
+    <p:sldId xmlns:r="http://schemas.openxmlformats.org/officeDocument/2006/relationships" id="259" r:id="R5a6575d339c64d7a"/>
+    <p:sldId xmlns:r="http://schemas.openxmlformats.org/officeDocument/2006/relationships" id="260" r:id="Rd45e7be1017442a3"/>
+    <p:sldId xmlns:r="http://schemas.openxmlformats.org/officeDocument/2006/relationships" id="261" r:id="R2fb9a20b1a5c4455"/>
+    <p:sldId xmlns:r="http://schemas.openxmlformats.org/officeDocument/2006/relationships" id="262" r:id="R9b39a2a8e8924994"/>
+    <p:sldId xmlns:r="http://schemas.openxmlformats.org/officeDocument/2006/relationships" id="263" r:id="R9ae74660e8724962"/>
+    <p:sldId xmlns:r="http://schemas.openxmlformats.org/officeDocument/2006/relationships" id="264" r:id="R78cafa76bc6d4b51"/>
+    <p:sldId xmlns:r="http://schemas.openxmlformats.org/officeDocument/2006/relationships" id="265" r:id="R244f7aa264284356"/>
+    <p:sldId xmlns:r="http://schemas.openxmlformats.org/officeDocument/2006/relationships" id="266" r:id="R4ed2ce06188a4eb1"/>
+    <p:sldId xmlns:r="http://schemas.openxmlformats.org/officeDocument/2006/relationships" id="267" r:id="R717877d64f884085"/>
+    <p:sldId xmlns:r="http://schemas.openxmlformats.org/officeDocument/2006/relationships" id="268" r:id="R41eb0ad303b64bf2"/>
+    <p:sldId xmlns:r="http://schemas.openxmlformats.org/officeDocument/2006/relationships" id="269" r:id="R70524e69980341a7"/>
+    <p:sldId xmlns:r="http://schemas.openxmlformats.org/officeDocument/2006/relationships" id="270" r:id="R756a1a46ee4c498c"/>
+    <p:sldId xmlns:r="http://schemas.openxmlformats.org/officeDocument/2006/relationships" id="271" r:id="R1f5f99211f604516"/>
+    <p:sldId xmlns:r="http://schemas.openxmlformats.org/officeDocument/2006/relationships" id="272" r:id="Rd399195afe8147d0"/>
+    <p:sldId xmlns:r="http://schemas.openxmlformats.org/officeDocument/2006/relationships" id="273" r:id="Rc6704c059d6d4683"/>
   </p:sldIdLst>
   <p:sldSz cx="12192000" cy="6858000"/>
   <p:notesSz cx="6858000" cy="9144000"/>
@@ -212,16 +215,16 @@
         <a:srgbClr val="96607D"/>
       </a:folHlink>
     </a:clrScheme>
-    <a:fontScheme name="">
+    <a:fontScheme name="Office">
       <a:majorFont>
-        <a:latin typeface="Aptos"/>
-        <a:ea typeface=""/>
-        <a:cs typeface=""/>
+        <a:latin typeface="Calibri Light"/>
+        <a:ea typeface="Calibri Light"/>
+        <a:cs typeface="Calibri Light"/>
       </a:majorFont>
       <a:minorFont>
-        <a:latin typeface="Aptos"/>
-        <a:ea typeface=""/>
-        <a:cs typeface=""/>
+        <a:latin typeface="Calibri"/>
+        <a:ea typeface="Calibri"/>
+        <a:cs typeface="Calibri"/>
       </a:minorFont>
     </a:fontScheme>
     <a:fmtScheme name="ChatGPT">
@@ -736,7 +739,7 @@
           <a:lstStyle xmlns:a="http://schemas.openxmlformats.org/drawingml/2006/main"/>
           <a:p xmlns:a="http://schemas.openxmlformats.org/drawingml/2006/main">
             <a:r>
-              <a:t>Pandas/PySpark cho cùng kết quả tại ba boundary Silver/Gold, max absolute difference 0.0. Benchmark chỉ đo build_engine_summary in-memory bằng Pandas. Scale 100x có 3.372.700 rows, hai lần 1,6752 và 1,6732 giây; không bao gồm I/O và không có PySpark timing. Fresh E2E đối chiếu 18 bảng, 5 hình và raw hash; 151 tests pass.</a:t>
+              <a:t>Pandas/PySpark cho cùng kết quả tại ba boundary Silver/Gold, max absolute difference 0.0. Benchmark chỉ đo build_engine_summary in-memory bằng Pandas. Scale 100x có 3.372.700 rows, hai lần 1,6752 và 1,6732 giây; không bao gồm I/O và không có PySpark timing. Fresh E2E đối chiếu 18 bảng, 5 hình và raw hash; 175 tests pass.</a:t>
             </a:r>
           </a:p>
         </p:txBody>
@@ -806,7 +809,7 @@
           <a:lstStyle xmlns:a="http://schemas.openxmlformats.org/drawingml/2006/main"/>
           <a:p xmlns:a="http://schemas.openxmlformats.org/drawingml/2006/main">
             <a:r>
-              <a:t>Kết luận: HistGradientBoosting được chọn theo GroupKFold, final MAE 15,3490 cycles với window 30 trên FD001. Ma trận bổ sung dùng window 10 cho bốn subset. Transfer từ FD001 sang FD002–FD004 có MAE 60,3215; 47,3949; 58,5731 cycles. Cảnh báo OOF vẫn là mô tả nội bộ. Health Index forecast là phân tích phụ.</a:t>
+              <a:t>Outer 5-fold được giữ từ baseline. Trong mỗi outer train, inner 3-fold chọn window, tham số và trọng số. Chỉ chấm outer validation sau khi chọn xong. Test đã được xem trước đợt này, không dùng để chọn lại cấu hình.</a:t>
             </a:r>
           </a:p>
         </p:txBody>
@@ -837,6 +840,216 @@
 </file>
 
 <file path=ppt/notesSlides/notesSlide15.xml><?xml version="1.0" encoding="utf-8"?>
+<p:notes xmlns:p="http://schemas.openxmlformats.org/presentationml/2006/main">
+  <p:cSld>
+    <p:spTree>
+      <p:nvGrpSpPr>
+        <p:cNvPr id="1" name=""/>
+        <p:cNvGrpSpPr/>
+        <p:nvPr/>
+      </p:nvGrpSpPr>
+      <p:grpSpPr>
+        <a:xfrm xmlns:a="http://schemas.openxmlformats.org/drawingml/2006/main"/>
+      </p:grpSpPr>
+      <p:sp>
+        <p:nvSpPr>
+          <p:cNvPr id="2" name="Slide Image Placeholder 1"/>
+          <p:cNvSpPr>
+            <a:spLocks xmlns:a="http://schemas.openxmlformats.org/drawingml/2006/main" noGrp="1"/>
+          </p:cNvSpPr>
+          <p:nvPr>
+            <p:ph type="sldImg" idx="0"/>
+          </p:nvPr>
+        </p:nvSpPr>
+        <p:spPr/>
+      </p:sp>
+      <p:sp>
+        <p:nvSpPr>
+          <p:cNvPr id="3" name="Notes Placeholder 2"/>
+          <p:cNvSpPr>
+            <a:spLocks xmlns:a="http://schemas.openxmlformats.org/drawingml/2006/main" noGrp="1"/>
+          </p:cNvSpPr>
+          <p:nvPr>
+            <p:ph type="body" idx="1"/>
+          </p:nvPr>
+        </p:nvSpPr>
+        <p:spPr/>
+        <p:txBody>
+          <a:bodyPr xmlns:a="http://schemas.openxmlformats.org/drawingml/2006/main"/>
+          <a:lstStyle xmlns:a="http://schemas.openxmlformats.org/drawingml/2006/main"/>
+          <a:p xmlns:a="http://schemas.openxmlformats.org/drawingml/2006/main">
+            <a:r>
+              <a:t>Các stage dùng cùng 100 train engines. Window 30 được chọn ở cả 5 vòng. Hai vòng chọn cấu hình HGB khác, ba vòng giữ baseline. Không vòng nào chọn thêm trọng số. Chênh lệch MAE RUL thấp +0,0054 cycles, CI [-0,0506;0,0639]. Tỷ lệ cảnh báo trễ tăng 4 điểm phần trăm, CI [1;8]. Các CI điều kiện trên predictions đã fit.</a:t>
+            </a:r>
+          </a:p>
+        </p:txBody>
+      </p:sp>
+      <p:sp>
+        <p:nvSpPr>
+          <p:cNvPr id="4" name="Slide Number Placeholder 3"/>
+          <p:cNvSpPr>
+            <a:spLocks xmlns:a="http://schemas.openxmlformats.org/drawingml/2006/main" noGrp="1"/>
+          </p:cNvSpPr>
+          <p:nvPr>
+            <p:ph type="sldNum" idx="5"/>
+          </p:nvPr>
+        </p:nvSpPr>
+        <p:spPr/>
+        <p:txBody>
+          <a:bodyPr xmlns:a="http://schemas.openxmlformats.org/drawingml/2006/main"/>
+          <a:lstStyle xmlns:a="http://schemas.openxmlformats.org/drawingml/2006/main"/>
+          <a:p xmlns:a="http://schemas.openxmlformats.org/drawingml/2006/main"/>
+        </p:txBody>
+      </p:sp>
+    </p:spTree>
+  </p:cSld>
+  <p:clrMapOvr>
+    <a:masterClrMapping xmlns:a="http://schemas.openxmlformats.org/drawingml/2006/main"/>
+  </p:clrMapOvr>
+</p:notes>
+</file>
+
+<file path=ppt/notesSlides/notesSlide16.xml><?xml version="1.0" encoding="utf-8"?>
+<p:notes xmlns:p="http://schemas.openxmlformats.org/presentationml/2006/main">
+  <p:cSld>
+    <p:spTree>
+      <p:nvGrpSpPr>
+        <p:cNvPr id="1" name=""/>
+        <p:cNvGrpSpPr/>
+        <p:nvPr/>
+      </p:nvGrpSpPr>
+      <p:grpSpPr>
+        <a:xfrm xmlns:a="http://schemas.openxmlformats.org/drawingml/2006/main"/>
+      </p:grpSpPr>
+      <p:sp>
+        <p:nvSpPr>
+          <p:cNvPr id="2" name="Slide Image Placeholder 1"/>
+          <p:cNvSpPr>
+            <a:spLocks xmlns:a="http://schemas.openxmlformats.org/drawingml/2006/main" noGrp="1"/>
+          </p:cNvSpPr>
+          <p:nvPr>
+            <p:ph type="sldImg" idx="0"/>
+          </p:nvPr>
+        </p:nvSpPr>
+        <p:spPr/>
+      </p:sp>
+      <p:sp>
+        <p:nvSpPr>
+          <p:cNvPr id="3" name="Notes Placeholder 2"/>
+          <p:cNvSpPr>
+            <a:spLocks xmlns:a="http://schemas.openxmlformats.org/drawingml/2006/main" noGrp="1"/>
+          </p:cNvSpPr>
+          <p:nvPr>
+            <p:ph type="body" idx="1"/>
+          </p:nvPr>
+        </p:nvSpPr>
+        <p:spPr/>
+        <p:txBody>
+          <a:bodyPr xmlns:a="http://schemas.openxmlformats.org/drawingml/2006/main"/>
+          <a:lstStyle xmlns:a="http://schemas.openxmlformats.org/drawingml/2006/main"/>
+          <a:p xmlns:a="http://schemas.openxmlformats.org/drawingml/2006/main">
+            <a:r>
+              <a:t>Đây là ví dụ từ inner selection, không phải outer evaluation độc lập của ứng viên hgb_08. hgb_08 giảm MAE RUL thấp khoảng 9,75% nhưng MAE toàn bộ tăng 0,3233 cycles. Strong weights giảm low-RUL MAE và cảnh báo trễ nhưng tăng MAE toàn bộ và alarm burden. Luật đã chốt không cho phép tăng chỉ số kiểm soát. Không tuning tiếp theo test.</a:t>
+            </a:r>
+          </a:p>
+        </p:txBody>
+      </p:sp>
+      <p:sp>
+        <p:nvSpPr>
+          <p:cNvPr id="4" name="Slide Number Placeholder 3"/>
+          <p:cNvSpPr>
+            <a:spLocks xmlns:a="http://schemas.openxmlformats.org/drawingml/2006/main" noGrp="1"/>
+          </p:cNvSpPr>
+          <p:nvPr>
+            <p:ph type="sldNum" idx="5"/>
+          </p:nvPr>
+        </p:nvSpPr>
+        <p:spPr/>
+        <p:txBody>
+          <a:bodyPr xmlns:a="http://schemas.openxmlformats.org/drawingml/2006/main"/>
+          <a:lstStyle xmlns:a="http://schemas.openxmlformats.org/drawingml/2006/main"/>
+          <a:p xmlns:a="http://schemas.openxmlformats.org/drawingml/2006/main"/>
+        </p:txBody>
+      </p:sp>
+    </p:spTree>
+  </p:cSld>
+  <p:clrMapOvr>
+    <a:masterClrMapping xmlns:a="http://schemas.openxmlformats.org/drawingml/2006/main"/>
+  </p:clrMapOvr>
+</p:notes>
+</file>
+
+<file path=ppt/notesSlides/notesSlide17.xml><?xml version="1.0" encoding="utf-8"?>
+<p:notes xmlns:p="http://schemas.openxmlformats.org/presentationml/2006/main">
+  <p:cSld>
+    <p:spTree>
+      <p:nvGrpSpPr>
+        <p:cNvPr id="1" name=""/>
+        <p:cNvGrpSpPr/>
+        <p:nvPr/>
+      </p:nvGrpSpPr>
+      <p:grpSpPr>
+        <a:xfrm xmlns:a="http://schemas.openxmlformats.org/drawingml/2006/main"/>
+      </p:grpSpPr>
+      <p:sp>
+        <p:nvSpPr>
+          <p:cNvPr id="2" name="Slide Image Placeholder 1"/>
+          <p:cNvSpPr>
+            <a:spLocks xmlns:a="http://schemas.openxmlformats.org/drawingml/2006/main" noGrp="1"/>
+          </p:cNvSpPr>
+          <p:nvPr>
+            <p:ph type="sldImg" idx="0"/>
+          </p:nvPr>
+        </p:nvSpPr>
+        <p:spPr/>
+      </p:sp>
+      <p:sp>
+        <p:nvSpPr>
+          <p:cNvPr id="3" name="Notes Placeholder 2"/>
+          <p:cNvSpPr>
+            <a:spLocks xmlns:a="http://schemas.openxmlformats.org/drawingml/2006/main" noGrp="1"/>
+          </p:cNvSpPr>
+          <p:nvPr>
+            <p:ph type="body" idx="1"/>
+          </p:nvPr>
+        </p:nvSpPr>
+        <p:spPr/>
+        <p:txBody>
+          <a:bodyPr xmlns:a="http://schemas.openxmlformats.org/drawingml/2006/main"/>
+          <a:lstStyle xmlns:a="http://schemas.openxmlformats.org/drawingml/2006/main"/>
+          <a:p xmlns:a="http://schemas.openxmlformats.org/drawingml/2006/main">
+            <a:r>
+              <a:t>Kết luận: HistGradientBoosting được chọn theo GroupKFold, final MAE 15,3490 cycles với window 30 trên FD001. Ma trận bổ sung dùng window 10 cho bốn subset. Transfer từ FD001 sang FD002–FD004 có MAE 60,3215; 47,3949; 58,5731 cycles. Cảnh báo OOF vẫn là mô tả nội bộ. Health Index forecast là phân tích phụ.</a:t>
+            </a:r>
+          </a:p>
+        </p:txBody>
+      </p:sp>
+      <p:sp>
+        <p:nvSpPr>
+          <p:cNvPr id="4" name="Slide Number Placeholder 3"/>
+          <p:cNvSpPr>
+            <a:spLocks xmlns:a="http://schemas.openxmlformats.org/drawingml/2006/main" noGrp="1"/>
+          </p:cNvSpPr>
+          <p:nvPr>
+            <p:ph type="sldNum" idx="5"/>
+          </p:nvPr>
+        </p:nvSpPr>
+        <p:spPr/>
+        <p:txBody>
+          <a:bodyPr xmlns:a="http://schemas.openxmlformats.org/drawingml/2006/main"/>
+          <a:lstStyle xmlns:a="http://schemas.openxmlformats.org/drawingml/2006/main"/>
+          <a:p xmlns:a="http://schemas.openxmlformats.org/drawingml/2006/main"/>
+        </p:txBody>
+      </p:sp>
+    </p:spTree>
+  </p:cSld>
+  <p:clrMapOvr>
+    <a:masterClrMapping xmlns:a="http://schemas.openxmlformats.org/drawingml/2006/main"/>
+  </p:clrMapOvr>
+</p:notes>
+</file>
+
+<file path=ppt/notesSlides/notesSlide18.xml><?xml version="1.0" encoding="utf-8"?>
 <p:notes xmlns:p="http://schemas.openxmlformats.org/presentationml/2006/main">
   <p:cSld>
     <p:spTree>
@@ -1504,7 +1717,7 @@
   </p:cSld>
   <p:clrMap bg1="lt1" tx1="dk1" bg2="lt2" tx2="dk2" accent1="accent1" accent2="accent2" accent3="accent3" accent4="accent4" accent5="accent5" accent6="accent6" hlink="hlink" folHlink="folHlink"/>
   <p:sldLayoutIdLst>
-    <p:sldLayoutId xmlns:r="http://schemas.openxmlformats.org/officeDocument/2006/relationships" id="2147483649" r:id="Rfeb52146435948a4"/>
+    <p:sldLayoutId xmlns:r="http://schemas.openxmlformats.org/officeDocument/2006/relationships" id="2147483649" r:id="Re41c164fe7e74f1a"/>
   </p:sldLayoutIdLst>
   <p:txStyles>
     <p:titleStyle>
@@ -1827,16 +2040,16 @@
         <a:srgbClr val="96607D"/>
       </a:folHlink>
     </a:clrScheme>
-    <a:fontScheme name="">
+    <a:fontScheme name="Office">
       <a:majorFont>
-        <a:latin typeface="Aptos"/>
-        <a:ea typeface=""/>
-        <a:cs typeface=""/>
+        <a:latin typeface="Calibri Light"/>
+        <a:ea typeface="Calibri Light"/>
+        <a:cs typeface="Calibri Light"/>
       </a:majorFont>
       <a:minorFont>
-        <a:latin typeface="Aptos"/>
-        <a:ea typeface=""/>
-        <a:cs typeface=""/>
+        <a:latin typeface="Calibri"/>
+        <a:ea typeface="Calibri"/>
+        <a:cs typeface="Calibri"/>
       </a:minorFont>
     </a:fontScheme>
     <a:fmtScheme name="ChatGPT">
@@ -2055,7 +2268,7 @@
           <p:cNvPr id="5" name="">
             <a:extLst xmlns:a="http://schemas.openxmlformats.org/drawingml/2006/main">
               <a:ext uri="{FF2B5EF4-FFF2-40B4-BE49-F238E27FC236}">
-                <a16:creationId xmlns:a16="http://schemas.microsoft.com/office/drawing/2014/main" id="{927EF06E-C9A1-4A81-89DC-2E07BB092B60}"/>
+                <a16:creationId xmlns:a16="http://schemas.microsoft.com/office/drawing/2014/main" id="{591BE462-9FA0-45FD-979B-4D3032FB84FF}"/>
               </a:ext>
             </a:extLst>
           </p:cNvPr>
@@ -2116,7 +2329,7 @@
           <p:cNvPr id="2" name="">
             <a:extLst xmlns:a="http://schemas.openxmlformats.org/drawingml/2006/main">
               <a:ext uri="{FF2B5EF4-FFF2-40B4-BE49-F238E27FC236}">
-                <a16:creationId xmlns:a16="http://schemas.microsoft.com/office/drawing/2014/main" id="{FDDB1FA9-6792-4728-9E94-64BF01354FA6}"/>
+                <a16:creationId xmlns:a16="http://schemas.microsoft.com/office/drawing/2014/main" id="{788FEA61-D633-4599-B032-C746A875AEAC}"/>
               </a:ext>
             </a:extLst>
           </p:cNvPr>
@@ -2177,7 +2390,7 @@
           <p:cNvPr id="3" name="">
             <a:extLst xmlns:a="http://schemas.openxmlformats.org/drawingml/2006/main">
               <a:ext uri="{FF2B5EF4-FFF2-40B4-BE49-F238E27FC236}">
-                <a16:creationId xmlns:a16="http://schemas.microsoft.com/office/drawing/2014/main" id="{7801A303-D3DC-4F37-8091-8E9CC48CAA08}"/>
+                <a16:creationId xmlns:a16="http://schemas.microsoft.com/office/drawing/2014/main" id="{8154D036-4F90-4FAC-81C6-058551F233EE}"/>
               </a:ext>
             </a:extLst>
           </p:cNvPr>
@@ -2238,7 +2451,7 @@
           <p:cNvPr id="4" name="">
             <a:extLst xmlns:a="http://schemas.openxmlformats.org/drawingml/2006/main">
               <a:ext uri="{FF2B5EF4-FFF2-40B4-BE49-F238E27FC236}">
-                <a16:creationId xmlns:a16="http://schemas.microsoft.com/office/drawing/2014/main" id="{451471F4-B042-4B20-B46F-488BAE637294}"/>
+                <a16:creationId xmlns:a16="http://schemas.microsoft.com/office/drawing/2014/main" id="{105A829B-F7DE-47C0-AE60-B15984C20EDC}"/>
               </a:ext>
             </a:extLst>
           </p:cNvPr>
@@ -2297,7 +2510,7 @@
     </p:spTree>
     <p:extLst>
       <p:ext uri="{BB962C8B-B14F-4D97-AF65-F5344CB8AC3E}">
-        <p14:creationId xmlns:p14="http://schemas.microsoft.com/office/powerpoint/2010/main" val="1047789355"/>
+        <p14:creationId xmlns:p14="http://schemas.microsoft.com/office/powerpoint/2010/main" val="2147292593"/>
       </p:ext>
     </p:extLst>
   </p:cSld>
@@ -2328,7 +2541,7 @@
           <p:cNvPr id="11" name="">
             <a:extLst xmlns:a="http://schemas.openxmlformats.org/drawingml/2006/main">
               <a:ext uri="{FF2B5EF4-FFF2-40B4-BE49-F238E27FC236}">
-                <a16:creationId xmlns:a16="http://schemas.microsoft.com/office/drawing/2014/main" id="{47698572-812E-4089-B50D-8FAC3C7A01DE}"/>
+                <a16:creationId xmlns:a16="http://schemas.microsoft.com/office/drawing/2014/main" id="{0B7B2763-2B1C-49A2-8210-19EB93D6623E}"/>
               </a:ext>
             </a:extLst>
           </p:cNvPr>
@@ -2389,7 +2602,7 @@
           <p:cNvPr id="2" name="">
             <a:extLst xmlns:a="http://schemas.openxmlformats.org/drawingml/2006/main">
               <a:ext uri="{FF2B5EF4-FFF2-40B4-BE49-F238E27FC236}">
-                <a16:creationId xmlns:a16="http://schemas.microsoft.com/office/drawing/2014/main" id="{667F8BBC-FA84-4631-9C2B-9B6A97AF9655}"/>
+                <a16:creationId xmlns:a16="http://schemas.microsoft.com/office/drawing/2014/main" id="{F382C42A-C11B-456B-92D5-4B0E2FDB1312}"/>
               </a:ext>
             </a:extLst>
           </p:cNvPr>
@@ -2450,7 +2663,7 @@
           <p:cNvPr id="3" name="">
             <a:extLst xmlns:a="http://schemas.openxmlformats.org/drawingml/2006/main">
               <a:ext uri="{FF2B5EF4-FFF2-40B4-BE49-F238E27FC236}">
-                <a16:creationId xmlns:a16="http://schemas.microsoft.com/office/drawing/2014/main" id="{36F083A1-9FC1-4BED-838C-F8B4B2397B10}"/>
+                <a16:creationId xmlns:a16="http://schemas.microsoft.com/office/drawing/2014/main" id="{BE352025-3334-416E-8AFE-7DDA1E1B2C1E}"/>
               </a:ext>
             </a:extLst>
           </p:cNvPr>
@@ -2511,7 +2724,7 @@
           <p:cNvPr id="4" name="">
             <a:extLst xmlns:a="http://schemas.openxmlformats.org/drawingml/2006/main">
               <a:ext uri="{FF2B5EF4-FFF2-40B4-BE49-F238E27FC236}">
-                <a16:creationId xmlns:a16="http://schemas.microsoft.com/office/drawing/2014/main" id="{7730D7A9-F966-4E66-A7B4-95D0B0252623}"/>
+                <a16:creationId xmlns:a16="http://schemas.microsoft.com/office/drawing/2014/main" id="{B958C523-A7B3-45E7-A69A-0AC5FDDD9A1D}"/>
               </a:ext>
             </a:extLst>
           </p:cNvPr>
@@ -2576,7 +2789,7 @@
           <p:nvPr/>
         </p:nvPicPr>
         <p:blipFill>
-          <a:blip xmlns:r="http://schemas.openxmlformats.org/officeDocument/2006/relationships" xmlns:a="http://schemas.openxmlformats.org/drawingml/2006/main" r:embed="R3399447ea500454d"/>
+          <a:blip xmlns:r="http://schemas.openxmlformats.org/officeDocument/2006/relationships" xmlns:a="http://schemas.openxmlformats.org/drawingml/2006/main" r:embed="R07eda72a577d4fd1"/>
           <a:stretch xmlns:a="http://schemas.openxmlformats.org/drawingml/2006/main"/>
         </p:blipFill>
         <p:spPr>
@@ -2594,7 +2807,7 @@
           <p:cNvPr id="6" name="">
             <a:extLst xmlns:a="http://schemas.openxmlformats.org/drawingml/2006/main">
               <a:ext uri="{FF2B5EF4-FFF2-40B4-BE49-F238E27FC236}">
-                <a16:creationId xmlns:a16="http://schemas.microsoft.com/office/drawing/2014/main" id="{B112DE29-FB5A-491D-A668-8D4715FC38F9}"/>
+                <a16:creationId xmlns:a16="http://schemas.microsoft.com/office/drawing/2014/main" id="{E3154D58-B44A-488F-B7D7-A714C5E875A6}"/>
               </a:ext>
             </a:extLst>
           </p:cNvPr>
@@ -2655,7 +2868,7 @@
           <p:cNvPr id="7" name="">
             <a:extLst xmlns:a="http://schemas.openxmlformats.org/drawingml/2006/main">
               <a:ext uri="{FF2B5EF4-FFF2-40B4-BE49-F238E27FC236}">
-                <a16:creationId xmlns:a16="http://schemas.microsoft.com/office/drawing/2014/main" id="{D2957864-38FD-45BC-9B22-706E4893DCD3}"/>
+                <a16:creationId xmlns:a16="http://schemas.microsoft.com/office/drawing/2014/main" id="{09420CCD-2AAF-414D-BD93-D577DD610489}"/>
               </a:ext>
             </a:extLst>
           </p:cNvPr>
@@ -2716,7 +2929,7 @@
           <p:cNvPr id="8" name="">
             <a:extLst xmlns:a="http://schemas.openxmlformats.org/drawingml/2006/main">
               <a:ext uri="{FF2B5EF4-FFF2-40B4-BE49-F238E27FC236}">
-                <a16:creationId xmlns:a16="http://schemas.microsoft.com/office/drawing/2014/main" id="{EE570D63-FDE4-45F5-A671-2696963D0B39}"/>
+                <a16:creationId xmlns:a16="http://schemas.microsoft.com/office/drawing/2014/main" id="{F1E077B3-F368-4BA3-B22E-9193E0C7E8BF}"/>
               </a:ext>
             </a:extLst>
           </p:cNvPr>
@@ -2777,7 +2990,7 @@
           <p:cNvPr id="9" name="">
             <a:extLst xmlns:a="http://schemas.openxmlformats.org/drawingml/2006/main">
               <a:ext uri="{FF2B5EF4-FFF2-40B4-BE49-F238E27FC236}">
-                <a16:creationId xmlns:a16="http://schemas.microsoft.com/office/drawing/2014/main" id="{B0E2050E-EC51-4E02-9132-FCCEAC89F1BC}"/>
+                <a16:creationId xmlns:a16="http://schemas.microsoft.com/office/drawing/2014/main" id="{509D60E5-95A0-4A44-A79C-6C00DB6584F0}"/>
               </a:ext>
             </a:extLst>
           </p:cNvPr>
@@ -2838,7 +3051,7 @@
           <p:cNvPr id="10" name="">
             <a:extLst xmlns:a="http://schemas.openxmlformats.org/drawingml/2006/main">
               <a:ext uri="{FF2B5EF4-FFF2-40B4-BE49-F238E27FC236}">
-                <a16:creationId xmlns:a16="http://schemas.microsoft.com/office/drawing/2014/main" id="{1ACD2C81-16BE-4E77-B527-218FE8A6B48D}"/>
+                <a16:creationId xmlns:a16="http://schemas.microsoft.com/office/drawing/2014/main" id="{006635FA-73B8-42AD-98DF-1458F3B29814}"/>
               </a:ext>
             </a:extLst>
           </p:cNvPr>
@@ -2897,7 +3110,7 @@
     </p:spTree>
     <p:extLst>
       <p:ext uri="{BB962C8B-B14F-4D97-AF65-F5344CB8AC3E}">
-        <p14:creationId xmlns:p14="http://schemas.microsoft.com/office/powerpoint/2010/main" val="1092815356"/>
+        <p14:creationId xmlns:p14="http://schemas.microsoft.com/office/powerpoint/2010/main" val="1868418869"/>
       </p:ext>
     </p:extLst>
   </p:cSld>
@@ -2928,7 +3141,7 @@
           <p:cNvPr id="9" name="">
             <a:extLst xmlns:a="http://schemas.openxmlformats.org/drawingml/2006/main">
               <a:ext uri="{FF2B5EF4-FFF2-40B4-BE49-F238E27FC236}">
-                <a16:creationId xmlns:a16="http://schemas.microsoft.com/office/drawing/2014/main" id="{101F21FC-22B0-417B-870A-DCD5764240E5}"/>
+                <a16:creationId xmlns:a16="http://schemas.microsoft.com/office/drawing/2014/main" id="{3EC9F2C1-F152-4CE9-937E-F971EA43AD7A}"/>
               </a:ext>
             </a:extLst>
           </p:cNvPr>
@@ -2989,7 +3202,7 @@
           <p:cNvPr id="2" name="">
             <a:extLst xmlns:a="http://schemas.openxmlformats.org/drawingml/2006/main">
               <a:ext uri="{FF2B5EF4-FFF2-40B4-BE49-F238E27FC236}">
-                <a16:creationId xmlns:a16="http://schemas.microsoft.com/office/drawing/2014/main" id="{524F88FB-598A-4256-B96A-14AB7AFEDBDA}"/>
+                <a16:creationId xmlns:a16="http://schemas.microsoft.com/office/drawing/2014/main" id="{10D721F9-239E-46EB-9E9C-3D0C4AEB0BE6}"/>
               </a:ext>
             </a:extLst>
           </p:cNvPr>
@@ -3050,7 +3263,7 @@
           <p:cNvPr id="3" name="">
             <a:extLst xmlns:a="http://schemas.openxmlformats.org/drawingml/2006/main">
               <a:ext uri="{FF2B5EF4-FFF2-40B4-BE49-F238E27FC236}">
-                <a16:creationId xmlns:a16="http://schemas.microsoft.com/office/drawing/2014/main" id="{FE5EEAB3-61F5-4E0A-984A-E1FF3762010F}"/>
+                <a16:creationId xmlns:a16="http://schemas.microsoft.com/office/drawing/2014/main" id="{742FF340-4519-4800-BCD7-33A9518CD9C8}"/>
               </a:ext>
             </a:extLst>
           </p:cNvPr>
@@ -3111,7 +3324,7 @@
           <p:cNvPr id="4" name="">
             <a:extLst xmlns:a="http://schemas.openxmlformats.org/drawingml/2006/main">
               <a:ext uri="{FF2B5EF4-FFF2-40B4-BE49-F238E27FC236}">
-                <a16:creationId xmlns:a16="http://schemas.microsoft.com/office/drawing/2014/main" id="{F43108CE-F9E4-4194-834D-205A39265E44}"/>
+                <a16:creationId xmlns:a16="http://schemas.microsoft.com/office/drawing/2014/main" id="{1AE2B875-A107-4DF6-BB1F-92E48E319857}"/>
               </a:ext>
             </a:extLst>
           </p:cNvPr>
@@ -3176,7 +3389,7 @@
           <p:nvPr/>
         </p:nvPicPr>
         <p:blipFill>
-          <a:blip xmlns:r="http://schemas.openxmlformats.org/officeDocument/2006/relationships" xmlns:a="http://schemas.openxmlformats.org/drawingml/2006/main" r:embed="R7e561f812e9d4ffd"/>
+          <a:blip xmlns:r="http://schemas.openxmlformats.org/officeDocument/2006/relationships" xmlns:a="http://schemas.openxmlformats.org/drawingml/2006/main" r:embed="Ra8012491e5fa4881"/>
           <a:stretch xmlns:a="http://schemas.openxmlformats.org/drawingml/2006/main"/>
         </p:blipFill>
         <p:spPr>
@@ -3477,7 +3690,7 @@
           <p:cNvPr id="7" name="">
             <a:extLst xmlns:a="http://schemas.openxmlformats.org/drawingml/2006/main">
               <a:ext uri="{FF2B5EF4-FFF2-40B4-BE49-F238E27FC236}">
-                <a16:creationId xmlns:a16="http://schemas.microsoft.com/office/drawing/2014/main" id="{109BAA9B-C0A8-43DD-9086-F2DA9BC4B376}"/>
+                <a16:creationId xmlns:a16="http://schemas.microsoft.com/office/drawing/2014/main" id="{AC3A8413-A1CD-4408-B8C9-A2DB11AB76A2}"/>
               </a:ext>
             </a:extLst>
           </p:cNvPr>
@@ -3538,7 +3751,7 @@
           <p:cNvPr id="8" name="">
             <a:extLst xmlns:a="http://schemas.openxmlformats.org/drawingml/2006/main">
               <a:ext uri="{FF2B5EF4-FFF2-40B4-BE49-F238E27FC236}">
-                <a16:creationId xmlns:a16="http://schemas.microsoft.com/office/drawing/2014/main" id="{D286B8E3-FF9E-43B0-9332-8BDBB5B83719}"/>
+                <a16:creationId xmlns:a16="http://schemas.microsoft.com/office/drawing/2014/main" id="{33C0F27D-1983-4B9D-84F8-B46BE16E874F}"/>
               </a:ext>
             </a:extLst>
           </p:cNvPr>
@@ -3597,7 +3810,7 @@
     </p:spTree>
     <p:extLst>
       <p:ext uri="{BB962C8B-B14F-4D97-AF65-F5344CB8AC3E}">
-        <p14:creationId xmlns:p14="http://schemas.microsoft.com/office/powerpoint/2010/main" val="962487007"/>
+        <p14:creationId xmlns:p14="http://schemas.microsoft.com/office/powerpoint/2010/main" val="1285266853"/>
       </p:ext>
     </p:extLst>
   </p:cSld>
@@ -3628,7 +3841,7 @@
           <p:cNvPr id="11" name="">
             <a:extLst xmlns:a="http://schemas.openxmlformats.org/drawingml/2006/main">
               <a:ext uri="{FF2B5EF4-FFF2-40B4-BE49-F238E27FC236}">
-                <a16:creationId xmlns:a16="http://schemas.microsoft.com/office/drawing/2014/main" id="{53F45AD6-27C2-47D4-8356-19EAB122AA29}"/>
+                <a16:creationId xmlns:a16="http://schemas.microsoft.com/office/drawing/2014/main" id="{D66A9032-5BC0-4149-A4D4-DC146B0CDF97}"/>
               </a:ext>
             </a:extLst>
           </p:cNvPr>
@@ -3689,7 +3902,7 @@
           <p:cNvPr id="2" name="">
             <a:extLst xmlns:a="http://schemas.openxmlformats.org/drawingml/2006/main">
               <a:ext uri="{FF2B5EF4-FFF2-40B4-BE49-F238E27FC236}">
-                <a16:creationId xmlns:a16="http://schemas.microsoft.com/office/drawing/2014/main" id="{0EADE791-4FAA-4F32-9071-29B9D2BCBEED}"/>
+                <a16:creationId xmlns:a16="http://schemas.microsoft.com/office/drawing/2014/main" id="{E78E9B39-E68B-4F8F-BFCA-D4ACEEF6029C}"/>
               </a:ext>
             </a:extLst>
           </p:cNvPr>
@@ -3750,7 +3963,7 @@
           <p:cNvPr id="3" name="">
             <a:extLst xmlns:a="http://schemas.openxmlformats.org/drawingml/2006/main">
               <a:ext uri="{FF2B5EF4-FFF2-40B4-BE49-F238E27FC236}">
-                <a16:creationId xmlns:a16="http://schemas.microsoft.com/office/drawing/2014/main" id="{186CF75D-FBDC-4E76-9063-A16132647638}"/>
+                <a16:creationId xmlns:a16="http://schemas.microsoft.com/office/drawing/2014/main" id="{A62E885C-4229-4B73-8D9B-BBD72B5883FD}"/>
               </a:ext>
             </a:extLst>
           </p:cNvPr>
@@ -3811,7 +4024,7 @@
           <p:cNvPr id="4" name="">
             <a:extLst xmlns:a="http://schemas.openxmlformats.org/drawingml/2006/main">
               <a:ext uri="{FF2B5EF4-FFF2-40B4-BE49-F238E27FC236}">
-                <a16:creationId xmlns:a16="http://schemas.microsoft.com/office/drawing/2014/main" id="{BD92A017-42F9-4065-9282-D686DCCC079E}"/>
+                <a16:creationId xmlns:a16="http://schemas.microsoft.com/office/drawing/2014/main" id="{733545AF-1603-41C4-9686-37559E5C0246}"/>
               </a:ext>
             </a:extLst>
           </p:cNvPr>
@@ -3876,7 +4089,7 @@
           <p:nvPr/>
         </p:nvPicPr>
         <p:blipFill>
-          <a:blip xmlns:r="http://schemas.openxmlformats.org/officeDocument/2006/relationships" xmlns:a="http://schemas.openxmlformats.org/drawingml/2006/main" r:embed="Re5adfd0927524c3f"/>
+          <a:blip xmlns:r="http://schemas.openxmlformats.org/officeDocument/2006/relationships" xmlns:a="http://schemas.openxmlformats.org/drawingml/2006/main" r:embed="Rbb433cb00d7b4833"/>
           <a:stretch xmlns:a="http://schemas.openxmlformats.org/drawingml/2006/main"/>
         </p:blipFill>
         <p:spPr>
@@ -3894,7 +4107,7 @@
           <p:cNvPr id="6" name="">
             <a:extLst xmlns:a="http://schemas.openxmlformats.org/drawingml/2006/main">
               <a:ext uri="{FF2B5EF4-FFF2-40B4-BE49-F238E27FC236}">
-                <a16:creationId xmlns:a16="http://schemas.microsoft.com/office/drawing/2014/main" id="{80311430-8A99-4431-8455-AC527F2070E1}"/>
+                <a16:creationId xmlns:a16="http://schemas.microsoft.com/office/drawing/2014/main" id="{F05CDF73-F686-4CDD-8238-1AF2CA3D7DCC}"/>
               </a:ext>
             </a:extLst>
           </p:cNvPr>
@@ -3955,7 +4168,7 @@
           <p:cNvPr id="7" name="">
             <a:extLst xmlns:a="http://schemas.openxmlformats.org/drawingml/2006/main">
               <a:ext uri="{FF2B5EF4-FFF2-40B4-BE49-F238E27FC236}">
-                <a16:creationId xmlns:a16="http://schemas.microsoft.com/office/drawing/2014/main" id="{89FF4AD3-4052-4DC9-B75F-75CFBF952FAB}"/>
+                <a16:creationId xmlns:a16="http://schemas.microsoft.com/office/drawing/2014/main" id="{7E2E8D65-C249-4F4B-BF39-F39203AB9E61}"/>
               </a:ext>
             </a:extLst>
           </p:cNvPr>
@@ -4016,7 +4229,7 @@
           <p:cNvPr id="8" name="">
             <a:extLst xmlns:a="http://schemas.openxmlformats.org/drawingml/2006/main">
               <a:ext uri="{FF2B5EF4-FFF2-40B4-BE49-F238E27FC236}">
-                <a16:creationId xmlns:a16="http://schemas.microsoft.com/office/drawing/2014/main" id="{7A25FBE1-789F-413A-B9C2-887414E52262}"/>
+                <a16:creationId xmlns:a16="http://schemas.microsoft.com/office/drawing/2014/main" id="{A0887943-1E8C-47A2-9441-CF4D8AA0513C}"/>
               </a:ext>
             </a:extLst>
           </p:cNvPr>
@@ -4077,7 +4290,7 @@
           <p:cNvPr id="9" name="">
             <a:extLst xmlns:a="http://schemas.openxmlformats.org/drawingml/2006/main">
               <a:ext uri="{FF2B5EF4-FFF2-40B4-BE49-F238E27FC236}">
-                <a16:creationId xmlns:a16="http://schemas.microsoft.com/office/drawing/2014/main" id="{73C41910-DC76-4B5A-B440-56ADCB35F7EC}"/>
+                <a16:creationId xmlns:a16="http://schemas.microsoft.com/office/drawing/2014/main" id="{92DA953E-1CC1-4BAB-9D18-EA51B3F586F0}"/>
               </a:ext>
             </a:extLst>
           </p:cNvPr>
@@ -4138,7 +4351,7 @@
           <p:cNvPr id="10" name="">
             <a:extLst xmlns:a="http://schemas.openxmlformats.org/drawingml/2006/main">
               <a:ext uri="{FF2B5EF4-FFF2-40B4-BE49-F238E27FC236}">
-                <a16:creationId xmlns:a16="http://schemas.microsoft.com/office/drawing/2014/main" id="{DDD94A43-2862-4BEF-B542-F5DB448DF5C3}"/>
+                <a16:creationId xmlns:a16="http://schemas.microsoft.com/office/drawing/2014/main" id="{354254A1-FEE5-44C9-8644-CA0F9A9FC9EA}"/>
               </a:ext>
             </a:extLst>
           </p:cNvPr>
@@ -4197,7 +4410,7 @@
     </p:spTree>
     <p:extLst>
       <p:ext uri="{BB962C8B-B14F-4D97-AF65-F5344CB8AC3E}">
-        <p14:creationId xmlns:p14="http://schemas.microsoft.com/office/powerpoint/2010/main" val="902753178"/>
+        <p14:creationId xmlns:p14="http://schemas.microsoft.com/office/powerpoint/2010/main" val="1283968221"/>
       </p:ext>
     </p:extLst>
   </p:cSld>
@@ -4228,7 +4441,7 @@
           <p:cNvPr id="11" name="">
             <a:extLst xmlns:a="http://schemas.openxmlformats.org/drawingml/2006/main">
               <a:ext uri="{FF2B5EF4-FFF2-40B4-BE49-F238E27FC236}">
-                <a16:creationId xmlns:a16="http://schemas.microsoft.com/office/drawing/2014/main" id="{612CA299-438F-4EA7-BC8E-0AC62AD3BBDF}"/>
+                <a16:creationId xmlns:a16="http://schemas.microsoft.com/office/drawing/2014/main" id="{9AF86465-26BF-4B6D-80A9-F865018FA73A}"/>
               </a:ext>
             </a:extLst>
           </p:cNvPr>
@@ -4289,7 +4502,7 @@
           <p:cNvPr id="2" name="">
             <a:extLst xmlns:a="http://schemas.openxmlformats.org/drawingml/2006/main">
               <a:ext uri="{FF2B5EF4-FFF2-40B4-BE49-F238E27FC236}">
-                <a16:creationId xmlns:a16="http://schemas.microsoft.com/office/drawing/2014/main" id="{F50A51F0-5D97-4A06-BFD2-E1F1EF3E0E17}"/>
+                <a16:creationId xmlns:a16="http://schemas.microsoft.com/office/drawing/2014/main" id="{21616687-F611-4A1F-A22D-E921354BCD1A}"/>
               </a:ext>
             </a:extLst>
           </p:cNvPr>
@@ -4350,7 +4563,7 @@
           <p:cNvPr id="3" name="">
             <a:extLst xmlns:a="http://schemas.openxmlformats.org/drawingml/2006/main">
               <a:ext uri="{FF2B5EF4-FFF2-40B4-BE49-F238E27FC236}">
-                <a16:creationId xmlns:a16="http://schemas.microsoft.com/office/drawing/2014/main" id="{B39EBB06-64D3-4603-B78F-4C906C62B289}"/>
+                <a16:creationId xmlns:a16="http://schemas.microsoft.com/office/drawing/2014/main" id="{E19651D2-8038-480A-A5CF-7A4E7A25FEBB}"/>
               </a:ext>
             </a:extLst>
           </p:cNvPr>
@@ -4411,7 +4624,7 @@
           <p:cNvPr id="4" name="">
             <a:extLst xmlns:a="http://schemas.openxmlformats.org/drawingml/2006/main">
               <a:ext uri="{FF2B5EF4-FFF2-40B4-BE49-F238E27FC236}">
-                <a16:creationId xmlns:a16="http://schemas.microsoft.com/office/drawing/2014/main" id="{0880C7A2-E9DC-430E-A387-0F64A2069C1A}"/>
+                <a16:creationId xmlns:a16="http://schemas.microsoft.com/office/drawing/2014/main" id="{A6EA5691-CA52-4B16-8E64-92D81147FCBB}"/>
               </a:ext>
             </a:extLst>
           </p:cNvPr>
@@ -4472,7 +4685,7 @@
           <p:cNvPr id="5" name="">
             <a:extLst xmlns:a="http://schemas.openxmlformats.org/drawingml/2006/main">
               <a:ext uri="{FF2B5EF4-FFF2-40B4-BE49-F238E27FC236}">
-                <a16:creationId xmlns:a16="http://schemas.microsoft.com/office/drawing/2014/main" id="{84E7AC98-9DB2-4E48-8B77-36AA0C204DA3}"/>
+                <a16:creationId xmlns:a16="http://schemas.microsoft.com/office/drawing/2014/main" id="{3FF8AF82-F680-4BE8-9BEB-98D01363A119}"/>
               </a:ext>
             </a:extLst>
           </p:cNvPr>
@@ -4533,7 +4746,7 @@
           <p:cNvPr id="6" name="">
             <a:extLst xmlns:a="http://schemas.openxmlformats.org/drawingml/2006/main">
               <a:ext uri="{FF2B5EF4-FFF2-40B4-BE49-F238E27FC236}">
-                <a16:creationId xmlns:a16="http://schemas.microsoft.com/office/drawing/2014/main" id="{27A5F1E5-0A22-4625-BC74-166DD924F156}"/>
+                <a16:creationId xmlns:a16="http://schemas.microsoft.com/office/drawing/2014/main" id="{03200E5A-9980-4632-8EEE-314941AEF9AF}"/>
               </a:ext>
             </a:extLst>
           </p:cNvPr>
@@ -4594,7 +4807,7 @@
           <p:cNvPr id="7" name="">
             <a:extLst xmlns:a="http://schemas.openxmlformats.org/drawingml/2006/main">
               <a:ext uri="{FF2B5EF4-FFF2-40B4-BE49-F238E27FC236}">
-                <a16:creationId xmlns:a16="http://schemas.microsoft.com/office/drawing/2014/main" id="{D01D68E0-2A4B-4864-895C-2C760D7F70A6}"/>
+                <a16:creationId xmlns:a16="http://schemas.microsoft.com/office/drawing/2014/main" id="{5F72297F-4D0D-40FA-A36C-EDE0585F8129}"/>
               </a:ext>
             </a:extLst>
           </p:cNvPr>
@@ -4655,7 +4868,7 @@
           <p:cNvPr id="8" name="">
             <a:extLst xmlns:a="http://schemas.openxmlformats.org/drawingml/2006/main">
               <a:ext uri="{FF2B5EF4-FFF2-40B4-BE49-F238E27FC236}">
-                <a16:creationId xmlns:a16="http://schemas.microsoft.com/office/drawing/2014/main" id="{C0B7D0C3-9EF0-47EA-B063-FB894B76B384}"/>
+                <a16:creationId xmlns:a16="http://schemas.microsoft.com/office/drawing/2014/main" id="{D4FB69E5-9C9B-4F0A-B26E-1F83BA5AAE7F}"/>
               </a:ext>
             </a:extLst>
           </p:cNvPr>
@@ -4716,7 +4929,7 @@
           <p:cNvPr id="9" name="">
             <a:extLst xmlns:a="http://schemas.openxmlformats.org/drawingml/2006/main">
               <a:ext uri="{FF2B5EF4-FFF2-40B4-BE49-F238E27FC236}">
-                <a16:creationId xmlns:a16="http://schemas.microsoft.com/office/drawing/2014/main" id="{48B81768-7D53-482A-A939-4AEF7CEC43E8}"/>
+                <a16:creationId xmlns:a16="http://schemas.microsoft.com/office/drawing/2014/main" id="{626200E8-6309-4504-B7FB-D7EEA85E2F62}"/>
               </a:ext>
             </a:extLst>
           </p:cNvPr>
@@ -4777,7 +4990,7 @@
           <p:cNvPr id="10" name="">
             <a:extLst xmlns:a="http://schemas.openxmlformats.org/drawingml/2006/main">
               <a:ext uri="{FF2B5EF4-FFF2-40B4-BE49-F238E27FC236}">
-                <a16:creationId xmlns:a16="http://schemas.microsoft.com/office/drawing/2014/main" id="{72C258E8-DA4D-4B6F-8674-6FD175205BC5}"/>
+                <a16:creationId xmlns:a16="http://schemas.microsoft.com/office/drawing/2014/main" id="{8663E835-E9AE-42AB-9C2B-AAEA35FF51E8}"/>
               </a:ext>
             </a:extLst>
           </p:cNvPr>
@@ -4828,7 +5041,7 @@
                 <a:ea typeface="Arial"/>
                 <a:cs typeface="Arial"/>
               </a:rPr>
-              <a:t>Chạy lại từ raw: 18 bảng khớp nội dung, 5 hình byte-identical, raw hash không đổi; 151 tests pass.</a:t>
+              <a:t>Chạy lại từ raw: 18 bảng khớp nội dung, 5 hình byte-identical, raw hash không đổi; 175 tests pass.</a:t>
             </a:r>
           </a:p>
         </p:txBody>
@@ -4836,7 +5049,7 @@
     </p:spTree>
     <p:extLst>
       <p:ext uri="{BB962C8B-B14F-4D97-AF65-F5344CB8AC3E}">
-        <p14:creationId xmlns:p14="http://schemas.microsoft.com/office/powerpoint/2010/main" val="1246094989"/>
+        <p14:creationId xmlns:p14="http://schemas.microsoft.com/office/powerpoint/2010/main" val="1156684681"/>
       </p:ext>
     </p:extLst>
   </p:cSld>
@@ -4867,7 +5080,7 @@
           <p:cNvPr id="11" name="">
             <a:extLst xmlns:a="http://schemas.openxmlformats.org/drawingml/2006/main">
               <a:ext uri="{FF2B5EF4-FFF2-40B4-BE49-F238E27FC236}">
-                <a16:creationId xmlns:a16="http://schemas.microsoft.com/office/drawing/2014/main" id="{FE99ADE9-6E43-40E5-9A07-0D28D32734B7}"/>
+                <a16:creationId xmlns:a16="http://schemas.microsoft.com/office/drawing/2014/main" id="{741B6DE7-7A63-4AF3-9983-83FFC99F88CD}"/>
               </a:ext>
             </a:extLst>
           </p:cNvPr>
@@ -4918,7 +5131,7 @@
                 <a:ea typeface="Arial"/>
                 <a:cs typeface="Arial"/>
               </a:rPr>
-              <a:t>Kết luận và giới hạn</a:t>
+              <a:t>Thiết kế thử nghiệm cải thiện RUL</a:t>
             </a:r>
           </a:p>
         </p:txBody>
@@ -4928,7 +5141,7 @@
           <p:cNvPr id="2" name="">
             <a:extLst xmlns:a="http://schemas.openxmlformats.org/drawingml/2006/main">
               <a:ext uri="{FF2B5EF4-FFF2-40B4-BE49-F238E27FC236}">
-                <a16:creationId xmlns:a16="http://schemas.microsoft.com/office/drawing/2014/main" id="{0BEAC2FC-B75D-45F1-BE73-6BA45DC6A7AF}"/>
+                <a16:creationId xmlns:a16="http://schemas.microsoft.com/office/drawing/2014/main" id="{B62F893C-F757-46A0-9F98-93A277EAD64D}"/>
               </a:ext>
             </a:extLst>
           </p:cNvPr>
@@ -4979,7 +5192,7 @@
                 <a:ea typeface="Arial"/>
                 <a:cs typeface="Arial"/>
               </a:rPr>
-              <a:t>Kết quả chính trên FD001 và bằng chứng chuyển miền trong C-MAPSS</a:t>
+              <a:t>100 train engines, cùng 17.731 khóa từ cycle 30</a:t>
             </a:r>
           </a:p>
         </p:txBody>
@@ -4989,7 +5202,7 @@
           <p:cNvPr id="3" name="">
             <a:extLst xmlns:a="http://schemas.openxmlformats.org/drawingml/2006/main">
               <a:ext uri="{FF2B5EF4-FFF2-40B4-BE49-F238E27FC236}">
-                <a16:creationId xmlns:a16="http://schemas.microsoft.com/office/drawing/2014/main" id="{860E286B-B181-4E8C-99BE-D84D7FD87D46}"/>
+                <a16:creationId xmlns:a16="http://schemas.microsoft.com/office/drawing/2014/main" id="{75E74F10-65F1-4BC6-B141-3F32FAD3961B}"/>
               </a:ext>
             </a:extLst>
           </p:cNvPr>
@@ -5040,7 +5253,7 @@
                 <a:ea typeface="Arial"/>
                 <a:cs typeface="Arial"/>
               </a:rPr>
-              <a:t>Nguồn: report/sections/conclusion.tex; outputs/cross_dataset/matrix.json</a:t>
+              <a:t>Nguồn: experiments/README.md; 20260927_full/search_manifest.json</a:t>
             </a:r>
           </a:p>
         </p:txBody>
@@ -5050,7 +5263,7 @@
           <p:cNvPr id="4" name="">
             <a:extLst xmlns:a="http://schemas.openxmlformats.org/drawingml/2006/main">
               <a:ext uri="{FF2B5EF4-FFF2-40B4-BE49-F238E27FC236}">
-                <a16:creationId xmlns:a16="http://schemas.microsoft.com/office/drawing/2014/main" id="{5C395A74-A573-490E-851D-8D8F875D6A8E}"/>
+                <a16:creationId xmlns:a16="http://schemas.microsoft.com/office/drawing/2014/main" id="{D825E92B-7EBF-4F7A-826F-B4623816CD14}"/>
               </a:ext>
             </a:extLst>
           </p:cNvPr>
@@ -5111,7 +5324,7 @@
           <p:cNvPr id="5" name="">
             <a:extLst xmlns:a="http://schemas.openxmlformats.org/drawingml/2006/main">
               <a:ext uri="{FF2B5EF4-FFF2-40B4-BE49-F238E27FC236}">
-                <a16:creationId xmlns:a16="http://schemas.microsoft.com/office/drawing/2014/main" id="{2EDB35F8-C77A-4480-85E2-0EDB447A8C5A}"/>
+                <a16:creationId xmlns:a16="http://schemas.microsoft.com/office/drawing/2014/main" id="{D67CFE22-F841-4976-B8F8-BA76DF82A9C9}"/>
               </a:ext>
             </a:extLst>
           </p:cNvPr>
@@ -5162,7 +5375,7 @@
                 <a:ea typeface="Arial"/>
                 <a:cs typeface="Arial"/>
               </a:rPr>
-              <a:t>Kết quả chính</a:t>
+              <a:t>Phạm vi đã chạy</a:t>
             </a:r>
           </a:p>
         </p:txBody>
@@ -5172,7 +5385,7 @@
           <p:cNvPr id="6" name="">
             <a:extLst xmlns:a="http://schemas.openxmlformats.org/drawingml/2006/main">
               <a:ext uri="{FF2B5EF4-FFF2-40B4-BE49-F238E27FC236}">
-                <a16:creationId xmlns:a16="http://schemas.microsoft.com/office/drawing/2014/main" id="{A9B32345-8541-4949-8AA1-C840DF0AC4A3}"/>
+                <a16:creationId xmlns:a16="http://schemas.microsoft.com/office/drawing/2014/main" id="{C1568799-9501-4390-9EFA-7B6B3E645D0D}"/>
               </a:ext>
             </a:extLst>
           </p:cNvPr>
@@ -5184,7 +5397,7 @@
         <p:spPr>
           <a:xfrm xmlns:a="http://schemas.openxmlformats.org/drawingml/2006/main">
             <a:off x="714375" y="2000250"/>
-            <a:ext cx="10477500" cy="952500"/>
+            <a:ext cx="10477500" cy="857250"/>
           </a:xfrm>
           <a:prstGeom xmlns:a="http://schemas.openxmlformats.org/drawingml/2006/main" prst="rect">
             <a:avLst/>
@@ -5223,7 +5436,7 @@
                 <a:ea typeface="Arial"/>
                 <a:cs typeface="Arial"/>
               </a:rPr>
-              <a:t>HistGradientBoosting đạt MAE 15,3490 cycles trên 100 test engines; CI 95% [12,7286; 18,0866].</a:t>
+              <a:t>Window 10 / 20 / 30, 24 cấu hình HistGradientBoosting và 3 phương án trọng số RUL.</a:t>
             </a:r>
           </a:p>
         </p:txBody>
@@ -5233,7 +5446,7 @@
           <p:cNvPr id="7" name="">
             <a:extLst xmlns:a="http://schemas.openxmlformats.org/drawingml/2006/main">
               <a:ext uri="{FF2B5EF4-FFF2-40B4-BE49-F238E27FC236}">
-                <a16:creationId xmlns:a16="http://schemas.microsoft.com/office/drawing/2014/main" id="{F4F76635-2364-4D51-8C21-35DCEF207B77}"/>
+                <a16:creationId xmlns:a16="http://schemas.microsoft.com/office/drawing/2014/main" id="{8C0EA479-D9AC-4D05-8D1F-DD4F25B4E415}"/>
               </a:ext>
             </a:extLst>
           </p:cNvPr>
@@ -5244,7 +5457,7 @@
         </p:nvSpPr>
         <p:spPr>
           <a:xfrm xmlns:a="http://schemas.openxmlformats.org/drawingml/2006/main">
-            <a:off x="714375" y="3143250"/>
+            <a:off x="714375" y="3000375"/>
             <a:ext cx="10477500" cy="304800"/>
           </a:xfrm>
           <a:prstGeom xmlns:a="http://schemas.openxmlformats.org/drawingml/2006/main" prst="rect">
@@ -5284,7 +5497,7 @@
                 <a:ea typeface="Arial"/>
                 <a:cs typeface="Arial"/>
               </a:rPr>
-              <a:t>Giới hạn cần nhớ</a:t>
+              <a:t>Tách lựa chọn và đánh giá</a:t>
             </a:r>
           </a:p>
         </p:txBody>
@@ -5294,7 +5507,7 @@
           <p:cNvPr id="8" name="">
             <a:extLst xmlns:a="http://schemas.openxmlformats.org/drawingml/2006/main">
               <a:ext uri="{FF2B5EF4-FFF2-40B4-BE49-F238E27FC236}">
-                <a16:creationId xmlns:a16="http://schemas.microsoft.com/office/drawing/2014/main" id="{5AF317AD-8650-41BA-AECB-FAE561DDB14A}"/>
+                <a16:creationId xmlns:a16="http://schemas.microsoft.com/office/drawing/2014/main" id="{2E2DC638-765D-4F57-8328-6339EDABDBDD}"/>
               </a:ext>
             </a:extLst>
           </p:cNvPr>
@@ -5305,8 +5518,8 @@
         </p:nvSpPr>
         <p:spPr>
           <a:xfrm xmlns:a="http://schemas.openxmlformats.org/drawingml/2006/main">
-            <a:off x="714375" y="3524250"/>
-            <a:ext cx="10477500" cy="1190625"/>
+            <a:off x="714375" y="3381375"/>
+            <a:ext cx="10477500" cy="1047750"/>
           </a:xfrm>
           <a:prstGeom xmlns:a="http://schemas.openxmlformats.org/drawingml/2006/main" prst="rect">
             <a:avLst/>
@@ -5345,7 +5558,7 @@
                 <a:ea typeface="Arial"/>
                 <a:cs typeface="Arial"/>
               </a:rPr>
-              <a:t>Kết quả chính FD001 dùng window 30; ma trận transfer dùng window 10. Test chỉ đánh giá một điểm cắt mỗi engine. Cảnh báo OOF chưa độc lập với model selection.</a:t>
+              <a:t>5 outer folds đánh giá trên engine được giữ riêng. Mỗi outer train dùng 3 inner folds để chọn cấu hình.</a:t>
             </a:r>
           </a:p>
         </p:txBody>
@@ -5355,7 +5568,7 @@
           <p:cNvPr id="9" name="">
             <a:extLst xmlns:a="http://schemas.openxmlformats.org/drawingml/2006/main">
               <a:ext uri="{FF2B5EF4-FFF2-40B4-BE49-F238E27FC236}">
-                <a16:creationId xmlns:a16="http://schemas.microsoft.com/office/drawing/2014/main" id="{6C40BD18-613E-4DAA-87DF-D2B2B16AA747}"/>
+                <a16:creationId xmlns:a16="http://schemas.microsoft.com/office/drawing/2014/main" id="{96D07D62-715D-4A15-9DBB-5D3BB3204F9D}"/>
               </a:ext>
             </a:extLst>
           </p:cNvPr>
@@ -5366,7 +5579,7 @@
         </p:nvSpPr>
         <p:spPr>
           <a:xfrm xmlns:a="http://schemas.openxmlformats.org/drawingml/2006/main">
-            <a:off x="714375" y="4905375"/>
+            <a:off x="714375" y="4667250"/>
             <a:ext cx="10477500" cy="304800"/>
           </a:xfrm>
           <a:prstGeom xmlns:a="http://schemas.openxmlformats.org/drawingml/2006/main" prst="rect">
@@ -5406,7 +5619,7 @@
                 <a:ea typeface="Arial"/>
                 <a:cs typeface="Arial"/>
               </a:rPr>
-              <a:t>Bước nghiên cứu tiếp</a:t>
+              <a:t>Tiêu chí đã chốt</a:t>
             </a:r>
           </a:p>
         </p:txBody>
@@ -5416,7 +5629,7 @@
           <p:cNvPr id="10" name="">
             <a:extLst xmlns:a="http://schemas.openxmlformats.org/drawingml/2006/main">
               <a:ext uri="{FF2B5EF4-FFF2-40B4-BE49-F238E27FC236}">
-                <a16:creationId xmlns:a16="http://schemas.microsoft.com/office/drawing/2014/main" id="{896BC5FD-8AE6-4940-8036-042C16E9CE65}"/>
+                <a16:creationId xmlns:a16="http://schemas.microsoft.com/office/drawing/2014/main" id="{8ABEF3A2-D842-434F-9A25-9346899A7F08}"/>
               </a:ext>
             </a:extLst>
           </p:cNvPr>
@@ -5427,8 +5640,8 @@
         </p:nvSpPr>
         <p:spPr>
           <a:xfrm xmlns:a="http://schemas.openxmlformats.org/drawingml/2006/main">
-            <a:off x="714375" y="5286375"/>
-            <a:ext cx="10477500" cy="904875"/>
+            <a:off x="714375" y="5048250"/>
+            <a:ext cx="10477500" cy="1047750"/>
           </a:xfrm>
           <a:prstGeom xmlns:a="http://schemas.openxmlformats.org/drawingml/2006/main" prst="rect">
             <a:avLst/>
@@ -5467,7 +5680,7 @@
                 <a:ea typeface="Arial"/>
                 <a:cs typeface="Arial"/>
               </a:rPr>
-              <a:t>Retrain hoặc domain adaptation cho subset mới; sau đó kiểm tra cảnh báo bằng outer split theo engine.</a:t>
+              <a:t>Ưu tiên MAE khi RUL ≤ 30. MAE toàn bộ, tỷ lệ cảnh báo trễ và thời gian báo sớm phải không tăng.</a:t>
             </a:r>
           </a:p>
         </p:txBody>
@@ -5475,7 +5688,7 @@
     </p:spTree>
     <p:extLst>
       <p:ext uri="{BB962C8B-B14F-4D97-AF65-F5344CB8AC3E}">
-        <p14:creationId xmlns:p14="http://schemas.microsoft.com/office/powerpoint/2010/main" val="1298656101"/>
+        <p14:creationId xmlns:p14="http://schemas.microsoft.com/office/powerpoint/2010/main" val="249231885"/>
       </p:ext>
     </p:extLst>
   </p:cSld>
@@ -5506,7 +5719,7 @@
           <p:cNvPr id="8" name="">
             <a:extLst xmlns:a="http://schemas.openxmlformats.org/drawingml/2006/main">
               <a:ext uri="{FF2B5EF4-FFF2-40B4-BE49-F238E27FC236}">
-                <a16:creationId xmlns:a16="http://schemas.microsoft.com/office/drawing/2014/main" id="{AEE5FF50-1E48-4912-8A87-8CF56B2B91E1}"/>
+                <a16:creationId xmlns:a16="http://schemas.microsoft.com/office/drawing/2014/main" id="{3B6F23E5-6510-4160-88AE-1A2EB8C41C60}"/>
               </a:ext>
             </a:extLst>
           </p:cNvPr>
@@ -5557,7 +5770,7 @@
                 <a:ea typeface="Arial"/>
                 <a:cs typeface="Arial"/>
               </a:rPr>
-              <a:t>Transfer giữa các subset C-MAPSS</a:t>
+              <a:t>Kết quả chưa đạt tiêu chí cải thiện</a:t>
             </a:r>
           </a:p>
         </p:txBody>
@@ -5567,7 +5780,7 @@
           <p:cNvPr id="2" name="">
             <a:extLst xmlns:a="http://schemas.openxmlformats.org/drawingml/2006/main">
               <a:ext uri="{FF2B5EF4-FFF2-40B4-BE49-F238E27FC236}">
-                <a16:creationId xmlns:a16="http://schemas.microsoft.com/office/drawing/2014/main" id="{925D4280-F31D-4F34-AE76-948637F66BB3}"/>
+                <a16:creationId xmlns:a16="http://schemas.microsoft.com/office/drawing/2014/main" id="{3F99A810-D2F7-44C9-B03B-E2B4F1A87005}"/>
               </a:ext>
             </a:extLst>
           </p:cNvPr>
@@ -5618,7 +5831,7 @@
                 <a:ea typeface="Arial"/>
                 <a:cs typeface="Arial"/>
               </a:rPr>
-              <a:t>Window 10 cho phép giữ đủ test engines trong FD001–FD004</a:t>
+              <a:t>Outer evaluation của cả quy trình chọn cấu hình</a:t>
             </a:r>
           </a:p>
         </p:txBody>
@@ -5628,7 +5841,7 @@
           <p:cNvPr id="3" name="">
             <a:extLst xmlns:a="http://schemas.openxmlformats.org/drawingml/2006/main">
               <a:ext uri="{FF2B5EF4-FFF2-40B4-BE49-F238E27FC236}">
-                <a16:creationId xmlns:a16="http://schemas.microsoft.com/office/drawing/2014/main" id="{5FBE9F83-F46E-4175-82F8-DC483E43992E}"/>
+                <a16:creationId xmlns:a16="http://schemas.microsoft.com/office/drawing/2014/main" id="{64B9C10B-569A-482A-A6B1-20C32F8E8C46}"/>
               </a:ext>
             </a:extLst>
           </p:cNvPr>
@@ -5679,7 +5892,7 @@
                 <a:ea typeface="Arial"/>
                 <a:cs typeface="Arial"/>
               </a:rPr>
-              <a:t>Nguồn: outputs/cross_dataset/matrix.json; outputs/cross_dataset/README.md</a:t>
+              <a:t>Nguồn: 20260927_full/ablation_metrics.csv; paired_comparison.csv</a:t>
             </a:r>
           </a:p>
         </p:txBody>
@@ -5689,7 +5902,7 @@
           <p:cNvPr id="4" name="">
             <a:extLst xmlns:a="http://schemas.openxmlformats.org/drawingml/2006/main">
               <a:ext uri="{FF2B5EF4-FFF2-40B4-BE49-F238E27FC236}">
-                <a16:creationId xmlns:a16="http://schemas.microsoft.com/office/drawing/2014/main" id="{714768BA-4736-45C6-80C2-5BC6BB125AB8}"/>
+                <a16:creationId xmlns:a16="http://schemas.microsoft.com/office/drawing/2014/main" id="{274FDC0F-639A-4DC6-BBDE-E409E6458741}"/>
               </a:ext>
             </a:extLst>
           </p:cNvPr>
@@ -5741,6 +5954,2314 @@
                 <a:cs typeface="Arial"/>
               </a:rPr>
               <a:t>15</a:t>
+            </a:r>
+          </a:p>
+        </p:txBody>
+      </p:sp>
+      <p:graphicFrame>
+        <p:nvGraphicFramePr>
+          <p:cNvPr id="12" name=""/>
+          <p:cNvGraphicFramePr/>
+          <p:nvPr/>
+        </p:nvGraphicFramePr>
+        <p:xfrm>
+          <a:off xmlns:a="http://schemas.openxmlformats.org/drawingml/2006/main" x="666750" y="1619250"/>
+          <a:ext xmlns:a="http://schemas.openxmlformats.org/drawingml/2006/main" cx="10858500" cy="2571750"/>
+        </p:xfrm>
+        <a:graphic xmlns:a="http://schemas.openxmlformats.org/drawingml/2006/main">
+          <a:graphicData uri="http://schemas.openxmlformats.org/drawingml/2006/table">
+            <a:tbl>
+              <a:tblPr firstRow="1" bandRow="1"/>
+              <a:tblGrid>
+                <a:gridCol w="2714625"/>
+                <a:gridCol w="2714625"/>
+                <a:gridCol w="2714625"/>
+                <a:gridCol w="2714625"/>
+              </a:tblGrid>
+              <a:tr h="514350">
+                <a:tc>
+                  <a:txBody>
+                    <a:bodyPr/>
+                    <a:lstStyle/>
+                    <a:p>
+                      <a:r>
+                        <a:rPr sz="1575" b="1">
+                          <a:solidFill>
+                            <a:srgbClr val="FFFFFF"/>
+                          </a:solidFill>
+                          <a:latin typeface="Arial"/>
+                          <a:ea typeface="Arial"/>
+                          <a:cs typeface="Arial"/>
+                        </a:rPr>
+                        <a:t>Phương án</a:t>
+                      </a:r>
+                    </a:p>
+                  </a:txBody>
+                  <a:tcPr marL="91440" marR="91440" marT="45720" marB="45720">
+                    <a:solidFill>
+                      <a:srgbClr val="0F243E"/>
+                    </a:solidFill>
+                  </a:tcPr>
+                </a:tc>
+                <a:tc>
+                  <a:txBody>
+                    <a:bodyPr/>
+                    <a:lstStyle/>
+                    <a:p>
+                      <a:r>
+                        <a:rPr sz="1575" b="1">
+                          <a:solidFill>
+                            <a:srgbClr val="FFFFFF"/>
+                          </a:solidFill>
+                          <a:latin typeface="Arial"/>
+                          <a:ea typeface="Arial"/>
+                          <a:cs typeface="Arial"/>
+                        </a:rPr>
+                        <a:t>MAE toàn bộ</a:t>
+                      </a:r>
+                    </a:p>
+                  </a:txBody>
+                  <a:tcPr marL="91440" marR="91440" marT="45720" marB="45720">
+                    <a:solidFill>
+                      <a:srgbClr val="0F243E"/>
+                    </a:solidFill>
+                  </a:tcPr>
+                </a:tc>
+                <a:tc>
+                  <a:txBody>
+                    <a:bodyPr/>
+                    <a:lstStyle/>
+                    <a:p>
+                      <a:r>
+                        <a:rPr sz="1575" b="1">
+                          <a:solidFill>
+                            <a:srgbClr val="FFFFFF"/>
+                          </a:solidFill>
+                          <a:latin typeface="Arial"/>
+                          <a:ea typeface="Arial"/>
+                          <a:cs typeface="Arial"/>
+                        </a:rPr>
+                        <a:t>MAE RUL ≤ 30</a:t>
+                      </a:r>
+                    </a:p>
+                  </a:txBody>
+                  <a:tcPr marL="91440" marR="91440" marT="45720" marB="45720">
+                    <a:solidFill>
+                      <a:srgbClr val="0F243E"/>
+                    </a:solidFill>
+                  </a:tcPr>
+                </a:tc>
+                <a:tc>
+                  <a:txBody>
+                    <a:bodyPr/>
+                    <a:lstStyle/>
+                    <a:p>
+                      <a:r>
+                        <a:rPr sz="1575" b="1">
+                          <a:solidFill>
+                            <a:srgbClr val="FFFFFF"/>
+                          </a:solidFill>
+                          <a:latin typeface="Arial"/>
+                          <a:ea typeface="Arial"/>
+                          <a:cs typeface="Arial"/>
+                        </a:rPr>
+                        <a:t>Trễ / bỏ lỡ</a:t>
+                      </a:r>
+                    </a:p>
+                  </a:txBody>
+                  <a:tcPr marL="91440" marR="91440" marT="45720" marB="45720">
+                    <a:solidFill>
+                      <a:srgbClr val="0F243E"/>
+                    </a:solidFill>
+                  </a:tcPr>
+                </a:tc>
+              </a:tr>
+              <a:tr h="514350">
+                <a:tc>
+                  <a:txBody>
+                    <a:bodyPr/>
+                    <a:lstStyle/>
+                    <a:p>
+                      <a:r>
+                        <a:rPr sz="1575" b="0">
+                          <a:solidFill>
+                            <a:srgbClr val="16202A"/>
+                          </a:solidFill>
+                          <a:latin typeface="Arial"/>
+                          <a:ea typeface="Arial"/>
+                          <a:cs typeface="Arial"/>
+                        </a:rPr>
+                        <a:t>Baseline</a:t>
+                      </a:r>
+                    </a:p>
+                  </a:txBody>
+                  <a:tcPr marL="91440" marR="91440" marT="45720" marB="45720"/>
+                </a:tc>
+                <a:tc>
+                  <a:txBody>
+                    <a:bodyPr/>
+                    <a:lstStyle/>
+                    <a:p>
+                      <a:r>
+                        <a:rPr sz="1575" b="0">
+                          <a:solidFill>
+                            <a:srgbClr val="16202A"/>
+                          </a:solidFill>
+                          <a:latin typeface="Arial"/>
+                          <a:ea typeface="Arial"/>
+                          <a:cs typeface="Arial"/>
+                        </a:rPr>
+                        <a:t>20,2143</a:t>
+                      </a:r>
+                    </a:p>
+                  </a:txBody>
+                  <a:tcPr marL="91440" marR="91440" marT="45720" marB="45720"/>
+                </a:tc>
+                <a:tc>
+                  <a:txBody>
+                    <a:bodyPr/>
+                    <a:lstStyle/>
+                    <a:p>
+                      <a:r>
+                        <a:rPr sz="1575" b="0">
+                          <a:solidFill>
+                            <a:srgbClr val="16202A"/>
+                          </a:solidFill>
+                          <a:latin typeface="Arial"/>
+                          <a:ea typeface="Arial"/>
+                          <a:cs typeface="Arial"/>
+                        </a:rPr>
+                        <a:t>3,6676</a:t>
+                      </a:r>
+                    </a:p>
+                  </a:txBody>
+                  <a:tcPr marL="91440" marR="91440" marT="45720" marB="45720"/>
+                </a:tc>
+                <a:tc>
+                  <a:txBody>
+                    <a:bodyPr/>
+                    <a:lstStyle/>
+                    <a:p>
+                      <a:r>
+                        <a:rPr sz="1575" b="0">
+                          <a:solidFill>
+                            <a:srgbClr val="16202A"/>
+                          </a:solidFill>
+                          <a:latin typeface="Arial"/>
+                          <a:ea typeface="Arial"/>
+                          <a:cs typeface="Arial"/>
+                        </a:rPr>
+                        <a:t>49 / 100</a:t>
+                      </a:r>
+                    </a:p>
+                  </a:txBody>
+                  <a:tcPr marL="91440" marR="91440" marT="45720" marB="45720"/>
+                </a:tc>
+              </a:tr>
+              <a:tr h="514350">
+                <a:tc>
+                  <a:txBody>
+                    <a:bodyPr/>
+                    <a:lstStyle/>
+                    <a:p>
+                      <a:r>
+                        <a:rPr sz="1575" b="0">
+                          <a:solidFill>
+                            <a:srgbClr val="16202A"/>
+                          </a:solidFill>
+                          <a:latin typeface="Arial"/>
+                          <a:ea typeface="Arial"/>
+                          <a:cs typeface="Arial"/>
+                        </a:rPr>
+                        <a:t>Chọn window</a:t>
+                      </a:r>
+                    </a:p>
+                  </a:txBody>
+                  <a:tcPr marL="91440" marR="91440" marT="45720" marB="45720"/>
+                </a:tc>
+                <a:tc>
+                  <a:txBody>
+                    <a:bodyPr/>
+                    <a:lstStyle/>
+                    <a:p>
+                      <a:r>
+                        <a:rPr sz="1575" b="0">
+                          <a:solidFill>
+                            <a:srgbClr val="16202A"/>
+                          </a:solidFill>
+                          <a:latin typeface="Arial"/>
+                          <a:ea typeface="Arial"/>
+                          <a:cs typeface="Arial"/>
+                        </a:rPr>
+                        <a:t>20,2143</a:t>
+                      </a:r>
+                    </a:p>
+                  </a:txBody>
+                  <a:tcPr marL="91440" marR="91440" marT="45720" marB="45720"/>
+                </a:tc>
+                <a:tc>
+                  <a:txBody>
+                    <a:bodyPr/>
+                    <a:lstStyle/>
+                    <a:p>
+                      <a:r>
+                        <a:rPr sz="1575" b="0">
+                          <a:solidFill>
+                            <a:srgbClr val="16202A"/>
+                          </a:solidFill>
+                          <a:latin typeface="Arial"/>
+                          <a:ea typeface="Arial"/>
+                          <a:cs typeface="Arial"/>
+                        </a:rPr>
+                        <a:t>3,6676</a:t>
+                      </a:r>
+                    </a:p>
+                  </a:txBody>
+                  <a:tcPr marL="91440" marR="91440" marT="45720" marB="45720"/>
+                </a:tc>
+                <a:tc>
+                  <a:txBody>
+                    <a:bodyPr/>
+                    <a:lstStyle/>
+                    <a:p>
+                      <a:r>
+                        <a:rPr sz="1575" b="0">
+                          <a:solidFill>
+                            <a:srgbClr val="16202A"/>
+                          </a:solidFill>
+                          <a:latin typeface="Arial"/>
+                          <a:ea typeface="Arial"/>
+                          <a:cs typeface="Arial"/>
+                        </a:rPr>
+                        <a:t>49 / 100</a:t>
+                      </a:r>
+                    </a:p>
+                  </a:txBody>
+                  <a:tcPr marL="91440" marR="91440" marT="45720" marB="45720"/>
+                </a:tc>
+              </a:tr>
+              <a:tr h="514350">
+                <a:tc>
+                  <a:txBody>
+                    <a:bodyPr/>
+                    <a:lstStyle/>
+                    <a:p>
+                      <a:r>
+                        <a:rPr sz="1575" b="0">
+                          <a:solidFill>
+                            <a:srgbClr val="16202A"/>
+                          </a:solidFill>
+                          <a:latin typeface="Arial"/>
+                          <a:ea typeface="Arial"/>
+                          <a:cs typeface="Arial"/>
+                        </a:rPr>
+                        <a:t>Chỉnh tham số</a:t>
+                      </a:r>
+                    </a:p>
+                  </a:txBody>
+                  <a:tcPr marL="91440" marR="91440" marT="45720" marB="45720"/>
+                </a:tc>
+                <a:tc>
+                  <a:txBody>
+                    <a:bodyPr/>
+                    <a:lstStyle/>
+                    <a:p>
+                      <a:r>
+                        <a:rPr sz="1575" b="0">
+                          <a:solidFill>
+                            <a:srgbClr val="16202A"/>
+                          </a:solidFill>
+                          <a:latin typeface="Arial"/>
+                          <a:ea typeface="Arial"/>
+                          <a:cs typeface="Arial"/>
+                        </a:rPr>
+                        <a:t>20,2459</a:t>
+                      </a:r>
+                    </a:p>
+                  </a:txBody>
+                  <a:tcPr marL="91440" marR="91440" marT="45720" marB="45720"/>
+                </a:tc>
+                <a:tc>
+                  <a:txBody>
+                    <a:bodyPr/>
+                    <a:lstStyle/>
+                    <a:p>
+                      <a:r>
+                        <a:rPr sz="1575" b="0">
+                          <a:solidFill>
+                            <a:srgbClr val="16202A"/>
+                          </a:solidFill>
+                          <a:latin typeface="Arial"/>
+                          <a:ea typeface="Arial"/>
+                          <a:cs typeface="Arial"/>
+                        </a:rPr>
+                        <a:t>3,6730</a:t>
+                      </a:r>
+                    </a:p>
+                  </a:txBody>
+                  <a:tcPr marL="91440" marR="91440" marT="45720" marB="45720"/>
+                </a:tc>
+                <a:tc>
+                  <a:txBody>
+                    <a:bodyPr/>
+                    <a:lstStyle/>
+                    <a:p>
+                      <a:r>
+                        <a:rPr sz="1575" b="0">
+                          <a:solidFill>
+                            <a:srgbClr val="16202A"/>
+                          </a:solidFill>
+                          <a:latin typeface="Arial"/>
+                          <a:ea typeface="Arial"/>
+                          <a:cs typeface="Arial"/>
+                        </a:rPr>
+                        <a:t>53 / 100</a:t>
+                      </a:r>
+                    </a:p>
+                  </a:txBody>
+                  <a:tcPr marL="91440" marR="91440" marT="45720" marB="45720"/>
+                </a:tc>
+              </a:tr>
+              <a:tr h="514350">
+                <a:tc>
+                  <a:txBody>
+                    <a:bodyPr/>
+                    <a:lstStyle/>
+                    <a:p>
+                      <a:r>
+                        <a:rPr sz="1575" b="0">
+                          <a:solidFill>
+                            <a:srgbClr val="16202A"/>
+                          </a:solidFill>
+                          <a:latin typeface="Arial"/>
+                          <a:ea typeface="Arial"/>
+                          <a:cs typeface="Arial"/>
+                        </a:rPr>
+                        <a:t>Chọn trọng số</a:t>
+                      </a:r>
+                    </a:p>
+                  </a:txBody>
+                  <a:tcPr marL="91440" marR="91440" marT="45720" marB="45720"/>
+                </a:tc>
+                <a:tc>
+                  <a:txBody>
+                    <a:bodyPr/>
+                    <a:lstStyle/>
+                    <a:p>
+                      <a:r>
+                        <a:rPr sz="1575" b="0">
+                          <a:solidFill>
+                            <a:srgbClr val="16202A"/>
+                          </a:solidFill>
+                          <a:latin typeface="Arial"/>
+                          <a:ea typeface="Arial"/>
+                          <a:cs typeface="Arial"/>
+                        </a:rPr>
+                        <a:t>20,2459</a:t>
+                      </a:r>
+                    </a:p>
+                  </a:txBody>
+                  <a:tcPr marL="91440" marR="91440" marT="45720" marB="45720"/>
+                </a:tc>
+                <a:tc>
+                  <a:txBody>
+                    <a:bodyPr/>
+                    <a:lstStyle/>
+                    <a:p>
+                      <a:r>
+                        <a:rPr sz="1575" b="0">
+                          <a:solidFill>
+                            <a:srgbClr val="16202A"/>
+                          </a:solidFill>
+                          <a:latin typeface="Arial"/>
+                          <a:ea typeface="Arial"/>
+                          <a:cs typeface="Arial"/>
+                        </a:rPr>
+                        <a:t>3,6730</a:t>
+                      </a:r>
+                    </a:p>
+                  </a:txBody>
+                  <a:tcPr marL="91440" marR="91440" marT="45720" marB="45720"/>
+                </a:tc>
+                <a:tc>
+                  <a:txBody>
+                    <a:bodyPr/>
+                    <a:lstStyle/>
+                    <a:p>
+                      <a:r>
+                        <a:rPr sz="1575" b="0">
+                          <a:solidFill>
+                            <a:srgbClr val="16202A"/>
+                          </a:solidFill>
+                          <a:latin typeface="Arial"/>
+                          <a:ea typeface="Arial"/>
+                          <a:cs typeface="Arial"/>
+                        </a:rPr>
+                        <a:t>53 / 100</a:t>
+                      </a:r>
+                    </a:p>
+                  </a:txBody>
+                  <a:tcPr marL="91440" marR="91440" marT="45720" marB="45720"/>
+                </a:tc>
+              </a:tr>
+            </a:tbl>
+          </a:graphicData>
+        </a:graphic>
+      </p:graphicFrame>
+      <p:sp>
+        <p:nvSpPr>
+          <p:cNvPr id="6" name="">
+            <a:extLst xmlns:a="http://schemas.openxmlformats.org/drawingml/2006/main">
+              <a:ext uri="{FF2B5EF4-FFF2-40B4-BE49-F238E27FC236}">
+                <a16:creationId xmlns:a16="http://schemas.microsoft.com/office/drawing/2014/main" id="{8B2031A4-0830-47A4-99C1-F54918297302}"/>
+              </a:ext>
+            </a:extLst>
+          </p:cNvPr>
+          <p:cNvSpPr>
+            <a:spLocks xmlns:a="http://schemas.openxmlformats.org/drawingml/2006/main" noGrp="1"/>
+          </p:cNvSpPr>
+          <p:nvPr/>
+        </p:nvSpPr>
+        <p:spPr>
+          <a:xfrm xmlns:a="http://schemas.openxmlformats.org/drawingml/2006/main">
+            <a:off x="714375" y="4619625"/>
+            <a:ext cx="10572750" cy="523875"/>
+          </a:xfrm>
+          <a:prstGeom xmlns:a="http://schemas.openxmlformats.org/drawingml/2006/main" prst="rect">
+            <a:avLst/>
+          </a:prstGeom>
+          <a:noFill xmlns:a="http://schemas.openxmlformats.org/drawingml/2006/main"/>
+          <a:ln xmlns:a="http://schemas.openxmlformats.org/drawingml/2006/main" w="0">
+            <a:noFill/>
+          </a:ln>
+        </p:spPr>
+        <p:txBody>
+          <a:bodyPr xmlns:a="http://schemas.openxmlformats.org/drawingml/2006/main" lIns="0" tIns="0" rIns="0" bIns="0" anchor="t">
+            <a:normAutofit fontScale="100000"/>
+          </a:bodyPr>
+          <a:lstStyle xmlns:a="http://schemas.openxmlformats.org/drawingml/2006/main"/>
+          <a:p xmlns:a="http://schemas.openxmlformats.org/drawingml/2006/main">
+            <a:pPr algn="l">
+              <a:lnSpc>
+                <a:spcPct val="108000"/>
+              </a:lnSpc>
+              <a:buNone/>
+              <a:defRPr sz="1725" b="1">
+                <a:solidFill>
+                  <a:srgbClr val="0F243E"/>
+                </a:solidFill>
+                <a:latin typeface="Arial"/>
+                <a:ea typeface="Arial"/>
+                <a:cs typeface="Arial"/>
+              </a:defRPr>
+            </a:pPr>
+            <a:r>
+              <a:rPr sz="1725" b="1">
+                <a:solidFill>
+                  <a:srgbClr val="0F243E"/>
+                </a:solidFill>
+                <a:latin typeface="Arial"/>
+                <a:ea typeface="Arial"/>
+                <a:cs typeface="Arial"/>
+              </a:rPr>
+              <a:t>MAE RUL thấp thay đổi +0,0054 cycles, CI 95% [−0,0506; 0,0639].</a:t>
+            </a:r>
+          </a:p>
+        </p:txBody>
+      </p:sp>
+      <p:sp>
+        <p:nvSpPr>
+          <p:cNvPr id="7" name="">
+            <a:extLst xmlns:a="http://schemas.openxmlformats.org/drawingml/2006/main">
+              <a:ext uri="{FF2B5EF4-FFF2-40B4-BE49-F238E27FC236}">
+                <a16:creationId xmlns:a16="http://schemas.microsoft.com/office/drawing/2014/main" id="{20EC9E5F-B840-4E12-9781-52E7F074A5DE}"/>
+              </a:ext>
+            </a:extLst>
+          </p:cNvPr>
+          <p:cNvSpPr>
+            <a:spLocks xmlns:a="http://schemas.openxmlformats.org/drawingml/2006/main" noGrp="1"/>
+          </p:cNvSpPr>
+          <p:nvPr/>
+        </p:nvSpPr>
+        <p:spPr>
+          <a:xfrm xmlns:a="http://schemas.openxmlformats.org/drawingml/2006/main">
+            <a:off x="714375" y="5334000"/>
+            <a:ext cx="10572750" cy="571500"/>
+          </a:xfrm>
+          <a:prstGeom xmlns:a="http://schemas.openxmlformats.org/drawingml/2006/main" prst="rect">
+            <a:avLst/>
+          </a:prstGeom>
+          <a:noFill xmlns:a="http://schemas.openxmlformats.org/drawingml/2006/main"/>
+          <a:ln xmlns:a="http://schemas.openxmlformats.org/drawingml/2006/main" w="0">
+            <a:noFill/>
+          </a:ln>
+        </p:spPr>
+        <p:txBody>
+          <a:bodyPr xmlns:a="http://schemas.openxmlformats.org/drawingml/2006/main" lIns="0" tIns="0" rIns="0" bIns="0" anchor="t">
+            <a:normAutofit fontScale="100000"/>
+          </a:bodyPr>
+          <a:lstStyle xmlns:a="http://schemas.openxmlformats.org/drawingml/2006/main"/>
+          <a:p xmlns:a="http://schemas.openxmlformats.org/drawingml/2006/main">
+            <a:pPr algn="l">
+              <a:lnSpc>
+                <a:spcPct val="108000"/>
+              </a:lnSpc>
+              <a:buNone/>
+              <a:defRPr sz="1800" b="0">
+                <a:solidFill>
+                  <a:srgbClr val="16202A"/>
+                </a:solidFill>
+                <a:latin typeface="Arial"/>
+                <a:ea typeface="Arial"/>
+                <a:cs typeface="Arial"/>
+              </a:defRPr>
+            </a:pPr>
+            <a:r>
+              <a:rPr sz="1800" b="0">
+                <a:solidFill>
+                  <a:srgbClr val="16202A"/>
+                </a:solidFill>
+                <a:latin typeface="Arial"/>
+                <a:ea typeface="Arial"/>
+                <a:cs typeface="Arial"/>
+              </a:rPr>
+              <a:t>Cấu hình cuối trùng baseline. Test MAE giữ nguyên 15,3490 cycles.</a:t>
+            </a:r>
+          </a:p>
+        </p:txBody>
+      </p:sp>
+    </p:spTree>
+    <p:extLst>
+      <p:ext uri="{BB962C8B-B14F-4D97-AF65-F5344CB8AC3E}">
+        <p14:creationId xmlns:p14="http://schemas.microsoft.com/office/powerpoint/2010/main" val="1064156394"/>
+      </p:ext>
+    </p:extLst>
+  </p:cSld>
+</p:sld>
+</file>
+
+<file path=ppt/slides/slide16.xml><?xml version="1.0" encoding="utf-8"?>
+<p:sld xmlns:p="http://schemas.openxmlformats.org/presentationml/2006/main">
+  <p:cSld>
+    <p:bg>
+      <p:bgPr>
+        <a:solidFill xmlns:a="http://schemas.openxmlformats.org/drawingml/2006/main">
+          <a:srgbClr val="FFFFFF"/>
+        </a:solidFill>
+      </p:bgPr>
+    </p:bg>
+    <p:spTree>
+      <p:nvGrpSpPr>
+        <p:cNvPr id="1" name=""/>
+        <p:cNvGrpSpPr/>
+        <p:nvPr/>
+      </p:nvGrpSpPr>
+      <p:grpSpPr>
+        <a:xfrm xmlns:a="http://schemas.openxmlformats.org/drawingml/2006/main"/>
+      </p:grpSpPr>
+      <p:sp>
+        <p:nvSpPr>
+          <p:cNvPr id="9" name="">
+            <a:extLst xmlns:a="http://schemas.openxmlformats.org/drawingml/2006/main">
+              <a:ext uri="{FF2B5EF4-FFF2-40B4-BE49-F238E27FC236}">
+                <a16:creationId xmlns:a16="http://schemas.microsoft.com/office/drawing/2014/main" id="{3891DEB7-210D-4453-B81C-FC32A6BDF26C}"/>
+              </a:ext>
+            </a:extLst>
+          </p:cNvPr>
+          <p:cNvSpPr>
+            <a:spLocks xmlns:a="http://schemas.openxmlformats.org/drawingml/2006/main" noGrp="1"/>
+          </p:cNvSpPr>
+          <p:nvPr/>
+        </p:nvSpPr>
+        <p:spPr>
+          <a:xfrm xmlns:a="http://schemas.openxmlformats.org/drawingml/2006/main">
+            <a:off x="609600" y="361950"/>
+            <a:ext cx="10953750" cy="495300"/>
+          </a:xfrm>
+          <a:prstGeom xmlns:a="http://schemas.openxmlformats.org/drawingml/2006/main" prst="rect">
+            <a:avLst/>
+          </a:prstGeom>
+          <a:noFill xmlns:a="http://schemas.openxmlformats.org/drawingml/2006/main"/>
+          <a:ln xmlns:a="http://schemas.openxmlformats.org/drawingml/2006/main" w="0">
+            <a:noFill/>
+          </a:ln>
+        </p:spPr>
+        <p:txBody>
+          <a:bodyPr xmlns:a="http://schemas.openxmlformats.org/drawingml/2006/main" lIns="0" tIns="0" rIns="0" bIns="0" anchor="t">
+            <a:normAutofit fontScale="100000"/>
+          </a:bodyPr>
+          <a:lstStyle xmlns:a="http://schemas.openxmlformats.org/drawingml/2006/main"/>
+          <a:p xmlns:a="http://schemas.openxmlformats.org/drawingml/2006/main">
+            <a:pPr algn="l">
+              <a:lnSpc>
+                <a:spcPct val="108000"/>
+              </a:lnSpc>
+              <a:buNone/>
+              <a:defRPr sz="2550" b="1">
+                <a:solidFill>
+                  <a:srgbClr val="0F243E"/>
+                </a:solidFill>
+                <a:latin typeface="Arial"/>
+                <a:ea typeface="Arial"/>
+                <a:cs typeface="Arial"/>
+              </a:defRPr>
+            </a:pPr>
+            <a:r>
+              <a:rPr sz="2550" b="1">
+                <a:solidFill>
+                  <a:srgbClr val="0F243E"/>
+                </a:solidFill>
+                <a:latin typeface="Arial"/>
+                <a:ea typeface="Arial"/>
+                <a:cs typeface="Arial"/>
+              </a:rPr>
+              <a:t>Giảm sai số có thể đi kèm đánh đổi</a:t>
+            </a:r>
+          </a:p>
+        </p:txBody>
+      </p:sp>
+      <p:sp>
+        <p:nvSpPr>
+          <p:cNvPr id="2" name="">
+            <a:extLst xmlns:a="http://schemas.openxmlformats.org/drawingml/2006/main">
+              <a:ext uri="{FF2B5EF4-FFF2-40B4-BE49-F238E27FC236}">
+                <a16:creationId xmlns:a16="http://schemas.microsoft.com/office/drawing/2014/main" id="{1DC390D2-F4E5-4535-BF34-2D3BA53E2407}"/>
+              </a:ext>
+            </a:extLst>
+          </p:cNvPr>
+          <p:cNvSpPr>
+            <a:spLocks xmlns:a="http://schemas.openxmlformats.org/drawingml/2006/main" noGrp="1"/>
+          </p:cNvSpPr>
+          <p:nvPr/>
+        </p:nvSpPr>
+        <p:spPr>
+          <a:xfrm xmlns:a="http://schemas.openxmlformats.org/drawingml/2006/main">
+            <a:off x="628650" y="914400"/>
+            <a:ext cx="10858500" cy="333375"/>
+          </a:xfrm>
+          <a:prstGeom xmlns:a="http://schemas.openxmlformats.org/drawingml/2006/main" prst="rect">
+            <a:avLst/>
+          </a:prstGeom>
+          <a:noFill xmlns:a="http://schemas.openxmlformats.org/drawingml/2006/main"/>
+          <a:ln xmlns:a="http://schemas.openxmlformats.org/drawingml/2006/main" w="0">
+            <a:noFill/>
+          </a:ln>
+        </p:spPr>
+        <p:txBody>
+          <a:bodyPr xmlns:a="http://schemas.openxmlformats.org/drawingml/2006/main" lIns="0" tIns="0" rIns="0" bIns="0" anchor="t">
+            <a:normAutofit fontScale="100000"/>
+          </a:bodyPr>
+          <a:lstStyle xmlns:a="http://schemas.openxmlformats.org/drawingml/2006/main"/>
+          <a:p xmlns:a="http://schemas.openxmlformats.org/drawingml/2006/main">
+            <a:pPr algn="l">
+              <a:lnSpc>
+                <a:spcPct val="108000"/>
+              </a:lnSpc>
+              <a:buNone/>
+              <a:defRPr sz="1425" b="0">
+                <a:solidFill>
+                  <a:srgbClr val="52606D"/>
+                </a:solidFill>
+                <a:latin typeface="Arial"/>
+                <a:ea typeface="Arial"/>
+                <a:cs typeface="Arial"/>
+              </a:defRPr>
+            </a:pPr>
+            <a:r>
+              <a:rPr sz="1425" b="0">
+                <a:solidFill>
+                  <a:srgbClr val="52606D"/>
+                </a:solidFill>
+                <a:latin typeface="Arial"/>
+                <a:ea typeface="Arial"/>
+                <a:cs typeface="Arial"/>
+              </a:rPr>
+              <a:t>Ví dụ trong inner CV trên toàn train, phục vụ chọn cấu hình</a:t>
+            </a:r>
+          </a:p>
+        </p:txBody>
+      </p:sp>
+      <p:sp>
+        <p:nvSpPr>
+          <p:cNvPr id="3" name="">
+            <a:extLst xmlns:a="http://schemas.openxmlformats.org/drawingml/2006/main">
+              <a:ext uri="{FF2B5EF4-FFF2-40B4-BE49-F238E27FC236}">
+                <a16:creationId xmlns:a16="http://schemas.microsoft.com/office/drawing/2014/main" id="{687B6976-B8EB-4637-A0ED-CA870B44884D}"/>
+              </a:ext>
+            </a:extLst>
+          </p:cNvPr>
+          <p:cNvSpPr>
+            <a:spLocks xmlns:a="http://schemas.openxmlformats.org/drawingml/2006/main" noGrp="1"/>
+          </p:cNvSpPr>
+          <p:nvPr/>
+        </p:nvSpPr>
+        <p:spPr>
+          <a:xfrm xmlns:a="http://schemas.openxmlformats.org/drawingml/2006/main">
+            <a:off x="609600" y="6248400"/>
+            <a:ext cx="10287000" cy="285750"/>
+          </a:xfrm>
+          <a:prstGeom xmlns:a="http://schemas.openxmlformats.org/drawingml/2006/main" prst="rect">
+            <a:avLst/>
+          </a:prstGeom>
+          <a:noFill xmlns:a="http://schemas.openxmlformats.org/drawingml/2006/main"/>
+          <a:ln xmlns:a="http://schemas.openxmlformats.org/drawingml/2006/main" w="0">
+            <a:noFill/>
+          </a:ln>
+        </p:spPr>
+        <p:txBody>
+          <a:bodyPr xmlns:a="http://schemas.openxmlformats.org/drawingml/2006/main" lIns="0" tIns="0" rIns="0" bIns="0" anchor="t">
+            <a:normAutofit fontScale="100000"/>
+          </a:bodyPr>
+          <a:lstStyle xmlns:a="http://schemas.openxmlformats.org/drawingml/2006/main"/>
+          <a:p xmlns:a="http://schemas.openxmlformats.org/drawingml/2006/main">
+            <a:pPr algn="l">
+              <a:lnSpc>
+                <a:spcPct val="108000"/>
+              </a:lnSpc>
+              <a:buNone/>
+              <a:defRPr sz="900" b="0">
+                <a:solidFill>
+                  <a:srgbClr val="52606D"/>
+                </a:solidFill>
+                <a:latin typeface="Arial"/>
+                <a:ea typeface="Arial"/>
+                <a:cs typeface="Arial"/>
+              </a:defRPr>
+            </a:pPr>
+            <a:r>
+              <a:rPr sz="900" b="0">
+                <a:solidFill>
+                  <a:srgbClr val="52606D"/>
+                </a:solidFill>
+                <a:latin typeface="Arial"/>
+                <a:ea typeface="Arial"/>
+                <a:cs typeface="Arial"/>
+              </a:rPr>
+              <a:t>Nguồn: 20260927_full/final_selection_metrics.csv</a:t>
+            </a:r>
+          </a:p>
+        </p:txBody>
+      </p:sp>
+      <p:sp>
+        <p:nvSpPr>
+          <p:cNvPr id="4" name="">
+            <a:extLst xmlns:a="http://schemas.openxmlformats.org/drawingml/2006/main">
+              <a:ext uri="{FF2B5EF4-FFF2-40B4-BE49-F238E27FC236}">
+                <a16:creationId xmlns:a16="http://schemas.microsoft.com/office/drawing/2014/main" id="{4B6B763B-0D56-4C5D-81A8-84F21C240DE1}"/>
+              </a:ext>
+            </a:extLst>
+          </p:cNvPr>
+          <p:cNvSpPr>
+            <a:spLocks xmlns:a="http://schemas.openxmlformats.org/drawingml/2006/main" noGrp="1"/>
+          </p:cNvSpPr>
+          <p:nvPr/>
+        </p:nvSpPr>
+        <p:spPr>
+          <a:xfrm xmlns:a="http://schemas.openxmlformats.org/drawingml/2006/main">
+            <a:off x="11096625" y="6391275"/>
+            <a:ext cx="476250" cy="238125"/>
+          </a:xfrm>
+          <a:prstGeom xmlns:a="http://schemas.openxmlformats.org/drawingml/2006/main" prst="rect">
+            <a:avLst/>
+          </a:prstGeom>
+          <a:noFill xmlns:a="http://schemas.openxmlformats.org/drawingml/2006/main"/>
+          <a:ln xmlns:a="http://schemas.openxmlformats.org/drawingml/2006/main" w="0">
+            <a:noFill/>
+          </a:ln>
+        </p:spPr>
+        <p:txBody>
+          <a:bodyPr xmlns:a="http://schemas.openxmlformats.org/drawingml/2006/main" lIns="0" tIns="0" rIns="0" bIns="0" anchor="t">
+            <a:normAutofit fontScale="100000"/>
+          </a:bodyPr>
+          <a:lstStyle xmlns:a="http://schemas.openxmlformats.org/drawingml/2006/main"/>
+          <a:p xmlns:a="http://schemas.openxmlformats.org/drawingml/2006/main">
+            <a:pPr algn="r">
+              <a:lnSpc>
+                <a:spcPct val="108000"/>
+              </a:lnSpc>
+              <a:buNone/>
+              <a:defRPr sz="1050" b="1">
+                <a:solidFill>
+                  <a:srgbClr val="52606D"/>
+                </a:solidFill>
+                <a:latin typeface="Arial"/>
+                <a:ea typeface="Arial"/>
+                <a:cs typeface="Arial"/>
+              </a:defRPr>
+            </a:pPr>
+            <a:r>
+              <a:rPr sz="1050" b="1">
+                <a:solidFill>
+                  <a:srgbClr val="52606D"/>
+                </a:solidFill>
+                <a:latin typeface="Arial"/>
+                <a:ea typeface="Arial"/>
+                <a:cs typeface="Arial"/>
+              </a:rPr>
+              <a:t>16</a:t>
+            </a:r>
+          </a:p>
+        </p:txBody>
+      </p:sp>
+      <p:graphicFrame>
+        <p:nvGraphicFramePr>
+          <p:cNvPr id="13" name=""/>
+          <p:cNvGraphicFramePr/>
+          <p:nvPr/>
+        </p:nvGraphicFramePr>
+        <p:xfrm>
+          <a:off xmlns:a="http://schemas.openxmlformats.org/drawingml/2006/main" x="666750" y="1619250"/>
+          <a:ext xmlns:a="http://schemas.openxmlformats.org/drawingml/2006/main" cx="10858500" cy="2190750"/>
+        </p:xfrm>
+        <a:graphic xmlns:a="http://schemas.openxmlformats.org/drawingml/2006/main">
+          <a:graphicData uri="http://schemas.openxmlformats.org/drawingml/2006/table">
+            <a:tbl>
+              <a:tblPr firstRow="1" bandRow="1"/>
+              <a:tblGrid>
+                <a:gridCol w="2714625"/>
+                <a:gridCol w="2714625"/>
+                <a:gridCol w="2714625"/>
+                <a:gridCol w="2714625"/>
+              </a:tblGrid>
+              <a:tr h="547688">
+                <a:tc>
+                  <a:txBody>
+                    <a:bodyPr/>
+                    <a:lstStyle/>
+                    <a:p>
+                      <a:r>
+                        <a:rPr sz="1575" b="1">
+                          <a:solidFill>
+                            <a:srgbClr val="FFFFFF"/>
+                          </a:solidFill>
+                          <a:latin typeface="Arial"/>
+                          <a:ea typeface="Arial"/>
+                          <a:cs typeface="Arial"/>
+                        </a:rPr>
+                        <a:t>Ứng viên</a:t>
+                      </a:r>
+                    </a:p>
+                  </a:txBody>
+                  <a:tcPr marL="91440" marR="91440" marT="45720" marB="45720">
+                    <a:solidFill>
+                      <a:srgbClr val="0F243E"/>
+                    </a:solidFill>
+                  </a:tcPr>
+                </a:tc>
+                <a:tc>
+                  <a:txBody>
+                    <a:bodyPr/>
+                    <a:lstStyle/>
+                    <a:p>
+                      <a:r>
+                        <a:rPr sz="1575" b="1">
+                          <a:solidFill>
+                            <a:srgbClr val="FFFFFF"/>
+                          </a:solidFill>
+                          <a:latin typeface="Arial"/>
+                          <a:ea typeface="Arial"/>
+                          <a:cs typeface="Arial"/>
+                        </a:rPr>
+                        <a:t>MAE RUL ≤ 30</a:t>
+                      </a:r>
+                    </a:p>
+                  </a:txBody>
+                  <a:tcPr marL="91440" marR="91440" marT="45720" marB="45720">
+                    <a:solidFill>
+                      <a:srgbClr val="0F243E"/>
+                    </a:solidFill>
+                  </a:tcPr>
+                </a:tc>
+                <a:tc>
+                  <a:txBody>
+                    <a:bodyPr/>
+                    <a:lstStyle/>
+                    <a:p>
+                      <a:r>
+                        <a:rPr sz="1575" b="1">
+                          <a:solidFill>
+                            <a:srgbClr val="FFFFFF"/>
+                          </a:solidFill>
+                          <a:latin typeface="Arial"/>
+                          <a:ea typeface="Arial"/>
+                          <a:cs typeface="Arial"/>
+                        </a:rPr>
+                        <a:t>MAE toàn bộ</a:t>
+                      </a:r>
+                    </a:p>
+                  </a:txBody>
+                  <a:tcPr marL="91440" marR="91440" marT="45720" marB="45720">
+                    <a:solidFill>
+                      <a:srgbClr val="0F243E"/>
+                    </a:solidFill>
+                  </a:tcPr>
+                </a:tc>
+                <a:tc>
+                  <a:txBody>
+                    <a:bodyPr/>
+                    <a:lstStyle/>
+                    <a:p>
+                      <a:r>
+                        <a:rPr sz="1575" b="1">
+                          <a:solidFill>
+                            <a:srgbClr val="FFFFFF"/>
+                          </a:solidFill>
+                          <a:latin typeface="Arial"/>
+                          <a:ea typeface="Arial"/>
+                          <a:cs typeface="Arial"/>
+                        </a:rPr>
+                        <a:t>Trễ / bỏ lỡ</a:t>
+                      </a:r>
+                    </a:p>
+                  </a:txBody>
+                  <a:tcPr marL="91440" marR="91440" marT="45720" marB="45720">
+                    <a:solidFill>
+                      <a:srgbClr val="0F243E"/>
+                    </a:solidFill>
+                  </a:tcPr>
+                </a:tc>
+              </a:tr>
+              <a:tr h="547688">
+                <a:tc>
+                  <a:txBody>
+                    <a:bodyPr/>
+                    <a:lstStyle/>
+                    <a:p>
+                      <a:r>
+                        <a:rPr sz="1575" b="0">
+                          <a:solidFill>
+                            <a:srgbClr val="16202A"/>
+                          </a:solidFill>
+                          <a:latin typeface="Arial"/>
+                          <a:ea typeface="Arial"/>
+                          <a:cs typeface="Arial"/>
+                        </a:rPr>
+                        <a:t>Baseline</a:t>
+                      </a:r>
+                    </a:p>
+                  </a:txBody>
+                  <a:tcPr marL="91440" marR="91440" marT="45720" marB="45720"/>
+                </a:tc>
+                <a:tc>
+                  <a:txBody>
+                    <a:bodyPr/>
+                    <a:lstStyle/>
+                    <a:p>
+                      <a:r>
+                        <a:rPr sz="1575" b="0">
+                          <a:solidFill>
+                            <a:srgbClr val="16202A"/>
+                          </a:solidFill>
+                          <a:latin typeface="Arial"/>
+                          <a:ea typeface="Arial"/>
+                          <a:cs typeface="Arial"/>
+                        </a:rPr>
+                        <a:t>3,6148</a:t>
+                      </a:r>
+                    </a:p>
+                  </a:txBody>
+                  <a:tcPr marL="91440" marR="91440" marT="45720" marB="45720"/>
+                </a:tc>
+                <a:tc>
+                  <a:txBody>
+                    <a:bodyPr/>
+                    <a:lstStyle/>
+                    <a:p>
+                      <a:r>
+                        <a:rPr sz="1575" b="0">
+                          <a:solidFill>
+                            <a:srgbClr val="16202A"/>
+                          </a:solidFill>
+                          <a:latin typeface="Arial"/>
+                          <a:ea typeface="Arial"/>
+                          <a:cs typeface="Arial"/>
+                        </a:rPr>
+                        <a:t>20,3613</a:t>
+                      </a:r>
+                    </a:p>
+                  </a:txBody>
+                  <a:tcPr marL="91440" marR="91440" marT="45720" marB="45720"/>
+                </a:tc>
+                <a:tc>
+                  <a:txBody>
+                    <a:bodyPr/>
+                    <a:lstStyle/>
+                    <a:p>
+                      <a:r>
+                        <a:rPr sz="1575" b="0">
+                          <a:solidFill>
+                            <a:srgbClr val="16202A"/>
+                          </a:solidFill>
+                          <a:latin typeface="Arial"/>
+                          <a:ea typeface="Arial"/>
+                          <a:cs typeface="Arial"/>
+                        </a:rPr>
+                        <a:t>50 / 100</a:t>
+                      </a:r>
+                    </a:p>
+                  </a:txBody>
+                  <a:tcPr marL="91440" marR="91440" marT="45720" marB="45720"/>
+                </a:tc>
+              </a:tr>
+              <a:tr h="547688">
+                <a:tc>
+                  <a:txBody>
+                    <a:bodyPr/>
+                    <a:lstStyle/>
+                    <a:p>
+                      <a:r>
+                        <a:rPr sz="1575" b="0">
+                          <a:solidFill>
+                            <a:srgbClr val="16202A"/>
+                          </a:solidFill>
+                          <a:latin typeface="Arial"/>
+                          <a:ea typeface="Arial"/>
+                          <a:cs typeface="Arial"/>
+                        </a:rPr>
+                        <a:t>hgb_08</a:t>
+                      </a:r>
+                    </a:p>
+                  </a:txBody>
+                  <a:tcPr marL="91440" marR="91440" marT="45720" marB="45720"/>
+                </a:tc>
+                <a:tc>
+                  <a:txBody>
+                    <a:bodyPr/>
+                    <a:lstStyle/>
+                    <a:p>
+                      <a:r>
+                        <a:rPr sz="1575" b="0">
+                          <a:solidFill>
+                            <a:srgbClr val="16202A"/>
+                          </a:solidFill>
+                          <a:latin typeface="Arial"/>
+                          <a:ea typeface="Arial"/>
+                          <a:cs typeface="Arial"/>
+                        </a:rPr>
+                        <a:t>3,2625</a:t>
+                      </a:r>
+                    </a:p>
+                  </a:txBody>
+                  <a:tcPr marL="91440" marR="91440" marT="45720" marB="45720"/>
+                </a:tc>
+                <a:tc>
+                  <a:txBody>
+                    <a:bodyPr/>
+                    <a:lstStyle/>
+                    <a:p>
+                      <a:r>
+                        <a:rPr sz="1575" b="0">
+                          <a:solidFill>
+                            <a:srgbClr val="16202A"/>
+                          </a:solidFill>
+                          <a:latin typeface="Arial"/>
+                          <a:ea typeface="Arial"/>
+                          <a:cs typeface="Arial"/>
+                        </a:rPr>
+                        <a:t>20,6846</a:t>
+                      </a:r>
+                    </a:p>
+                  </a:txBody>
+                  <a:tcPr marL="91440" marR="91440" marT="45720" marB="45720"/>
+                </a:tc>
+                <a:tc>
+                  <a:txBody>
+                    <a:bodyPr/>
+                    <a:lstStyle/>
+                    <a:p>
+                      <a:r>
+                        <a:rPr sz="1575" b="0">
+                          <a:solidFill>
+                            <a:srgbClr val="16202A"/>
+                          </a:solidFill>
+                          <a:latin typeface="Arial"/>
+                          <a:ea typeface="Arial"/>
+                          <a:cs typeface="Arial"/>
+                        </a:rPr>
+                        <a:t>49 / 100</a:t>
+                      </a:r>
+                    </a:p>
+                  </a:txBody>
+                  <a:tcPr marL="91440" marR="91440" marT="45720" marB="45720"/>
+                </a:tc>
+              </a:tr>
+              <a:tr h="547688">
+                <a:tc>
+                  <a:txBody>
+                    <a:bodyPr/>
+                    <a:lstStyle/>
+                    <a:p>
+                      <a:r>
+                        <a:rPr sz="1575" b="0">
+                          <a:solidFill>
+                            <a:srgbClr val="16202A"/>
+                          </a:solidFill>
+                          <a:latin typeface="Arial"/>
+                          <a:ea typeface="Arial"/>
+                          <a:cs typeface="Arial"/>
+                        </a:rPr>
+                        <a:t>Ưu tiên RUL thấp cao</a:t>
+                      </a:r>
+                    </a:p>
+                  </a:txBody>
+                  <a:tcPr marL="91440" marR="91440" marT="45720" marB="45720"/>
+                </a:tc>
+                <a:tc>
+                  <a:txBody>
+                    <a:bodyPr/>
+                    <a:lstStyle/>
+                    <a:p>
+                      <a:r>
+                        <a:rPr sz="1575" b="0">
+                          <a:solidFill>
+                            <a:srgbClr val="16202A"/>
+                          </a:solidFill>
+                          <a:latin typeface="Arial"/>
+                          <a:ea typeface="Arial"/>
+                          <a:cs typeface="Arial"/>
+                        </a:rPr>
+                        <a:t>3,3901</a:t>
+                      </a:r>
+                    </a:p>
+                  </a:txBody>
+                  <a:tcPr marL="91440" marR="91440" marT="45720" marB="45720"/>
+                </a:tc>
+                <a:tc>
+                  <a:txBody>
+                    <a:bodyPr/>
+                    <a:lstStyle/>
+                    <a:p>
+                      <a:r>
+                        <a:rPr sz="1575" b="0">
+                          <a:solidFill>
+                            <a:srgbClr val="16202A"/>
+                          </a:solidFill>
+                          <a:latin typeface="Arial"/>
+                          <a:ea typeface="Arial"/>
+                          <a:cs typeface="Arial"/>
+                        </a:rPr>
+                        <a:t>20,4072</a:t>
+                      </a:r>
+                    </a:p>
+                  </a:txBody>
+                  <a:tcPr marL="91440" marR="91440" marT="45720" marB="45720"/>
+                </a:tc>
+                <a:tc>
+                  <a:txBody>
+                    <a:bodyPr/>
+                    <a:lstStyle/>
+                    <a:p>
+                      <a:r>
+                        <a:rPr sz="1575" b="0">
+                          <a:solidFill>
+                            <a:srgbClr val="16202A"/>
+                          </a:solidFill>
+                          <a:latin typeface="Arial"/>
+                          <a:ea typeface="Arial"/>
+                          <a:cs typeface="Arial"/>
+                        </a:rPr>
+                        <a:t>47 / 100</a:t>
+                      </a:r>
+                    </a:p>
+                  </a:txBody>
+                  <a:tcPr marL="91440" marR="91440" marT="45720" marB="45720"/>
+                </a:tc>
+              </a:tr>
+            </a:tbl>
+          </a:graphicData>
+        </a:graphic>
+      </p:graphicFrame>
+      <p:sp>
+        <p:nvSpPr>
+          <p:cNvPr id="6" name="">
+            <a:extLst xmlns:a="http://schemas.openxmlformats.org/drawingml/2006/main">
+              <a:ext uri="{FF2B5EF4-FFF2-40B4-BE49-F238E27FC236}">
+                <a16:creationId xmlns:a16="http://schemas.microsoft.com/office/drawing/2014/main" id="{140675A1-B358-47D9-8211-685E961051A7}"/>
+              </a:ext>
+            </a:extLst>
+          </p:cNvPr>
+          <p:cNvSpPr>
+            <a:spLocks xmlns:a="http://schemas.openxmlformats.org/drawingml/2006/main" noGrp="1"/>
+          </p:cNvSpPr>
+          <p:nvPr/>
+        </p:nvSpPr>
+        <p:spPr>
+          <a:xfrm xmlns:a="http://schemas.openxmlformats.org/drawingml/2006/main">
+            <a:off x="714375" y="4286250"/>
+            <a:ext cx="10477500" cy="304800"/>
+          </a:xfrm>
+          <a:prstGeom xmlns:a="http://schemas.openxmlformats.org/drawingml/2006/main" prst="rect">
+            <a:avLst/>
+          </a:prstGeom>
+          <a:noFill xmlns:a="http://schemas.openxmlformats.org/drawingml/2006/main"/>
+          <a:ln xmlns:a="http://schemas.openxmlformats.org/drawingml/2006/main" w="0">
+            <a:noFill/>
+          </a:ln>
+        </p:spPr>
+        <p:txBody>
+          <a:bodyPr xmlns:a="http://schemas.openxmlformats.org/drawingml/2006/main" lIns="0" tIns="0" rIns="0" bIns="0" anchor="t">
+            <a:normAutofit fontScale="100000"/>
+          </a:bodyPr>
+          <a:lstStyle xmlns:a="http://schemas.openxmlformats.org/drawingml/2006/main"/>
+          <a:p xmlns:a="http://schemas.openxmlformats.org/drawingml/2006/main">
+            <a:pPr algn="l">
+              <a:lnSpc>
+                <a:spcPct val="108000"/>
+              </a:lnSpc>
+              <a:buNone/>
+              <a:defRPr sz="1500" b="1">
+                <a:solidFill>
+                  <a:srgbClr val="1F7A8C"/>
+                </a:solidFill>
+                <a:latin typeface="Arial"/>
+                <a:ea typeface="Arial"/>
+                <a:cs typeface="Arial"/>
+              </a:defRPr>
+            </a:pPr>
+            <a:r>
+              <a:rPr sz="1500" b="1">
+                <a:solidFill>
+                  <a:srgbClr val="1F7A8C"/>
+                </a:solidFill>
+                <a:latin typeface="Arial"/>
+                <a:ea typeface="Arial"/>
+                <a:cs typeface="Arial"/>
+              </a:rPr>
+              <a:t>Lý do chưa thay model</a:t>
+            </a:r>
+          </a:p>
+        </p:txBody>
+      </p:sp>
+      <p:sp>
+        <p:nvSpPr>
+          <p:cNvPr id="7" name="">
+            <a:extLst xmlns:a="http://schemas.openxmlformats.org/drawingml/2006/main">
+              <a:ext uri="{FF2B5EF4-FFF2-40B4-BE49-F238E27FC236}">
+                <a16:creationId xmlns:a16="http://schemas.microsoft.com/office/drawing/2014/main" id="{B9ED52AE-F227-42DA-8037-D8EC0D01FA36}"/>
+              </a:ext>
+            </a:extLst>
+          </p:cNvPr>
+          <p:cNvSpPr>
+            <a:spLocks xmlns:a="http://schemas.openxmlformats.org/drawingml/2006/main" noGrp="1"/>
+          </p:cNvSpPr>
+          <p:nvPr/>
+        </p:nvSpPr>
+        <p:spPr>
+          <a:xfrm xmlns:a="http://schemas.openxmlformats.org/drawingml/2006/main">
+            <a:off x="714375" y="4667250"/>
+            <a:ext cx="10477500" cy="1143000"/>
+          </a:xfrm>
+          <a:prstGeom xmlns:a="http://schemas.openxmlformats.org/drawingml/2006/main" prst="rect">
+            <a:avLst/>
+          </a:prstGeom>
+          <a:noFill xmlns:a="http://schemas.openxmlformats.org/drawingml/2006/main"/>
+          <a:ln xmlns:a="http://schemas.openxmlformats.org/drawingml/2006/main" w="0">
+            <a:noFill/>
+          </a:ln>
+        </p:spPr>
+        <p:txBody>
+          <a:bodyPr xmlns:a="http://schemas.openxmlformats.org/drawingml/2006/main" lIns="0" tIns="0" rIns="0" bIns="0" anchor="t">
+            <a:normAutofit fontScale="100000"/>
+          </a:bodyPr>
+          <a:lstStyle xmlns:a="http://schemas.openxmlformats.org/drawingml/2006/main"/>
+          <a:p xmlns:a="http://schemas.openxmlformats.org/drawingml/2006/main">
+            <a:pPr algn="l">
+              <a:lnSpc>
+                <a:spcPct val="108000"/>
+              </a:lnSpc>
+              <a:buNone/>
+              <a:defRPr sz="1725" b="0">
+                <a:solidFill>
+                  <a:srgbClr val="16202A"/>
+                </a:solidFill>
+                <a:latin typeface="Arial"/>
+                <a:ea typeface="Arial"/>
+                <a:cs typeface="Arial"/>
+              </a:defRPr>
+            </a:pPr>
+            <a:r>
+              <a:rPr sz="1725" b="0">
+                <a:solidFill>
+                  <a:srgbClr val="16202A"/>
+                </a:solidFill>
+                <a:latin typeface="Arial"/>
+                <a:ea typeface="Arial"/>
+                <a:cs typeface="Arial"/>
+              </a:rPr>
+              <a:t>hgb_08 giảm sai số RUL thấp khoảng 9,75% nhưng tăng MAE toàn bộ. Phương án trọng số cao còn tăng thời gian báo sớm.</a:t>
+            </a:r>
+          </a:p>
+        </p:txBody>
+      </p:sp>
+      <p:sp>
+        <p:nvSpPr>
+          <p:cNvPr id="8" name="">
+            <a:extLst xmlns:a="http://schemas.openxmlformats.org/drawingml/2006/main">
+              <a:ext uri="{FF2B5EF4-FFF2-40B4-BE49-F238E27FC236}">
+                <a16:creationId xmlns:a16="http://schemas.microsoft.com/office/drawing/2014/main" id="{1C821484-2E9A-489A-901A-677C734ED3E6}"/>
+              </a:ext>
+            </a:extLst>
+          </p:cNvPr>
+          <p:cNvSpPr>
+            <a:spLocks xmlns:a="http://schemas.openxmlformats.org/drawingml/2006/main" noGrp="1"/>
+          </p:cNvSpPr>
+          <p:nvPr/>
+        </p:nvSpPr>
+        <p:spPr>
+          <a:xfrm xmlns:a="http://schemas.openxmlformats.org/drawingml/2006/main">
+            <a:off x="714375" y="5762625"/>
+            <a:ext cx="10572750" cy="333375"/>
+          </a:xfrm>
+          <a:prstGeom xmlns:a="http://schemas.openxmlformats.org/drawingml/2006/main" prst="rect">
+            <a:avLst/>
+          </a:prstGeom>
+          <a:noFill xmlns:a="http://schemas.openxmlformats.org/drawingml/2006/main"/>
+          <a:ln xmlns:a="http://schemas.openxmlformats.org/drawingml/2006/main" w="0">
+            <a:noFill/>
+          </a:ln>
+        </p:spPr>
+        <p:txBody>
+          <a:bodyPr xmlns:a="http://schemas.openxmlformats.org/drawingml/2006/main" lIns="0" tIns="0" rIns="0" bIns="0" anchor="t">
+            <a:normAutofit fontScale="100000"/>
+          </a:bodyPr>
+          <a:lstStyle xmlns:a="http://schemas.openxmlformats.org/drawingml/2006/main"/>
+          <a:p xmlns:a="http://schemas.openxmlformats.org/drawingml/2006/main">
+            <a:pPr algn="l">
+              <a:lnSpc>
+                <a:spcPct val="108000"/>
+              </a:lnSpc>
+              <a:buNone/>
+              <a:defRPr sz="1575" b="1">
+                <a:solidFill>
+                  <a:srgbClr val="0F243E"/>
+                </a:solidFill>
+                <a:latin typeface="Arial"/>
+                <a:ea typeface="Arial"/>
+                <a:cs typeface="Arial"/>
+              </a:defRPr>
+            </a:pPr>
+            <a:r>
+              <a:rPr sz="1575" b="1">
+                <a:solidFill>
+                  <a:srgbClr val="0F243E"/>
+                </a:solidFill>
+                <a:latin typeface="Arial"/>
+                <a:ea typeface="Arial"/>
+                <a:cs typeface="Arial"/>
+              </a:rPr>
+              <a:t>Đợt tiếp theo cần chốt mức đánh đổi chấp nhận được trước khi thử lại.</a:t>
+            </a:r>
+          </a:p>
+        </p:txBody>
+      </p:sp>
+    </p:spTree>
+    <p:extLst>
+      <p:ext uri="{BB962C8B-B14F-4D97-AF65-F5344CB8AC3E}">
+        <p14:creationId xmlns:p14="http://schemas.microsoft.com/office/powerpoint/2010/main" val="1172673718"/>
+      </p:ext>
+    </p:extLst>
+  </p:cSld>
+</p:sld>
+</file>
+
+<file path=ppt/slides/slide17.xml><?xml version="1.0" encoding="utf-8"?>
+<p:sld xmlns:p="http://schemas.openxmlformats.org/presentationml/2006/main">
+  <p:cSld>
+    <p:bg>
+      <p:bgPr>
+        <a:solidFill xmlns:a="http://schemas.openxmlformats.org/drawingml/2006/main">
+          <a:srgbClr val="FFFFFF"/>
+        </a:solidFill>
+      </p:bgPr>
+    </p:bg>
+    <p:spTree>
+      <p:nvGrpSpPr>
+        <p:cNvPr id="1" name=""/>
+        <p:cNvGrpSpPr/>
+        <p:nvPr/>
+      </p:nvGrpSpPr>
+      <p:grpSpPr>
+        <a:xfrm xmlns:a="http://schemas.openxmlformats.org/drawingml/2006/main"/>
+      </p:grpSpPr>
+      <p:sp>
+        <p:nvSpPr>
+          <p:cNvPr id="11" name="">
+            <a:extLst xmlns:a="http://schemas.openxmlformats.org/drawingml/2006/main">
+              <a:ext uri="{FF2B5EF4-FFF2-40B4-BE49-F238E27FC236}">
+                <a16:creationId xmlns:a16="http://schemas.microsoft.com/office/drawing/2014/main" id="{4FE6F597-DE63-406E-86A8-782AB3392698}"/>
+              </a:ext>
+            </a:extLst>
+          </p:cNvPr>
+          <p:cNvSpPr>
+            <a:spLocks xmlns:a="http://schemas.openxmlformats.org/drawingml/2006/main" noGrp="1"/>
+          </p:cNvSpPr>
+          <p:nvPr/>
+        </p:nvSpPr>
+        <p:spPr>
+          <a:xfrm xmlns:a="http://schemas.openxmlformats.org/drawingml/2006/main">
+            <a:off x="609600" y="361950"/>
+            <a:ext cx="10953750" cy="495300"/>
+          </a:xfrm>
+          <a:prstGeom xmlns:a="http://schemas.openxmlformats.org/drawingml/2006/main" prst="rect">
+            <a:avLst/>
+          </a:prstGeom>
+          <a:noFill xmlns:a="http://schemas.openxmlformats.org/drawingml/2006/main"/>
+          <a:ln xmlns:a="http://schemas.openxmlformats.org/drawingml/2006/main" w="0">
+            <a:noFill/>
+          </a:ln>
+        </p:spPr>
+        <p:txBody>
+          <a:bodyPr xmlns:a="http://schemas.openxmlformats.org/drawingml/2006/main" lIns="0" tIns="0" rIns="0" bIns="0" anchor="t">
+            <a:normAutofit fontScale="100000"/>
+          </a:bodyPr>
+          <a:lstStyle xmlns:a="http://schemas.openxmlformats.org/drawingml/2006/main"/>
+          <a:p xmlns:a="http://schemas.openxmlformats.org/drawingml/2006/main">
+            <a:pPr algn="l">
+              <a:lnSpc>
+                <a:spcPct val="108000"/>
+              </a:lnSpc>
+              <a:buNone/>
+              <a:defRPr sz="2550" b="1">
+                <a:solidFill>
+                  <a:srgbClr val="0F243E"/>
+                </a:solidFill>
+                <a:latin typeface="Arial"/>
+                <a:ea typeface="Arial"/>
+                <a:cs typeface="Arial"/>
+              </a:defRPr>
+            </a:pPr>
+            <a:r>
+              <a:rPr sz="2550" b="1">
+                <a:solidFill>
+                  <a:srgbClr val="0F243E"/>
+                </a:solidFill>
+                <a:latin typeface="Arial"/>
+                <a:ea typeface="Arial"/>
+                <a:cs typeface="Arial"/>
+              </a:rPr>
+              <a:t>Kết luận và giới hạn</a:t>
+            </a:r>
+          </a:p>
+        </p:txBody>
+      </p:sp>
+      <p:sp>
+        <p:nvSpPr>
+          <p:cNvPr id="2" name="">
+            <a:extLst xmlns:a="http://schemas.openxmlformats.org/drawingml/2006/main">
+              <a:ext uri="{FF2B5EF4-FFF2-40B4-BE49-F238E27FC236}">
+                <a16:creationId xmlns:a16="http://schemas.microsoft.com/office/drawing/2014/main" id="{DD68E398-3833-4AD0-B74C-D8C90ADCB691}"/>
+              </a:ext>
+            </a:extLst>
+          </p:cNvPr>
+          <p:cNvSpPr>
+            <a:spLocks xmlns:a="http://schemas.openxmlformats.org/drawingml/2006/main" noGrp="1"/>
+          </p:cNvSpPr>
+          <p:nvPr/>
+        </p:nvSpPr>
+        <p:spPr>
+          <a:xfrm xmlns:a="http://schemas.openxmlformats.org/drawingml/2006/main">
+            <a:off x="628650" y="914400"/>
+            <a:ext cx="10858500" cy="333375"/>
+          </a:xfrm>
+          <a:prstGeom xmlns:a="http://schemas.openxmlformats.org/drawingml/2006/main" prst="rect">
+            <a:avLst/>
+          </a:prstGeom>
+          <a:noFill xmlns:a="http://schemas.openxmlformats.org/drawingml/2006/main"/>
+          <a:ln xmlns:a="http://schemas.openxmlformats.org/drawingml/2006/main" w="0">
+            <a:noFill/>
+          </a:ln>
+        </p:spPr>
+        <p:txBody>
+          <a:bodyPr xmlns:a="http://schemas.openxmlformats.org/drawingml/2006/main" lIns="0" tIns="0" rIns="0" bIns="0" anchor="t">
+            <a:normAutofit fontScale="100000"/>
+          </a:bodyPr>
+          <a:lstStyle xmlns:a="http://schemas.openxmlformats.org/drawingml/2006/main"/>
+          <a:p xmlns:a="http://schemas.openxmlformats.org/drawingml/2006/main">
+            <a:pPr algn="l">
+              <a:lnSpc>
+                <a:spcPct val="108000"/>
+              </a:lnSpc>
+              <a:buNone/>
+              <a:defRPr sz="1425" b="0">
+                <a:solidFill>
+                  <a:srgbClr val="52606D"/>
+                </a:solidFill>
+                <a:latin typeface="Arial"/>
+                <a:ea typeface="Arial"/>
+                <a:cs typeface="Arial"/>
+              </a:defRPr>
+            </a:pPr>
+            <a:r>
+              <a:rPr sz="1425" b="0">
+                <a:solidFill>
+                  <a:srgbClr val="52606D"/>
+                </a:solidFill>
+                <a:latin typeface="Arial"/>
+                <a:ea typeface="Arial"/>
+                <a:cs typeface="Arial"/>
+              </a:rPr>
+              <a:t>Kết quả chính trên FD001 và bằng chứng chuyển miền trong C-MAPSS</a:t>
+            </a:r>
+          </a:p>
+        </p:txBody>
+      </p:sp>
+      <p:sp>
+        <p:nvSpPr>
+          <p:cNvPr id="3" name="">
+            <a:extLst xmlns:a="http://schemas.openxmlformats.org/drawingml/2006/main">
+              <a:ext uri="{FF2B5EF4-FFF2-40B4-BE49-F238E27FC236}">
+                <a16:creationId xmlns:a16="http://schemas.microsoft.com/office/drawing/2014/main" id="{F07D4E4B-81DC-4841-B9B5-485D13C6908A}"/>
+              </a:ext>
+            </a:extLst>
+          </p:cNvPr>
+          <p:cNvSpPr>
+            <a:spLocks xmlns:a="http://schemas.openxmlformats.org/drawingml/2006/main" noGrp="1"/>
+          </p:cNvSpPr>
+          <p:nvPr/>
+        </p:nvSpPr>
+        <p:spPr>
+          <a:xfrm xmlns:a="http://schemas.openxmlformats.org/drawingml/2006/main">
+            <a:off x="609600" y="6248400"/>
+            <a:ext cx="10287000" cy="285750"/>
+          </a:xfrm>
+          <a:prstGeom xmlns:a="http://schemas.openxmlformats.org/drawingml/2006/main" prst="rect">
+            <a:avLst/>
+          </a:prstGeom>
+          <a:noFill xmlns:a="http://schemas.openxmlformats.org/drawingml/2006/main"/>
+          <a:ln xmlns:a="http://schemas.openxmlformats.org/drawingml/2006/main" w="0">
+            <a:noFill/>
+          </a:ln>
+        </p:spPr>
+        <p:txBody>
+          <a:bodyPr xmlns:a="http://schemas.openxmlformats.org/drawingml/2006/main" lIns="0" tIns="0" rIns="0" bIns="0" anchor="t">
+            <a:normAutofit fontScale="100000"/>
+          </a:bodyPr>
+          <a:lstStyle xmlns:a="http://schemas.openxmlformats.org/drawingml/2006/main"/>
+          <a:p xmlns:a="http://schemas.openxmlformats.org/drawingml/2006/main">
+            <a:pPr algn="l">
+              <a:lnSpc>
+                <a:spcPct val="108000"/>
+              </a:lnSpc>
+              <a:buNone/>
+              <a:defRPr sz="900" b="0">
+                <a:solidFill>
+                  <a:srgbClr val="52606D"/>
+                </a:solidFill>
+                <a:latin typeface="Arial"/>
+                <a:ea typeface="Arial"/>
+                <a:cs typeface="Arial"/>
+              </a:defRPr>
+            </a:pPr>
+            <a:r>
+              <a:rPr sz="900" b="0">
+                <a:solidFill>
+                  <a:srgbClr val="52606D"/>
+                </a:solidFill>
+                <a:latin typeface="Arial"/>
+                <a:ea typeface="Arial"/>
+                <a:cs typeface="Arial"/>
+              </a:rPr>
+              <a:t>Nguồn: report/sections/conclusion.tex; outputs/cross_dataset/matrix.json</a:t>
+            </a:r>
+          </a:p>
+        </p:txBody>
+      </p:sp>
+      <p:sp>
+        <p:nvSpPr>
+          <p:cNvPr id="4" name="">
+            <a:extLst xmlns:a="http://schemas.openxmlformats.org/drawingml/2006/main">
+              <a:ext uri="{FF2B5EF4-FFF2-40B4-BE49-F238E27FC236}">
+                <a16:creationId xmlns:a16="http://schemas.microsoft.com/office/drawing/2014/main" id="{B84F7688-69DA-4792-9184-8D407A66DB35}"/>
+              </a:ext>
+            </a:extLst>
+          </p:cNvPr>
+          <p:cNvSpPr>
+            <a:spLocks xmlns:a="http://schemas.openxmlformats.org/drawingml/2006/main" noGrp="1"/>
+          </p:cNvSpPr>
+          <p:nvPr/>
+        </p:nvSpPr>
+        <p:spPr>
+          <a:xfrm xmlns:a="http://schemas.openxmlformats.org/drawingml/2006/main">
+            <a:off x="11096625" y="6391275"/>
+            <a:ext cx="476250" cy="238125"/>
+          </a:xfrm>
+          <a:prstGeom xmlns:a="http://schemas.openxmlformats.org/drawingml/2006/main" prst="rect">
+            <a:avLst/>
+          </a:prstGeom>
+          <a:noFill xmlns:a="http://schemas.openxmlformats.org/drawingml/2006/main"/>
+          <a:ln xmlns:a="http://schemas.openxmlformats.org/drawingml/2006/main" w="0">
+            <a:noFill/>
+          </a:ln>
+        </p:spPr>
+        <p:txBody>
+          <a:bodyPr xmlns:a="http://schemas.openxmlformats.org/drawingml/2006/main" lIns="0" tIns="0" rIns="0" bIns="0" anchor="t">
+            <a:normAutofit fontScale="100000"/>
+          </a:bodyPr>
+          <a:lstStyle xmlns:a="http://schemas.openxmlformats.org/drawingml/2006/main"/>
+          <a:p xmlns:a="http://schemas.openxmlformats.org/drawingml/2006/main">
+            <a:pPr algn="r">
+              <a:lnSpc>
+                <a:spcPct val="108000"/>
+              </a:lnSpc>
+              <a:buNone/>
+              <a:defRPr sz="1050" b="1">
+                <a:solidFill>
+                  <a:srgbClr val="52606D"/>
+                </a:solidFill>
+                <a:latin typeface="Arial"/>
+                <a:ea typeface="Arial"/>
+                <a:cs typeface="Arial"/>
+              </a:defRPr>
+            </a:pPr>
+            <a:r>
+              <a:rPr sz="1050" b="1">
+                <a:solidFill>
+                  <a:srgbClr val="52606D"/>
+                </a:solidFill>
+                <a:latin typeface="Arial"/>
+                <a:ea typeface="Arial"/>
+                <a:cs typeface="Arial"/>
+              </a:rPr>
+              <a:t>17</a:t>
+            </a:r>
+          </a:p>
+        </p:txBody>
+      </p:sp>
+      <p:sp>
+        <p:nvSpPr>
+          <p:cNvPr id="5" name="">
+            <a:extLst xmlns:a="http://schemas.openxmlformats.org/drawingml/2006/main">
+              <a:ext uri="{FF2B5EF4-FFF2-40B4-BE49-F238E27FC236}">
+                <a16:creationId xmlns:a16="http://schemas.microsoft.com/office/drawing/2014/main" id="{EB40D202-ACA0-49F1-B359-1A9A78D147B4}"/>
+              </a:ext>
+            </a:extLst>
+          </p:cNvPr>
+          <p:cNvSpPr>
+            <a:spLocks xmlns:a="http://schemas.openxmlformats.org/drawingml/2006/main" noGrp="1"/>
+          </p:cNvSpPr>
+          <p:nvPr/>
+        </p:nvSpPr>
+        <p:spPr>
+          <a:xfrm xmlns:a="http://schemas.openxmlformats.org/drawingml/2006/main">
+            <a:off x="714375" y="1619250"/>
+            <a:ext cx="10477500" cy="304800"/>
+          </a:xfrm>
+          <a:prstGeom xmlns:a="http://schemas.openxmlformats.org/drawingml/2006/main" prst="rect">
+            <a:avLst/>
+          </a:prstGeom>
+          <a:noFill xmlns:a="http://schemas.openxmlformats.org/drawingml/2006/main"/>
+          <a:ln xmlns:a="http://schemas.openxmlformats.org/drawingml/2006/main" w="0">
+            <a:noFill/>
+          </a:ln>
+        </p:spPr>
+        <p:txBody>
+          <a:bodyPr xmlns:a="http://schemas.openxmlformats.org/drawingml/2006/main" lIns="0" tIns="0" rIns="0" bIns="0" anchor="t">
+            <a:normAutofit fontScale="100000"/>
+          </a:bodyPr>
+          <a:lstStyle xmlns:a="http://schemas.openxmlformats.org/drawingml/2006/main"/>
+          <a:p xmlns:a="http://schemas.openxmlformats.org/drawingml/2006/main">
+            <a:pPr algn="l">
+              <a:lnSpc>
+                <a:spcPct val="108000"/>
+              </a:lnSpc>
+              <a:buNone/>
+              <a:defRPr sz="1500" b="1">
+                <a:solidFill>
+                  <a:srgbClr val="1F7A8C"/>
+                </a:solidFill>
+                <a:latin typeface="Arial"/>
+                <a:ea typeface="Arial"/>
+                <a:cs typeface="Arial"/>
+              </a:defRPr>
+            </a:pPr>
+            <a:r>
+              <a:rPr sz="1500" b="1">
+                <a:solidFill>
+                  <a:srgbClr val="1F7A8C"/>
+                </a:solidFill>
+                <a:latin typeface="Arial"/>
+                <a:ea typeface="Arial"/>
+                <a:cs typeface="Arial"/>
+              </a:rPr>
+              <a:t>Kết quả chính</a:t>
+            </a:r>
+          </a:p>
+        </p:txBody>
+      </p:sp>
+      <p:sp>
+        <p:nvSpPr>
+          <p:cNvPr id="6" name="">
+            <a:extLst xmlns:a="http://schemas.openxmlformats.org/drawingml/2006/main">
+              <a:ext uri="{FF2B5EF4-FFF2-40B4-BE49-F238E27FC236}">
+                <a16:creationId xmlns:a16="http://schemas.microsoft.com/office/drawing/2014/main" id="{EC55127C-CFC4-4B0D-AA75-EDBE546144B5}"/>
+              </a:ext>
+            </a:extLst>
+          </p:cNvPr>
+          <p:cNvSpPr>
+            <a:spLocks xmlns:a="http://schemas.openxmlformats.org/drawingml/2006/main" noGrp="1"/>
+          </p:cNvSpPr>
+          <p:nvPr/>
+        </p:nvSpPr>
+        <p:spPr>
+          <a:xfrm xmlns:a="http://schemas.openxmlformats.org/drawingml/2006/main">
+            <a:off x="714375" y="2000250"/>
+            <a:ext cx="10477500" cy="952500"/>
+          </a:xfrm>
+          <a:prstGeom xmlns:a="http://schemas.openxmlformats.org/drawingml/2006/main" prst="rect">
+            <a:avLst/>
+          </a:prstGeom>
+          <a:noFill xmlns:a="http://schemas.openxmlformats.org/drawingml/2006/main"/>
+          <a:ln xmlns:a="http://schemas.openxmlformats.org/drawingml/2006/main" w="0">
+            <a:noFill/>
+          </a:ln>
+        </p:spPr>
+        <p:txBody>
+          <a:bodyPr xmlns:a="http://schemas.openxmlformats.org/drawingml/2006/main" lIns="0" tIns="0" rIns="0" bIns="0" anchor="t">
+            <a:normAutofit fontScale="100000"/>
+          </a:bodyPr>
+          <a:lstStyle xmlns:a="http://schemas.openxmlformats.org/drawingml/2006/main"/>
+          <a:p xmlns:a="http://schemas.openxmlformats.org/drawingml/2006/main">
+            <a:pPr algn="l">
+              <a:lnSpc>
+                <a:spcPct val="108000"/>
+              </a:lnSpc>
+              <a:buNone/>
+              <a:defRPr sz="1725" b="0">
+                <a:solidFill>
+                  <a:srgbClr val="16202A"/>
+                </a:solidFill>
+                <a:latin typeface="Arial"/>
+                <a:ea typeface="Arial"/>
+                <a:cs typeface="Arial"/>
+              </a:defRPr>
+            </a:pPr>
+            <a:r>
+              <a:rPr sz="1725" b="0">
+                <a:solidFill>
+                  <a:srgbClr val="16202A"/>
+                </a:solidFill>
+                <a:latin typeface="Arial"/>
+                <a:ea typeface="Arial"/>
+                <a:cs typeface="Arial"/>
+              </a:rPr>
+              <a:t>HistGradientBoosting đạt MAE 15,3490 cycles trên 100 test engines; CI 95% [12,7286; 18,0866].</a:t>
+            </a:r>
+          </a:p>
+        </p:txBody>
+      </p:sp>
+      <p:sp>
+        <p:nvSpPr>
+          <p:cNvPr id="7" name="">
+            <a:extLst xmlns:a="http://schemas.openxmlformats.org/drawingml/2006/main">
+              <a:ext uri="{FF2B5EF4-FFF2-40B4-BE49-F238E27FC236}">
+                <a16:creationId xmlns:a16="http://schemas.microsoft.com/office/drawing/2014/main" id="{653970EE-1659-4F02-BFBC-75A477C76F45}"/>
+              </a:ext>
+            </a:extLst>
+          </p:cNvPr>
+          <p:cNvSpPr>
+            <a:spLocks xmlns:a="http://schemas.openxmlformats.org/drawingml/2006/main" noGrp="1"/>
+          </p:cNvSpPr>
+          <p:nvPr/>
+        </p:nvSpPr>
+        <p:spPr>
+          <a:xfrm xmlns:a="http://schemas.openxmlformats.org/drawingml/2006/main">
+            <a:off x="714375" y="3143250"/>
+            <a:ext cx="10477500" cy="304800"/>
+          </a:xfrm>
+          <a:prstGeom xmlns:a="http://schemas.openxmlformats.org/drawingml/2006/main" prst="rect">
+            <a:avLst/>
+          </a:prstGeom>
+          <a:noFill xmlns:a="http://schemas.openxmlformats.org/drawingml/2006/main"/>
+          <a:ln xmlns:a="http://schemas.openxmlformats.org/drawingml/2006/main" w="0">
+            <a:noFill/>
+          </a:ln>
+        </p:spPr>
+        <p:txBody>
+          <a:bodyPr xmlns:a="http://schemas.openxmlformats.org/drawingml/2006/main" lIns="0" tIns="0" rIns="0" bIns="0" anchor="t">
+            <a:normAutofit fontScale="100000"/>
+          </a:bodyPr>
+          <a:lstStyle xmlns:a="http://schemas.openxmlformats.org/drawingml/2006/main"/>
+          <a:p xmlns:a="http://schemas.openxmlformats.org/drawingml/2006/main">
+            <a:pPr algn="l">
+              <a:lnSpc>
+                <a:spcPct val="108000"/>
+              </a:lnSpc>
+              <a:buNone/>
+              <a:defRPr sz="1500" b="1">
+                <a:solidFill>
+                  <a:srgbClr val="1F7A8C"/>
+                </a:solidFill>
+                <a:latin typeface="Arial"/>
+                <a:ea typeface="Arial"/>
+                <a:cs typeface="Arial"/>
+              </a:defRPr>
+            </a:pPr>
+            <a:r>
+              <a:rPr sz="1500" b="1">
+                <a:solidFill>
+                  <a:srgbClr val="1F7A8C"/>
+                </a:solidFill>
+                <a:latin typeface="Arial"/>
+                <a:ea typeface="Arial"/>
+                <a:cs typeface="Arial"/>
+              </a:rPr>
+              <a:t>Giới hạn cần nhớ</a:t>
+            </a:r>
+          </a:p>
+        </p:txBody>
+      </p:sp>
+      <p:sp>
+        <p:nvSpPr>
+          <p:cNvPr id="8" name="">
+            <a:extLst xmlns:a="http://schemas.openxmlformats.org/drawingml/2006/main">
+              <a:ext uri="{FF2B5EF4-FFF2-40B4-BE49-F238E27FC236}">
+                <a16:creationId xmlns:a16="http://schemas.microsoft.com/office/drawing/2014/main" id="{76F83EF9-4987-4C1C-8CAA-7330395B3F47}"/>
+              </a:ext>
+            </a:extLst>
+          </p:cNvPr>
+          <p:cNvSpPr>
+            <a:spLocks xmlns:a="http://schemas.openxmlformats.org/drawingml/2006/main" noGrp="1"/>
+          </p:cNvSpPr>
+          <p:nvPr/>
+        </p:nvSpPr>
+        <p:spPr>
+          <a:xfrm xmlns:a="http://schemas.openxmlformats.org/drawingml/2006/main">
+            <a:off x="714375" y="3524250"/>
+            <a:ext cx="10477500" cy="1190625"/>
+          </a:xfrm>
+          <a:prstGeom xmlns:a="http://schemas.openxmlformats.org/drawingml/2006/main" prst="rect">
+            <a:avLst/>
+          </a:prstGeom>
+          <a:noFill xmlns:a="http://schemas.openxmlformats.org/drawingml/2006/main"/>
+          <a:ln xmlns:a="http://schemas.openxmlformats.org/drawingml/2006/main" w="0">
+            <a:noFill/>
+          </a:ln>
+        </p:spPr>
+        <p:txBody>
+          <a:bodyPr xmlns:a="http://schemas.openxmlformats.org/drawingml/2006/main" lIns="0" tIns="0" rIns="0" bIns="0" anchor="t">
+            <a:normAutofit fontScale="100000"/>
+          </a:bodyPr>
+          <a:lstStyle xmlns:a="http://schemas.openxmlformats.org/drawingml/2006/main"/>
+          <a:p xmlns:a="http://schemas.openxmlformats.org/drawingml/2006/main">
+            <a:pPr algn="l">
+              <a:lnSpc>
+                <a:spcPct val="108000"/>
+              </a:lnSpc>
+              <a:buNone/>
+              <a:defRPr sz="1725" b="0">
+                <a:solidFill>
+                  <a:srgbClr val="16202A"/>
+                </a:solidFill>
+                <a:latin typeface="Arial"/>
+                <a:ea typeface="Arial"/>
+                <a:cs typeface="Arial"/>
+              </a:defRPr>
+            </a:pPr>
+            <a:r>
+              <a:rPr sz="1725" b="0">
+                <a:solidFill>
+                  <a:srgbClr val="16202A"/>
+                </a:solidFill>
+                <a:latin typeface="Arial"/>
+                <a:ea typeface="Arial"/>
+                <a:cs typeface="Arial"/>
+              </a:rPr>
+              <a:t>Kết quả chính FD001 dùng window 30; ma trận transfer dùng window 10. Test chỉ đánh giá một điểm cắt mỗi engine. Đợt nested CV bổ sung chưa cải thiện các tiêu chí đã chốt.</a:t>
+            </a:r>
+          </a:p>
+        </p:txBody>
+      </p:sp>
+      <p:sp>
+        <p:nvSpPr>
+          <p:cNvPr id="9" name="">
+            <a:extLst xmlns:a="http://schemas.openxmlformats.org/drawingml/2006/main">
+              <a:ext uri="{FF2B5EF4-FFF2-40B4-BE49-F238E27FC236}">
+                <a16:creationId xmlns:a16="http://schemas.microsoft.com/office/drawing/2014/main" id="{7C24A1F4-E6E3-413F-94FB-2E76A93B71D0}"/>
+              </a:ext>
+            </a:extLst>
+          </p:cNvPr>
+          <p:cNvSpPr>
+            <a:spLocks xmlns:a="http://schemas.openxmlformats.org/drawingml/2006/main" noGrp="1"/>
+          </p:cNvSpPr>
+          <p:nvPr/>
+        </p:nvSpPr>
+        <p:spPr>
+          <a:xfrm xmlns:a="http://schemas.openxmlformats.org/drawingml/2006/main">
+            <a:off x="714375" y="4905375"/>
+            <a:ext cx="10477500" cy="304800"/>
+          </a:xfrm>
+          <a:prstGeom xmlns:a="http://schemas.openxmlformats.org/drawingml/2006/main" prst="rect">
+            <a:avLst/>
+          </a:prstGeom>
+          <a:noFill xmlns:a="http://schemas.openxmlformats.org/drawingml/2006/main"/>
+          <a:ln xmlns:a="http://schemas.openxmlformats.org/drawingml/2006/main" w="0">
+            <a:noFill/>
+          </a:ln>
+        </p:spPr>
+        <p:txBody>
+          <a:bodyPr xmlns:a="http://schemas.openxmlformats.org/drawingml/2006/main" lIns="0" tIns="0" rIns="0" bIns="0" anchor="t">
+            <a:normAutofit fontScale="100000"/>
+          </a:bodyPr>
+          <a:lstStyle xmlns:a="http://schemas.openxmlformats.org/drawingml/2006/main"/>
+          <a:p xmlns:a="http://schemas.openxmlformats.org/drawingml/2006/main">
+            <a:pPr algn="l">
+              <a:lnSpc>
+                <a:spcPct val="108000"/>
+              </a:lnSpc>
+              <a:buNone/>
+              <a:defRPr sz="1500" b="1">
+                <a:solidFill>
+                  <a:srgbClr val="1F7A8C"/>
+                </a:solidFill>
+                <a:latin typeface="Arial"/>
+                <a:ea typeface="Arial"/>
+                <a:cs typeface="Arial"/>
+              </a:defRPr>
+            </a:pPr>
+            <a:r>
+              <a:rPr sz="1500" b="1">
+                <a:solidFill>
+                  <a:srgbClr val="1F7A8C"/>
+                </a:solidFill>
+                <a:latin typeface="Arial"/>
+                <a:ea typeface="Arial"/>
+                <a:cs typeface="Arial"/>
+              </a:rPr>
+              <a:t>Bước nghiên cứu tiếp</a:t>
+            </a:r>
+          </a:p>
+        </p:txBody>
+      </p:sp>
+      <p:sp>
+        <p:nvSpPr>
+          <p:cNvPr id="10" name="">
+            <a:extLst xmlns:a="http://schemas.openxmlformats.org/drawingml/2006/main">
+              <a:ext uri="{FF2B5EF4-FFF2-40B4-BE49-F238E27FC236}">
+                <a16:creationId xmlns:a16="http://schemas.microsoft.com/office/drawing/2014/main" id="{173E1E94-CA9A-41C9-8BAD-CB1D75F4D4F1}"/>
+              </a:ext>
+            </a:extLst>
+          </p:cNvPr>
+          <p:cNvSpPr>
+            <a:spLocks xmlns:a="http://schemas.openxmlformats.org/drawingml/2006/main" noGrp="1"/>
+          </p:cNvSpPr>
+          <p:nvPr/>
+        </p:nvSpPr>
+        <p:spPr>
+          <a:xfrm xmlns:a="http://schemas.openxmlformats.org/drawingml/2006/main">
+            <a:off x="714375" y="5286375"/>
+            <a:ext cx="10477500" cy="904875"/>
+          </a:xfrm>
+          <a:prstGeom xmlns:a="http://schemas.openxmlformats.org/drawingml/2006/main" prst="rect">
+            <a:avLst/>
+          </a:prstGeom>
+          <a:noFill xmlns:a="http://schemas.openxmlformats.org/drawingml/2006/main"/>
+          <a:ln xmlns:a="http://schemas.openxmlformats.org/drawingml/2006/main" w="0">
+            <a:noFill/>
+          </a:ln>
+        </p:spPr>
+        <p:txBody>
+          <a:bodyPr xmlns:a="http://schemas.openxmlformats.org/drawingml/2006/main" lIns="0" tIns="0" rIns="0" bIns="0" anchor="t">
+            <a:normAutofit fontScale="100000"/>
+          </a:bodyPr>
+          <a:lstStyle xmlns:a="http://schemas.openxmlformats.org/drawingml/2006/main"/>
+          <a:p xmlns:a="http://schemas.openxmlformats.org/drawingml/2006/main">
+            <a:pPr algn="l">
+              <a:lnSpc>
+                <a:spcPct val="108000"/>
+              </a:lnSpc>
+              <a:buNone/>
+              <a:defRPr sz="1725" b="0">
+                <a:solidFill>
+                  <a:srgbClr val="16202A"/>
+                </a:solidFill>
+                <a:latin typeface="Arial"/>
+                <a:ea typeface="Arial"/>
+                <a:cs typeface="Arial"/>
+              </a:defRPr>
+            </a:pPr>
+            <a:r>
+              <a:rPr sz="1725" b="0">
+                <a:solidFill>
+                  <a:srgbClr val="16202A"/>
+                </a:solidFill>
+                <a:latin typeface="Arial"/>
+                <a:ea typeface="Arial"/>
+                <a:cs typeface="Arial"/>
+              </a:rPr>
+              <a:t>Chốt mức đánh đổi cho vùng RUL thấp, thử đặc trưng mới trong training fold, rồi đánh giá bằng protocol mới đã công bố trước.</a:t>
+            </a:r>
+          </a:p>
+        </p:txBody>
+      </p:sp>
+    </p:spTree>
+    <p:extLst>
+      <p:ext uri="{BB962C8B-B14F-4D97-AF65-F5344CB8AC3E}">
+        <p14:creationId xmlns:p14="http://schemas.microsoft.com/office/powerpoint/2010/main" val="1067971343"/>
+      </p:ext>
+    </p:extLst>
+  </p:cSld>
+</p:sld>
+</file>
+
+<file path=ppt/slides/slide18.xml><?xml version="1.0" encoding="utf-8"?>
+<p:sld xmlns:p="http://schemas.openxmlformats.org/presentationml/2006/main">
+  <p:cSld>
+    <p:bg>
+      <p:bgPr>
+        <a:solidFill xmlns:a="http://schemas.openxmlformats.org/drawingml/2006/main">
+          <a:srgbClr val="FFFFFF"/>
+        </a:solidFill>
+      </p:bgPr>
+    </p:bg>
+    <p:spTree>
+      <p:nvGrpSpPr>
+        <p:cNvPr id="1" name=""/>
+        <p:cNvGrpSpPr/>
+        <p:nvPr/>
+      </p:nvGrpSpPr>
+      <p:grpSpPr>
+        <a:xfrm xmlns:a="http://schemas.openxmlformats.org/drawingml/2006/main"/>
+      </p:grpSpPr>
+      <p:sp>
+        <p:nvSpPr>
+          <p:cNvPr id="8" name="">
+            <a:extLst xmlns:a="http://schemas.openxmlformats.org/drawingml/2006/main">
+              <a:ext uri="{FF2B5EF4-FFF2-40B4-BE49-F238E27FC236}">
+                <a16:creationId xmlns:a16="http://schemas.microsoft.com/office/drawing/2014/main" id="{B4FFD5B0-FC5A-4C16-B698-FC3FC6CCC76A}"/>
+              </a:ext>
+            </a:extLst>
+          </p:cNvPr>
+          <p:cNvSpPr>
+            <a:spLocks xmlns:a="http://schemas.openxmlformats.org/drawingml/2006/main" noGrp="1"/>
+          </p:cNvSpPr>
+          <p:nvPr/>
+        </p:nvSpPr>
+        <p:spPr>
+          <a:xfrm xmlns:a="http://schemas.openxmlformats.org/drawingml/2006/main">
+            <a:off x="609600" y="361950"/>
+            <a:ext cx="10953750" cy="495300"/>
+          </a:xfrm>
+          <a:prstGeom xmlns:a="http://schemas.openxmlformats.org/drawingml/2006/main" prst="rect">
+            <a:avLst/>
+          </a:prstGeom>
+          <a:noFill xmlns:a="http://schemas.openxmlformats.org/drawingml/2006/main"/>
+          <a:ln xmlns:a="http://schemas.openxmlformats.org/drawingml/2006/main" w="0">
+            <a:noFill/>
+          </a:ln>
+        </p:spPr>
+        <p:txBody>
+          <a:bodyPr xmlns:a="http://schemas.openxmlformats.org/drawingml/2006/main" lIns="0" tIns="0" rIns="0" bIns="0" anchor="t">
+            <a:normAutofit fontScale="100000"/>
+          </a:bodyPr>
+          <a:lstStyle xmlns:a="http://schemas.openxmlformats.org/drawingml/2006/main"/>
+          <a:p xmlns:a="http://schemas.openxmlformats.org/drawingml/2006/main">
+            <a:pPr algn="l">
+              <a:lnSpc>
+                <a:spcPct val="108000"/>
+              </a:lnSpc>
+              <a:buNone/>
+              <a:defRPr sz="2550" b="1">
+                <a:solidFill>
+                  <a:srgbClr val="0F243E"/>
+                </a:solidFill>
+                <a:latin typeface="Arial"/>
+                <a:ea typeface="Arial"/>
+                <a:cs typeface="Arial"/>
+              </a:defRPr>
+            </a:pPr>
+            <a:r>
+              <a:rPr sz="2550" b="1">
+                <a:solidFill>
+                  <a:srgbClr val="0F243E"/>
+                </a:solidFill>
+                <a:latin typeface="Arial"/>
+                <a:ea typeface="Arial"/>
+                <a:cs typeface="Arial"/>
+              </a:rPr>
+              <a:t>Transfer giữa các subset C-MAPSS</a:t>
+            </a:r>
+          </a:p>
+        </p:txBody>
+      </p:sp>
+      <p:sp>
+        <p:nvSpPr>
+          <p:cNvPr id="2" name="">
+            <a:extLst xmlns:a="http://schemas.openxmlformats.org/drawingml/2006/main">
+              <a:ext uri="{FF2B5EF4-FFF2-40B4-BE49-F238E27FC236}">
+                <a16:creationId xmlns:a16="http://schemas.microsoft.com/office/drawing/2014/main" id="{05C2E80A-6720-4E45-B089-FCCBA1AAE482}"/>
+              </a:ext>
+            </a:extLst>
+          </p:cNvPr>
+          <p:cNvSpPr>
+            <a:spLocks xmlns:a="http://schemas.openxmlformats.org/drawingml/2006/main" noGrp="1"/>
+          </p:cNvSpPr>
+          <p:nvPr/>
+        </p:nvSpPr>
+        <p:spPr>
+          <a:xfrm xmlns:a="http://schemas.openxmlformats.org/drawingml/2006/main">
+            <a:off x="628650" y="914400"/>
+            <a:ext cx="10858500" cy="333375"/>
+          </a:xfrm>
+          <a:prstGeom xmlns:a="http://schemas.openxmlformats.org/drawingml/2006/main" prst="rect">
+            <a:avLst/>
+          </a:prstGeom>
+          <a:noFill xmlns:a="http://schemas.openxmlformats.org/drawingml/2006/main"/>
+          <a:ln xmlns:a="http://schemas.openxmlformats.org/drawingml/2006/main" w="0">
+            <a:noFill/>
+          </a:ln>
+        </p:spPr>
+        <p:txBody>
+          <a:bodyPr xmlns:a="http://schemas.openxmlformats.org/drawingml/2006/main" lIns="0" tIns="0" rIns="0" bIns="0" anchor="t">
+            <a:normAutofit fontScale="100000"/>
+          </a:bodyPr>
+          <a:lstStyle xmlns:a="http://schemas.openxmlformats.org/drawingml/2006/main"/>
+          <a:p xmlns:a="http://schemas.openxmlformats.org/drawingml/2006/main">
+            <a:pPr algn="l">
+              <a:lnSpc>
+                <a:spcPct val="108000"/>
+              </a:lnSpc>
+              <a:buNone/>
+              <a:defRPr sz="1425" b="0">
+                <a:solidFill>
+                  <a:srgbClr val="52606D"/>
+                </a:solidFill>
+                <a:latin typeface="Arial"/>
+                <a:ea typeface="Arial"/>
+                <a:cs typeface="Arial"/>
+              </a:defRPr>
+            </a:pPr>
+            <a:r>
+              <a:rPr sz="1425" b="0">
+                <a:solidFill>
+                  <a:srgbClr val="52606D"/>
+                </a:solidFill>
+                <a:latin typeface="Arial"/>
+                <a:ea typeface="Arial"/>
+                <a:cs typeface="Arial"/>
+              </a:rPr>
+              <a:t>Window 10 cho phép giữ đủ test engines trong FD001–FD004</a:t>
+            </a:r>
+          </a:p>
+        </p:txBody>
+      </p:sp>
+      <p:sp>
+        <p:nvSpPr>
+          <p:cNvPr id="3" name="">
+            <a:extLst xmlns:a="http://schemas.openxmlformats.org/drawingml/2006/main">
+              <a:ext uri="{FF2B5EF4-FFF2-40B4-BE49-F238E27FC236}">
+                <a16:creationId xmlns:a16="http://schemas.microsoft.com/office/drawing/2014/main" id="{40BC05FE-59E6-44E6-9E89-FBD66F4D7A7B}"/>
+              </a:ext>
+            </a:extLst>
+          </p:cNvPr>
+          <p:cNvSpPr>
+            <a:spLocks xmlns:a="http://schemas.openxmlformats.org/drawingml/2006/main" noGrp="1"/>
+          </p:cNvSpPr>
+          <p:nvPr/>
+        </p:nvSpPr>
+        <p:spPr>
+          <a:xfrm xmlns:a="http://schemas.openxmlformats.org/drawingml/2006/main">
+            <a:off x="609600" y="6248400"/>
+            <a:ext cx="10287000" cy="285750"/>
+          </a:xfrm>
+          <a:prstGeom xmlns:a="http://schemas.openxmlformats.org/drawingml/2006/main" prst="rect">
+            <a:avLst/>
+          </a:prstGeom>
+          <a:noFill xmlns:a="http://schemas.openxmlformats.org/drawingml/2006/main"/>
+          <a:ln xmlns:a="http://schemas.openxmlformats.org/drawingml/2006/main" w="0">
+            <a:noFill/>
+          </a:ln>
+        </p:spPr>
+        <p:txBody>
+          <a:bodyPr xmlns:a="http://schemas.openxmlformats.org/drawingml/2006/main" lIns="0" tIns="0" rIns="0" bIns="0" anchor="t">
+            <a:normAutofit fontScale="100000"/>
+          </a:bodyPr>
+          <a:lstStyle xmlns:a="http://schemas.openxmlformats.org/drawingml/2006/main"/>
+          <a:p xmlns:a="http://schemas.openxmlformats.org/drawingml/2006/main">
+            <a:pPr algn="l">
+              <a:lnSpc>
+                <a:spcPct val="108000"/>
+              </a:lnSpc>
+              <a:buNone/>
+              <a:defRPr sz="900" b="0">
+                <a:solidFill>
+                  <a:srgbClr val="52606D"/>
+                </a:solidFill>
+                <a:latin typeface="Arial"/>
+                <a:ea typeface="Arial"/>
+                <a:cs typeface="Arial"/>
+              </a:defRPr>
+            </a:pPr>
+            <a:r>
+              <a:rPr sz="900" b="0">
+                <a:solidFill>
+                  <a:srgbClr val="52606D"/>
+                </a:solidFill>
+                <a:latin typeface="Arial"/>
+                <a:ea typeface="Arial"/>
+                <a:cs typeface="Arial"/>
+              </a:rPr>
+              <a:t>Nguồn: outputs/cross_dataset/matrix.json; outputs/cross_dataset/README.md</a:t>
+            </a:r>
+          </a:p>
+        </p:txBody>
+      </p:sp>
+      <p:sp>
+        <p:nvSpPr>
+          <p:cNvPr id="4" name="">
+            <a:extLst xmlns:a="http://schemas.openxmlformats.org/drawingml/2006/main">
+              <a:ext uri="{FF2B5EF4-FFF2-40B4-BE49-F238E27FC236}">
+                <a16:creationId xmlns:a16="http://schemas.microsoft.com/office/drawing/2014/main" id="{796323EF-344A-43AF-9649-CF11804C2B71}"/>
+              </a:ext>
+            </a:extLst>
+          </p:cNvPr>
+          <p:cNvSpPr>
+            <a:spLocks xmlns:a="http://schemas.openxmlformats.org/drawingml/2006/main" noGrp="1"/>
+          </p:cNvSpPr>
+          <p:nvPr/>
+        </p:nvSpPr>
+        <p:spPr>
+          <a:xfrm xmlns:a="http://schemas.openxmlformats.org/drawingml/2006/main">
+            <a:off x="11096625" y="6391275"/>
+            <a:ext cx="476250" cy="238125"/>
+          </a:xfrm>
+          <a:prstGeom xmlns:a="http://schemas.openxmlformats.org/drawingml/2006/main" prst="rect">
+            <a:avLst/>
+          </a:prstGeom>
+          <a:noFill xmlns:a="http://schemas.openxmlformats.org/drawingml/2006/main"/>
+          <a:ln xmlns:a="http://schemas.openxmlformats.org/drawingml/2006/main" w="0">
+            <a:noFill/>
+          </a:ln>
+        </p:spPr>
+        <p:txBody>
+          <a:bodyPr xmlns:a="http://schemas.openxmlformats.org/drawingml/2006/main" lIns="0" tIns="0" rIns="0" bIns="0" anchor="t">
+            <a:normAutofit fontScale="100000"/>
+          </a:bodyPr>
+          <a:lstStyle xmlns:a="http://schemas.openxmlformats.org/drawingml/2006/main"/>
+          <a:p xmlns:a="http://schemas.openxmlformats.org/drawingml/2006/main">
+            <a:pPr algn="r">
+              <a:lnSpc>
+                <a:spcPct val="108000"/>
+              </a:lnSpc>
+              <a:buNone/>
+              <a:defRPr sz="1050" b="1">
+                <a:solidFill>
+                  <a:srgbClr val="52606D"/>
+                </a:solidFill>
+                <a:latin typeface="Arial"/>
+                <a:ea typeface="Arial"/>
+                <a:cs typeface="Arial"/>
+              </a:defRPr>
+            </a:pPr>
+            <a:r>
+              <a:rPr sz="1050" b="1">
+                <a:solidFill>
+                  <a:srgbClr val="52606D"/>
+                </a:solidFill>
+                <a:latin typeface="Arial"/>
+                <a:ea typeface="Arial"/>
+                <a:cs typeface="Arial"/>
+              </a:rPr>
+              <a:t>18</a:t>
             </a:r>
           </a:p>
         </p:txBody>
@@ -6446,7 +8967,7 @@
           <p:cNvPr id="6" name="">
             <a:extLst xmlns:a="http://schemas.openxmlformats.org/drawingml/2006/main">
               <a:ext uri="{FF2B5EF4-FFF2-40B4-BE49-F238E27FC236}">
-                <a16:creationId xmlns:a16="http://schemas.microsoft.com/office/drawing/2014/main" id="{1C635397-6341-4BA3-8E2F-395FE1488502}"/>
+                <a16:creationId xmlns:a16="http://schemas.microsoft.com/office/drawing/2014/main" id="{4864DE71-7875-4CF9-863B-BA5B52F6F6B3}"/>
               </a:ext>
             </a:extLst>
           </p:cNvPr>
@@ -6507,7 +9028,7 @@
           <p:cNvPr id="7" name="">
             <a:extLst xmlns:a="http://schemas.openxmlformats.org/drawingml/2006/main">
               <a:ext uri="{FF2B5EF4-FFF2-40B4-BE49-F238E27FC236}">
-                <a16:creationId xmlns:a16="http://schemas.microsoft.com/office/drawing/2014/main" id="{3E041642-F391-4432-B54E-D9176B6265B4}"/>
+                <a16:creationId xmlns:a16="http://schemas.microsoft.com/office/drawing/2014/main" id="{520178CD-CACA-4C48-90CF-07ACD6C5182C}"/>
               </a:ext>
             </a:extLst>
           </p:cNvPr>
@@ -6566,7 +9087,7 @@
     </p:spTree>
     <p:extLst>
       <p:ext uri="{BB962C8B-B14F-4D97-AF65-F5344CB8AC3E}">
-        <p14:creationId xmlns:p14="http://schemas.microsoft.com/office/powerpoint/2010/main" val="1439848869"/>
+        <p14:creationId xmlns:p14="http://schemas.microsoft.com/office/powerpoint/2010/main" val="429167047"/>
       </p:ext>
     </p:extLst>
   </p:cSld>
@@ -6597,7 +9118,7 @@
           <p:cNvPr id="11" name="">
             <a:extLst xmlns:a="http://schemas.openxmlformats.org/drawingml/2006/main">
               <a:ext uri="{FF2B5EF4-FFF2-40B4-BE49-F238E27FC236}">
-                <a16:creationId xmlns:a16="http://schemas.microsoft.com/office/drawing/2014/main" id="{A9C4FDF0-9279-4ECB-A371-0F1AA45A9A49}"/>
+                <a16:creationId xmlns:a16="http://schemas.microsoft.com/office/drawing/2014/main" id="{0C13A50A-D47C-41A7-845F-29B08513C4A0}"/>
               </a:ext>
             </a:extLst>
           </p:cNvPr>
@@ -6658,7 +9179,7 @@
           <p:cNvPr id="2" name="">
             <a:extLst xmlns:a="http://schemas.openxmlformats.org/drawingml/2006/main">
               <a:ext uri="{FF2B5EF4-FFF2-40B4-BE49-F238E27FC236}">
-                <a16:creationId xmlns:a16="http://schemas.microsoft.com/office/drawing/2014/main" id="{B61716AB-362C-45AE-8796-B58DF26F0A40}"/>
+                <a16:creationId xmlns:a16="http://schemas.microsoft.com/office/drawing/2014/main" id="{E37B7722-6877-49FB-B4B4-E30F6C2BAE24}"/>
               </a:ext>
             </a:extLst>
           </p:cNvPr>
@@ -6719,7 +9240,7 @@
           <p:cNvPr id="3" name="">
             <a:extLst xmlns:a="http://schemas.openxmlformats.org/drawingml/2006/main">
               <a:ext uri="{FF2B5EF4-FFF2-40B4-BE49-F238E27FC236}">
-                <a16:creationId xmlns:a16="http://schemas.microsoft.com/office/drawing/2014/main" id="{756085EA-F839-430E-AB46-9A63708C56BC}"/>
+                <a16:creationId xmlns:a16="http://schemas.microsoft.com/office/drawing/2014/main" id="{9C0FE028-CBEB-4676-B49B-004AC9F140C2}"/>
               </a:ext>
             </a:extLst>
           </p:cNvPr>
@@ -6780,7 +9301,7 @@
           <p:cNvPr id="4" name="">
             <a:extLst xmlns:a="http://schemas.openxmlformats.org/drawingml/2006/main">
               <a:ext uri="{FF2B5EF4-FFF2-40B4-BE49-F238E27FC236}">
-                <a16:creationId xmlns:a16="http://schemas.microsoft.com/office/drawing/2014/main" id="{CBA50FFD-AC04-4237-A751-E5A9A1A452F2}"/>
+                <a16:creationId xmlns:a16="http://schemas.microsoft.com/office/drawing/2014/main" id="{8411D093-FE7E-4CE2-B146-E28306519CB7}"/>
               </a:ext>
             </a:extLst>
           </p:cNvPr>
@@ -6841,7 +9362,7 @@
           <p:cNvPr id="5" name="">
             <a:extLst xmlns:a="http://schemas.openxmlformats.org/drawingml/2006/main">
               <a:ext uri="{FF2B5EF4-FFF2-40B4-BE49-F238E27FC236}">
-                <a16:creationId xmlns:a16="http://schemas.microsoft.com/office/drawing/2014/main" id="{9D47D0E5-2F79-4E44-A891-17C4DE4A1301}"/>
+                <a16:creationId xmlns:a16="http://schemas.microsoft.com/office/drawing/2014/main" id="{0A4D98CB-B6F1-4F22-BEFE-E2C8826055F9}"/>
               </a:ext>
             </a:extLst>
           </p:cNvPr>
@@ -6902,7 +9423,7 @@
           <p:cNvPr id="6" name="">
             <a:extLst xmlns:a="http://schemas.openxmlformats.org/drawingml/2006/main">
               <a:ext uri="{FF2B5EF4-FFF2-40B4-BE49-F238E27FC236}">
-                <a16:creationId xmlns:a16="http://schemas.microsoft.com/office/drawing/2014/main" id="{6C7164A7-43ED-4D0A-A482-17E145CC49AD}"/>
+                <a16:creationId xmlns:a16="http://schemas.microsoft.com/office/drawing/2014/main" id="{E46BBF7F-B03C-4070-BEE2-E151454091B1}"/>
               </a:ext>
             </a:extLst>
           </p:cNvPr>
@@ -6963,7 +9484,7 @@
           <p:cNvPr id="7" name="">
             <a:extLst xmlns:a="http://schemas.openxmlformats.org/drawingml/2006/main">
               <a:ext uri="{FF2B5EF4-FFF2-40B4-BE49-F238E27FC236}">
-                <a16:creationId xmlns:a16="http://schemas.microsoft.com/office/drawing/2014/main" id="{10897DDD-72E1-488B-8B0E-D9D523068338}"/>
+                <a16:creationId xmlns:a16="http://schemas.microsoft.com/office/drawing/2014/main" id="{C656E694-DFE8-43AC-8A74-BE241EC39633}"/>
               </a:ext>
             </a:extLst>
           </p:cNvPr>
@@ -7024,7 +9545,7 @@
           <p:cNvPr id="8" name="">
             <a:extLst xmlns:a="http://schemas.openxmlformats.org/drawingml/2006/main">
               <a:ext uri="{FF2B5EF4-FFF2-40B4-BE49-F238E27FC236}">
-                <a16:creationId xmlns:a16="http://schemas.microsoft.com/office/drawing/2014/main" id="{CEC72960-3AAB-4F6D-9E5D-0518B97F1877}"/>
+                <a16:creationId xmlns:a16="http://schemas.microsoft.com/office/drawing/2014/main" id="{FF579DFC-F8D3-4670-8CD0-A6559439BCED}"/>
               </a:ext>
             </a:extLst>
           </p:cNvPr>
@@ -7085,7 +9606,7 @@
           <p:cNvPr id="9" name="">
             <a:extLst xmlns:a="http://schemas.openxmlformats.org/drawingml/2006/main">
               <a:ext uri="{FF2B5EF4-FFF2-40B4-BE49-F238E27FC236}">
-                <a16:creationId xmlns:a16="http://schemas.microsoft.com/office/drawing/2014/main" id="{1622549A-210B-4C71-B6CE-D14D38BE98A5}"/>
+                <a16:creationId xmlns:a16="http://schemas.microsoft.com/office/drawing/2014/main" id="{9989521F-ACCB-4F1E-B4A4-E8E6A31384B3}"/>
               </a:ext>
             </a:extLst>
           </p:cNvPr>
@@ -7146,7 +9667,7 @@
           <p:cNvPr id="10" name="">
             <a:extLst xmlns:a="http://schemas.openxmlformats.org/drawingml/2006/main">
               <a:ext uri="{FF2B5EF4-FFF2-40B4-BE49-F238E27FC236}">
-                <a16:creationId xmlns:a16="http://schemas.microsoft.com/office/drawing/2014/main" id="{E8AE8DC1-DE0E-4457-9CF5-F05C9C0371C9}"/>
+                <a16:creationId xmlns:a16="http://schemas.microsoft.com/office/drawing/2014/main" id="{148196E8-687A-4F0F-BDAF-C084EB6DA55F}"/>
               </a:ext>
             </a:extLst>
           </p:cNvPr>
@@ -7205,7 +9726,7 @@
     </p:spTree>
     <p:extLst>
       <p:ext uri="{BB962C8B-B14F-4D97-AF65-F5344CB8AC3E}">
-        <p14:creationId xmlns:p14="http://schemas.microsoft.com/office/powerpoint/2010/main" val="597405302"/>
+        <p14:creationId xmlns:p14="http://schemas.microsoft.com/office/powerpoint/2010/main" val="1285167433"/>
       </p:ext>
     </p:extLst>
   </p:cSld>
@@ -7236,7 +9757,7 @@
           <p:cNvPr id="8" name="">
             <a:extLst xmlns:a="http://schemas.openxmlformats.org/drawingml/2006/main">
               <a:ext uri="{FF2B5EF4-FFF2-40B4-BE49-F238E27FC236}">
-                <a16:creationId xmlns:a16="http://schemas.microsoft.com/office/drawing/2014/main" id="{69DFB66A-E7BE-4EF9-A2DE-9D5CA81DDA91}"/>
+                <a16:creationId xmlns:a16="http://schemas.microsoft.com/office/drawing/2014/main" id="{58BA8F71-A922-423C-85D7-D73E89FB174A}"/>
               </a:ext>
             </a:extLst>
           </p:cNvPr>
@@ -7297,7 +9818,7 @@
           <p:cNvPr id="2" name="">
             <a:extLst xmlns:a="http://schemas.openxmlformats.org/drawingml/2006/main">
               <a:ext uri="{FF2B5EF4-FFF2-40B4-BE49-F238E27FC236}">
-                <a16:creationId xmlns:a16="http://schemas.microsoft.com/office/drawing/2014/main" id="{CF07B2AA-B348-4C85-9552-CE61463D1BD7}"/>
+                <a16:creationId xmlns:a16="http://schemas.microsoft.com/office/drawing/2014/main" id="{82D4D4BE-689C-4696-A358-3DCC26D56316}"/>
               </a:ext>
             </a:extLst>
           </p:cNvPr>
@@ -7358,7 +9879,7 @@
           <p:cNvPr id="3" name="">
             <a:extLst xmlns:a="http://schemas.openxmlformats.org/drawingml/2006/main">
               <a:ext uri="{FF2B5EF4-FFF2-40B4-BE49-F238E27FC236}">
-                <a16:creationId xmlns:a16="http://schemas.microsoft.com/office/drawing/2014/main" id="{503D5ABD-EF39-434F-BB8F-81DDCA3FD040}"/>
+                <a16:creationId xmlns:a16="http://schemas.microsoft.com/office/drawing/2014/main" id="{3DB052B9-0DDC-4E63-B06F-E1D173BF96D4}"/>
               </a:ext>
             </a:extLst>
           </p:cNvPr>
@@ -7419,7 +9940,7 @@
           <p:cNvPr id="4" name="">
             <a:extLst xmlns:a="http://schemas.openxmlformats.org/drawingml/2006/main">
               <a:ext uri="{FF2B5EF4-FFF2-40B4-BE49-F238E27FC236}">
-                <a16:creationId xmlns:a16="http://schemas.microsoft.com/office/drawing/2014/main" id="{DB663E2B-4F54-4E27-B6AE-1312B5BE617D}"/>
+                <a16:creationId xmlns:a16="http://schemas.microsoft.com/office/drawing/2014/main" id="{6F2DE2EE-8785-4F73-9A03-BCAD10B7B3D5}"/>
               </a:ext>
             </a:extLst>
           </p:cNvPr>
@@ -7766,7 +10287,7 @@
           <p:cNvPr id="6" name="">
             <a:extLst xmlns:a="http://schemas.openxmlformats.org/drawingml/2006/main">
               <a:ext uri="{FF2B5EF4-FFF2-40B4-BE49-F238E27FC236}">
-                <a16:creationId xmlns:a16="http://schemas.microsoft.com/office/drawing/2014/main" id="{A1BAE9A4-0320-4C30-BB1A-C1FA65468EF3}"/>
+                <a16:creationId xmlns:a16="http://schemas.microsoft.com/office/drawing/2014/main" id="{8261D291-5364-40C2-B560-3238CF4E27EC}"/>
               </a:ext>
             </a:extLst>
           </p:cNvPr>
@@ -7827,7 +10348,7 @@
           <p:cNvPr id="7" name="">
             <a:extLst xmlns:a="http://schemas.openxmlformats.org/drawingml/2006/main">
               <a:ext uri="{FF2B5EF4-FFF2-40B4-BE49-F238E27FC236}">
-                <a16:creationId xmlns:a16="http://schemas.microsoft.com/office/drawing/2014/main" id="{AED3838C-0901-43E0-965B-F53FBFF61F3E}"/>
+                <a16:creationId xmlns:a16="http://schemas.microsoft.com/office/drawing/2014/main" id="{62CFE674-7886-4C2D-8A5D-B51660FA3B43}"/>
               </a:ext>
             </a:extLst>
           </p:cNvPr>
@@ -7886,7 +10407,7 @@
     </p:spTree>
     <p:extLst>
       <p:ext uri="{BB962C8B-B14F-4D97-AF65-F5344CB8AC3E}">
-        <p14:creationId xmlns:p14="http://schemas.microsoft.com/office/powerpoint/2010/main" val="976751183"/>
+        <p14:creationId xmlns:p14="http://schemas.microsoft.com/office/powerpoint/2010/main" val="1101579237"/>
       </p:ext>
     </p:extLst>
   </p:cSld>
@@ -7917,7 +10438,7 @@
           <p:cNvPr id="7" name="">
             <a:extLst xmlns:a="http://schemas.openxmlformats.org/drawingml/2006/main">
               <a:ext uri="{FF2B5EF4-FFF2-40B4-BE49-F238E27FC236}">
-                <a16:creationId xmlns:a16="http://schemas.microsoft.com/office/drawing/2014/main" id="{D9611D70-030D-4995-AE96-73815025C357}"/>
+                <a16:creationId xmlns:a16="http://schemas.microsoft.com/office/drawing/2014/main" id="{230F45D1-6A22-4189-88A8-137A629DAF7E}"/>
               </a:ext>
             </a:extLst>
           </p:cNvPr>
@@ -7978,7 +10499,7 @@
           <p:cNvPr id="2" name="">
             <a:extLst xmlns:a="http://schemas.openxmlformats.org/drawingml/2006/main">
               <a:ext uri="{FF2B5EF4-FFF2-40B4-BE49-F238E27FC236}">
-                <a16:creationId xmlns:a16="http://schemas.microsoft.com/office/drawing/2014/main" id="{4E1C7A2F-206C-46B1-90FA-1D8197F0E41C}"/>
+                <a16:creationId xmlns:a16="http://schemas.microsoft.com/office/drawing/2014/main" id="{CDBBD5EF-C747-45E2-A974-A618B8003A20}"/>
               </a:ext>
             </a:extLst>
           </p:cNvPr>
@@ -8039,7 +10560,7 @@
           <p:cNvPr id="3" name="">
             <a:extLst xmlns:a="http://schemas.openxmlformats.org/drawingml/2006/main">
               <a:ext uri="{FF2B5EF4-FFF2-40B4-BE49-F238E27FC236}">
-                <a16:creationId xmlns:a16="http://schemas.microsoft.com/office/drawing/2014/main" id="{3D572CD0-9CF5-41DF-8023-16DD739C730F}"/>
+                <a16:creationId xmlns:a16="http://schemas.microsoft.com/office/drawing/2014/main" id="{E15B49A3-F91B-433D-99A3-B055EA6206F1}"/>
               </a:ext>
             </a:extLst>
           </p:cNvPr>
@@ -8100,7 +10621,7 @@
           <p:cNvPr id="4" name="">
             <a:extLst xmlns:a="http://schemas.openxmlformats.org/drawingml/2006/main">
               <a:ext uri="{FF2B5EF4-FFF2-40B4-BE49-F238E27FC236}">
-                <a16:creationId xmlns:a16="http://schemas.microsoft.com/office/drawing/2014/main" id="{AB0C4625-2182-482D-99AA-1964E12B5497}"/>
+                <a16:creationId xmlns:a16="http://schemas.microsoft.com/office/drawing/2014/main" id="{47282B42-D659-4ABD-8A55-E57845B6EBBE}"/>
               </a:ext>
             </a:extLst>
           </p:cNvPr>
@@ -8165,7 +10686,7 @@
           <p:nvPr/>
         </p:nvPicPr>
         <p:blipFill>
-          <a:blip xmlns:r="http://schemas.openxmlformats.org/officeDocument/2006/relationships" xmlns:a="http://schemas.openxmlformats.org/drawingml/2006/main" r:embed="R042c4ebeb7f24bf0"/>
+          <a:blip xmlns:r="http://schemas.openxmlformats.org/officeDocument/2006/relationships" xmlns:a="http://schemas.openxmlformats.org/drawingml/2006/main" r:embed="R53fac2c85f5c461d"/>
           <a:stretch xmlns:a="http://schemas.openxmlformats.org/drawingml/2006/main"/>
         </p:blipFill>
         <p:spPr>
@@ -8183,7 +10704,7 @@
           <p:cNvPr id="6" name="">
             <a:extLst xmlns:a="http://schemas.openxmlformats.org/drawingml/2006/main">
               <a:ext uri="{FF2B5EF4-FFF2-40B4-BE49-F238E27FC236}">
-                <a16:creationId xmlns:a16="http://schemas.microsoft.com/office/drawing/2014/main" id="{EFC78CC4-0E83-4D4F-8B95-1DDCE7011BC4}"/>
+                <a16:creationId xmlns:a16="http://schemas.microsoft.com/office/drawing/2014/main" id="{3970CAE4-C079-4871-BAF4-04985044C3D8}"/>
               </a:ext>
             </a:extLst>
           </p:cNvPr>
@@ -8242,7 +10763,7 @@
     </p:spTree>
     <p:extLst>
       <p:ext uri="{BB962C8B-B14F-4D97-AF65-F5344CB8AC3E}">
-        <p14:creationId xmlns:p14="http://schemas.microsoft.com/office/powerpoint/2010/main" val="677232483"/>
+        <p14:creationId xmlns:p14="http://schemas.microsoft.com/office/powerpoint/2010/main" val="1254508175"/>
       </p:ext>
     </p:extLst>
   </p:cSld>
@@ -8273,7 +10794,7 @@
           <p:cNvPr id="11" name="">
             <a:extLst xmlns:a="http://schemas.openxmlformats.org/drawingml/2006/main">
               <a:ext uri="{FF2B5EF4-FFF2-40B4-BE49-F238E27FC236}">
-                <a16:creationId xmlns:a16="http://schemas.microsoft.com/office/drawing/2014/main" id="{6D821554-4CBA-4072-9CFC-521ED2029A46}"/>
+                <a16:creationId xmlns:a16="http://schemas.microsoft.com/office/drawing/2014/main" id="{A3028D6A-D079-4346-BF37-2546CA652E2E}"/>
               </a:ext>
             </a:extLst>
           </p:cNvPr>
@@ -8334,7 +10855,7 @@
           <p:cNvPr id="2" name="">
             <a:extLst xmlns:a="http://schemas.openxmlformats.org/drawingml/2006/main">
               <a:ext uri="{FF2B5EF4-FFF2-40B4-BE49-F238E27FC236}">
-                <a16:creationId xmlns:a16="http://schemas.microsoft.com/office/drawing/2014/main" id="{9EF05C5B-053C-48DB-B6A9-E4CE6861DCA0}"/>
+                <a16:creationId xmlns:a16="http://schemas.microsoft.com/office/drawing/2014/main" id="{5860E559-E756-4BA9-AEA0-A16D2A1DC321}"/>
               </a:ext>
             </a:extLst>
           </p:cNvPr>
@@ -8395,7 +10916,7 @@
           <p:cNvPr id="3" name="">
             <a:extLst xmlns:a="http://schemas.openxmlformats.org/drawingml/2006/main">
               <a:ext uri="{FF2B5EF4-FFF2-40B4-BE49-F238E27FC236}">
-                <a16:creationId xmlns:a16="http://schemas.microsoft.com/office/drawing/2014/main" id="{374A5669-4972-4341-9ACB-126CB2085617}"/>
+                <a16:creationId xmlns:a16="http://schemas.microsoft.com/office/drawing/2014/main" id="{9724B6FE-551E-4F5A-903E-C2A81145C152}"/>
               </a:ext>
             </a:extLst>
           </p:cNvPr>
@@ -8456,7 +10977,7 @@
           <p:cNvPr id="4" name="">
             <a:extLst xmlns:a="http://schemas.openxmlformats.org/drawingml/2006/main">
               <a:ext uri="{FF2B5EF4-FFF2-40B4-BE49-F238E27FC236}">
-                <a16:creationId xmlns:a16="http://schemas.microsoft.com/office/drawing/2014/main" id="{50BA85C3-82E3-4C64-A64B-136C8A427E8A}"/>
+                <a16:creationId xmlns:a16="http://schemas.microsoft.com/office/drawing/2014/main" id="{9D9A1C4D-9B04-4180-8AFB-95D31B6C20F4}"/>
               </a:ext>
             </a:extLst>
           </p:cNvPr>
@@ -8517,7 +11038,7 @@
           <p:cNvPr id="5" name="">
             <a:extLst xmlns:a="http://schemas.openxmlformats.org/drawingml/2006/main">
               <a:ext uri="{FF2B5EF4-FFF2-40B4-BE49-F238E27FC236}">
-                <a16:creationId xmlns:a16="http://schemas.microsoft.com/office/drawing/2014/main" id="{19542E8F-A2F6-4E5C-9BA2-B08D58398FE5}"/>
+                <a16:creationId xmlns:a16="http://schemas.microsoft.com/office/drawing/2014/main" id="{5F1A93D1-EF27-47CC-B089-3CB2251F507A}"/>
               </a:ext>
             </a:extLst>
           </p:cNvPr>
@@ -8578,7 +11099,7 @@
           <p:cNvPr id="6" name="">
             <a:extLst xmlns:a="http://schemas.openxmlformats.org/drawingml/2006/main">
               <a:ext uri="{FF2B5EF4-FFF2-40B4-BE49-F238E27FC236}">
-                <a16:creationId xmlns:a16="http://schemas.microsoft.com/office/drawing/2014/main" id="{5C27D9CB-6097-4582-9827-E6E8D431E6DF}"/>
+                <a16:creationId xmlns:a16="http://schemas.microsoft.com/office/drawing/2014/main" id="{AD834AEA-86FA-4A5B-96F6-CFB08E963E69}"/>
               </a:ext>
             </a:extLst>
           </p:cNvPr>
@@ -8639,7 +11160,7 @@
           <p:cNvPr id="7" name="">
             <a:extLst xmlns:a="http://schemas.openxmlformats.org/drawingml/2006/main">
               <a:ext uri="{FF2B5EF4-FFF2-40B4-BE49-F238E27FC236}">
-                <a16:creationId xmlns:a16="http://schemas.microsoft.com/office/drawing/2014/main" id="{AFFC4F4B-A62C-4B90-83F5-246389EB8436}"/>
+                <a16:creationId xmlns:a16="http://schemas.microsoft.com/office/drawing/2014/main" id="{EC9D7850-6F8E-4A41-B776-F69C2969E9C4}"/>
               </a:ext>
             </a:extLst>
           </p:cNvPr>
@@ -8700,7 +11221,7 @@
           <p:cNvPr id="8" name="">
             <a:extLst xmlns:a="http://schemas.openxmlformats.org/drawingml/2006/main">
               <a:ext uri="{FF2B5EF4-FFF2-40B4-BE49-F238E27FC236}">
-                <a16:creationId xmlns:a16="http://schemas.microsoft.com/office/drawing/2014/main" id="{20FD73D1-67B5-445A-99BE-085F9EEBF486}"/>
+                <a16:creationId xmlns:a16="http://schemas.microsoft.com/office/drawing/2014/main" id="{0A4C1958-4471-4756-BDA1-0E7010FC8523}"/>
               </a:ext>
             </a:extLst>
           </p:cNvPr>
@@ -8761,7 +11282,7 @@
           <p:cNvPr id="9" name="">
             <a:extLst xmlns:a="http://schemas.openxmlformats.org/drawingml/2006/main">
               <a:ext uri="{FF2B5EF4-FFF2-40B4-BE49-F238E27FC236}">
-                <a16:creationId xmlns:a16="http://schemas.microsoft.com/office/drawing/2014/main" id="{A936411A-FF74-40D3-A143-B80870CF7AE0}"/>
+                <a16:creationId xmlns:a16="http://schemas.microsoft.com/office/drawing/2014/main" id="{3DD107CC-37C6-4E52-BC3D-31D5DE8E4604}"/>
               </a:ext>
             </a:extLst>
           </p:cNvPr>
@@ -8822,7 +11343,7 @@
           <p:cNvPr id="10" name="">
             <a:extLst xmlns:a="http://schemas.openxmlformats.org/drawingml/2006/main">
               <a:ext uri="{FF2B5EF4-FFF2-40B4-BE49-F238E27FC236}">
-                <a16:creationId xmlns:a16="http://schemas.microsoft.com/office/drawing/2014/main" id="{F7A66050-B5C2-417C-969F-659ADB3B7E0E}"/>
+                <a16:creationId xmlns:a16="http://schemas.microsoft.com/office/drawing/2014/main" id="{9481FA4F-2ECA-45EF-9D21-C249A6641605}"/>
               </a:ext>
             </a:extLst>
           </p:cNvPr>
@@ -8881,7 +11402,7 @@
     </p:spTree>
     <p:extLst>
       <p:ext uri="{BB962C8B-B14F-4D97-AF65-F5344CB8AC3E}">
-        <p14:creationId xmlns:p14="http://schemas.microsoft.com/office/powerpoint/2010/main" val="1232194741"/>
+        <p14:creationId xmlns:p14="http://schemas.microsoft.com/office/powerpoint/2010/main" val="2124503018"/>
       </p:ext>
     </p:extLst>
   </p:cSld>
@@ -8912,7 +11433,7 @@
           <p:cNvPr id="8" name="">
             <a:extLst xmlns:a="http://schemas.openxmlformats.org/drawingml/2006/main">
               <a:ext uri="{FF2B5EF4-FFF2-40B4-BE49-F238E27FC236}">
-                <a16:creationId xmlns:a16="http://schemas.microsoft.com/office/drawing/2014/main" id="{FAE5628F-01EC-42A8-9625-5EEEC96078D9}"/>
+                <a16:creationId xmlns:a16="http://schemas.microsoft.com/office/drawing/2014/main" id="{21241308-23AD-44D5-BCC5-D8C6AD6F16DC}"/>
               </a:ext>
             </a:extLst>
           </p:cNvPr>
@@ -8973,7 +11494,7 @@
           <p:cNvPr id="2" name="">
             <a:extLst xmlns:a="http://schemas.openxmlformats.org/drawingml/2006/main">
               <a:ext uri="{FF2B5EF4-FFF2-40B4-BE49-F238E27FC236}">
-                <a16:creationId xmlns:a16="http://schemas.microsoft.com/office/drawing/2014/main" id="{C731E7B0-0816-47E0-8485-FDBA4B5F65DB}"/>
+                <a16:creationId xmlns:a16="http://schemas.microsoft.com/office/drawing/2014/main" id="{0D69001E-8C4B-4830-B934-AF2EA3A77EB3}"/>
               </a:ext>
             </a:extLst>
           </p:cNvPr>
@@ -9034,7 +11555,7 @@
           <p:cNvPr id="3" name="">
             <a:extLst xmlns:a="http://schemas.openxmlformats.org/drawingml/2006/main">
               <a:ext uri="{FF2B5EF4-FFF2-40B4-BE49-F238E27FC236}">
-                <a16:creationId xmlns:a16="http://schemas.microsoft.com/office/drawing/2014/main" id="{F4D76DDF-2A2C-49EC-9276-FD89F883991A}"/>
+                <a16:creationId xmlns:a16="http://schemas.microsoft.com/office/drawing/2014/main" id="{87F1760F-8791-49D6-B548-EEB43EF93D88}"/>
               </a:ext>
             </a:extLst>
           </p:cNvPr>
@@ -9095,7 +11616,7 @@
           <p:cNvPr id="4" name="">
             <a:extLst xmlns:a="http://schemas.openxmlformats.org/drawingml/2006/main">
               <a:ext uri="{FF2B5EF4-FFF2-40B4-BE49-F238E27FC236}">
-                <a16:creationId xmlns:a16="http://schemas.microsoft.com/office/drawing/2014/main" id="{6E046EAF-89CF-4A96-AC8B-BBC8CF2EEE61}"/>
+                <a16:creationId xmlns:a16="http://schemas.microsoft.com/office/drawing/2014/main" id="{62C3F336-0F35-4947-BFBF-B6BDACBEBD23}"/>
               </a:ext>
             </a:extLst>
           </p:cNvPr>
@@ -9156,7 +11677,7 @@
           <p:cNvPr id="5" name="">
             <a:extLst xmlns:a="http://schemas.openxmlformats.org/drawingml/2006/main">
               <a:ext uri="{FF2B5EF4-FFF2-40B4-BE49-F238E27FC236}">
-                <a16:creationId xmlns:a16="http://schemas.microsoft.com/office/drawing/2014/main" id="{34F66F11-B38D-46D2-96D3-0EA678E96092}"/>
+                <a16:creationId xmlns:a16="http://schemas.microsoft.com/office/drawing/2014/main" id="{F2A1008A-DEE9-41E2-8D47-1D8DD283ECC6}"/>
               </a:ext>
             </a:extLst>
           </p:cNvPr>
@@ -9415,7 +11936,7 @@
           <p:cNvPr id="7" name="">
             <a:extLst xmlns:a="http://schemas.openxmlformats.org/drawingml/2006/main">
               <a:ext uri="{FF2B5EF4-FFF2-40B4-BE49-F238E27FC236}">
-                <a16:creationId xmlns:a16="http://schemas.microsoft.com/office/drawing/2014/main" id="{76D93644-761A-49B2-96F2-38BC946417A9}"/>
+                <a16:creationId xmlns:a16="http://schemas.microsoft.com/office/drawing/2014/main" id="{E951A141-F664-41A4-B0DA-9F9E35DF4A20}"/>
               </a:ext>
             </a:extLst>
           </p:cNvPr>
@@ -9474,7 +11995,7 @@
     </p:spTree>
     <p:extLst>
       <p:ext uri="{BB962C8B-B14F-4D97-AF65-F5344CB8AC3E}">
-        <p14:creationId xmlns:p14="http://schemas.microsoft.com/office/powerpoint/2010/main" val="608422282"/>
+        <p14:creationId xmlns:p14="http://schemas.microsoft.com/office/powerpoint/2010/main" val="586915372"/>
       </p:ext>
     </p:extLst>
   </p:cSld>
@@ -9505,7 +12026,7 @@
           <p:cNvPr id="7" name="">
             <a:extLst xmlns:a="http://schemas.openxmlformats.org/drawingml/2006/main">
               <a:ext uri="{FF2B5EF4-FFF2-40B4-BE49-F238E27FC236}">
-                <a16:creationId xmlns:a16="http://schemas.microsoft.com/office/drawing/2014/main" id="{6B4974DC-BD99-4B67-B5E4-42BFD36EEA21}"/>
+                <a16:creationId xmlns:a16="http://schemas.microsoft.com/office/drawing/2014/main" id="{C4961E67-C7DB-40C6-8D17-AAA2A7648579}"/>
               </a:ext>
             </a:extLst>
           </p:cNvPr>
@@ -9566,7 +12087,7 @@
           <p:cNvPr id="2" name="">
             <a:extLst xmlns:a="http://schemas.openxmlformats.org/drawingml/2006/main">
               <a:ext uri="{FF2B5EF4-FFF2-40B4-BE49-F238E27FC236}">
-                <a16:creationId xmlns:a16="http://schemas.microsoft.com/office/drawing/2014/main" id="{175AE5EA-76BA-49AE-9F7E-A04AEA7DD883}"/>
+                <a16:creationId xmlns:a16="http://schemas.microsoft.com/office/drawing/2014/main" id="{E228F13A-AE52-4C02-8823-6196DF40CDE1}"/>
               </a:ext>
             </a:extLst>
           </p:cNvPr>
@@ -9627,7 +12148,7 @@
           <p:cNvPr id="3" name="">
             <a:extLst xmlns:a="http://schemas.openxmlformats.org/drawingml/2006/main">
               <a:ext uri="{FF2B5EF4-FFF2-40B4-BE49-F238E27FC236}">
-                <a16:creationId xmlns:a16="http://schemas.microsoft.com/office/drawing/2014/main" id="{733BEEEA-4621-4058-AC78-8C7E8B557E59}"/>
+                <a16:creationId xmlns:a16="http://schemas.microsoft.com/office/drawing/2014/main" id="{24EB219C-33F5-40DC-A874-65DEF8C3CC9D}"/>
               </a:ext>
             </a:extLst>
           </p:cNvPr>
@@ -9688,7 +12209,7 @@
           <p:cNvPr id="4" name="">
             <a:extLst xmlns:a="http://schemas.openxmlformats.org/drawingml/2006/main">
               <a:ext uri="{FF2B5EF4-FFF2-40B4-BE49-F238E27FC236}">
-                <a16:creationId xmlns:a16="http://schemas.microsoft.com/office/drawing/2014/main" id="{7FD0F2CE-82BD-4EB5-9D35-527F7D323AF3}"/>
+                <a16:creationId xmlns:a16="http://schemas.microsoft.com/office/drawing/2014/main" id="{971212AE-D60F-4F2A-B8D2-91AA24E7911F}"/>
               </a:ext>
             </a:extLst>
           </p:cNvPr>
@@ -10032,7 +12553,7 @@
           <p:cNvPr id="6" name="">
             <a:extLst xmlns:a="http://schemas.openxmlformats.org/drawingml/2006/main">
               <a:ext uri="{FF2B5EF4-FFF2-40B4-BE49-F238E27FC236}">
-                <a16:creationId xmlns:a16="http://schemas.microsoft.com/office/drawing/2014/main" id="{99798F67-8B70-497B-AE0D-693585E3996B}"/>
+                <a16:creationId xmlns:a16="http://schemas.microsoft.com/office/drawing/2014/main" id="{1EBA7936-CAA8-42EC-808C-1AC9CB46D25A}"/>
               </a:ext>
             </a:extLst>
           </p:cNvPr>
@@ -10091,7 +12612,7 @@
     </p:spTree>
     <p:extLst>
       <p:ext uri="{BB962C8B-B14F-4D97-AF65-F5344CB8AC3E}">
-        <p14:creationId xmlns:p14="http://schemas.microsoft.com/office/powerpoint/2010/main" val="14629851"/>
+        <p14:creationId xmlns:p14="http://schemas.microsoft.com/office/powerpoint/2010/main" val="49524413"/>
       </p:ext>
     </p:extLst>
   </p:cSld>
@@ -10122,7 +12643,7 @@
           <p:cNvPr id="7" name="">
             <a:extLst xmlns:a="http://schemas.openxmlformats.org/drawingml/2006/main">
               <a:ext uri="{FF2B5EF4-FFF2-40B4-BE49-F238E27FC236}">
-                <a16:creationId xmlns:a16="http://schemas.microsoft.com/office/drawing/2014/main" id="{F61E4469-8EF0-44E9-937F-1EB74E7C07D8}"/>
+                <a16:creationId xmlns:a16="http://schemas.microsoft.com/office/drawing/2014/main" id="{E9FCE2D7-29A4-4DF5-A53F-13479D1FCE1C}"/>
               </a:ext>
             </a:extLst>
           </p:cNvPr>
@@ -10183,7 +12704,7 @@
           <p:cNvPr id="2" name="">
             <a:extLst xmlns:a="http://schemas.openxmlformats.org/drawingml/2006/main">
               <a:ext uri="{FF2B5EF4-FFF2-40B4-BE49-F238E27FC236}">
-                <a16:creationId xmlns:a16="http://schemas.microsoft.com/office/drawing/2014/main" id="{72351F19-5E87-445D-8286-2A7BF61E943C}"/>
+                <a16:creationId xmlns:a16="http://schemas.microsoft.com/office/drawing/2014/main" id="{2921E09C-BD91-4878-B4BD-A3A4B2137691}"/>
               </a:ext>
             </a:extLst>
           </p:cNvPr>
@@ -10244,7 +12765,7 @@
           <p:cNvPr id="3" name="">
             <a:extLst xmlns:a="http://schemas.openxmlformats.org/drawingml/2006/main">
               <a:ext uri="{FF2B5EF4-FFF2-40B4-BE49-F238E27FC236}">
-                <a16:creationId xmlns:a16="http://schemas.microsoft.com/office/drawing/2014/main" id="{A98D7951-0E9B-4E04-90A0-54F4D5F16C21}"/>
+                <a16:creationId xmlns:a16="http://schemas.microsoft.com/office/drawing/2014/main" id="{7C6DAD0E-62F1-41D1-96D5-7848A91A3B21}"/>
               </a:ext>
             </a:extLst>
           </p:cNvPr>
@@ -10305,7 +12826,7 @@
           <p:cNvPr id="4" name="">
             <a:extLst xmlns:a="http://schemas.openxmlformats.org/drawingml/2006/main">
               <a:ext uri="{FF2B5EF4-FFF2-40B4-BE49-F238E27FC236}">
-                <a16:creationId xmlns:a16="http://schemas.microsoft.com/office/drawing/2014/main" id="{E9F6EA56-0E73-4F7B-A307-BAFFA1323B97}"/>
+                <a16:creationId xmlns:a16="http://schemas.microsoft.com/office/drawing/2014/main" id="{D9019912-2753-4173-9CD9-5DCF60E62D2B}"/>
               </a:ext>
             </a:extLst>
           </p:cNvPr>
@@ -10649,7 +13170,7 @@
           <p:cNvPr id="6" name="">
             <a:extLst xmlns:a="http://schemas.openxmlformats.org/drawingml/2006/main">
               <a:ext uri="{FF2B5EF4-FFF2-40B4-BE49-F238E27FC236}">
-                <a16:creationId xmlns:a16="http://schemas.microsoft.com/office/drawing/2014/main" id="{C1A430E5-DEE5-4273-96DC-394C87177D90}"/>
+                <a16:creationId xmlns:a16="http://schemas.microsoft.com/office/drawing/2014/main" id="{BE9C087C-45DB-495F-9A2D-CA0C3ECE1E67}"/>
               </a:ext>
             </a:extLst>
           </p:cNvPr>
@@ -10708,7 +13229,7 @@
     </p:spTree>
     <p:extLst>
       <p:ext uri="{BB962C8B-B14F-4D97-AF65-F5344CB8AC3E}">
-        <p14:creationId xmlns:p14="http://schemas.microsoft.com/office/powerpoint/2010/main" val="686932504"/>
+        <p14:creationId xmlns:p14="http://schemas.microsoft.com/office/powerpoint/2010/main" val="82840649"/>
       </p:ext>
     </p:extLst>
   </p:cSld>
@@ -10739,7 +13260,7 @@
           <p:cNvPr id="13" name="">
             <a:extLst xmlns:a="http://schemas.openxmlformats.org/drawingml/2006/main">
               <a:ext uri="{FF2B5EF4-FFF2-40B4-BE49-F238E27FC236}">
-                <a16:creationId xmlns:a16="http://schemas.microsoft.com/office/drawing/2014/main" id="{21AFC943-C7EB-4C35-BD59-BF1E09AE217E}"/>
+                <a16:creationId xmlns:a16="http://schemas.microsoft.com/office/drawing/2014/main" id="{6B963BBE-2042-4EE3-85E2-909941347AD4}"/>
               </a:ext>
             </a:extLst>
           </p:cNvPr>
@@ -10800,7 +13321,7 @@
           <p:cNvPr id="2" name="">
             <a:extLst xmlns:a="http://schemas.openxmlformats.org/drawingml/2006/main">
               <a:ext uri="{FF2B5EF4-FFF2-40B4-BE49-F238E27FC236}">
-                <a16:creationId xmlns:a16="http://schemas.microsoft.com/office/drawing/2014/main" id="{480EE7D2-7020-42B8-B2E4-D862970B4CDB}"/>
+                <a16:creationId xmlns:a16="http://schemas.microsoft.com/office/drawing/2014/main" id="{6F13F3B1-A368-441E-8058-8080A57EC7C7}"/>
               </a:ext>
             </a:extLst>
           </p:cNvPr>
@@ -10861,7 +13382,7 @@
           <p:cNvPr id="3" name="">
             <a:extLst xmlns:a="http://schemas.openxmlformats.org/drawingml/2006/main">
               <a:ext uri="{FF2B5EF4-FFF2-40B4-BE49-F238E27FC236}">
-                <a16:creationId xmlns:a16="http://schemas.microsoft.com/office/drawing/2014/main" id="{8BC898CD-CAED-43D1-9DF3-1A67EE8242E3}"/>
+                <a16:creationId xmlns:a16="http://schemas.microsoft.com/office/drawing/2014/main" id="{AAC3A780-70DC-4CE0-B534-3C9E362CF711}"/>
               </a:ext>
             </a:extLst>
           </p:cNvPr>
@@ -10922,7 +13443,7 @@
           <p:cNvPr id="4" name="">
             <a:extLst xmlns:a="http://schemas.openxmlformats.org/drawingml/2006/main">
               <a:ext uri="{FF2B5EF4-FFF2-40B4-BE49-F238E27FC236}">
-                <a16:creationId xmlns:a16="http://schemas.microsoft.com/office/drawing/2014/main" id="{6008105B-5168-46C6-B37F-8C0DE6270C3D}"/>
+                <a16:creationId xmlns:a16="http://schemas.microsoft.com/office/drawing/2014/main" id="{729988E6-402D-4051-8D9A-BBEC26D11169}"/>
               </a:ext>
             </a:extLst>
           </p:cNvPr>
@@ -10987,7 +13508,7 @@
           <p:nvPr/>
         </p:nvPicPr>
         <p:blipFill>
-          <a:blip xmlns:r="http://schemas.openxmlformats.org/officeDocument/2006/relationships" xmlns:a="http://schemas.openxmlformats.org/drawingml/2006/main" r:embed="Reda9afbcf3de4152"/>
+          <a:blip xmlns:r="http://schemas.openxmlformats.org/officeDocument/2006/relationships" xmlns:a="http://schemas.openxmlformats.org/drawingml/2006/main" r:embed="Rad5e71cdda8e4e59"/>
           <a:stretch xmlns:a="http://schemas.openxmlformats.org/drawingml/2006/main"/>
         </p:blipFill>
         <p:spPr>
@@ -11005,7 +13526,7 @@
           <p:cNvPr id="6" name="">
             <a:extLst xmlns:a="http://schemas.openxmlformats.org/drawingml/2006/main">
               <a:ext uri="{FF2B5EF4-FFF2-40B4-BE49-F238E27FC236}">
-                <a16:creationId xmlns:a16="http://schemas.microsoft.com/office/drawing/2014/main" id="{4E433CE7-5655-43C6-B7DA-D72ED83A3206}"/>
+                <a16:creationId xmlns:a16="http://schemas.microsoft.com/office/drawing/2014/main" id="{0FAE0A82-A779-41A6-8FF0-9BA00CC86B1B}"/>
               </a:ext>
             </a:extLst>
           </p:cNvPr>
@@ -11066,7 +13587,7 @@
           <p:cNvPr id="7" name="">
             <a:extLst xmlns:a="http://schemas.openxmlformats.org/drawingml/2006/main">
               <a:ext uri="{FF2B5EF4-FFF2-40B4-BE49-F238E27FC236}">
-                <a16:creationId xmlns:a16="http://schemas.microsoft.com/office/drawing/2014/main" id="{BB06C5C1-5ABB-474C-A597-009C6B0753BD}"/>
+                <a16:creationId xmlns:a16="http://schemas.microsoft.com/office/drawing/2014/main" id="{2A2D7CB0-F39C-459F-B037-BF77E9A5CDBE}"/>
               </a:ext>
             </a:extLst>
           </p:cNvPr>
@@ -11127,7 +13648,7 @@
           <p:cNvPr id="8" name="">
             <a:extLst xmlns:a="http://schemas.openxmlformats.org/drawingml/2006/main">
               <a:ext uri="{FF2B5EF4-FFF2-40B4-BE49-F238E27FC236}">
-                <a16:creationId xmlns:a16="http://schemas.microsoft.com/office/drawing/2014/main" id="{AFCDE639-AC35-458B-8906-29A7E7B91AC8}"/>
+                <a16:creationId xmlns:a16="http://schemas.microsoft.com/office/drawing/2014/main" id="{67832740-CE4C-430F-A071-2C58795DF31F}"/>
               </a:ext>
             </a:extLst>
           </p:cNvPr>
@@ -11188,7 +13709,7 @@
           <p:cNvPr id="9" name="">
             <a:extLst xmlns:a="http://schemas.openxmlformats.org/drawingml/2006/main">
               <a:ext uri="{FF2B5EF4-FFF2-40B4-BE49-F238E27FC236}">
-                <a16:creationId xmlns:a16="http://schemas.microsoft.com/office/drawing/2014/main" id="{2E0BE064-4464-4F15-AC53-AA57782DD044}"/>
+                <a16:creationId xmlns:a16="http://schemas.microsoft.com/office/drawing/2014/main" id="{FA8E304F-7452-4D35-9AE2-68809C0E2EA8}"/>
               </a:ext>
             </a:extLst>
           </p:cNvPr>
@@ -11249,7 +13770,7 @@
           <p:cNvPr id="10" name="">
             <a:extLst xmlns:a="http://schemas.openxmlformats.org/drawingml/2006/main">
               <a:ext uri="{FF2B5EF4-FFF2-40B4-BE49-F238E27FC236}">
-                <a16:creationId xmlns:a16="http://schemas.microsoft.com/office/drawing/2014/main" id="{FB5ED898-8BDF-4967-A9B8-7AC9783BEAC7}"/>
+                <a16:creationId xmlns:a16="http://schemas.microsoft.com/office/drawing/2014/main" id="{8B98C818-703F-423A-9707-F5C70E2D844B}"/>
               </a:ext>
             </a:extLst>
           </p:cNvPr>
@@ -11310,7 +13831,7 @@
           <p:cNvPr id="11" name="">
             <a:extLst xmlns:a="http://schemas.openxmlformats.org/drawingml/2006/main">
               <a:ext uri="{FF2B5EF4-FFF2-40B4-BE49-F238E27FC236}">
-                <a16:creationId xmlns:a16="http://schemas.microsoft.com/office/drawing/2014/main" id="{48F8AA08-0789-4990-B456-80B050A61852}"/>
+                <a16:creationId xmlns:a16="http://schemas.microsoft.com/office/drawing/2014/main" id="{87191DBA-5968-4E28-AEB1-174F5B135096}"/>
               </a:ext>
             </a:extLst>
           </p:cNvPr>
@@ -11371,7 +13892,7 @@
           <p:cNvPr id="12" name="">
             <a:extLst xmlns:a="http://schemas.openxmlformats.org/drawingml/2006/main">
               <a:ext uri="{FF2B5EF4-FFF2-40B4-BE49-F238E27FC236}">
-                <a16:creationId xmlns:a16="http://schemas.microsoft.com/office/drawing/2014/main" id="{7A42E2B8-7D0D-4D83-AFDE-D89564CBB0B7}"/>
+                <a16:creationId xmlns:a16="http://schemas.microsoft.com/office/drawing/2014/main" id="{E49C109F-2709-468D-BE62-5AD8CBAE84E3}"/>
               </a:ext>
             </a:extLst>
           </p:cNvPr>
@@ -11430,7 +13951,7 @@
     </p:spTree>
     <p:extLst>
       <p:ext uri="{BB962C8B-B14F-4D97-AF65-F5344CB8AC3E}">
-        <p14:creationId xmlns:p14="http://schemas.microsoft.com/office/powerpoint/2010/main" val="394356863"/>
+        <p14:creationId xmlns:p14="http://schemas.microsoft.com/office/powerpoint/2010/main" val="1895487725"/>
       </p:ext>
     </p:extLst>
   </p:cSld>
@@ -11478,16 +13999,16 @@
         <a:srgbClr val="96607D"/>
       </a:folHlink>
     </a:clrScheme>
-    <a:fontScheme name="">
+    <a:fontScheme name="Office">
       <a:majorFont>
-        <a:latin typeface="Aptos"/>
-        <a:ea typeface=""/>
-        <a:cs typeface=""/>
+        <a:latin typeface="Calibri Light"/>
+        <a:ea typeface="Calibri Light"/>
+        <a:cs typeface="Calibri Light"/>
       </a:majorFont>
       <a:minorFont>
-        <a:latin typeface="Aptos"/>
-        <a:ea typeface=""/>
-        <a:cs typeface=""/>
+        <a:latin typeface="Calibri"/>
+        <a:ea typeface="Calibri"/>
+        <a:cs typeface="Calibri"/>
       </a:minorFont>
     </a:fontScheme>
     <a:fmtScheme name="ChatGPT">

--- a/slides/cmapss_fd001_presentation.pptx
+++ b/slides/cmapss_fd001_presentation.pptx
@@ -2,30 +2,30 @@
 <file path=ppt/presentation.xml><?xml version="1.0" encoding="utf-8"?>
 <p:presentation xmlns:p="http://schemas.openxmlformats.org/presentationml/2006/main">
   <p:sldMasterIdLst>
-    <p:sldMasterId xmlns:r="http://schemas.openxmlformats.org/officeDocument/2006/relationships" id="2147483648" r:id="Re58b5c0bddde4125"/>
+    <p:sldMasterId xmlns:r="http://schemas.openxmlformats.org/officeDocument/2006/relationships" id="2147483648" r:id="R9b770b8641a24b7f"/>
   </p:sldMasterIdLst>
   <p:notesMasterIdLst>
-    <p:notesMasterId xmlns:r="http://schemas.openxmlformats.org/officeDocument/2006/relationships" r:id="Rcd79f44ee7704b31"/>
+    <p:notesMasterId xmlns:r="http://schemas.openxmlformats.org/officeDocument/2006/relationships" r:id="R22b105e163074564"/>
   </p:notesMasterIdLst>
   <p:sldIdLst>
-    <p:sldId xmlns:r="http://schemas.openxmlformats.org/officeDocument/2006/relationships" id="256" r:id="R943f942bb23f4e94"/>
-    <p:sldId xmlns:r="http://schemas.openxmlformats.org/officeDocument/2006/relationships" id="257" r:id="Rf42a1872f4154377"/>
-    <p:sldId xmlns:r="http://schemas.openxmlformats.org/officeDocument/2006/relationships" id="258" r:id="R35381d84789240f2"/>
-    <p:sldId xmlns:r="http://schemas.openxmlformats.org/officeDocument/2006/relationships" id="259" r:id="R5a6575d339c64d7a"/>
-    <p:sldId xmlns:r="http://schemas.openxmlformats.org/officeDocument/2006/relationships" id="260" r:id="Rd45e7be1017442a3"/>
-    <p:sldId xmlns:r="http://schemas.openxmlformats.org/officeDocument/2006/relationships" id="261" r:id="R2fb9a20b1a5c4455"/>
-    <p:sldId xmlns:r="http://schemas.openxmlformats.org/officeDocument/2006/relationships" id="262" r:id="R9b39a2a8e8924994"/>
-    <p:sldId xmlns:r="http://schemas.openxmlformats.org/officeDocument/2006/relationships" id="263" r:id="R9ae74660e8724962"/>
-    <p:sldId xmlns:r="http://schemas.openxmlformats.org/officeDocument/2006/relationships" id="264" r:id="R78cafa76bc6d4b51"/>
-    <p:sldId xmlns:r="http://schemas.openxmlformats.org/officeDocument/2006/relationships" id="265" r:id="R244f7aa264284356"/>
-    <p:sldId xmlns:r="http://schemas.openxmlformats.org/officeDocument/2006/relationships" id="266" r:id="R4ed2ce06188a4eb1"/>
-    <p:sldId xmlns:r="http://schemas.openxmlformats.org/officeDocument/2006/relationships" id="267" r:id="R717877d64f884085"/>
-    <p:sldId xmlns:r="http://schemas.openxmlformats.org/officeDocument/2006/relationships" id="268" r:id="R41eb0ad303b64bf2"/>
-    <p:sldId xmlns:r="http://schemas.openxmlformats.org/officeDocument/2006/relationships" id="269" r:id="R70524e69980341a7"/>
-    <p:sldId xmlns:r="http://schemas.openxmlformats.org/officeDocument/2006/relationships" id="270" r:id="R756a1a46ee4c498c"/>
-    <p:sldId xmlns:r="http://schemas.openxmlformats.org/officeDocument/2006/relationships" id="271" r:id="R1f5f99211f604516"/>
-    <p:sldId xmlns:r="http://schemas.openxmlformats.org/officeDocument/2006/relationships" id="272" r:id="Rd399195afe8147d0"/>
-    <p:sldId xmlns:r="http://schemas.openxmlformats.org/officeDocument/2006/relationships" id="273" r:id="Rc6704c059d6d4683"/>
+    <p:sldId xmlns:r="http://schemas.openxmlformats.org/officeDocument/2006/relationships" id="256" r:id="Ref5e4058000d41ef"/>
+    <p:sldId xmlns:r="http://schemas.openxmlformats.org/officeDocument/2006/relationships" id="257" r:id="Rfa51e09a5847494d"/>
+    <p:sldId xmlns:r="http://schemas.openxmlformats.org/officeDocument/2006/relationships" id="258" r:id="R98a2c8f1364c42f1"/>
+    <p:sldId xmlns:r="http://schemas.openxmlformats.org/officeDocument/2006/relationships" id="259" r:id="R5f9cba5f17764ba4"/>
+    <p:sldId xmlns:r="http://schemas.openxmlformats.org/officeDocument/2006/relationships" id="260" r:id="R7866a504d8014dfc"/>
+    <p:sldId xmlns:r="http://schemas.openxmlformats.org/officeDocument/2006/relationships" id="261" r:id="Ra99c4673049d4ff1"/>
+    <p:sldId xmlns:r="http://schemas.openxmlformats.org/officeDocument/2006/relationships" id="262" r:id="R253171194a3c4f71"/>
+    <p:sldId xmlns:r="http://schemas.openxmlformats.org/officeDocument/2006/relationships" id="263" r:id="Ra8055d244e4d488f"/>
+    <p:sldId xmlns:r="http://schemas.openxmlformats.org/officeDocument/2006/relationships" id="264" r:id="R04dc8f3bdb574c1e"/>
+    <p:sldId xmlns:r="http://schemas.openxmlformats.org/officeDocument/2006/relationships" id="265" r:id="Ra8337fd2f3db4750"/>
+    <p:sldId xmlns:r="http://schemas.openxmlformats.org/officeDocument/2006/relationships" id="266" r:id="Rcde03451423b4e36"/>
+    <p:sldId xmlns:r="http://schemas.openxmlformats.org/officeDocument/2006/relationships" id="267" r:id="Rff579a557e3841b0"/>
+    <p:sldId xmlns:r="http://schemas.openxmlformats.org/officeDocument/2006/relationships" id="268" r:id="Rf1ea90faec7f4021"/>
+    <p:sldId xmlns:r="http://schemas.openxmlformats.org/officeDocument/2006/relationships" id="269" r:id="R6e37013cdb534b8a"/>
+    <p:sldId xmlns:r="http://schemas.openxmlformats.org/officeDocument/2006/relationships" id="270" r:id="R0fe72f273acf4ac0"/>
+    <p:sldId xmlns:r="http://schemas.openxmlformats.org/officeDocument/2006/relationships" id="271" r:id="R6e0a3a6e4c0f4ac8"/>
+    <p:sldId xmlns:r="http://schemas.openxmlformats.org/officeDocument/2006/relationships" id="272" r:id="R93233fb774f94e54"/>
+    <p:sldId xmlns:r="http://schemas.openxmlformats.org/officeDocument/2006/relationships" id="273" r:id="R9c04e813fef746a3"/>
   </p:sldIdLst>
   <p:sldSz cx="12192000" cy="6858000"/>
   <p:notesSz cx="6858000" cy="9144000"/>
@@ -215,16 +215,16 @@
         <a:srgbClr val="96607D"/>
       </a:folHlink>
     </a:clrScheme>
-    <a:fontScheme name="Office">
+    <a:fontScheme name="">
       <a:majorFont>
-        <a:latin typeface="Calibri Light"/>
-        <a:ea typeface="Calibri Light"/>
-        <a:cs typeface="Calibri Light"/>
+        <a:latin typeface="Aptos"/>
+        <a:ea typeface=""/>
+        <a:cs typeface=""/>
       </a:majorFont>
       <a:minorFont>
-        <a:latin typeface="Calibri"/>
-        <a:ea typeface="Calibri"/>
-        <a:cs typeface="Calibri"/>
+        <a:latin typeface="Aptos"/>
+        <a:ea typeface=""/>
+        <a:cs typeface=""/>
       </a:minorFont>
     </a:fontScheme>
     <a:fmtScheme name="ChatGPT">
@@ -1299,7 +1299,7 @@
           <a:lstStyle xmlns:a="http://schemas.openxmlformats.org/drawingml/2006/main"/>
           <a:p xmlns:a="http://schemas.openxmlformats.org/drawingml/2006/main">
             <a:r>
-              <a:t>Đọc sơ đồ từ trái sang phải. Raw được kiểm tra schema và khóa, ETL ghi Silver/Gold, rolling features dùng lịch sử của từng engine, GroupKFold chọn model, final evaluation ghép nhãn test ở bước cuối. Nhánh Health Index là phân tích phụ. Nguồn hình: assets/diagrams/fd001-pipeline.png.</a:t>
+              <a:t>Đọc sơ đồ từ trái sang phải. Trong một subset, reader đọc train/test cùng schema, thêm split rồi union theo dòng. Silver giữ observations typed trong Parquet; SQLite chỉ có engine_summary và train_targets. Rolling features dùng lịch sử của từng engine, GroupKFold chọn model, final evaluation ghép nhãn test ở bước cuối. PySpark hiện tái hiện ETL local để parity; chưa có query engine trên Parquet, Airflow hoặc Power BI.</a:t>
             </a:r>
           </a:p>
         </p:txBody>
@@ -1439,7 +1439,7 @@
           <a:lstStyle xmlns:a="http://schemas.openxmlformats.org/drawingml/2006/main"/>
           <a:p xmlns:a="http://schemas.openxmlformats.org/drawingml/2006/main">
             <a:r>
-              <a:t>Window dài 30. Ví dụ tại cycle 170 dùng 141–170, không dùng 171. Với mỗi trong 21 sensor, tính last, mean, standard deviation, min, max, slope. Tổng 126 đặc trưng. Artifact hiện có 27.927 window. Không nối window qua hai engine.</a:t>
+              <a:t>Window dài 30. Ví dụ tại cycle 170 dùng 141–170, không dùng 171. Với mỗi trong 21 sensor, tính last, mean, standard deviation, min, max, slope. Tổng 126 đặc trưng. Artifact hiện có 27.927 window. Observation và feature dùng cùng khóa; modeling join feature với train target one-to-one. Ba setting không đưa vào X của model RUL. Không nối window qua hai engine.</a:t>
             </a:r>
           </a:p>
         </p:txBody>
@@ -1717,7 +1717,7 @@
   </p:cSld>
   <p:clrMap bg1="lt1" tx1="dk1" bg2="lt2" tx2="dk2" accent1="accent1" accent2="accent2" accent3="accent3" accent4="accent4" accent5="accent5" accent6="accent6" hlink="hlink" folHlink="folHlink"/>
   <p:sldLayoutIdLst>
-    <p:sldLayoutId xmlns:r="http://schemas.openxmlformats.org/officeDocument/2006/relationships" id="2147483649" r:id="Re41c164fe7e74f1a"/>
+    <p:sldLayoutId xmlns:r="http://schemas.openxmlformats.org/officeDocument/2006/relationships" id="2147483649" r:id="R23a877c3ffd14d1a"/>
   </p:sldLayoutIdLst>
   <p:txStyles>
     <p:titleStyle>
@@ -2040,16 +2040,16 @@
         <a:srgbClr val="96607D"/>
       </a:folHlink>
     </a:clrScheme>
-    <a:fontScheme name="Office">
+    <a:fontScheme name="">
       <a:majorFont>
-        <a:latin typeface="Calibri Light"/>
-        <a:ea typeface="Calibri Light"/>
-        <a:cs typeface="Calibri Light"/>
+        <a:latin typeface="Aptos"/>
+        <a:ea typeface=""/>
+        <a:cs typeface=""/>
       </a:majorFont>
       <a:minorFont>
-        <a:latin typeface="Calibri"/>
-        <a:ea typeface="Calibri"/>
-        <a:cs typeface="Calibri"/>
+        <a:latin typeface="Aptos"/>
+        <a:ea typeface=""/>
+        <a:cs typeface=""/>
       </a:minorFont>
     </a:fontScheme>
     <a:fmtScheme name="ChatGPT">
@@ -2268,7 +2268,7 @@
           <p:cNvPr id="5" name="">
             <a:extLst xmlns:a="http://schemas.openxmlformats.org/drawingml/2006/main">
               <a:ext uri="{FF2B5EF4-FFF2-40B4-BE49-F238E27FC236}">
-                <a16:creationId xmlns:a16="http://schemas.microsoft.com/office/drawing/2014/main" id="{591BE462-9FA0-45FD-979B-4D3032FB84FF}"/>
+                <a16:creationId xmlns:a16="http://schemas.microsoft.com/office/drawing/2014/main" id="{820BAF43-6BF8-444F-B768-F9877AFC1B85}"/>
               </a:ext>
             </a:extLst>
           </p:cNvPr>
@@ -2329,7 +2329,7 @@
           <p:cNvPr id="2" name="">
             <a:extLst xmlns:a="http://schemas.openxmlformats.org/drawingml/2006/main">
               <a:ext uri="{FF2B5EF4-FFF2-40B4-BE49-F238E27FC236}">
-                <a16:creationId xmlns:a16="http://schemas.microsoft.com/office/drawing/2014/main" id="{788FEA61-D633-4599-B032-C746A875AEAC}"/>
+                <a16:creationId xmlns:a16="http://schemas.microsoft.com/office/drawing/2014/main" id="{D7DC8F3F-453D-492A-AEE1-59EF636127CE}"/>
               </a:ext>
             </a:extLst>
           </p:cNvPr>
@@ -2390,7 +2390,7 @@
           <p:cNvPr id="3" name="">
             <a:extLst xmlns:a="http://schemas.openxmlformats.org/drawingml/2006/main">
               <a:ext uri="{FF2B5EF4-FFF2-40B4-BE49-F238E27FC236}">
-                <a16:creationId xmlns:a16="http://schemas.microsoft.com/office/drawing/2014/main" id="{8154D036-4F90-4FAC-81C6-058551F233EE}"/>
+                <a16:creationId xmlns:a16="http://schemas.microsoft.com/office/drawing/2014/main" id="{38663B2D-7857-4970-A631-663AB3739ABF}"/>
               </a:ext>
             </a:extLst>
           </p:cNvPr>
@@ -2451,7 +2451,7 @@
           <p:cNvPr id="4" name="">
             <a:extLst xmlns:a="http://schemas.openxmlformats.org/drawingml/2006/main">
               <a:ext uri="{FF2B5EF4-FFF2-40B4-BE49-F238E27FC236}">
-                <a16:creationId xmlns:a16="http://schemas.microsoft.com/office/drawing/2014/main" id="{105A829B-F7DE-47C0-AE60-B15984C20EDC}"/>
+                <a16:creationId xmlns:a16="http://schemas.microsoft.com/office/drawing/2014/main" id="{6C096419-1B36-47AA-BC99-C896FE40E8BE}"/>
               </a:ext>
             </a:extLst>
           </p:cNvPr>
@@ -2510,7 +2510,7 @@
     </p:spTree>
     <p:extLst>
       <p:ext uri="{BB962C8B-B14F-4D97-AF65-F5344CB8AC3E}">
-        <p14:creationId xmlns:p14="http://schemas.microsoft.com/office/powerpoint/2010/main" val="2147292593"/>
+        <p14:creationId xmlns:p14="http://schemas.microsoft.com/office/powerpoint/2010/main" val="1526597498"/>
       </p:ext>
     </p:extLst>
   </p:cSld>
@@ -2541,7 +2541,7 @@
           <p:cNvPr id="11" name="">
             <a:extLst xmlns:a="http://schemas.openxmlformats.org/drawingml/2006/main">
               <a:ext uri="{FF2B5EF4-FFF2-40B4-BE49-F238E27FC236}">
-                <a16:creationId xmlns:a16="http://schemas.microsoft.com/office/drawing/2014/main" id="{0B7B2763-2B1C-49A2-8210-19EB93D6623E}"/>
+                <a16:creationId xmlns:a16="http://schemas.microsoft.com/office/drawing/2014/main" id="{A5ECBB1B-BE9F-42EE-8943-1E1A9D55B8A7}"/>
               </a:ext>
             </a:extLst>
           </p:cNvPr>
@@ -2602,7 +2602,7 @@
           <p:cNvPr id="2" name="">
             <a:extLst xmlns:a="http://schemas.openxmlformats.org/drawingml/2006/main">
               <a:ext uri="{FF2B5EF4-FFF2-40B4-BE49-F238E27FC236}">
-                <a16:creationId xmlns:a16="http://schemas.microsoft.com/office/drawing/2014/main" id="{F382C42A-C11B-456B-92D5-4B0E2FDB1312}"/>
+                <a16:creationId xmlns:a16="http://schemas.microsoft.com/office/drawing/2014/main" id="{3F8BBEDD-B69B-4E00-BB5E-36D3A1B8A584}"/>
               </a:ext>
             </a:extLst>
           </p:cNvPr>
@@ -2663,7 +2663,7 @@
           <p:cNvPr id="3" name="">
             <a:extLst xmlns:a="http://schemas.openxmlformats.org/drawingml/2006/main">
               <a:ext uri="{FF2B5EF4-FFF2-40B4-BE49-F238E27FC236}">
-                <a16:creationId xmlns:a16="http://schemas.microsoft.com/office/drawing/2014/main" id="{BE352025-3334-416E-8AFE-7DDA1E1B2C1E}"/>
+                <a16:creationId xmlns:a16="http://schemas.microsoft.com/office/drawing/2014/main" id="{898EAAAC-6276-467E-9511-3AADCE0A4431}"/>
               </a:ext>
             </a:extLst>
           </p:cNvPr>
@@ -2724,7 +2724,7 @@
           <p:cNvPr id="4" name="">
             <a:extLst xmlns:a="http://schemas.openxmlformats.org/drawingml/2006/main">
               <a:ext uri="{FF2B5EF4-FFF2-40B4-BE49-F238E27FC236}">
-                <a16:creationId xmlns:a16="http://schemas.microsoft.com/office/drawing/2014/main" id="{B958C523-A7B3-45E7-A69A-0AC5FDDD9A1D}"/>
+                <a16:creationId xmlns:a16="http://schemas.microsoft.com/office/drawing/2014/main" id="{6E2772D2-B940-488C-9F6F-2E9CF91E299F}"/>
               </a:ext>
             </a:extLst>
           </p:cNvPr>
@@ -2789,7 +2789,7 @@
           <p:nvPr/>
         </p:nvPicPr>
         <p:blipFill>
-          <a:blip xmlns:r="http://schemas.openxmlformats.org/officeDocument/2006/relationships" xmlns:a="http://schemas.openxmlformats.org/drawingml/2006/main" r:embed="R07eda72a577d4fd1"/>
+          <a:blip xmlns:r="http://schemas.openxmlformats.org/officeDocument/2006/relationships" xmlns:a="http://schemas.openxmlformats.org/drawingml/2006/main" r:embed="Re2fde293eeeb4298"/>
           <a:stretch xmlns:a="http://schemas.openxmlformats.org/drawingml/2006/main"/>
         </p:blipFill>
         <p:spPr>
@@ -2807,7 +2807,7 @@
           <p:cNvPr id="6" name="">
             <a:extLst xmlns:a="http://schemas.openxmlformats.org/drawingml/2006/main">
               <a:ext uri="{FF2B5EF4-FFF2-40B4-BE49-F238E27FC236}">
-                <a16:creationId xmlns:a16="http://schemas.microsoft.com/office/drawing/2014/main" id="{E3154D58-B44A-488F-B7D7-A714C5E875A6}"/>
+                <a16:creationId xmlns:a16="http://schemas.microsoft.com/office/drawing/2014/main" id="{188F287B-027F-4716-856D-7540C15A47D3}"/>
               </a:ext>
             </a:extLst>
           </p:cNvPr>
@@ -2868,7 +2868,7 @@
           <p:cNvPr id="7" name="">
             <a:extLst xmlns:a="http://schemas.openxmlformats.org/drawingml/2006/main">
               <a:ext uri="{FF2B5EF4-FFF2-40B4-BE49-F238E27FC236}">
-                <a16:creationId xmlns:a16="http://schemas.microsoft.com/office/drawing/2014/main" id="{09420CCD-2AAF-414D-BD93-D577DD610489}"/>
+                <a16:creationId xmlns:a16="http://schemas.microsoft.com/office/drawing/2014/main" id="{CC4003F5-27B7-4D54-A5A3-6C583CDF6AF2}"/>
               </a:ext>
             </a:extLst>
           </p:cNvPr>
@@ -2929,7 +2929,7 @@
           <p:cNvPr id="8" name="">
             <a:extLst xmlns:a="http://schemas.openxmlformats.org/drawingml/2006/main">
               <a:ext uri="{FF2B5EF4-FFF2-40B4-BE49-F238E27FC236}">
-                <a16:creationId xmlns:a16="http://schemas.microsoft.com/office/drawing/2014/main" id="{F1E077B3-F368-4BA3-B22E-9193E0C7E8BF}"/>
+                <a16:creationId xmlns:a16="http://schemas.microsoft.com/office/drawing/2014/main" id="{D919B022-222E-4696-BBBB-5D23FE09D9BE}"/>
               </a:ext>
             </a:extLst>
           </p:cNvPr>
@@ -2990,7 +2990,7 @@
           <p:cNvPr id="9" name="">
             <a:extLst xmlns:a="http://schemas.openxmlformats.org/drawingml/2006/main">
               <a:ext uri="{FF2B5EF4-FFF2-40B4-BE49-F238E27FC236}">
-                <a16:creationId xmlns:a16="http://schemas.microsoft.com/office/drawing/2014/main" id="{509D60E5-95A0-4A44-A79C-6C00DB6584F0}"/>
+                <a16:creationId xmlns:a16="http://schemas.microsoft.com/office/drawing/2014/main" id="{C774844A-BA3B-495C-8BF2-CB6C5A04ADFB}"/>
               </a:ext>
             </a:extLst>
           </p:cNvPr>
@@ -3051,7 +3051,7 @@
           <p:cNvPr id="10" name="">
             <a:extLst xmlns:a="http://schemas.openxmlformats.org/drawingml/2006/main">
               <a:ext uri="{FF2B5EF4-FFF2-40B4-BE49-F238E27FC236}">
-                <a16:creationId xmlns:a16="http://schemas.microsoft.com/office/drawing/2014/main" id="{006635FA-73B8-42AD-98DF-1458F3B29814}"/>
+                <a16:creationId xmlns:a16="http://schemas.microsoft.com/office/drawing/2014/main" id="{C6E72D6E-BF37-4CA1-9674-6460CEE54FF9}"/>
               </a:ext>
             </a:extLst>
           </p:cNvPr>
@@ -3110,7 +3110,7 @@
     </p:spTree>
     <p:extLst>
       <p:ext uri="{BB962C8B-B14F-4D97-AF65-F5344CB8AC3E}">
-        <p14:creationId xmlns:p14="http://schemas.microsoft.com/office/powerpoint/2010/main" val="1868418869"/>
+        <p14:creationId xmlns:p14="http://schemas.microsoft.com/office/powerpoint/2010/main" val="555843310"/>
       </p:ext>
     </p:extLst>
   </p:cSld>
@@ -3141,7 +3141,7 @@
           <p:cNvPr id="9" name="">
             <a:extLst xmlns:a="http://schemas.openxmlformats.org/drawingml/2006/main">
               <a:ext uri="{FF2B5EF4-FFF2-40B4-BE49-F238E27FC236}">
-                <a16:creationId xmlns:a16="http://schemas.microsoft.com/office/drawing/2014/main" id="{3EC9F2C1-F152-4CE9-937E-F971EA43AD7A}"/>
+                <a16:creationId xmlns:a16="http://schemas.microsoft.com/office/drawing/2014/main" id="{CB4CAD8E-8955-4D72-BE01-55D17BED90A2}"/>
               </a:ext>
             </a:extLst>
           </p:cNvPr>
@@ -3202,7 +3202,7 @@
           <p:cNvPr id="2" name="">
             <a:extLst xmlns:a="http://schemas.openxmlformats.org/drawingml/2006/main">
               <a:ext uri="{FF2B5EF4-FFF2-40B4-BE49-F238E27FC236}">
-                <a16:creationId xmlns:a16="http://schemas.microsoft.com/office/drawing/2014/main" id="{10D721F9-239E-46EB-9E9C-3D0C4AEB0BE6}"/>
+                <a16:creationId xmlns:a16="http://schemas.microsoft.com/office/drawing/2014/main" id="{F6C7FDC0-522B-434B-B5C6-8021EB2CBDEF}"/>
               </a:ext>
             </a:extLst>
           </p:cNvPr>
@@ -3263,7 +3263,7 @@
           <p:cNvPr id="3" name="">
             <a:extLst xmlns:a="http://schemas.openxmlformats.org/drawingml/2006/main">
               <a:ext uri="{FF2B5EF4-FFF2-40B4-BE49-F238E27FC236}">
-                <a16:creationId xmlns:a16="http://schemas.microsoft.com/office/drawing/2014/main" id="{742FF340-4519-4800-BCD7-33A9518CD9C8}"/>
+                <a16:creationId xmlns:a16="http://schemas.microsoft.com/office/drawing/2014/main" id="{490FFF31-399E-4633-90F0-5A950EDA1538}"/>
               </a:ext>
             </a:extLst>
           </p:cNvPr>
@@ -3324,7 +3324,7 @@
           <p:cNvPr id="4" name="">
             <a:extLst xmlns:a="http://schemas.openxmlformats.org/drawingml/2006/main">
               <a:ext uri="{FF2B5EF4-FFF2-40B4-BE49-F238E27FC236}">
-                <a16:creationId xmlns:a16="http://schemas.microsoft.com/office/drawing/2014/main" id="{1AE2B875-A107-4DF6-BB1F-92E48E319857}"/>
+                <a16:creationId xmlns:a16="http://schemas.microsoft.com/office/drawing/2014/main" id="{10955D9A-1EE6-42D9-86D8-1C8FB3B8E736}"/>
               </a:ext>
             </a:extLst>
           </p:cNvPr>
@@ -3389,7 +3389,7 @@
           <p:nvPr/>
         </p:nvPicPr>
         <p:blipFill>
-          <a:blip xmlns:r="http://schemas.openxmlformats.org/officeDocument/2006/relationships" xmlns:a="http://schemas.openxmlformats.org/drawingml/2006/main" r:embed="Ra8012491e5fa4881"/>
+          <a:blip xmlns:r="http://schemas.openxmlformats.org/officeDocument/2006/relationships" xmlns:a="http://schemas.openxmlformats.org/drawingml/2006/main" r:embed="Rd04fc30a9bea4d89"/>
           <a:stretch xmlns:a="http://schemas.openxmlformats.org/drawingml/2006/main"/>
         </p:blipFill>
         <p:spPr>
@@ -3690,7 +3690,7 @@
           <p:cNvPr id="7" name="">
             <a:extLst xmlns:a="http://schemas.openxmlformats.org/drawingml/2006/main">
               <a:ext uri="{FF2B5EF4-FFF2-40B4-BE49-F238E27FC236}">
-                <a16:creationId xmlns:a16="http://schemas.microsoft.com/office/drawing/2014/main" id="{AC3A8413-A1CD-4408-B8C9-A2DB11AB76A2}"/>
+                <a16:creationId xmlns:a16="http://schemas.microsoft.com/office/drawing/2014/main" id="{68EE72FA-3DBA-44AA-BA68-FCB0753B4491}"/>
               </a:ext>
             </a:extLst>
           </p:cNvPr>
@@ -3751,7 +3751,7 @@
           <p:cNvPr id="8" name="">
             <a:extLst xmlns:a="http://schemas.openxmlformats.org/drawingml/2006/main">
               <a:ext uri="{FF2B5EF4-FFF2-40B4-BE49-F238E27FC236}">
-                <a16:creationId xmlns:a16="http://schemas.microsoft.com/office/drawing/2014/main" id="{33C0F27D-1983-4B9D-84F8-B46BE16E874F}"/>
+                <a16:creationId xmlns:a16="http://schemas.microsoft.com/office/drawing/2014/main" id="{40313237-0527-4202-B01E-1C79186CA7CF}"/>
               </a:ext>
             </a:extLst>
           </p:cNvPr>
@@ -3810,7 +3810,7 @@
     </p:spTree>
     <p:extLst>
       <p:ext uri="{BB962C8B-B14F-4D97-AF65-F5344CB8AC3E}">
-        <p14:creationId xmlns:p14="http://schemas.microsoft.com/office/powerpoint/2010/main" val="1285266853"/>
+        <p14:creationId xmlns:p14="http://schemas.microsoft.com/office/powerpoint/2010/main" val="1893167351"/>
       </p:ext>
     </p:extLst>
   </p:cSld>
@@ -3841,7 +3841,7 @@
           <p:cNvPr id="11" name="">
             <a:extLst xmlns:a="http://schemas.openxmlformats.org/drawingml/2006/main">
               <a:ext uri="{FF2B5EF4-FFF2-40B4-BE49-F238E27FC236}">
-                <a16:creationId xmlns:a16="http://schemas.microsoft.com/office/drawing/2014/main" id="{D66A9032-5BC0-4149-A4D4-DC146B0CDF97}"/>
+                <a16:creationId xmlns:a16="http://schemas.microsoft.com/office/drawing/2014/main" id="{B14F63C6-641E-4D8C-898B-6DEB3C09196C}"/>
               </a:ext>
             </a:extLst>
           </p:cNvPr>
@@ -3902,7 +3902,7 @@
           <p:cNvPr id="2" name="">
             <a:extLst xmlns:a="http://schemas.openxmlformats.org/drawingml/2006/main">
               <a:ext uri="{FF2B5EF4-FFF2-40B4-BE49-F238E27FC236}">
-                <a16:creationId xmlns:a16="http://schemas.microsoft.com/office/drawing/2014/main" id="{E78E9B39-E68B-4F8F-BFCA-D4ACEEF6029C}"/>
+                <a16:creationId xmlns:a16="http://schemas.microsoft.com/office/drawing/2014/main" id="{BF0B437C-7FF2-4188-BDFF-B64CF695A957}"/>
               </a:ext>
             </a:extLst>
           </p:cNvPr>
@@ -3963,7 +3963,7 @@
           <p:cNvPr id="3" name="">
             <a:extLst xmlns:a="http://schemas.openxmlformats.org/drawingml/2006/main">
               <a:ext uri="{FF2B5EF4-FFF2-40B4-BE49-F238E27FC236}">
-                <a16:creationId xmlns:a16="http://schemas.microsoft.com/office/drawing/2014/main" id="{A62E885C-4229-4B73-8D9B-BBD72B5883FD}"/>
+                <a16:creationId xmlns:a16="http://schemas.microsoft.com/office/drawing/2014/main" id="{75EFE17E-9C43-49DA-9A1B-83DD7D61E880}"/>
               </a:ext>
             </a:extLst>
           </p:cNvPr>
@@ -4024,7 +4024,7 @@
           <p:cNvPr id="4" name="">
             <a:extLst xmlns:a="http://schemas.openxmlformats.org/drawingml/2006/main">
               <a:ext uri="{FF2B5EF4-FFF2-40B4-BE49-F238E27FC236}">
-                <a16:creationId xmlns:a16="http://schemas.microsoft.com/office/drawing/2014/main" id="{733545AF-1603-41C4-9686-37559E5C0246}"/>
+                <a16:creationId xmlns:a16="http://schemas.microsoft.com/office/drawing/2014/main" id="{68ED6D62-E459-4D0A-950D-D439E540B559}"/>
               </a:ext>
             </a:extLst>
           </p:cNvPr>
@@ -4089,7 +4089,7 @@
           <p:nvPr/>
         </p:nvPicPr>
         <p:blipFill>
-          <a:blip xmlns:r="http://schemas.openxmlformats.org/officeDocument/2006/relationships" xmlns:a="http://schemas.openxmlformats.org/drawingml/2006/main" r:embed="Rbb433cb00d7b4833"/>
+          <a:blip xmlns:r="http://schemas.openxmlformats.org/officeDocument/2006/relationships" xmlns:a="http://schemas.openxmlformats.org/drawingml/2006/main" r:embed="R2031ddfb6ecf4761"/>
           <a:stretch xmlns:a="http://schemas.openxmlformats.org/drawingml/2006/main"/>
         </p:blipFill>
         <p:spPr>
@@ -4107,7 +4107,7 @@
           <p:cNvPr id="6" name="">
             <a:extLst xmlns:a="http://schemas.openxmlformats.org/drawingml/2006/main">
               <a:ext uri="{FF2B5EF4-FFF2-40B4-BE49-F238E27FC236}">
-                <a16:creationId xmlns:a16="http://schemas.microsoft.com/office/drawing/2014/main" id="{F05CDF73-F686-4CDD-8238-1AF2CA3D7DCC}"/>
+                <a16:creationId xmlns:a16="http://schemas.microsoft.com/office/drawing/2014/main" id="{ED7F2D31-6BED-44C7-B603-2B592140FE61}"/>
               </a:ext>
             </a:extLst>
           </p:cNvPr>
@@ -4168,7 +4168,7 @@
           <p:cNvPr id="7" name="">
             <a:extLst xmlns:a="http://schemas.openxmlformats.org/drawingml/2006/main">
               <a:ext uri="{FF2B5EF4-FFF2-40B4-BE49-F238E27FC236}">
-                <a16:creationId xmlns:a16="http://schemas.microsoft.com/office/drawing/2014/main" id="{7E2E8D65-C249-4F4B-BF39-F39203AB9E61}"/>
+                <a16:creationId xmlns:a16="http://schemas.microsoft.com/office/drawing/2014/main" id="{506FC8CF-C332-4CB2-9633-FBA3561B831C}"/>
               </a:ext>
             </a:extLst>
           </p:cNvPr>
@@ -4229,7 +4229,7 @@
           <p:cNvPr id="8" name="">
             <a:extLst xmlns:a="http://schemas.openxmlformats.org/drawingml/2006/main">
               <a:ext uri="{FF2B5EF4-FFF2-40B4-BE49-F238E27FC236}">
-                <a16:creationId xmlns:a16="http://schemas.microsoft.com/office/drawing/2014/main" id="{A0887943-1E8C-47A2-9441-CF4D8AA0513C}"/>
+                <a16:creationId xmlns:a16="http://schemas.microsoft.com/office/drawing/2014/main" id="{4787B779-A202-4353-9698-57256D3F47D1}"/>
               </a:ext>
             </a:extLst>
           </p:cNvPr>
@@ -4290,7 +4290,7 @@
           <p:cNvPr id="9" name="">
             <a:extLst xmlns:a="http://schemas.openxmlformats.org/drawingml/2006/main">
               <a:ext uri="{FF2B5EF4-FFF2-40B4-BE49-F238E27FC236}">
-                <a16:creationId xmlns:a16="http://schemas.microsoft.com/office/drawing/2014/main" id="{92DA953E-1CC1-4BAB-9D18-EA51B3F586F0}"/>
+                <a16:creationId xmlns:a16="http://schemas.microsoft.com/office/drawing/2014/main" id="{A54505EA-C27A-408A-A4B3-A771372A55A0}"/>
               </a:ext>
             </a:extLst>
           </p:cNvPr>
@@ -4351,7 +4351,7 @@
           <p:cNvPr id="10" name="">
             <a:extLst xmlns:a="http://schemas.openxmlformats.org/drawingml/2006/main">
               <a:ext uri="{FF2B5EF4-FFF2-40B4-BE49-F238E27FC236}">
-                <a16:creationId xmlns:a16="http://schemas.microsoft.com/office/drawing/2014/main" id="{354254A1-FEE5-44C9-8644-CA0F9A9FC9EA}"/>
+                <a16:creationId xmlns:a16="http://schemas.microsoft.com/office/drawing/2014/main" id="{8C547502-9A64-4432-A9E2-94D6755B371F}"/>
               </a:ext>
             </a:extLst>
           </p:cNvPr>
@@ -4410,7 +4410,7 @@
     </p:spTree>
     <p:extLst>
       <p:ext uri="{BB962C8B-B14F-4D97-AF65-F5344CB8AC3E}">
-        <p14:creationId xmlns:p14="http://schemas.microsoft.com/office/powerpoint/2010/main" val="1283968221"/>
+        <p14:creationId xmlns:p14="http://schemas.microsoft.com/office/powerpoint/2010/main" val="1394798085"/>
       </p:ext>
     </p:extLst>
   </p:cSld>
@@ -4441,7 +4441,7 @@
           <p:cNvPr id="11" name="">
             <a:extLst xmlns:a="http://schemas.openxmlformats.org/drawingml/2006/main">
               <a:ext uri="{FF2B5EF4-FFF2-40B4-BE49-F238E27FC236}">
-                <a16:creationId xmlns:a16="http://schemas.microsoft.com/office/drawing/2014/main" id="{9AF86465-26BF-4B6D-80A9-F865018FA73A}"/>
+                <a16:creationId xmlns:a16="http://schemas.microsoft.com/office/drawing/2014/main" id="{FCCC9E0C-4062-4DC5-8B6E-9098524583D3}"/>
               </a:ext>
             </a:extLst>
           </p:cNvPr>
@@ -4502,7 +4502,7 @@
           <p:cNvPr id="2" name="">
             <a:extLst xmlns:a="http://schemas.openxmlformats.org/drawingml/2006/main">
               <a:ext uri="{FF2B5EF4-FFF2-40B4-BE49-F238E27FC236}">
-                <a16:creationId xmlns:a16="http://schemas.microsoft.com/office/drawing/2014/main" id="{21616687-F611-4A1F-A22D-E921354BCD1A}"/>
+                <a16:creationId xmlns:a16="http://schemas.microsoft.com/office/drawing/2014/main" id="{D71731A3-A47F-4885-9A7B-2BE79876BB71}"/>
               </a:ext>
             </a:extLst>
           </p:cNvPr>
@@ -4563,7 +4563,7 @@
           <p:cNvPr id="3" name="">
             <a:extLst xmlns:a="http://schemas.openxmlformats.org/drawingml/2006/main">
               <a:ext uri="{FF2B5EF4-FFF2-40B4-BE49-F238E27FC236}">
-                <a16:creationId xmlns:a16="http://schemas.microsoft.com/office/drawing/2014/main" id="{E19651D2-8038-480A-A5CF-7A4E7A25FEBB}"/>
+                <a16:creationId xmlns:a16="http://schemas.microsoft.com/office/drawing/2014/main" id="{57188FCC-A1A4-479B-BF11-64D73F4B9D4A}"/>
               </a:ext>
             </a:extLst>
           </p:cNvPr>
@@ -4624,7 +4624,7 @@
           <p:cNvPr id="4" name="">
             <a:extLst xmlns:a="http://schemas.openxmlformats.org/drawingml/2006/main">
               <a:ext uri="{FF2B5EF4-FFF2-40B4-BE49-F238E27FC236}">
-                <a16:creationId xmlns:a16="http://schemas.microsoft.com/office/drawing/2014/main" id="{A6EA5691-CA52-4B16-8E64-92D81147FCBB}"/>
+                <a16:creationId xmlns:a16="http://schemas.microsoft.com/office/drawing/2014/main" id="{2C37D731-A196-4E56-BF24-F082CB1D27E2}"/>
               </a:ext>
             </a:extLst>
           </p:cNvPr>
@@ -4685,7 +4685,7 @@
           <p:cNvPr id="5" name="">
             <a:extLst xmlns:a="http://schemas.openxmlformats.org/drawingml/2006/main">
               <a:ext uri="{FF2B5EF4-FFF2-40B4-BE49-F238E27FC236}">
-                <a16:creationId xmlns:a16="http://schemas.microsoft.com/office/drawing/2014/main" id="{3FF8AF82-F680-4BE8-9BEB-98D01363A119}"/>
+                <a16:creationId xmlns:a16="http://schemas.microsoft.com/office/drawing/2014/main" id="{A46A6B24-3711-44C9-8ACA-24AA65B3C38B}"/>
               </a:ext>
             </a:extLst>
           </p:cNvPr>
@@ -4746,7 +4746,7 @@
           <p:cNvPr id="6" name="">
             <a:extLst xmlns:a="http://schemas.openxmlformats.org/drawingml/2006/main">
               <a:ext uri="{FF2B5EF4-FFF2-40B4-BE49-F238E27FC236}">
-                <a16:creationId xmlns:a16="http://schemas.microsoft.com/office/drawing/2014/main" id="{03200E5A-9980-4632-8EEE-314941AEF9AF}"/>
+                <a16:creationId xmlns:a16="http://schemas.microsoft.com/office/drawing/2014/main" id="{695EA9E0-77FC-4231-8360-CDD73ACAC766}"/>
               </a:ext>
             </a:extLst>
           </p:cNvPr>
@@ -4807,7 +4807,7 @@
           <p:cNvPr id="7" name="">
             <a:extLst xmlns:a="http://schemas.openxmlformats.org/drawingml/2006/main">
               <a:ext uri="{FF2B5EF4-FFF2-40B4-BE49-F238E27FC236}">
-                <a16:creationId xmlns:a16="http://schemas.microsoft.com/office/drawing/2014/main" id="{5F72297F-4D0D-40FA-A36C-EDE0585F8129}"/>
+                <a16:creationId xmlns:a16="http://schemas.microsoft.com/office/drawing/2014/main" id="{974A7809-7EBF-4935-B069-BC4FF1D9060F}"/>
               </a:ext>
             </a:extLst>
           </p:cNvPr>
@@ -4868,7 +4868,7 @@
           <p:cNvPr id="8" name="">
             <a:extLst xmlns:a="http://schemas.openxmlformats.org/drawingml/2006/main">
               <a:ext uri="{FF2B5EF4-FFF2-40B4-BE49-F238E27FC236}">
-                <a16:creationId xmlns:a16="http://schemas.microsoft.com/office/drawing/2014/main" id="{D4FB69E5-9C9B-4F0A-B26E-1F83BA5AAE7F}"/>
+                <a16:creationId xmlns:a16="http://schemas.microsoft.com/office/drawing/2014/main" id="{5FCB5A3C-8C74-41F6-BFB8-38239505C743}"/>
               </a:ext>
             </a:extLst>
           </p:cNvPr>
@@ -4929,7 +4929,7 @@
           <p:cNvPr id="9" name="">
             <a:extLst xmlns:a="http://schemas.openxmlformats.org/drawingml/2006/main">
               <a:ext uri="{FF2B5EF4-FFF2-40B4-BE49-F238E27FC236}">
-                <a16:creationId xmlns:a16="http://schemas.microsoft.com/office/drawing/2014/main" id="{626200E8-6309-4504-B7FB-D7EEA85E2F62}"/>
+                <a16:creationId xmlns:a16="http://schemas.microsoft.com/office/drawing/2014/main" id="{0754F3D1-C9DB-4EBD-8FBD-16B4666B53BA}"/>
               </a:ext>
             </a:extLst>
           </p:cNvPr>
@@ -4990,7 +4990,7 @@
           <p:cNvPr id="10" name="">
             <a:extLst xmlns:a="http://schemas.openxmlformats.org/drawingml/2006/main">
               <a:ext uri="{FF2B5EF4-FFF2-40B4-BE49-F238E27FC236}">
-                <a16:creationId xmlns:a16="http://schemas.microsoft.com/office/drawing/2014/main" id="{8663E835-E9AE-42AB-9C2B-AAEA35FF51E8}"/>
+                <a16:creationId xmlns:a16="http://schemas.microsoft.com/office/drawing/2014/main" id="{99B392D0-4927-4F1E-AEB9-74B2274B7314}"/>
               </a:ext>
             </a:extLst>
           </p:cNvPr>
@@ -5049,7 +5049,7 @@
     </p:spTree>
     <p:extLst>
       <p:ext uri="{BB962C8B-B14F-4D97-AF65-F5344CB8AC3E}">
-        <p14:creationId xmlns:p14="http://schemas.microsoft.com/office/powerpoint/2010/main" val="1156684681"/>
+        <p14:creationId xmlns:p14="http://schemas.microsoft.com/office/powerpoint/2010/main" val="1573737211"/>
       </p:ext>
     </p:extLst>
   </p:cSld>
@@ -5080,7 +5080,7 @@
           <p:cNvPr id="11" name="">
             <a:extLst xmlns:a="http://schemas.openxmlformats.org/drawingml/2006/main">
               <a:ext uri="{FF2B5EF4-FFF2-40B4-BE49-F238E27FC236}">
-                <a16:creationId xmlns:a16="http://schemas.microsoft.com/office/drawing/2014/main" id="{741B6DE7-7A63-4AF3-9983-83FFC99F88CD}"/>
+                <a16:creationId xmlns:a16="http://schemas.microsoft.com/office/drawing/2014/main" id="{657AC37D-C4E7-4307-81E6-397D8E06F970}"/>
               </a:ext>
             </a:extLst>
           </p:cNvPr>
@@ -5141,7 +5141,7 @@
           <p:cNvPr id="2" name="">
             <a:extLst xmlns:a="http://schemas.openxmlformats.org/drawingml/2006/main">
               <a:ext uri="{FF2B5EF4-FFF2-40B4-BE49-F238E27FC236}">
-                <a16:creationId xmlns:a16="http://schemas.microsoft.com/office/drawing/2014/main" id="{B62F893C-F757-46A0-9F98-93A277EAD64D}"/>
+                <a16:creationId xmlns:a16="http://schemas.microsoft.com/office/drawing/2014/main" id="{77541248-89B2-40C0-ABE3-E1AD16C24993}"/>
               </a:ext>
             </a:extLst>
           </p:cNvPr>
@@ -5202,7 +5202,7 @@
           <p:cNvPr id="3" name="">
             <a:extLst xmlns:a="http://schemas.openxmlformats.org/drawingml/2006/main">
               <a:ext uri="{FF2B5EF4-FFF2-40B4-BE49-F238E27FC236}">
-                <a16:creationId xmlns:a16="http://schemas.microsoft.com/office/drawing/2014/main" id="{75E74F10-65F1-4BC6-B141-3F32FAD3961B}"/>
+                <a16:creationId xmlns:a16="http://schemas.microsoft.com/office/drawing/2014/main" id="{DFB159C5-4400-484E-94B4-41988CE58BBF}"/>
               </a:ext>
             </a:extLst>
           </p:cNvPr>
@@ -5263,7 +5263,7 @@
           <p:cNvPr id="4" name="">
             <a:extLst xmlns:a="http://schemas.openxmlformats.org/drawingml/2006/main">
               <a:ext uri="{FF2B5EF4-FFF2-40B4-BE49-F238E27FC236}">
-                <a16:creationId xmlns:a16="http://schemas.microsoft.com/office/drawing/2014/main" id="{D825E92B-7EBF-4F7A-826F-B4623816CD14}"/>
+                <a16:creationId xmlns:a16="http://schemas.microsoft.com/office/drawing/2014/main" id="{3AC781BD-E1F4-4168-9E78-609A0EC1AC89}"/>
               </a:ext>
             </a:extLst>
           </p:cNvPr>
@@ -5324,7 +5324,7 @@
           <p:cNvPr id="5" name="">
             <a:extLst xmlns:a="http://schemas.openxmlformats.org/drawingml/2006/main">
               <a:ext uri="{FF2B5EF4-FFF2-40B4-BE49-F238E27FC236}">
-                <a16:creationId xmlns:a16="http://schemas.microsoft.com/office/drawing/2014/main" id="{D67CFE22-F841-4976-B8F8-BA76DF82A9C9}"/>
+                <a16:creationId xmlns:a16="http://schemas.microsoft.com/office/drawing/2014/main" id="{EF335AD3-FB0D-44B5-B2BB-D803744BA54D}"/>
               </a:ext>
             </a:extLst>
           </p:cNvPr>
@@ -5385,7 +5385,7 @@
           <p:cNvPr id="6" name="">
             <a:extLst xmlns:a="http://schemas.openxmlformats.org/drawingml/2006/main">
               <a:ext uri="{FF2B5EF4-FFF2-40B4-BE49-F238E27FC236}">
-                <a16:creationId xmlns:a16="http://schemas.microsoft.com/office/drawing/2014/main" id="{C1568799-9501-4390-9EFA-7B6B3E645D0D}"/>
+                <a16:creationId xmlns:a16="http://schemas.microsoft.com/office/drawing/2014/main" id="{8D7A2E11-F2D3-4B16-90C8-E8B50F9C1FAD}"/>
               </a:ext>
             </a:extLst>
           </p:cNvPr>
@@ -5446,7 +5446,7 @@
           <p:cNvPr id="7" name="">
             <a:extLst xmlns:a="http://schemas.openxmlformats.org/drawingml/2006/main">
               <a:ext uri="{FF2B5EF4-FFF2-40B4-BE49-F238E27FC236}">
-                <a16:creationId xmlns:a16="http://schemas.microsoft.com/office/drawing/2014/main" id="{8C0EA479-D9AC-4D05-8D1F-DD4F25B4E415}"/>
+                <a16:creationId xmlns:a16="http://schemas.microsoft.com/office/drawing/2014/main" id="{2AC32205-62A5-4CEE-B8CB-34C6B99C6A62}"/>
               </a:ext>
             </a:extLst>
           </p:cNvPr>
@@ -5507,7 +5507,7 @@
           <p:cNvPr id="8" name="">
             <a:extLst xmlns:a="http://schemas.openxmlformats.org/drawingml/2006/main">
               <a:ext uri="{FF2B5EF4-FFF2-40B4-BE49-F238E27FC236}">
-                <a16:creationId xmlns:a16="http://schemas.microsoft.com/office/drawing/2014/main" id="{2E2DC638-765D-4F57-8328-6339EDABDBDD}"/>
+                <a16:creationId xmlns:a16="http://schemas.microsoft.com/office/drawing/2014/main" id="{1E7548B0-5422-4853-95AC-15C5FE86D065}"/>
               </a:ext>
             </a:extLst>
           </p:cNvPr>
@@ -5568,7 +5568,7 @@
           <p:cNvPr id="9" name="">
             <a:extLst xmlns:a="http://schemas.openxmlformats.org/drawingml/2006/main">
               <a:ext uri="{FF2B5EF4-FFF2-40B4-BE49-F238E27FC236}">
-                <a16:creationId xmlns:a16="http://schemas.microsoft.com/office/drawing/2014/main" id="{96D07D62-715D-4A15-9DBB-5D3BB3204F9D}"/>
+                <a16:creationId xmlns:a16="http://schemas.microsoft.com/office/drawing/2014/main" id="{13BDDD48-A488-4161-80A5-E01453CD4336}"/>
               </a:ext>
             </a:extLst>
           </p:cNvPr>
@@ -5629,7 +5629,7 @@
           <p:cNvPr id="10" name="">
             <a:extLst xmlns:a="http://schemas.openxmlformats.org/drawingml/2006/main">
               <a:ext uri="{FF2B5EF4-FFF2-40B4-BE49-F238E27FC236}">
-                <a16:creationId xmlns:a16="http://schemas.microsoft.com/office/drawing/2014/main" id="{8ABEF3A2-D842-434F-9A25-9346899A7F08}"/>
+                <a16:creationId xmlns:a16="http://schemas.microsoft.com/office/drawing/2014/main" id="{23DCDB5A-E318-4CC4-9FE5-597B018CDB9B}"/>
               </a:ext>
             </a:extLst>
           </p:cNvPr>
@@ -5688,7 +5688,7 @@
     </p:spTree>
     <p:extLst>
       <p:ext uri="{BB962C8B-B14F-4D97-AF65-F5344CB8AC3E}">
-        <p14:creationId xmlns:p14="http://schemas.microsoft.com/office/powerpoint/2010/main" val="249231885"/>
+        <p14:creationId xmlns:p14="http://schemas.microsoft.com/office/powerpoint/2010/main" val="1317249664"/>
       </p:ext>
     </p:extLst>
   </p:cSld>
@@ -5719,7 +5719,7 @@
           <p:cNvPr id="8" name="">
             <a:extLst xmlns:a="http://schemas.openxmlformats.org/drawingml/2006/main">
               <a:ext uri="{FF2B5EF4-FFF2-40B4-BE49-F238E27FC236}">
-                <a16:creationId xmlns:a16="http://schemas.microsoft.com/office/drawing/2014/main" id="{3B6F23E5-6510-4160-88AE-1A2EB8C41C60}"/>
+                <a16:creationId xmlns:a16="http://schemas.microsoft.com/office/drawing/2014/main" id="{A5D49D59-A09F-44EA-B3AC-7656F48D5D58}"/>
               </a:ext>
             </a:extLst>
           </p:cNvPr>
@@ -5780,7 +5780,7 @@
           <p:cNvPr id="2" name="">
             <a:extLst xmlns:a="http://schemas.openxmlformats.org/drawingml/2006/main">
               <a:ext uri="{FF2B5EF4-FFF2-40B4-BE49-F238E27FC236}">
-                <a16:creationId xmlns:a16="http://schemas.microsoft.com/office/drawing/2014/main" id="{3F99A810-D2F7-44C9-B03B-E2B4F1A87005}"/>
+                <a16:creationId xmlns:a16="http://schemas.microsoft.com/office/drawing/2014/main" id="{7DEB5BF1-85F0-4728-9B64-410D390D16A2}"/>
               </a:ext>
             </a:extLst>
           </p:cNvPr>
@@ -5841,7 +5841,7 @@
           <p:cNvPr id="3" name="">
             <a:extLst xmlns:a="http://schemas.openxmlformats.org/drawingml/2006/main">
               <a:ext uri="{FF2B5EF4-FFF2-40B4-BE49-F238E27FC236}">
-                <a16:creationId xmlns:a16="http://schemas.microsoft.com/office/drawing/2014/main" id="{64B9C10B-569A-482A-A6B1-20C32F8E8C46}"/>
+                <a16:creationId xmlns:a16="http://schemas.microsoft.com/office/drawing/2014/main" id="{2391FE0E-21D4-458C-BA59-C26130CAD910}"/>
               </a:ext>
             </a:extLst>
           </p:cNvPr>
@@ -5902,7 +5902,7 @@
           <p:cNvPr id="4" name="">
             <a:extLst xmlns:a="http://schemas.openxmlformats.org/drawingml/2006/main">
               <a:ext uri="{FF2B5EF4-FFF2-40B4-BE49-F238E27FC236}">
-                <a16:creationId xmlns:a16="http://schemas.microsoft.com/office/drawing/2014/main" id="{274FDC0F-639A-4DC6-BBDE-E409E6458741}"/>
+                <a16:creationId xmlns:a16="http://schemas.microsoft.com/office/drawing/2014/main" id="{53C0D7A2-87C5-402A-B59D-57B6272DEE5B}"/>
               </a:ext>
             </a:extLst>
           </p:cNvPr>
@@ -6413,7 +6413,7 @@
           <p:cNvPr id="6" name="">
             <a:extLst xmlns:a="http://schemas.openxmlformats.org/drawingml/2006/main">
               <a:ext uri="{FF2B5EF4-FFF2-40B4-BE49-F238E27FC236}">
-                <a16:creationId xmlns:a16="http://schemas.microsoft.com/office/drawing/2014/main" id="{8B2031A4-0830-47A4-99C1-F54918297302}"/>
+                <a16:creationId xmlns:a16="http://schemas.microsoft.com/office/drawing/2014/main" id="{7E6FFA5E-944C-4F61-9F28-EB2B76CBA34C}"/>
               </a:ext>
             </a:extLst>
           </p:cNvPr>
@@ -6474,7 +6474,7 @@
           <p:cNvPr id="7" name="">
             <a:extLst xmlns:a="http://schemas.openxmlformats.org/drawingml/2006/main">
               <a:ext uri="{FF2B5EF4-FFF2-40B4-BE49-F238E27FC236}">
-                <a16:creationId xmlns:a16="http://schemas.microsoft.com/office/drawing/2014/main" id="{20EC9E5F-B840-4E12-9781-52E7F074A5DE}"/>
+                <a16:creationId xmlns:a16="http://schemas.microsoft.com/office/drawing/2014/main" id="{51D15DD0-4614-4EE2-B3BC-C2E7951BF249}"/>
               </a:ext>
             </a:extLst>
           </p:cNvPr>
@@ -6533,7 +6533,7 @@
     </p:spTree>
     <p:extLst>
       <p:ext uri="{BB962C8B-B14F-4D97-AF65-F5344CB8AC3E}">
-        <p14:creationId xmlns:p14="http://schemas.microsoft.com/office/powerpoint/2010/main" val="1064156394"/>
+        <p14:creationId xmlns:p14="http://schemas.microsoft.com/office/powerpoint/2010/main" val="721402739"/>
       </p:ext>
     </p:extLst>
   </p:cSld>
@@ -6564,7 +6564,7 @@
           <p:cNvPr id="9" name="">
             <a:extLst xmlns:a="http://schemas.openxmlformats.org/drawingml/2006/main">
               <a:ext uri="{FF2B5EF4-FFF2-40B4-BE49-F238E27FC236}">
-                <a16:creationId xmlns:a16="http://schemas.microsoft.com/office/drawing/2014/main" id="{3891DEB7-210D-4453-B81C-FC32A6BDF26C}"/>
+                <a16:creationId xmlns:a16="http://schemas.microsoft.com/office/drawing/2014/main" id="{241E1ABA-4C0F-46DC-A697-52E71BD11722}"/>
               </a:ext>
             </a:extLst>
           </p:cNvPr>
@@ -6625,7 +6625,7 @@
           <p:cNvPr id="2" name="">
             <a:extLst xmlns:a="http://schemas.openxmlformats.org/drawingml/2006/main">
               <a:ext uri="{FF2B5EF4-FFF2-40B4-BE49-F238E27FC236}">
-                <a16:creationId xmlns:a16="http://schemas.microsoft.com/office/drawing/2014/main" id="{1DC390D2-F4E5-4535-BF34-2D3BA53E2407}"/>
+                <a16:creationId xmlns:a16="http://schemas.microsoft.com/office/drawing/2014/main" id="{DD01640E-DDC5-44EB-9DB7-DC648D4C421A}"/>
               </a:ext>
             </a:extLst>
           </p:cNvPr>
@@ -6686,7 +6686,7 @@
           <p:cNvPr id="3" name="">
             <a:extLst xmlns:a="http://schemas.openxmlformats.org/drawingml/2006/main">
               <a:ext uri="{FF2B5EF4-FFF2-40B4-BE49-F238E27FC236}">
-                <a16:creationId xmlns:a16="http://schemas.microsoft.com/office/drawing/2014/main" id="{687B6976-B8EB-4637-A0ED-CA870B44884D}"/>
+                <a16:creationId xmlns:a16="http://schemas.microsoft.com/office/drawing/2014/main" id="{75ADE341-996F-43EB-A158-4E9DD1926B13}"/>
               </a:ext>
             </a:extLst>
           </p:cNvPr>
@@ -6747,7 +6747,7 @@
           <p:cNvPr id="4" name="">
             <a:extLst xmlns:a="http://schemas.openxmlformats.org/drawingml/2006/main">
               <a:ext uri="{FF2B5EF4-FFF2-40B4-BE49-F238E27FC236}">
-                <a16:creationId xmlns:a16="http://schemas.microsoft.com/office/drawing/2014/main" id="{4B6B763B-0D56-4C5D-81A8-84F21C240DE1}"/>
+                <a16:creationId xmlns:a16="http://schemas.microsoft.com/office/drawing/2014/main" id="{648D8693-F1D5-4FA2-81D6-49A7F4C763E0}"/>
               </a:ext>
             </a:extLst>
           </p:cNvPr>
@@ -7176,7 +7176,7 @@
           <p:cNvPr id="6" name="">
             <a:extLst xmlns:a="http://schemas.openxmlformats.org/drawingml/2006/main">
               <a:ext uri="{FF2B5EF4-FFF2-40B4-BE49-F238E27FC236}">
-                <a16:creationId xmlns:a16="http://schemas.microsoft.com/office/drawing/2014/main" id="{140675A1-B358-47D9-8211-685E961051A7}"/>
+                <a16:creationId xmlns:a16="http://schemas.microsoft.com/office/drawing/2014/main" id="{BB4B2AFC-15B4-4941-B4CB-5607567701CB}"/>
               </a:ext>
             </a:extLst>
           </p:cNvPr>
@@ -7237,7 +7237,7 @@
           <p:cNvPr id="7" name="">
             <a:extLst xmlns:a="http://schemas.openxmlformats.org/drawingml/2006/main">
               <a:ext uri="{FF2B5EF4-FFF2-40B4-BE49-F238E27FC236}">
-                <a16:creationId xmlns:a16="http://schemas.microsoft.com/office/drawing/2014/main" id="{B9ED52AE-F227-42DA-8037-D8EC0D01FA36}"/>
+                <a16:creationId xmlns:a16="http://schemas.microsoft.com/office/drawing/2014/main" id="{C0B71590-E32E-476F-B61B-3620A6754229}"/>
               </a:ext>
             </a:extLst>
           </p:cNvPr>
@@ -7298,7 +7298,7 @@
           <p:cNvPr id="8" name="">
             <a:extLst xmlns:a="http://schemas.openxmlformats.org/drawingml/2006/main">
               <a:ext uri="{FF2B5EF4-FFF2-40B4-BE49-F238E27FC236}">
-                <a16:creationId xmlns:a16="http://schemas.microsoft.com/office/drawing/2014/main" id="{1C821484-2E9A-489A-901A-677C734ED3E6}"/>
+                <a16:creationId xmlns:a16="http://schemas.microsoft.com/office/drawing/2014/main" id="{7133CD07-F2FB-4DEC-89AC-9D44A21A8E48}"/>
               </a:ext>
             </a:extLst>
           </p:cNvPr>
@@ -7357,7 +7357,7 @@
     </p:spTree>
     <p:extLst>
       <p:ext uri="{BB962C8B-B14F-4D97-AF65-F5344CB8AC3E}">
-        <p14:creationId xmlns:p14="http://schemas.microsoft.com/office/powerpoint/2010/main" val="1172673718"/>
+        <p14:creationId xmlns:p14="http://schemas.microsoft.com/office/powerpoint/2010/main" val="1642542118"/>
       </p:ext>
     </p:extLst>
   </p:cSld>
@@ -7388,7 +7388,7 @@
           <p:cNvPr id="11" name="">
             <a:extLst xmlns:a="http://schemas.openxmlformats.org/drawingml/2006/main">
               <a:ext uri="{FF2B5EF4-FFF2-40B4-BE49-F238E27FC236}">
-                <a16:creationId xmlns:a16="http://schemas.microsoft.com/office/drawing/2014/main" id="{4FE6F597-DE63-406E-86A8-782AB3392698}"/>
+                <a16:creationId xmlns:a16="http://schemas.microsoft.com/office/drawing/2014/main" id="{3E2B7B18-E5B8-48AD-9B3B-2BD0B44FC3FF}"/>
               </a:ext>
             </a:extLst>
           </p:cNvPr>
@@ -7449,7 +7449,7 @@
           <p:cNvPr id="2" name="">
             <a:extLst xmlns:a="http://schemas.openxmlformats.org/drawingml/2006/main">
               <a:ext uri="{FF2B5EF4-FFF2-40B4-BE49-F238E27FC236}">
-                <a16:creationId xmlns:a16="http://schemas.microsoft.com/office/drawing/2014/main" id="{DD68E398-3833-4AD0-B74C-D8C90ADCB691}"/>
+                <a16:creationId xmlns:a16="http://schemas.microsoft.com/office/drawing/2014/main" id="{076D1FBF-7EDB-43BE-B5B6-0074AE8D9394}"/>
               </a:ext>
             </a:extLst>
           </p:cNvPr>
@@ -7510,7 +7510,7 @@
           <p:cNvPr id="3" name="">
             <a:extLst xmlns:a="http://schemas.openxmlformats.org/drawingml/2006/main">
               <a:ext uri="{FF2B5EF4-FFF2-40B4-BE49-F238E27FC236}">
-                <a16:creationId xmlns:a16="http://schemas.microsoft.com/office/drawing/2014/main" id="{F07D4E4B-81DC-4841-B9B5-485D13C6908A}"/>
+                <a16:creationId xmlns:a16="http://schemas.microsoft.com/office/drawing/2014/main" id="{31294048-4FB1-4D71-8C69-FCA46A244759}"/>
               </a:ext>
             </a:extLst>
           </p:cNvPr>
@@ -7571,7 +7571,7 @@
           <p:cNvPr id="4" name="">
             <a:extLst xmlns:a="http://schemas.openxmlformats.org/drawingml/2006/main">
               <a:ext uri="{FF2B5EF4-FFF2-40B4-BE49-F238E27FC236}">
-                <a16:creationId xmlns:a16="http://schemas.microsoft.com/office/drawing/2014/main" id="{B84F7688-69DA-4792-9184-8D407A66DB35}"/>
+                <a16:creationId xmlns:a16="http://schemas.microsoft.com/office/drawing/2014/main" id="{3629532F-2F8E-4583-BDCA-45E5E66CF1D8}"/>
               </a:ext>
             </a:extLst>
           </p:cNvPr>
@@ -7632,7 +7632,7 @@
           <p:cNvPr id="5" name="">
             <a:extLst xmlns:a="http://schemas.openxmlformats.org/drawingml/2006/main">
               <a:ext uri="{FF2B5EF4-FFF2-40B4-BE49-F238E27FC236}">
-                <a16:creationId xmlns:a16="http://schemas.microsoft.com/office/drawing/2014/main" id="{EB40D202-ACA0-49F1-B359-1A9A78D147B4}"/>
+                <a16:creationId xmlns:a16="http://schemas.microsoft.com/office/drawing/2014/main" id="{803093FF-A46A-47BC-8615-84C4AD1EB5B5}"/>
               </a:ext>
             </a:extLst>
           </p:cNvPr>
@@ -7693,7 +7693,7 @@
           <p:cNvPr id="6" name="">
             <a:extLst xmlns:a="http://schemas.openxmlformats.org/drawingml/2006/main">
               <a:ext uri="{FF2B5EF4-FFF2-40B4-BE49-F238E27FC236}">
-                <a16:creationId xmlns:a16="http://schemas.microsoft.com/office/drawing/2014/main" id="{EC55127C-CFC4-4B0D-AA75-EDBE546144B5}"/>
+                <a16:creationId xmlns:a16="http://schemas.microsoft.com/office/drawing/2014/main" id="{9621B4B7-2D96-44C1-85BF-FFFFDFEC9BA4}"/>
               </a:ext>
             </a:extLst>
           </p:cNvPr>
@@ -7754,7 +7754,7 @@
           <p:cNvPr id="7" name="">
             <a:extLst xmlns:a="http://schemas.openxmlformats.org/drawingml/2006/main">
               <a:ext uri="{FF2B5EF4-FFF2-40B4-BE49-F238E27FC236}">
-                <a16:creationId xmlns:a16="http://schemas.microsoft.com/office/drawing/2014/main" id="{653970EE-1659-4F02-BFBC-75A477C76F45}"/>
+                <a16:creationId xmlns:a16="http://schemas.microsoft.com/office/drawing/2014/main" id="{96585ECA-3C36-4B96-B130-E8D2D9D27F4F}"/>
               </a:ext>
             </a:extLst>
           </p:cNvPr>
@@ -7815,7 +7815,7 @@
           <p:cNvPr id="8" name="">
             <a:extLst xmlns:a="http://schemas.openxmlformats.org/drawingml/2006/main">
               <a:ext uri="{FF2B5EF4-FFF2-40B4-BE49-F238E27FC236}">
-                <a16:creationId xmlns:a16="http://schemas.microsoft.com/office/drawing/2014/main" id="{76F83EF9-4987-4C1C-8CAA-7330395B3F47}"/>
+                <a16:creationId xmlns:a16="http://schemas.microsoft.com/office/drawing/2014/main" id="{0416E94B-855D-4FB9-AD72-F0FAFA303EE1}"/>
               </a:ext>
             </a:extLst>
           </p:cNvPr>
@@ -7876,7 +7876,7 @@
           <p:cNvPr id="9" name="">
             <a:extLst xmlns:a="http://schemas.openxmlformats.org/drawingml/2006/main">
               <a:ext uri="{FF2B5EF4-FFF2-40B4-BE49-F238E27FC236}">
-                <a16:creationId xmlns:a16="http://schemas.microsoft.com/office/drawing/2014/main" id="{7C24A1F4-E6E3-413F-94FB-2E76A93B71D0}"/>
+                <a16:creationId xmlns:a16="http://schemas.microsoft.com/office/drawing/2014/main" id="{0DDFB535-C387-4DC4-9AA8-2C08C001A9C0}"/>
               </a:ext>
             </a:extLst>
           </p:cNvPr>
@@ -7937,7 +7937,7 @@
           <p:cNvPr id="10" name="">
             <a:extLst xmlns:a="http://schemas.openxmlformats.org/drawingml/2006/main">
               <a:ext uri="{FF2B5EF4-FFF2-40B4-BE49-F238E27FC236}">
-                <a16:creationId xmlns:a16="http://schemas.microsoft.com/office/drawing/2014/main" id="{173E1E94-CA9A-41C9-8BAD-CB1D75F4D4F1}"/>
+                <a16:creationId xmlns:a16="http://schemas.microsoft.com/office/drawing/2014/main" id="{C98034C2-DD14-4F87-913B-1D16AAF5D2F0}"/>
               </a:ext>
             </a:extLst>
           </p:cNvPr>
@@ -7996,7 +7996,7 @@
     </p:spTree>
     <p:extLst>
       <p:ext uri="{BB962C8B-B14F-4D97-AF65-F5344CB8AC3E}">
-        <p14:creationId xmlns:p14="http://schemas.microsoft.com/office/powerpoint/2010/main" val="1067971343"/>
+        <p14:creationId xmlns:p14="http://schemas.microsoft.com/office/powerpoint/2010/main" val="531871666"/>
       </p:ext>
     </p:extLst>
   </p:cSld>
@@ -8027,7 +8027,7 @@
           <p:cNvPr id="8" name="">
             <a:extLst xmlns:a="http://schemas.openxmlformats.org/drawingml/2006/main">
               <a:ext uri="{FF2B5EF4-FFF2-40B4-BE49-F238E27FC236}">
-                <a16:creationId xmlns:a16="http://schemas.microsoft.com/office/drawing/2014/main" id="{B4FFD5B0-FC5A-4C16-B698-FC3FC6CCC76A}"/>
+                <a16:creationId xmlns:a16="http://schemas.microsoft.com/office/drawing/2014/main" id="{3FE8CF3A-D36A-45A3-9EC5-0F8BD5768F23}"/>
               </a:ext>
             </a:extLst>
           </p:cNvPr>
@@ -8088,7 +8088,7 @@
           <p:cNvPr id="2" name="">
             <a:extLst xmlns:a="http://schemas.openxmlformats.org/drawingml/2006/main">
               <a:ext uri="{FF2B5EF4-FFF2-40B4-BE49-F238E27FC236}">
-                <a16:creationId xmlns:a16="http://schemas.microsoft.com/office/drawing/2014/main" id="{05C2E80A-6720-4E45-B089-FCCBA1AAE482}"/>
+                <a16:creationId xmlns:a16="http://schemas.microsoft.com/office/drawing/2014/main" id="{224B9468-3512-438E-8D32-7B0E8D029E1D}"/>
               </a:ext>
             </a:extLst>
           </p:cNvPr>
@@ -8149,7 +8149,7 @@
           <p:cNvPr id="3" name="">
             <a:extLst xmlns:a="http://schemas.openxmlformats.org/drawingml/2006/main">
               <a:ext uri="{FF2B5EF4-FFF2-40B4-BE49-F238E27FC236}">
-                <a16:creationId xmlns:a16="http://schemas.microsoft.com/office/drawing/2014/main" id="{40BC05FE-59E6-44E6-9E89-FBD66F4D7A7B}"/>
+                <a16:creationId xmlns:a16="http://schemas.microsoft.com/office/drawing/2014/main" id="{6AB9E334-A24E-468B-B19E-CB76FECA926A}"/>
               </a:ext>
             </a:extLst>
           </p:cNvPr>
@@ -8210,7 +8210,7 @@
           <p:cNvPr id="4" name="">
             <a:extLst xmlns:a="http://schemas.openxmlformats.org/drawingml/2006/main">
               <a:ext uri="{FF2B5EF4-FFF2-40B4-BE49-F238E27FC236}">
-                <a16:creationId xmlns:a16="http://schemas.microsoft.com/office/drawing/2014/main" id="{796323EF-344A-43AF-9649-CF11804C2B71}"/>
+                <a16:creationId xmlns:a16="http://schemas.microsoft.com/office/drawing/2014/main" id="{E5E022C0-A391-48C3-B7BC-46553AD3D918}"/>
               </a:ext>
             </a:extLst>
           </p:cNvPr>
@@ -8967,7 +8967,7 @@
           <p:cNvPr id="6" name="">
             <a:extLst xmlns:a="http://schemas.openxmlformats.org/drawingml/2006/main">
               <a:ext uri="{FF2B5EF4-FFF2-40B4-BE49-F238E27FC236}">
-                <a16:creationId xmlns:a16="http://schemas.microsoft.com/office/drawing/2014/main" id="{4864DE71-7875-4CF9-863B-BA5B52F6F6B3}"/>
+                <a16:creationId xmlns:a16="http://schemas.microsoft.com/office/drawing/2014/main" id="{E861EA8F-1334-460C-96CD-B166D47AF4AF}"/>
               </a:ext>
             </a:extLst>
           </p:cNvPr>
@@ -9028,7 +9028,7 @@
           <p:cNvPr id="7" name="">
             <a:extLst xmlns:a="http://schemas.openxmlformats.org/drawingml/2006/main">
               <a:ext uri="{FF2B5EF4-FFF2-40B4-BE49-F238E27FC236}">
-                <a16:creationId xmlns:a16="http://schemas.microsoft.com/office/drawing/2014/main" id="{520178CD-CACA-4C48-90CF-07ACD6C5182C}"/>
+                <a16:creationId xmlns:a16="http://schemas.microsoft.com/office/drawing/2014/main" id="{909851EE-8C28-4461-B312-7C29520ADFEB}"/>
               </a:ext>
             </a:extLst>
           </p:cNvPr>
@@ -9087,7 +9087,7 @@
     </p:spTree>
     <p:extLst>
       <p:ext uri="{BB962C8B-B14F-4D97-AF65-F5344CB8AC3E}">
-        <p14:creationId xmlns:p14="http://schemas.microsoft.com/office/powerpoint/2010/main" val="429167047"/>
+        <p14:creationId xmlns:p14="http://schemas.microsoft.com/office/powerpoint/2010/main" val="1653395256"/>
       </p:ext>
     </p:extLst>
   </p:cSld>
@@ -9118,7 +9118,7 @@
           <p:cNvPr id="11" name="">
             <a:extLst xmlns:a="http://schemas.openxmlformats.org/drawingml/2006/main">
               <a:ext uri="{FF2B5EF4-FFF2-40B4-BE49-F238E27FC236}">
-                <a16:creationId xmlns:a16="http://schemas.microsoft.com/office/drawing/2014/main" id="{0C13A50A-D47C-41A7-845F-29B08513C4A0}"/>
+                <a16:creationId xmlns:a16="http://schemas.microsoft.com/office/drawing/2014/main" id="{DB3AC7BD-580B-4B15-A45C-3DC67D624819}"/>
               </a:ext>
             </a:extLst>
           </p:cNvPr>
@@ -9179,7 +9179,7 @@
           <p:cNvPr id="2" name="">
             <a:extLst xmlns:a="http://schemas.openxmlformats.org/drawingml/2006/main">
               <a:ext uri="{FF2B5EF4-FFF2-40B4-BE49-F238E27FC236}">
-                <a16:creationId xmlns:a16="http://schemas.microsoft.com/office/drawing/2014/main" id="{E37B7722-6877-49FB-B4B4-E30F6C2BAE24}"/>
+                <a16:creationId xmlns:a16="http://schemas.microsoft.com/office/drawing/2014/main" id="{EE59015C-02CE-4C07-9DE9-56F5B60617DC}"/>
               </a:ext>
             </a:extLst>
           </p:cNvPr>
@@ -9240,7 +9240,7 @@
           <p:cNvPr id="3" name="">
             <a:extLst xmlns:a="http://schemas.openxmlformats.org/drawingml/2006/main">
               <a:ext uri="{FF2B5EF4-FFF2-40B4-BE49-F238E27FC236}">
-                <a16:creationId xmlns:a16="http://schemas.microsoft.com/office/drawing/2014/main" id="{9C0FE028-CBEB-4676-B49B-004AC9F140C2}"/>
+                <a16:creationId xmlns:a16="http://schemas.microsoft.com/office/drawing/2014/main" id="{9CDE1714-E0BF-4C7D-9DCA-E3010EB764ED}"/>
               </a:ext>
             </a:extLst>
           </p:cNvPr>
@@ -9301,7 +9301,7 @@
           <p:cNvPr id="4" name="">
             <a:extLst xmlns:a="http://schemas.openxmlformats.org/drawingml/2006/main">
               <a:ext uri="{FF2B5EF4-FFF2-40B4-BE49-F238E27FC236}">
-                <a16:creationId xmlns:a16="http://schemas.microsoft.com/office/drawing/2014/main" id="{8411D093-FE7E-4CE2-B146-E28306519CB7}"/>
+                <a16:creationId xmlns:a16="http://schemas.microsoft.com/office/drawing/2014/main" id="{F4C0821A-77EE-4E2A-840D-67DE1FDAA8A6}"/>
               </a:ext>
             </a:extLst>
           </p:cNvPr>
@@ -9362,7 +9362,7 @@
           <p:cNvPr id="5" name="">
             <a:extLst xmlns:a="http://schemas.openxmlformats.org/drawingml/2006/main">
               <a:ext uri="{FF2B5EF4-FFF2-40B4-BE49-F238E27FC236}">
-                <a16:creationId xmlns:a16="http://schemas.microsoft.com/office/drawing/2014/main" id="{0A4D98CB-B6F1-4F22-BEFE-E2C8826055F9}"/>
+                <a16:creationId xmlns:a16="http://schemas.microsoft.com/office/drawing/2014/main" id="{99C30926-E072-4825-9BC2-E6FFB3E8FE2D}"/>
               </a:ext>
             </a:extLst>
           </p:cNvPr>
@@ -9423,7 +9423,7 @@
           <p:cNvPr id="6" name="">
             <a:extLst xmlns:a="http://schemas.openxmlformats.org/drawingml/2006/main">
               <a:ext uri="{FF2B5EF4-FFF2-40B4-BE49-F238E27FC236}">
-                <a16:creationId xmlns:a16="http://schemas.microsoft.com/office/drawing/2014/main" id="{E46BBF7F-B03C-4070-BEE2-E151454091B1}"/>
+                <a16:creationId xmlns:a16="http://schemas.microsoft.com/office/drawing/2014/main" id="{06733B77-5DAF-4125-9A39-2E7BE6EE5650}"/>
               </a:ext>
             </a:extLst>
           </p:cNvPr>
@@ -9484,7 +9484,7 @@
           <p:cNvPr id="7" name="">
             <a:extLst xmlns:a="http://schemas.openxmlformats.org/drawingml/2006/main">
               <a:ext uri="{FF2B5EF4-FFF2-40B4-BE49-F238E27FC236}">
-                <a16:creationId xmlns:a16="http://schemas.microsoft.com/office/drawing/2014/main" id="{C656E694-DFE8-43AC-8A74-BE241EC39633}"/>
+                <a16:creationId xmlns:a16="http://schemas.microsoft.com/office/drawing/2014/main" id="{571F34EB-9B06-44AC-BFAF-C071E893E140}"/>
               </a:ext>
             </a:extLst>
           </p:cNvPr>
@@ -9545,7 +9545,7 @@
           <p:cNvPr id="8" name="">
             <a:extLst xmlns:a="http://schemas.openxmlformats.org/drawingml/2006/main">
               <a:ext uri="{FF2B5EF4-FFF2-40B4-BE49-F238E27FC236}">
-                <a16:creationId xmlns:a16="http://schemas.microsoft.com/office/drawing/2014/main" id="{FF579DFC-F8D3-4670-8CD0-A6559439BCED}"/>
+                <a16:creationId xmlns:a16="http://schemas.microsoft.com/office/drawing/2014/main" id="{A984A38D-312A-46EC-AB19-ADCC910AC4BF}"/>
               </a:ext>
             </a:extLst>
           </p:cNvPr>
@@ -9606,7 +9606,7 @@
           <p:cNvPr id="9" name="">
             <a:extLst xmlns:a="http://schemas.openxmlformats.org/drawingml/2006/main">
               <a:ext uri="{FF2B5EF4-FFF2-40B4-BE49-F238E27FC236}">
-                <a16:creationId xmlns:a16="http://schemas.microsoft.com/office/drawing/2014/main" id="{9989521F-ACCB-4F1E-B4A4-E8E6A31384B3}"/>
+                <a16:creationId xmlns:a16="http://schemas.microsoft.com/office/drawing/2014/main" id="{03504352-54BD-4116-9384-B1D008703E60}"/>
               </a:ext>
             </a:extLst>
           </p:cNvPr>
@@ -9667,7 +9667,7 @@
           <p:cNvPr id="10" name="">
             <a:extLst xmlns:a="http://schemas.openxmlformats.org/drawingml/2006/main">
               <a:ext uri="{FF2B5EF4-FFF2-40B4-BE49-F238E27FC236}">
-                <a16:creationId xmlns:a16="http://schemas.microsoft.com/office/drawing/2014/main" id="{148196E8-687A-4F0F-BDAF-C084EB6DA55F}"/>
+                <a16:creationId xmlns:a16="http://schemas.microsoft.com/office/drawing/2014/main" id="{D2FC4959-5966-4FC2-A680-2C271EFE06FC}"/>
               </a:ext>
             </a:extLst>
           </p:cNvPr>
@@ -9726,7 +9726,7 @@
     </p:spTree>
     <p:extLst>
       <p:ext uri="{BB962C8B-B14F-4D97-AF65-F5344CB8AC3E}">
-        <p14:creationId xmlns:p14="http://schemas.microsoft.com/office/powerpoint/2010/main" val="1285167433"/>
+        <p14:creationId xmlns:p14="http://schemas.microsoft.com/office/powerpoint/2010/main" val="1020331902"/>
       </p:ext>
     </p:extLst>
   </p:cSld>
@@ -9757,7 +9757,7 @@
           <p:cNvPr id="8" name="">
             <a:extLst xmlns:a="http://schemas.openxmlformats.org/drawingml/2006/main">
               <a:ext uri="{FF2B5EF4-FFF2-40B4-BE49-F238E27FC236}">
-                <a16:creationId xmlns:a16="http://schemas.microsoft.com/office/drawing/2014/main" id="{58BA8F71-A922-423C-85D7-D73E89FB174A}"/>
+                <a16:creationId xmlns:a16="http://schemas.microsoft.com/office/drawing/2014/main" id="{4D58EA92-2F91-4854-B42A-B2254D69FDE0}"/>
               </a:ext>
             </a:extLst>
           </p:cNvPr>
@@ -9818,7 +9818,7 @@
           <p:cNvPr id="2" name="">
             <a:extLst xmlns:a="http://schemas.openxmlformats.org/drawingml/2006/main">
               <a:ext uri="{FF2B5EF4-FFF2-40B4-BE49-F238E27FC236}">
-                <a16:creationId xmlns:a16="http://schemas.microsoft.com/office/drawing/2014/main" id="{82D4D4BE-689C-4696-A358-3DCC26D56316}"/>
+                <a16:creationId xmlns:a16="http://schemas.microsoft.com/office/drawing/2014/main" id="{DA5A6222-3419-4DEB-B679-8E7C493E0FB7}"/>
               </a:ext>
             </a:extLst>
           </p:cNvPr>
@@ -9879,7 +9879,7 @@
           <p:cNvPr id="3" name="">
             <a:extLst xmlns:a="http://schemas.openxmlformats.org/drawingml/2006/main">
               <a:ext uri="{FF2B5EF4-FFF2-40B4-BE49-F238E27FC236}">
-                <a16:creationId xmlns:a16="http://schemas.microsoft.com/office/drawing/2014/main" id="{3DB052B9-0DDC-4E63-B06F-E1D173BF96D4}"/>
+                <a16:creationId xmlns:a16="http://schemas.microsoft.com/office/drawing/2014/main" id="{D06784B6-4F07-4927-B142-9F493AED7339}"/>
               </a:ext>
             </a:extLst>
           </p:cNvPr>
@@ -9940,7 +9940,7 @@
           <p:cNvPr id="4" name="">
             <a:extLst xmlns:a="http://schemas.openxmlformats.org/drawingml/2006/main">
               <a:ext uri="{FF2B5EF4-FFF2-40B4-BE49-F238E27FC236}">
-                <a16:creationId xmlns:a16="http://schemas.microsoft.com/office/drawing/2014/main" id="{6F2DE2EE-8785-4F73-9A03-BCAD10B7B3D5}"/>
+                <a16:creationId xmlns:a16="http://schemas.microsoft.com/office/drawing/2014/main" id="{9A8DD694-2344-4BBA-9A49-F082320A3BBB}"/>
               </a:ext>
             </a:extLst>
           </p:cNvPr>
@@ -10287,7 +10287,7 @@
           <p:cNvPr id="6" name="">
             <a:extLst xmlns:a="http://schemas.openxmlformats.org/drawingml/2006/main">
               <a:ext uri="{FF2B5EF4-FFF2-40B4-BE49-F238E27FC236}">
-                <a16:creationId xmlns:a16="http://schemas.microsoft.com/office/drawing/2014/main" id="{8261D291-5364-40C2-B560-3238CF4E27EC}"/>
+                <a16:creationId xmlns:a16="http://schemas.microsoft.com/office/drawing/2014/main" id="{5C08ABCB-F36D-44C0-8241-90BF922D32C5}"/>
               </a:ext>
             </a:extLst>
           </p:cNvPr>
@@ -10348,7 +10348,7 @@
           <p:cNvPr id="7" name="">
             <a:extLst xmlns:a="http://schemas.openxmlformats.org/drawingml/2006/main">
               <a:ext uri="{FF2B5EF4-FFF2-40B4-BE49-F238E27FC236}">
-                <a16:creationId xmlns:a16="http://schemas.microsoft.com/office/drawing/2014/main" id="{62CFE674-7886-4C2D-8A5D-B51660FA3B43}"/>
+                <a16:creationId xmlns:a16="http://schemas.microsoft.com/office/drawing/2014/main" id="{D457B6B1-92AB-41A9-B38E-52EE92DC9954}"/>
               </a:ext>
             </a:extLst>
           </p:cNvPr>
@@ -10407,7 +10407,7 @@
     </p:spTree>
     <p:extLst>
       <p:ext uri="{BB962C8B-B14F-4D97-AF65-F5344CB8AC3E}">
-        <p14:creationId xmlns:p14="http://schemas.microsoft.com/office/powerpoint/2010/main" val="1101579237"/>
+        <p14:creationId xmlns:p14="http://schemas.microsoft.com/office/powerpoint/2010/main" val="1198646338"/>
       </p:ext>
     </p:extLst>
   </p:cSld>
@@ -10438,7 +10438,7 @@
           <p:cNvPr id="7" name="">
             <a:extLst xmlns:a="http://schemas.openxmlformats.org/drawingml/2006/main">
               <a:ext uri="{FF2B5EF4-FFF2-40B4-BE49-F238E27FC236}">
-                <a16:creationId xmlns:a16="http://schemas.microsoft.com/office/drawing/2014/main" id="{230F45D1-6A22-4189-88A8-137A629DAF7E}"/>
+                <a16:creationId xmlns:a16="http://schemas.microsoft.com/office/drawing/2014/main" id="{CB1ABE21-6859-427C-ADEA-38ECAE6506E3}"/>
               </a:ext>
             </a:extLst>
           </p:cNvPr>
@@ -10499,7 +10499,7 @@
           <p:cNvPr id="2" name="">
             <a:extLst xmlns:a="http://schemas.openxmlformats.org/drawingml/2006/main">
               <a:ext uri="{FF2B5EF4-FFF2-40B4-BE49-F238E27FC236}">
-                <a16:creationId xmlns:a16="http://schemas.microsoft.com/office/drawing/2014/main" id="{CDBBD5EF-C747-45E2-A974-A618B8003A20}"/>
+                <a16:creationId xmlns:a16="http://schemas.microsoft.com/office/drawing/2014/main" id="{050736A2-A4AE-4C9A-B224-35778099DDCE}"/>
               </a:ext>
             </a:extLst>
           </p:cNvPr>
@@ -10560,7 +10560,7 @@
           <p:cNvPr id="3" name="">
             <a:extLst xmlns:a="http://schemas.openxmlformats.org/drawingml/2006/main">
               <a:ext uri="{FF2B5EF4-FFF2-40B4-BE49-F238E27FC236}">
-                <a16:creationId xmlns:a16="http://schemas.microsoft.com/office/drawing/2014/main" id="{E15B49A3-F91B-433D-99A3-B055EA6206F1}"/>
+                <a16:creationId xmlns:a16="http://schemas.microsoft.com/office/drawing/2014/main" id="{72F13C5A-58F7-4A3D-8B2B-23F2F91E6FCB}"/>
               </a:ext>
             </a:extLst>
           </p:cNvPr>
@@ -10611,7 +10611,7 @@
                 <a:ea typeface="Arial"/>
                 <a:cs typeface="Arial"/>
               </a:rPr>
-              <a:t>Nguồn: assets/diagrams/fd001-pipeline.png; outputs/modeling/tables/evaluation_protocol.csv</a:t>
+              <a:t>Nguồn: assets/diagrams/fd001-pipeline.png; handoff/DATA_WALKTHROUGH.md</a:t>
             </a:r>
           </a:p>
         </p:txBody>
@@ -10621,7 +10621,7 @@
           <p:cNvPr id="4" name="">
             <a:extLst xmlns:a="http://schemas.openxmlformats.org/drawingml/2006/main">
               <a:ext uri="{FF2B5EF4-FFF2-40B4-BE49-F238E27FC236}">
-                <a16:creationId xmlns:a16="http://schemas.microsoft.com/office/drawing/2014/main" id="{47282B42-D659-4ABD-8A55-E57845B6EBBE}"/>
+                <a16:creationId xmlns:a16="http://schemas.microsoft.com/office/drawing/2014/main" id="{1EEB21CF-3FDC-4FE6-8866-9E64E1A2EB55}"/>
               </a:ext>
             </a:extLst>
           </p:cNvPr>
@@ -10686,7 +10686,7 @@
           <p:nvPr/>
         </p:nvPicPr>
         <p:blipFill>
-          <a:blip xmlns:r="http://schemas.openxmlformats.org/officeDocument/2006/relationships" xmlns:a="http://schemas.openxmlformats.org/drawingml/2006/main" r:embed="R53fac2c85f5c461d"/>
+          <a:blip xmlns:r="http://schemas.openxmlformats.org/officeDocument/2006/relationships" xmlns:a="http://schemas.openxmlformats.org/drawingml/2006/main" r:embed="R011955c33caa41c7"/>
           <a:stretch xmlns:a="http://schemas.openxmlformats.org/drawingml/2006/main"/>
         </p:blipFill>
         <p:spPr>
@@ -10704,7 +10704,7 @@
           <p:cNvPr id="6" name="">
             <a:extLst xmlns:a="http://schemas.openxmlformats.org/drawingml/2006/main">
               <a:ext uri="{FF2B5EF4-FFF2-40B4-BE49-F238E27FC236}">
-                <a16:creationId xmlns:a16="http://schemas.microsoft.com/office/drawing/2014/main" id="{3970CAE4-C079-4871-BAF4-04985044C3D8}"/>
+                <a16:creationId xmlns:a16="http://schemas.microsoft.com/office/drawing/2014/main" id="{683BE203-FFD9-4930-86B6-0749FAC3F3B0}"/>
               </a:ext>
             </a:extLst>
           </p:cNvPr>
@@ -10755,7 +10755,7 @@
                 <a:ea typeface="Arial"/>
                 <a:cs typeface="Arial"/>
               </a:rPr>
-              <a:t>Điểm kiểm soát quan trọng: nhãn test chỉ xuất hiện sau khi model đã tạo dự đoán cuối.</a:t>
+              <a:t>FD001: 33.727 observations → Silver Parquet → Gold summary/features. Nhãn test chỉ xuất hiện sau khi model đã tạo dự đoán cuối.</a:t>
             </a:r>
           </a:p>
         </p:txBody>
@@ -10763,7 +10763,7 @@
     </p:spTree>
     <p:extLst>
       <p:ext uri="{BB962C8B-B14F-4D97-AF65-F5344CB8AC3E}">
-        <p14:creationId xmlns:p14="http://schemas.microsoft.com/office/powerpoint/2010/main" val="1254508175"/>
+        <p14:creationId xmlns:p14="http://schemas.microsoft.com/office/powerpoint/2010/main" val="1843444779"/>
       </p:ext>
     </p:extLst>
   </p:cSld>
@@ -10794,7 +10794,7 @@
           <p:cNvPr id="11" name="">
             <a:extLst xmlns:a="http://schemas.openxmlformats.org/drawingml/2006/main">
               <a:ext uri="{FF2B5EF4-FFF2-40B4-BE49-F238E27FC236}">
-                <a16:creationId xmlns:a16="http://schemas.microsoft.com/office/drawing/2014/main" id="{A3028D6A-D079-4346-BF37-2546CA652E2E}"/>
+                <a16:creationId xmlns:a16="http://schemas.microsoft.com/office/drawing/2014/main" id="{F2D82B0C-E8EA-4B64-B130-1A7A134BF1A8}"/>
               </a:ext>
             </a:extLst>
           </p:cNvPr>
@@ -10855,7 +10855,7 @@
           <p:cNvPr id="2" name="">
             <a:extLst xmlns:a="http://schemas.openxmlformats.org/drawingml/2006/main">
               <a:ext uri="{FF2B5EF4-FFF2-40B4-BE49-F238E27FC236}">
-                <a16:creationId xmlns:a16="http://schemas.microsoft.com/office/drawing/2014/main" id="{5860E559-E756-4BA9-AEA0-A16D2A1DC321}"/>
+                <a16:creationId xmlns:a16="http://schemas.microsoft.com/office/drawing/2014/main" id="{9E44BFAC-1379-447B-A460-B31F8F4F1C65}"/>
               </a:ext>
             </a:extLst>
           </p:cNvPr>
@@ -10916,7 +10916,7 @@
           <p:cNvPr id="3" name="">
             <a:extLst xmlns:a="http://schemas.openxmlformats.org/drawingml/2006/main">
               <a:ext uri="{FF2B5EF4-FFF2-40B4-BE49-F238E27FC236}">
-                <a16:creationId xmlns:a16="http://schemas.microsoft.com/office/drawing/2014/main" id="{9724B6FE-551E-4F5A-903E-C2A81145C152}"/>
+                <a16:creationId xmlns:a16="http://schemas.microsoft.com/office/drawing/2014/main" id="{B2C1A42E-7D4B-4B26-833C-7F66EAF892DA}"/>
               </a:ext>
             </a:extLst>
           </p:cNvPr>
@@ -10977,7 +10977,7 @@
           <p:cNvPr id="4" name="">
             <a:extLst xmlns:a="http://schemas.openxmlformats.org/drawingml/2006/main">
               <a:ext uri="{FF2B5EF4-FFF2-40B4-BE49-F238E27FC236}">
-                <a16:creationId xmlns:a16="http://schemas.microsoft.com/office/drawing/2014/main" id="{9D9A1C4D-9B04-4180-8AFB-95D31B6C20F4}"/>
+                <a16:creationId xmlns:a16="http://schemas.microsoft.com/office/drawing/2014/main" id="{05992EC9-D0FE-4DBE-A3B9-E3BB00FBB4DB}"/>
               </a:ext>
             </a:extLst>
           </p:cNvPr>
@@ -11038,7 +11038,7 @@
           <p:cNvPr id="5" name="">
             <a:extLst xmlns:a="http://schemas.openxmlformats.org/drawingml/2006/main">
               <a:ext uri="{FF2B5EF4-FFF2-40B4-BE49-F238E27FC236}">
-                <a16:creationId xmlns:a16="http://schemas.microsoft.com/office/drawing/2014/main" id="{5F1A93D1-EF27-47CC-B089-3CB2251F507A}"/>
+                <a16:creationId xmlns:a16="http://schemas.microsoft.com/office/drawing/2014/main" id="{92B67511-7173-49C4-9C90-D86356526A71}"/>
               </a:ext>
             </a:extLst>
           </p:cNvPr>
@@ -11099,7 +11099,7 @@
           <p:cNvPr id="6" name="">
             <a:extLst xmlns:a="http://schemas.openxmlformats.org/drawingml/2006/main">
               <a:ext uri="{FF2B5EF4-FFF2-40B4-BE49-F238E27FC236}">
-                <a16:creationId xmlns:a16="http://schemas.microsoft.com/office/drawing/2014/main" id="{AD834AEA-86FA-4A5B-96F6-CFB08E963E69}"/>
+                <a16:creationId xmlns:a16="http://schemas.microsoft.com/office/drawing/2014/main" id="{211BB11C-627A-4AE7-939E-783210CB05A4}"/>
               </a:ext>
             </a:extLst>
           </p:cNvPr>
@@ -11160,7 +11160,7 @@
           <p:cNvPr id="7" name="">
             <a:extLst xmlns:a="http://schemas.openxmlformats.org/drawingml/2006/main">
               <a:ext uri="{FF2B5EF4-FFF2-40B4-BE49-F238E27FC236}">
-                <a16:creationId xmlns:a16="http://schemas.microsoft.com/office/drawing/2014/main" id="{EC9D7850-6F8E-4A41-B776-F69C2969E9C4}"/>
+                <a16:creationId xmlns:a16="http://schemas.microsoft.com/office/drawing/2014/main" id="{EA74BE10-3523-4AB8-821C-9A4546432877}"/>
               </a:ext>
             </a:extLst>
           </p:cNvPr>
@@ -11221,7 +11221,7 @@
           <p:cNvPr id="8" name="">
             <a:extLst xmlns:a="http://schemas.openxmlformats.org/drawingml/2006/main">
               <a:ext uri="{FF2B5EF4-FFF2-40B4-BE49-F238E27FC236}">
-                <a16:creationId xmlns:a16="http://schemas.microsoft.com/office/drawing/2014/main" id="{0A4C1958-4471-4756-BDA1-0E7010FC8523}"/>
+                <a16:creationId xmlns:a16="http://schemas.microsoft.com/office/drawing/2014/main" id="{AFC4258D-0877-4CC8-8F36-1443DC12B2EF}"/>
               </a:ext>
             </a:extLst>
           </p:cNvPr>
@@ -11282,7 +11282,7 @@
           <p:cNvPr id="9" name="">
             <a:extLst xmlns:a="http://schemas.openxmlformats.org/drawingml/2006/main">
               <a:ext uri="{FF2B5EF4-FFF2-40B4-BE49-F238E27FC236}">
-                <a16:creationId xmlns:a16="http://schemas.microsoft.com/office/drawing/2014/main" id="{3DD107CC-37C6-4E52-BC3D-31D5DE8E4604}"/>
+                <a16:creationId xmlns:a16="http://schemas.microsoft.com/office/drawing/2014/main" id="{B3ABB80F-878D-465E-B43F-4BEFFA5153E5}"/>
               </a:ext>
             </a:extLst>
           </p:cNvPr>
@@ -11343,7 +11343,7 @@
           <p:cNvPr id="10" name="">
             <a:extLst xmlns:a="http://schemas.openxmlformats.org/drawingml/2006/main">
               <a:ext uri="{FF2B5EF4-FFF2-40B4-BE49-F238E27FC236}">
-                <a16:creationId xmlns:a16="http://schemas.microsoft.com/office/drawing/2014/main" id="{9481FA4F-2ECA-45EF-9D21-C249A6641605}"/>
+                <a16:creationId xmlns:a16="http://schemas.microsoft.com/office/drawing/2014/main" id="{C2646AE1-68A7-4785-B5B2-57616C89B083}"/>
               </a:ext>
             </a:extLst>
           </p:cNvPr>
@@ -11402,7 +11402,7 @@
     </p:spTree>
     <p:extLst>
       <p:ext uri="{BB962C8B-B14F-4D97-AF65-F5344CB8AC3E}">
-        <p14:creationId xmlns:p14="http://schemas.microsoft.com/office/powerpoint/2010/main" val="2124503018"/>
+        <p14:creationId xmlns:p14="http://schemas.microsoft.com/office/powerpoint/2010/main" val="231407694"/>
       </p:ext>
     </p:extLst>
   </p:cSld>
@@ -11433,7 +11433,7 @@
           <p:cNvPr id="8" name="">
             <a:extLst xmlns:a="http://schemas.openxmlformats.org/drawingml/2006/main">
               <a:ext uri="{FF2B5EF4-FFF2-40B4-BE49-F238E27FC236}">
-                <a16:creationId xmlns:a16="http://schemas.microsoft.com/office/drawing/2014/main" id="{21241308-23AD-44D5-BCC5-D8C6AD6F16DC}"/>
+                <a16:creationId xmlns:a16="http://schemas.microsoft.com/office/drawing/2014/main" id="{67FA51C5-6CD9-4E90-9B7A-1CCA697D2140}"/>
               </a:ext>
             </a:extLst>
           </p:cNvPr>
@@ -11494,7 +11494,7 @@
           <p:cNvPr id="2" name="">
             <a:extLst xmlns:a="http://schemas.openxmlformats.org/drawingml/2006/main">
               <a:ext uri="{FF2B5EF4-FFF2-40B4-BE49-F238E27FC236}">
-                <a16:creationId xmlns:a16="http://schemas.microsoft.com/office/drawing/2014/main" id="{0D69001E-8C4B-4830-B934-AF2EA3A77EB3}"/>
+                <a16:creationId xmlns:a16="http://schemas.microsoft.com/office/drawing/2014/main" id="{A24A4766-58F2-453A-A001-4210C0C72444}"/>
               </a:ext>
             </a:extLst>
           </p:cNvPr>
@@ -11555,7 +11555,7 @@
           <p:cNvPr id="3" name="">
             <a:extLst xmlns:a="http://schemas.openxmlformats.org/drawingml/2006/main">
               <a:ext uri="{FF2B5EF4-FFF2-40B4-BE49-F238E27FC236}">
-                <a16:creationId xmlns:a16="http://schemas.microsoft.com/office/drawing/2014/main" id="{87F1760F-8791-49D6-B548-EEB43EF93D88}"/>
+                <a16:creationId xmlns:a16="http://schemas.microsoft.com/office/drawing/2014/main" id="{F7547564-3DEA-439F-B4F6-2F8E65DF8424}"/>
               </a:ext>
             </a:extLst>
           </p:cNvPr>
@@ -11606,7 +11606,7 @@
                 <a:ea typeface="Arial"/>
                 <a:cs typeface="Arial"/>
               </a:rPr>
-              <a:t>Nguồn: outputs/features/run_info.json; report/sections/theory.tex</a:t>
+              <a:t>Nguồn: outputs/features/run_info.json; handoff/DATA_WALKTHROUGH.md</a:t>
             </a:r>
           </a:p>
         </p:txBody>
@@ -11616,7 +11616,7 @@
           <p:cNvPr id="4" name="">
             <a:extLst xmlns:a="http://schemas.openxmlformats.org/drawingml/2006/main">
               <a:ext uri="{FF2B5EF4-FFF2-40B4-BE49-F238E27FC236}">
-                <a16:creationId xmlns:a16="http://schemas.microsoft.com/office/drawing/2014/main" id="{62C3F336-0F35-4947-BFBF-B6BDACBEBD23}"/>
+                <a16:creationId xmlns:a16="http://schemas.microsoft.com/office/drawing/2014/main" id="{1DF4A9AF-DB0B-48B8-BFAF-3C29C6C1EFC5}"/>
               </a:ext>
             </a:extLst>
           </p:cNvPr>
@@ -11677,7 +11677,7 @@
           <p:cNvPr id="5" name="">
             <a:extLst xmlns:a="http://schemas.openxmlformats.org/drawingml/2006/main">
               <a:ext uri="{FF2B5EF4-FFF2-40B4-BE49-F238E27FC236}">
-                <a16:creationId xmlns:a16="http://schemas.microsoft.com/office/drawing/2014/main" id="{F2A1008A-DEE9-41E2-8D47-1D8DD283ECC6}"/>
+                <a16:creationId xmlns:a16="http://schemas.microsoft.com/office/drawing/2014/main" id="{E367C320-1557-4A80-A1D1-F6ADD34B0377}"/>
               </a:ext>
             </a:extLst>
           </p:cNvPr>
@@ -11936,7 +11936,7 @@
           <p:cNvPr id="7" name="">
             <a:extLst xmlns:a="http://schemas.openxmlformats.org/drawingml/2006/main">
               <a:ext uri="{FF2B5EF4-FFF2-40B4-BE49-F238E27FC236}">
-                <a16:creationId xmlns:a16="http://schemas.microsoft.com/office/drawing/2014/main" id="{E951A141-F664-41A4-B0DA-9F9E35DF4A20}"/>
+                <a16:creationId xmlns:a16="http://schemas.microsoft.com/office/drawing/2014/main" id="{4B80E6CD-65B8-429C-B49A-35A5F44E5597}"/>
               </a:ext>
             </a:extLst>
           </p:cNvPr>
@@ -11995,7 +11995,7 @@
     </p:spTree>
     <p:extLst>
       <p:ext uri="{BB962C8B-B14F-4D97-AF65-F5344CB8AC3E}">
-        <p14:creationId xmlns:p14="http://schemas.microsoft.com/office/powerpoint/2010/main" val="586915372"/>
+        <p14:creationId xmlns:p14="http://schemas.microsoft.com/office/powerpoint/2010/main" val="525123326"/>
       </p:ext>
     </p:extLst>
   </p:cSld>
@@ -12026,7 +12026,7 @@
           <p:cNvPr id="7" name="">
             <a:extLst xmlns:a="http://schemas.openxmlformats.org/drawingml/2006/main">
               <a:ext uri="{FF2B5EF4-FFF2-40B4-BE49-F238E27FC236}">
-                <a16:creationId xmlns:a16="http://schemas.microsoft.com/office/drawing/2014/main" id="{C4961E67-C7DB-40C6-8D17-AAA2A7648579}"/>
+                <a16:creationId xmlns:a16="http://schemas.microsoft.com/office/drawing/2014/main" id="{85D59879-B636-440C-AE71-9A5B17B7C75A}"/>
               </a:ext>
             </a:extLst>
           </p:cNvPr>
@@ -12087,7 +12087,7 @@
           <p:cNvPr id="2" name="">
             <a:extLst xmlns:a="http://schemas.openxmlformats.org/drawingml/2006/main">
               <a:ext uri="{FF2B5EF4-FFF2-40B4-BE49-F238E27FC236}">
-                <a16:creationId xmlns:a16="http://schemas.microsoft.com/office/drawing/2014/main" id="{E228F13A-AE52-4C02-8823-6196DF40CDE1}"/>
+                <a16:creationId xmlns:a16="http://schemas.microsoft.com/office/drawing/2014/main" id="{131E20A8-1F19-4C39-81F6-B903A7B6B237}"/>
               </a:ext>
             </a:extLst>
           </p:cNvPr>
@@ -12148,7 +12148,7 @@
           <p:cNvPr id="3" name="">
             <a:extLst xmlns:a="http://schemas.openxmlformats.org/drawingml/2006/main">
               <a:ext uri="{FF2B5EF4-FFF2-40B4-BE49-F238E27FC236}">
-                <a16:creationId xmlns:a16="http://schemas.microsoft.com/office/drawing/2014/main" id="{24EB219C-33F5-40DC-A874-65DEF8C3CC9D}"/>
+                <a16:creationId xmlns:a16="http://schemas.microsoft.com/office/drawing/2014/main" id="{523E121A-1106-4337-BAC7-A32E27C93049}"/>
               </a:ext>
             </a:extLst>
           </p:cNvPr>
@@ -12209,7 +12209,7 @@
           <p:cNvPr id="4" name="">
             <a:extLst xmlns:a="http://schemas.openxmlformats.org/drawingml/2006/main">
               <a:ext uri="{FF2B5EF4-FFF2-40B4-BE49-F238E27FC236}">
-                <a16:creationId xmlns:a16="http://schemas.microsoft.com/office/drawing/2014/main" id="{971212AE-D60F-4F2A-B8D2-91AA24E7911F}"/>
+                <a16:creationId xmlns:a16="http://schemas.microsoft.com/office/drawing/2014/main" id="{C07A5168-0611-4F5C-B341-D1AA4BE83874}"/>
               </a:ext>
             </a:extLst>
           </p:cNvPr>
@@ -12553,7 +12553,7 @@
           <p:cNvPr id="6" name="">
             <a:extLst xmlns:a="http://schemas.openxmlformats.org/drawingml/2006/main">
               <a:ext uri="{FF2B5EF4-FFF2-40B4-BE49-F238E27FC236}">
-                <a16:creationId xmlns:a16="http://schemas.microsoft.com/office/drawing/2014/main" id="{1EBA7936-CAA8-42EC-808C-1AC9CB46D25A}"/>
+                <a16:creationId xmlns:a16="http://schemas.microsoft.com/office/drawing/2014/main" id="{C140AFB3-03CA-496C-8B1B-37BD1A49566B}"/>
               </a:ext>
             </a:extLst>
           </p:cNvPr>
@@ -12612,7 +12612,7 @@
     </p:spTree>
     <p:extLst>
       <p:ext uri="{BB962C8B-B14F-4D97-AF65-F5344CB8AC3E}">
-        <p14:creationId xmlns:p14="http://schemas.microsoft.com/office/powerpoint/2010/main" val="49524413"/>
+        <p14:creationId xmlns:p14="http://schemas.microsoft.com/office/powerpoint/2010/main" val="1973142221"/>
       </p:ext>
     </p:extLst>
   </p:cSld>
@@ -12643,7 +12643,7 @@
           <p:cNvPr id="7" name="">
             <a:extLst xmlns:a="http://schemas.openxmlformats.org/drawingml/2006/main">
               <a:ext uri="{FF2B5EF4-FFF2-40B4-BE49-F238E27FC236}">
-                <a16:creationId xmlns:a16="http://schemas.microsoft.com/office/drawing/2014/main" id="{E9FCE2D7-29A4-4DF5-A53F-13479D1FCE1C}"/>
+                <a16:creationId xmlns:a16="http://schemas.microsoft.com/office/drawing/2014/main" id="{5DA00B46-6D4C-4E1D-8115-E91E27FCD183}"/>
               </a:ext>
             </a:extLst>
           </p:cNvPr>
@@ -12704,7 +12704,7 @@
           <p:cNvPr id="2" name="">
             <a:extLst xmlns:a="http://schemas.openxmlformats.org/drawingml/2006/main">
               <a:ext uri="{FF2B5EF4-FFF2-40B4-BE49-F238E27FC236}">
-                <a16:creationId xmlns:a16="http://schemas.microsoft.com/office/drawing/2014/main" id="{2921E09C-BD91-4878-B4BD-A3A4B2137691}"/>
+                <a16:creationId xmlns:a16="http://schemas.microsoft.com/office/drawing/2014/main" id="{6EF8CB0C-7E3A-4A61-B62D-A12C1199D0C6}"/>
               </a:ext>
             </a:extLst>
           </p:cNvPr>
@@ -12765,7 +12765,7 @@
           <p:cNvPr id="3" name="">
             <a:extLst xmlns:a="http://schemas.openxmlformats.org/drawingml/2006/main">
               <a:ext uri="{FF2B5EF4-FFF2-40B4-BE49-F238E27FC236}">
-                <a16:creationId xmlns:a16="http://schemas.microsoft.com/office/drawing/2014/main" id="{7C6DAD0E-62F1-41D1-96D5-7848A91A3B21}"/>
+                <a16:creationId xmlns:a16="http://schemas.microsoft.com/office/drawing/2014/main" id="{63D2C525-2F91-4A4F-97E3-08E3585562BB}"/>
               </a:ext>
             </a:extLst>
           </p:cNvPr>
@@ -12826,7 +12826,7 @@
           <p:cNvPr id="4" name="">
             <a:extLst xmlns:a="http://schemas.openxmlformats.org/drawingml/2006/main">
               <a:ext uri="{FF2B5EF4-FFF2-40B4-BE49-F238E27FC236}">
-                <a16:creationId xmlns:a16="http://schemas.microsoft.com/office/drawing/2014/main" id="{D9019912-2753-4173-9CD9-5DCF60E62D2B}"/>
+                <a16:creationId xmlns:a16="http://schemas.microsoft.com/office/drawing/2014/main" id="{BF785D1A-3134-4167-82BE-4DDE902AF584}"/>
               </a:ext>
             </a:extLst>
           </p:cNvPr>
@@ -13170,7 +13170,7 @@
           <p:cNvPr id="6" name="">
             <a:extLst xmlns:a="http://schemas.openxmlformats.org/drawingml/2006/main">
               <a:ext uri="{FF2B5EF4-FFF2-40B4-BE49-F238E27FC236}">
-                <a16:creationId xmlns:a16="http://schemas.microsoft.com/office/drawing/2014/main" id="{BE9C087C-45DB-495F-9A2D-CA0C3ECE1E67}"/>
+                <a16:creationId xmlns:a16="http://schemas.microsoft.com/office/drawing/2014/main" id="{94EB1A8F-E9D9-41A6-955D-DC917D63BE48}"/>
               </a:ext>
             </a:extLst>
           </p:cNvPr>
@@ -13229,7 +13229,7 @@
     </p:spTree>
     <p:extLst>
       <p:ext uri="{BB962C8B-B14F-4D97-AF65-F5344CB8AC3E}">
-        <p14:creationId xmlns:p14="http://schemas.microsoft.com/office/powerpoint/2010/main" val="82840649"/>
+        <p14:creationId xmlns:p14="http://schemas.microsoft.com/office/powerpoint/2010/main" val="2075600673"/>
       </p:ext>
     </p:extLst>
   </p:cSld>
@@ -13260,7 +13260,7 @@
           <p:cNvPr id="13" name="">
             <a:extLst xmlns:a="http://schemas.openxmlformats.org/drawingml/2006/main">
               <a:ext uri="{FF2B5EF4-FFF2-40B4-BE49-F238E27FC236}">
-                <a16:creationId xmlns:a16="http://schemas.microsoft.com/office/drawing/2014/main" id="{6B963BBE-2042-4EE3-85E2-909941347AD4}"/>
+                <a16:creationId xmlns:a16="http://schemas.microsoft.com/office/drawing/2014/main" id="{85A0731B-45C0-438A-8E4C-5C4F6CC17BAE}"/>
               </a:ext>
             </a:extLst>
           </p:cNvPr>
@@ -13321,7 +13321,7 @@
           <p:cNvPr id="2" name="">
             <a:extLst xmlns:a="http://schemas.openxmlformats.org/drawingml/2006/main">
               <a:ext uri="{FF2B5EF4-FFF2-40B4-BE49-F238E27FC236}">
-                <a16:creationId xmlns:a16="http://schemas.microsoft.com/office/drawing/2014/main" id="{6F13F3B1-A368-441E-8058-8080A57EC7C7}"/>
+                <a16:creationId xmlns:a16="http://schemas.microsoft.com/office/drawing/2014/main" id="{754159DF-AE79-4E73-ADA8-432BF6013E8E}"/>
               </a:ext>
             </a:extLst>
           </p:cNvPr>
@@ -13382,7 +13382,7 @@
           <p:cNvPr id="3" name="">
             <a:extLst xmlns:a="http://schemas.openxmlformats.org/drawingml/2006/main">
               <a:ext uri="{FF2B5EF4-FFF2-40B4-BE49-F238E27FC236}">
-                <a16:creationId xmlns:a16="http://schemas.microsoft.com/office/drawing/2014/main" id="{AAC3A780-70DC-4CE0-B534-3C9E362CF711}"/>
+                <a16:creationId xmlns:a16="http://schemas.microsoft.com/office/drawing/2014/main" id="{38B8C5BE-37E2-449B-B7FF-2540295CE90F}"/>
               </a:ext>
             </a:extLst>
           </p:cNvPr>
@@ -13443,7 +13443,7 @@
           <p:cNvPr id="4" name="">
             <a:extLst xmlns:a="http://schemas.openxmlformats.org/drawingml/2006/main">
               <a:ext uri="{FF2B5EF4-FFF2-40B4-BE49-F238E27FC236}">
-                <a16:creationId xmlns:a16="http://schemas.microsoft.com/office/drawing/2014/main" id="{729988E6-402D-4051-8D9A-BBEC26D11169}"/>
+                <a16:creationId xmlns:a16="http://schemas.microsoft.com/office/drawing/2014/main" id="{FB42F24A-8363-4AD5-B0AD-A41A8CFE2510}"/>
               </a:ext>
             </a:extLst>
           </p:cNvPr>
@@ -13508,7 +13508,7 @@
           <p:nvPr/>
         </p:nvPicPr>
         <p:blipFill>
-          <a:blip xmlns:r="http://schemas.openxmlformats.org/officeDocument/2006/relationships" xmlns:a="http://schemas.openxmlformats.org/drawingml/2006/main" r:embed="Rad5e71cdda8e4e59"/>
+          <a:blip xmlns:r="http://schemas.openxmlformats.org/officeDocument/2006/relationships" xmlns:a="http://schemas.openxmlformats.org/drawingml/2006/main" r:embed="Rf7a00583c3894074"/>
           <a:stretch xmlns:a="http://schemas.openxmlformats.org/drawingml/2006/main"/>
         </p:blipFill>
         <p:spPr>
@@ -13526,7 +13526,7 @@
           <p:cNvPr id="6" name="">
             <a:extLst xmlns:a="http://schemas.openxmlformats.org/drawingml/2006/main">
               <a:ext uri="{FF2B5EF4-FFF2-40B4-BE49-F238E27FC236}">
-                <a16:creationId xmlns:a16="http://schemas.microsoft.com/office/drawing/2014/main" id="{0FAE0A82-A779-41A6-8FF0-9BA00CC86B1B}"/>
+                <a16:creationId xmlns:a16="http://schemas.microsoft.com/office/drawing/2014/main" id="{4C104729-EA1C-40DE-B5D3-2CE5AAEAFC8D}"/>
               </a:ext>
             </a:extLst>
           </p:cNvPr>
@@ -13587,7 +13587,7 @@
           <p:cNvPr id="7" name="">
             <a:extLst xmlns:a="http://schemas.openxmlformats.org/drawingml/2006/main">
               <a:ext uri="{FF2B5EF4-FFF2-40B4-BE49-F238E27FC236}">
-                <a16:creationId xmlns:a16="http://schemas.microsoft.com/office/drawing/2014/main" id="{2A2D7CB0-F39C-459F-B037-BF77E9A5CDBE}"/>
+                <a16:creationId xmlns:a16="http://schemas.microsoft.com/office/drawing/2014/main" id="{6C7FAE2C-C784-4A31-90CC-2C9EF85EE2F4}"/>
               </a:ext>
             </a:extLst>
           </p:cNvPr>
@@ -13648,7 +13648,7 @@
           <p:cNvPr id="8" name="">
             <a:extLst xmlns:a="http://schemas.openxmlformats.org/drawingml/2006/main">
               <a:ext uri="{FF2B5EF4-FFF2-40B4-BE49-F238E27FC236}">
-                <a16:creationId xmlns:a16="http://schemas.microsoft.com/office/drawing/2014/main" id="{67832740-CE4C-430F-A071-2C58795DF31F}"/>
+                <a16:creationId xmlns:a16="http://schemas.microsoft.com/office/drawing/2014/main" id="{572398FE-D92C-4D72-A9D7-88C5C7E254D1}"/>
               </a:ext>
             </a:extLst>
           </p:cNvPr>
@@ -13709,7 +13709,7 @@
           <p:cNvPr id="9" name="">
             <a:extLst xmlns:a="http://schemas.openxmlformats.org/drawingml/2006/main">
               <a:ext uri="{FF2B5EF4-FFF2-40B4-BE49-F238E27FC236}">
-                <a16:creationId xmlns:a16="http://schemas.microsoft.com/office/drawing/2014/main" id="{FA8E304F-7452-4D35-9AE2-68809C0E2EA8}"/>
+                <a16:creationId xmlns:a16="http://schemas.microsoft.com/office/drawing/2014/main" id="{D34FE478-7926-4EA2-9028-083D9ACEA942}"/>
               </a:ext>
             </a:extLst>
           </p:cNvPr>
@@ -13770,7 +13770,7 @@
           <p:cNvPr id="10" name="">
             <a:extLst xmlns:a="http://schemas.openxmlformats.org/drawingml/2006/main">
               <a:ext uri="{FF2B5EF4-FFF2-40B4-BE49-F238E27FC236}">
-                <a16:creationId xmlns:a16="http://schemas.microsoft.com/office/drawing/2014/main" id="{8B98C818-703F-423A-9707-F5C70E2D844B}"/>
+                <a16:creationId xmlns:a16="http://schemas.microsoft.com/office/drawing/2014/main" id="{AD4E8B03-1423-4454-9FAD-AAEDCFB5974D}"/>
               </a:ext>
             </a:extLst>
           </p:cNvPr>
@@ -13831,7 +13831,7 @@
           <p:cNvPr id="11" name="">
             <a:extLst xmlns:a="http://schemas.openxmlformats.org/drawingml/2006/main">
               <a:ext uri="{FF2B5EF4-FFF2-40B4-BE49-F238E27FC236}">
-                <a16:creationId xmlns:a16="http://schemas.microsoft.com/office/drawing/2014/main" id="{87191DBA-5968-4E28-AEB1-174F5B135096}"/>
+                <a16:creationId xmlns:a16="http://schemas.microsoft.com/office/drawing/2014/main" id="{782246BB-711D-46B4-8C2B-59E0B1FAC925}"/>
               </a:ext>
             </a:extLst>
           </p:cNvPr>
@@ -13892,7 +13892,7 @@
           <p:cNvPr id="12" name="">
             <a:extLst xmlns:a="http://schemas.openxmlformats.org/drawingml/2006/main">
               <a:ext uri="{FF2B5EF4-FFF2-40B4-BE49-F238E27FC236}">
-                <a16:creationId xmlns:a16="http://schemas.microsoft.com/office/drawing/2014/main" id="{E49C109F-2709-468D-BE62-5AD8CBAE84E3}"/>
+                <a16:creationId xmlns:a16="http://schemas.microsoft.com/office/drawing/2014/main" id="{86AFF3E3-A1EF-4AB5-A39E-2A8CAD5568EC}"/>
               </a:ext>
             </a:extLst>
           </p:cNvPr>
@@ -13951,7 +13951,7 @@
     </p:spTree>
     <p:extLst>
       <p:ext uri="{BB962C8B-B14F-4D97-AF65-F5344CB8AC3E}">
-        <p14:creationId xmlns:p14="http://schemas.microsoft.com/office/powerpoint/2010/main" val="1895487725"/>
+        <p14:creationId xmlns:p14="http://schemas.microsoft.com/office/powerpoint/2010/main" val="771515463"/>
       </p:ext>
     </p:extLst>
   </p:cSld>
@@ -13999,16 +13999,16 @@
         <a:srgbClr val="96607D"/>
       </a:folHlink>
     </a:clrScheme>
-    <a:fontScheme name="Office">
+    <a:fontScheme name="">
       <a:majorFont>
-        <a:latin typeface="Calibri Light"/>
-        <a:ea typeface="Calibri Light"/>
-        <a:cs typeface="Calibri Light"/>
+        <a:latin typeface="Aptos"/>
+        <a:ea typeface=""/>
+        <a:cs typeface=""/>
       </a:majorFont>
       <a:minorFont>
-        <a:latin typeface="Calibri"/>
-        <a:ea typeface="Calibri"/>
-        <a:cs typeface="Calibri"/>
+        <a:latin typeface="Aptos"/>
+        <a:ea typeface=""/>
+        <a:cs typeface=""/>
       </a:minorFont>
     </a:fontScheme>
     <a:fmtScheme name="ChatGPT">

--- a/slides/cmapss_fd001_presentation.pptx
+++ b/slides/cmapss_fd001_presentation.pptx
@@ -152,7 +152,7 @@
                 </a:solidFill>
                 <a:latin typeface="Arial"/>
               </a:rPr>
-              <a:t>build_engine_summary · Pandas · lần chạy cold (mili giây)</a:t>
+              <a:t>Pipeline gồm I/O · trung vị 3 lượt (giây)</a:t>
             </a:r>
           </a:p>
         </c:rich>
@@ -176,7 +176,7 @@
               <c:strCache>
                 <c:ptCount val="1"/>
                 <c:pt idx="0">
-                  <c:v>ms</c:v>
+                  <c:v>Pandas</c:v>
                 </c:pt>
               </c:strCache>
             </c:strRef>
@@ -213,38 +213,105 @@
             <c:showLeaderLines val="0"/>
           </c:dLbls>
           <c:cat>
-            <c:multiLvlStrRef>
-              <c:f>Sheet1!$A$2:$A$4</c:f>
-              <c:multiLvlStrCache>
-                <c:ptCount val="3"/>
-                <c:lvl>
-                  <c:pt idx="0">
-                    <c:v>1× · 33.727 dòng</c:v>
-                  </c:pt>
-                  <c:pt idx="1">
-                    <c:v>10× · 337.270 dòng</c:v>
-                  </c:pt>
-                  <c:pt idx="2">
-                    <c:v>100× · 3.372.700 dòng</c:v>
-                  </c:pt>
-                </c:lvl>
-              </c:multiLvlStrCache>
-            </c:multiLvlStrRef>
+            <c:strRef>
+              <c:f>Sheet1!$A$2:$A$3</c:f>
+              <c:strCache>
+                <c:ptCount val="2"/>
+                <c:pt idx="0">
+                  <c:v>1× · 33.727 dòng</c:v>
+                </c:pt>
+                <c:pt idx="1">
+                  <c:v>10× · 337.270 dòng</c:v>
+                </c:pt>
+              </c:strCache>
+            </c:strRef>
           </c:cat>
           <c:val>
             <c:numRef>
-              <c:f>Sheet1!$B$2:$B$4</c:f>
+              <c:f>Sheet1!$B$2:$B$3</c:f>
               <c:numCache>
                 <c:formatCode>General</c:formatCode>
-                <c:ptCount val="3"/>
+                <c:ptCount val="2"/>
                 <c:pt idx="0">
-                  <c:v>20</c:v>
+                  <c:v>11</c:v>
                 </c:pt>
                 <c:pt idx="1">
-                  <c:v>159</c:v>
+                  <c:v>112</c:v>
                 </c:pt>
-                <c:pt idx="2">
-                  <c:v>1675</c:v>
+              </c:numCache>
+            </c:numRef>
+          </c:val>
+        </c:ser>
+        <c:ser>
+          <c:idx val="1"/>
+          <c:order val="1"/>
+          <c:tx>
+            <c:strRef>
+              <c:f>Sheet1!$C$1</c:f>
+              <c:strCache>
+                <c:ptCount val="1"/>
+                <c:pt idx="0">
+                  <c:v>PySpark local[4]</c:v>
+                </c:pt>
+              </c:strCache>
+            </c:strRef>
+          </c:tx>
+          <c:spPr>
+            <a:solidFill>
+              <a:srgbClr val="C8701E"/>
+            </a:solidFill>
+            <a:effectLst/>
+          </c:spPr>
+          <c:invertIfNegative val="0"/>
+          <c:dLbls>
+            <c:numFmt formatCode="0" sourceLinked="0"/>
+            <c:txPr>
+              <a:bodyPr/>
+              <a:lstStyle/>
+              <a:p>
+                <a:pPr>
+                  <a:defRPr b="0" i="0" strike="noStrike" sz="1300" u="none">
+                    <a:solidFill>
+                      <a:srgbClr val="1B2733"/>
+                    </a:solidFill>
+                    <a:latin typeface="Arial"/>
+                  </a:defRPr>
+                </a:pPr>
+              </a:p>
+            </c:txPr>
+            <c:showLegendKey val="0"/>
+            <c:showVal val="1"/>
+            <c:showCatName val="0"/>
+            <c:showSerName val="0"/>
+            <c:showPercent val="0"/>
+            <c:showBubbleSize val="0"/>
+            <c:showLeaderLines val="0"/>
+          </c:dLbls>
+          <c:cat>
+            <c:strRef>
+              <c:f>Sheet1!$A$2:$A$3</c:f>
+              <c:strCache>
+                <c:ptCount val="2"/>
+                <c:pt idx="0">
+                  <c:v>1× · 33.727 dòng</c:v>
+                </c:pt>
+                <c:pt idx="1">
+                  <c:v>10× · 337.270 dòng</c:v>
+                </c:pt>
+              </c:strCache>
+            </c:strRef>
+          </c:cat>
+          <c:val>
+            <c:numRef>
+              <c:f>Sheet1!$C$2:$C$3</c:f>
+              <c:numCache>
+                <c:formatCode>General</c:formatCode>
+                <c:ptCount val="2"/>
+                <c:pt idx="0">
+                  <c:v>15</c:v>
+                </c:pt>
+                <c:pt idx="1">
+                  <c:v>33</c:v>
                 </c:pt>
               </c:numCache>
             </c:numRef>
@@ -379,6 +446,20 @@
         <a:effectLst/>
       </c:spPr>
     </c:plotArea>
+    <c:legend>
+      <c:legendPos val="b"/>
+      <c:overlay val="0"/>
+      <c:txPr>
+        <a:bodyPr/>
+        <a:lstStyle/>
+        <a:p>
+          <a:pPr>
+            <a:defRPr sz="1100">      </a:defRPr>
+          </a:pPr>
+          <a:endParaRPr lang="en-US"/>
+        </a:p>
+      </c:txPr>
+    </c:legend>
     <c:plotVisOnly val="1"/>
     <c:dispBlanksAs val="span"/>
   </c:chart>
@@ -482,23 +563,21 @@
             <c:showLeaderLines val="0"/>
           </c:dLbls>
           <c:cat>
-            <c:multiLvlStrRef>
+            <c:strRef>
               <c:f>Sheet1!$A$2:$A$4</c:f>
-              <c:multiLvlStrCache>
+              <c:strCache>
                 <c:ptCount val="3"/>
-                <c:lvl>
-                  <c:pt idx="0">
-                    <c:v>ARIMA · 0,4110</c:v>
-                  </c:pt>
-                  <c:pt idx="1">
-                    <c:v>Drift · 0,7469</c:v>
-                  </c:pt>
-                  <c:pt idx="2">
-                    <c:v>Last-value · 0,9478</c:v>
-                  </c:pt>
-                </c:lvl>
-              </c:multiLvlStrCache>
-            </c:multiLvlStrRef>
+                <c:pt idx="0">
+                  <c:v>ARIMA · 0,4110</c:v>
+                </c:pt>
+                <c:pt idx="1">
+                  <c:v>Drift · 0,7469</c:v>
+                </c:pt>
+                <c:pt idx="2">
+                  <c:v>Last-value · 0,9478</c:v>
+                </c:pt>
+              </c:strCache>
+            </c:strRef>
           </c:cat>
           <c:val>
             <c:numRef>
@@ -681,267 +760,7 @@
                 </a:solidFill>
                 <a:latin typeface="Arial"/>
               </a:rPr>
-              <a:t>Mean engine-level MAE, 5-fold GroupKFold (cycles)</a:t>
-            </a:r>
-          </a:p>
-        </c:rich>
-      </c:tx>
-      <c:layout/>
-      <c:overlay val="0"/>
-    </c:title>
-    <c:autoTitleDeleted val="0"/>
-    <c:plotArea>
-      <c:layout/>
-      <c:barChart>
-        <c:barDir val="bar"/>
-        <c:grouping val="clustered"/>
-        <c:varyColors val="0"/>
-        <c:ser>
-          <c:idx val="0"/>
-          <c:order val="0"/>
-          <c:tx>
-            <c:strRef>
-              <c:f>Sheet1!$B$1</c:f>
-              <c:strCache>
-                <c:ptCount val="1"/>
-                <c:pt idx="0">
-                  <c:v>MAE</c:v>
-                </c:pt>
-              </c:strCache>
-            </c:strRef>
-          </c:tx>
-          <c:spPr>
-            <a:solidFill>
-              <a:srgbClr val="157A7F"/>
-            </a:solidFill>
-            <a:effectLst/>
-          </c:spPr>
-          <c:invertIfNegative val="0"/>
-          <c:dLbls>
-            <c:numFmt formatCode="#,##0" sourceLinked="0"/>
-            <c:txPr>
-              <a:bodyPr/>
-              <a:lstStyle/>
-              <a:p>
-                <a:pPr>
-                  <a:defRPr b="0" i="0" strike="noStrike" sz="1200" u="none">
-                    <a:solidFill>
-                      <a:srgbClr val="000000"/>
-                    </a:solidFill>
-                    <a:latin typeface="Arial"/>
-                  </a:defRPr>
-                </a:pPr>
-              </a:p>
-            </c:txPr>
-            <c:showLegendKey val="0"/>
-            <c:showVal val="0"/>
-            <c:showCatName val="0"/>
-            <c:showSerName val="0"/>
-            <c:showPercent val="0"/>
-            <c:showBubbleSize val="0"/>
-            <c:showLeaderLines val="0"/>
-          </c:dLbls>
-          <c:cat>
-            <c:multiLvlStrRef>
-              <c:f>Sheet1!$A$2:$A$4</c:f>
-              <c:multiLvlStrCache>
-                <c:ptCount val="3"/>
-                <c:lvl>
-                  <c:pt idx="0">
-                    <c:v>Median baseline · 46,95</c:v>
-                  </c:pt>
-                  <c:pt idx="1">
-                    <c:v>Ridge (α = 1) · 23,99</c:v>
-                  </c:pt>
-                  <c:pt idx="2">
-                    <c:v>HistGradientBoosting · 20,21</c:v>
-                  </c:pt>
-                </c:lvl>
-              </c:multiLvlStrCache>
-            </c:multiLvlStrRef>
-          </c:cat>
-          <c:val>
-            <c:numRef>
-              <c:f>Sheet1!$B$2:$B$4</c:f>
-              <c:numCache>
-                <c:formatCode>General</c:formatCode>
-                <c:ptCount val="3"/>
-                <c:pt idx="0">
-                  <c:v>46.95</c:v>
-                </c:pt>
-                <c:pt idx="1">
-                  <c:v>23.99</c:v>
-                </c:pt>
-                <c:pt idx="2">
-                  <c:v>20.21</c:v>
-                </c:pt>
-              </c:numCache>
-            </c:numRef>
-          </c:val>
-        </c:ser>
-        <c:dLbls>
-          <c:numFmt formatCode="#,##0" sourceLinked="0"/>
-          <c:txPr>
-            <a:bodyPr/>
-            <a:lstStyle/>
-            <a:p>
-              <a:pPr>
-                <a:defRPr b="0" i="0" strike="noStrike" sz="1200" u="none">
-                  <a:solidFill>
-                    <a:srgbClr val="000000"/>
-                  </a:solidFill>
-                  <a:latin typeface="Arial"/>
-                </a:defRPr>
-              </a:pPr>
-            </a:p>
-          </c:txPr>
-          <c:showLegendKey val="0"/>
-          <c:showVal val="0"/>
-          <c:showCatName val="0"/>
-          <c:showSerName val="0"/>
-          <c:showPercent val="0"/>
-          <c:showBubbleSize val="0"/>
-          <c:showLeaderLines val="0"/>
-        </c:dLbls>
-        <c:gapWidth val="150"/>
-        <c:overlap val="0"/>
-        <c:axId val="2094734554"/>
-        <c:axId val="2094734552"/>
-        <c:axId val="2094734556"/>
-      </c:barChart>
-      <c:catAx>
-        <c:axId val="2094734554"/>
-        <c:scaling>
-          <c:orientation val="maxMin"/>
-        </c:scaling>
-        <c:delete val="0"/>
-        <c:axPos val="l"/>
-        <c:numFmt formatCode="General" sourceLinked="1"/>
-        <c:majorTickMark val="out"/>
-        <c:minorTickMark val="none"/>
-        <c:tickLblPos val="nextTo"/>
-        <c:spPr>
-          <a:ln w="12700" cap="flat">
-            <a:solidFill>
-              <a:srgbClr val="888888"/>
-            </a:solidFill>
-            <a:prstDash val="solid"/>
-            <a:round/>
-          </a:ln>
-        </c:spPr>
-        <c:txPr>
-          <a:bodyPr/>
-          <a:lstStyle/>
-          <a:p>
-            <a:pPr>
-              <a:defRPr sz="1400" b="0" i="0" u="none" strike="noStrike">
-                <a:solidFill>
-                  <a:srgbClr val="1B2733"/>
-                </a:solidFill>
-                <a:latin typeface="Arial"/>
-              </a:defRPr>
-            </a:pPr>
-            <a:endParaRPr lang="en-US"/>
-          </a:p>
-        </c:txPr>
-        <c:crossAx val="2094734552"/>
-        <c:crosses val="autoZero"/>
-        <c:auto val="1"/>
-        <c:lblAlgn val="ctr"/>
-        <c:noMultiLvlLbl val="1"/>
-      </c:catAx>
-      <c:valAx>
-        <c:axId val="2094734552"/>
-        <c:scaling>
-          <c:orientation val="minMax"/>
-          <c:max val="50"/>
-          <c:min val="0"/>
-        </c:scaling>
-        <c:delete val="1"/>
-        <c:axPos val="b"/>
-        <c:numFmt formatCode="General" sourceLinked="0"/>
-        <c:majorTickMark val="out"/>
-        <c:minorTickMark val="none"/>
-        <c:tickLblPos val="low"/>
-        <c:spPr>
-          <a:ln w="12700" cap="flat">
-            <a:solidFill>
-              <a:srgbClr val="888888"/>
-            </a:solidFill>
-            <a:prstDash val="solid"/>
-            <a:round/>
-          </a:ln>
-        </c:spPr>
-        <c:txPr>
-          <a:bodyPr/>
-          <a:lstStyle/>
-          <a:p>
-            <a:pPr>
-              <a:defRPr sz="1200" b="0" i="0" u="none" strike="noStrike">
-                <a:solidFill>
-                  <a:srgbClr val="000000"/>
-                </a:solidFill>
-                <a:latin typeface="Arial"/>
-              </a:defRPr>
-            </a:pPr>
-            <a:endParaRPr lang="en-US"/>
-          </a:p>
-        </c:txPr>
-        <c:crossAx val="2094734554"/>
-        <c:crosses val="autoZero"/>
-        <c:crossBetween val="between"/>
-      </c:valAx>
-      <c:spPr>
-        <a:noFill/>
-        <a:ln>
-          <a:noFill/>
-        </a:ln>
-        <a:effectLst/>
-      </c:spPr>
-    </c:plotArea>
-    <c:plotVisOnly val="1"/>
-    <c:dispBlanksAs val="span"/>
-  </c:chart>
-  <c:spPr>
-    <a:noFill/>
-    <a:ln>
-      <a:noFill/>
-    </a:ln>
-    <a:effectLst/>
-  </c:spPr>
-  <c:externalData r:id="rId1">
-    <c:autoUpdate val="0"/>
-  </c:externalData>
-</c:chartSpace>
-</file>
-
-<file path=ppt/charts/chart4.xml><?xml version="1.0" encoding="utf-8"?>
-<c:chartSpace xmlns:c="http://schemas.openxmlformats.org/drawingml/2006/chart" xmlns:a="http://schemas.openxmlformats.org/drawingml/2006/main" xmlns:r="http://schemas.openxmlformats.org/officeDocument/2006/relationships">
-  <c:date1904 val="0"/>
-  <c:roundedCorners val="1"/>
-  <c:chart>
-    <c:title>
-      <c:tx>
-        <c:rich>
-          <a:bodyPr/>
-          <a:lstStyle/>
-          <a:p>
-            <a:pPr>
-              <a:defRPr sz="1100" b="0" i="0" u="none" strike="noStrike">
-                <a:solidFill>
-                  <a:srgbClr val="1B2733"/>
-                </a:solidFill>
-                <a:latin typeface="Arial"/>
-              </a:defRPr>
-            </a:pPr>
-            <a:r>
-              <a:rPr sz="1100" b="0" i="0" u="none" strike="noStrike">
-                <a:solidFill>
-                  <a:srgbClr val="1B2733"/>
-                </a:solidFill>
-                <a:latin typeface="Arial"/>
-              </a:rPr>
-              <a:t>Thời điểm cảnh báo đầu tiên so với RUL thật = 30 (số engine)</a:t>
+              <a:t>MAE trên panel chung (cycles)</a:t>
             </a:r>
           </a:p>
         </c:rich>
@@ -965,7 +784,82 @@
               <c:strCache>
                 <c:ptCount val="1"/>
                 <c:pt idx="0">
-                  <c:v>Engines</c:v>
+                  <c:v>HGB126 baseline</c:v>
+                </c:pt>
+              </c:strCache>
+            </c:strRef>
+          </c:tx>
+          <c:spPr>
+            <a:solidFill>
+              <a:srgbClr val="BFD9E3"/>
+            </a:solidFill>
+            <a:effectLst/>
+          </c:spPr>
+          <c:invertIfNegative val="0"/>
+          <c:dLbls>
+            <c:numFmt formatCode="#,##0" sourceLinked="0"/>
+            <c:txPr>
+              <a:bodyPr/>
+              <a:lstStyle/>
+              <a:p>
+                <a:pPr>
+                  <a:defRPr b="0" i="0" strike="noStrike" sz="1300" u="none">
+                    <a:solidFill>
+                      <a:srgbClr val="1B2733"/>
+                    </a:solidFill>
+                    <a:latin typeface="Arial"/>
+                  </a:defRPr>
+                </a:pPr>
+              </a:p>
+            </c:txPr>
+            <c:showLegendKey val="0"/>
+            <c:showVal val="1"/>
+            <c:showCatName val="0"/>
+            <c:showSerName val="0"/>
+            <c:showPercent val="0"/>
+            <c:showBubbleSize val="0"/>
+            <c:showLeaderLines val="0"/>
+          </c:dLbls>
+          <c:cat>
+            <c:strRef>
+              <c:f>Sheet1!$A$2:$A$3</c:f>
+              <c:strCache>
+                <c:ptCount val="2"/>
+                <c:pt idx="0">
+                  <c:v>Trajectory MAE</c:v>
+                </c:pt>
+                <c:pt idx="1">
+                  <c:v>Endpoint MAE</c:v>
+                </c:pt>
+              </c:strCache>
+            </c:strRef>
+          </c:cat>
+          <c:val>
+            <c:numRef>
+              <c:f>Sheet1!$B$2:$B$3</c:f>
+              <c:numCache>
+                <c:formatCode>General</c:formatCode>
+                <c:ptCount val="2"/>
+                <c:pt idx="0">
+                  <c:v>20.21</c:v>
+                </c:pt>
+                <c:pt idx="1">
+                  <c:v>15.26</c:v>
+                </c:pt>
+              </c:numCache>
+            </c:numRef>
+          </c:val>
+        </c:ser>
+        <c:ser>
+          <c:idx val="1"/>
+          <c:order val="1"/>
+          <c:tx>
+            <c:strRef>
+              <c:f>Sheet1!$C$1</c:f>
+              <c:strCache>
+                <c:ptCount val="1"/>
+                <c:pt idx="0">
+                  <c:v>HGB169 candidate</c:v>
                 </c:pt>
               </c:strCache>
             </c:strRef>
@@ -1002,38 +896,30 @@
             <c:showLeaderLines val="0"/>
           </c:dLbls>
           <c:cat>
-            <c:multiLvlStrRef>
-              <c:f>Sheet1!$A$2:$A$4</c:f>
-              <c:multiLvlStrCache>
-                <c:ptCount val="3"/>
-                <c:lvl>
-                  <c:pt idx="0">
-                    <c:v>Trước ngưỡng</c:v>
-                  </c:pt>
-                  <c:pt idx="1">
-                    <c:v>Đúng ngưỡng</c:v>
-                  </c:pt>
-                  <c:pt idx="2">
-                    <c:v>Sau ngưỡng</c:v>
-                  </c:pt>
-                </c:lvl>
-              </c:multiLvlStrCache>
-            </c:multiLvlStrRef>
+            <c:strRef>
+              <c:f>Sheet1!$A$2:$A$3</c:f>
+              <c:strCache>
+                <c:ptCount val="2"/>
+                <c:pt idx="0">
+                  <c:v>Trajectory MAE</c:v>
+                </c:pt>
+                <c:pt idx="1">
+                  <c:v>Endpoint MAE</c:v>
+                </c:pt>
+              </c:strCache>
+            </c:strRef>
           </c:cat>
           <c:val>
             <c:numRef>
-              <c:f>Sheet1!$B$2:$B$4</c:f>
+              <c:f>Sheet1!$C$2:$C$3</c:f>
               <c:numCache>
                 <c:formatCode>General</c:formatCode>
-                <c:ptCount val="3"/>
+                <c:ptCount val="2"/>
                 <c:pt idx="0">
-                  <c:v>44</c:v>
+                  <c:v>17</c:v>
                 </c:pt>
                 <c:pt idx="1">
-                  <c:v>7</c:v>
-                </c:pt>
-                <c:pt idx="2">
-                  <c:v>49</c:v>
+                  <c:v>9.89</c:v>
                 </c:pt>
               </c:numCache>
             </c:numRef>
@@ -1094,7 +980,7 @@
           <a:lstStyle/>
           <a:p>
             <a:pPr>
-              <a:defRPr sz="1200" b="0" i="0" u="none" strike="noStrike">
+              <a:defRPr sz="1400" b="0" i="0" u="none" strike="noStrike">
                 <a:solidFill>
                   <a:srgbClr val="1B2733"/>
                 </a:solidFill>
@@ -1114,7 +1000,8 @@
         <c:axId val="2094734552"/>
         <c:scaling>
           <c:orientation val="minMax"/>
-          <c:max val="60"/>
+          <c:max val="25"/>
+          <c:min val="0"/>
         </c:scaling>
         <c:delete val="1"/>
         <c:axPos val="l"/>
@@ -1158,6 +1045,23 @@
         <a:effectLst/>
       </c:spPr>
     </c:plotArea>
+    <c:legend>
+      <c:legendPos val="b"/>
+      <c:overlay val="0"/>
+      <c:txPr>
+        <a:bodyPr/>
+        <a:lstStyle/>
+        <a:p>
+          <a:pPr>
+            <a:defRPr sz="1200">
+              <a:latin typeface="Arial"/>
+              <a:cs typeface="Arial"/>
+            </a:defRPr>
+          </a:pPr>
+          <a:endParaRPr lang="en-US"/>
+        </a:p>
+      </c:txPr>
+    </c:legend>
     <c:plotVisOnly val="1"/>
     <c:dispBlanksAs val="span"/>
   </c:chart>
@@ -1174,7 +1078,7 @@
 </c:chartSpace>
 </file>
 
-<file path=ppt/charts/chart5.xml><?xml version="1.0" encoding="utf-8"?>
+<file path=ppt/charts/chart4.xml><?xml version="1.0" encoding="utf-8"?>
 <c:chartSpace xmlns:c="http://schemas.openxmlformats.org/drawingml/2006/chart" xmlns:a="http://schemas.openxmlformats.org/drawingml/2006/main" xmlns:r="http://schemas.openxmlformats.org/officeDocument/2006/relationships">
   <c:date1904 val="0"/>
   <c:roundedCorners val="1"/>
@@ -1261,23 +1165,21 @@
             <c:showLeaderLines val="0"/>
           </c:dLbls>
           <c:cat>
-            <c:multiLvlStrRef>
+            <c:strRef>
               <c:f>Sheet1!$A$2:$A$4</c:f>
-              <c:multiLvlStrCache>
+              <c:strCache>
                 <c:ptCount val="3"/>
-                <c:lvl>
-                  <c:pt idx="0">
-                    <c:v>FD002</c:v>
-                  </c:pt>
-                  <c:pt idx="1">
-                    <c:v>FD003</c:v>
-                  </c:pt>
-                  <c:pt idx="2">
-                    <c:v>FD004</c:v>
-                  </c:pt>
-                </c:lvl>
-              </c:multiLvlStrCache>
-            </c:multiLvlStrRef>
+                <c:pt idx="0">
+                  <c:v>FD002</c:v>
+                </c:pt>
+                <c:pt idx="1">
+                  <c:v>FD003</c:v>
+                </c:pt>
+                <c:pt idx="2">
+                  <c:v>FD004</c:v>
+                </c:pt>
+              </c:strCache>
+            </c:strRef>
           </c:cat>
           <c:val>
             <c:numRef>
@@ -1344,23 +1246,21 @@
             <c:showLeaderLines val="0"/>
           </c:dLbls>
           <c:cat>
-            <c:multiLvlStrRef>
+            <c:strRef>
               <c:f>Sheet1!$A$2:$A$4</c:f>
-              <c:multiLvlStrCache>
+              <c:strCache>
                 <c:ptCount val="3"/>
-                <c:lvl>
-                  <c:pt idx="0">
-                    <c:v>FD002</c:v>
-                  </c:pt>
-                  <c:pt idx="1">
-                    <c:v>FD003</c:v>
-                  </c:pt>
-                  <c:pt idx="2">
-                    <c:v>FD004</c:v>
-                  </c:pt>
-                </c:lvl>
-              </c:multiLvlStrCache>
-            </c:multiLvlStrRef>
+                <c:pt idx="0">
+                  <c:v>FD002</c:v>
+                </c:pt>
+                <c:pt idx="1">
+                  <c:v>FD003</c:v>
+                </c:pt>
+                <c:pt idx="2">
+                  <c:v>FD004</c:v>
+                </c:pt>
+              </c:strCache>
+            </c:strRef>
           </c:cat>
           <c:val>
             <c:numRef>
@@ -1928,10 +1828,10 @@
           <a:p>
             <a:r>
               <a:rPr lang="en-US" dirty="0"/>
-              <a:t>Thời lượng: 30 giây.
+              <a:t>Thời lượng: 20 giây.
 Chào thầy/cô. Giới thiệu tên, môn học. Nêu một câu mục tiêu: xây dựng pipeline từ raw data đến dự đoán RUL và cảnh báo sớm, có thể kiểm tra và tái lập.
-Bốn con số ở dưới là khung của bài: 100 train engines, 21 sensor, 126 đặc trưng, MAE 15,3490 cycles trên 100 test engines.
-Nguồn: outputs/modeling/tables/final_metrics.json; outputs/features/run_info.json.</a:t>
+Bốn con số ở dưới là khung của bài: 100 train engines, 21 sensor, 169 đặc trưng của predictor candidate và MAE trajectory 17,0009 cycles trên panel OOF chung. Đây là kết quả alignment audit có điều kiện, không phải metric test độc lập sau refit.
+Metric test lịch sử của HGB126 được giữ riêng ở slide 14. Nguồn: outputs/course_alignment/20261007/summary.json; outputs/course_alignment/20261007/model_metrics.csv.</a:t>
             </a:r>
             <a:endParaRPr lang="en-US" dirty="0"/>
           </a:p>
@@ -2019,7 +1919,7 @@
           <a:p>
             <a:r>
               <a:rPr lang="en-US" dirty="0"/>
-              <a:t>Thời lượng: 1 phút 45 giây.
+              <a:t>Thời lượng: 45 giây.
 Ví dụ tại cycle 170: window gồm cycles 141–170. Cycle 171 trở đi không được dùng.
 Với mỗi sensor tính 6 thống kê: last, mean, sample std, min, max, slope tuyến tính. 21 × 6 = 126 cột.
 29 cycle đầu mỗi engine chưa đủ window nên không tạo dòng; không padding. FD001 có 17.731 train windows và 10.196 test windows.
@@ -2111,7 +2011,7 @@
           <a:p>
             <a:r>
               <a:rPr lang="en-US" dirty="0"/>
-              <a:t>Thời lượng: 1 phút 30 giây.
+              <a:t>Thời lượng: 35 giây.
 Health Index là PC1 sau StandardScaler; scaler, PCA và hướng PC1 fit trên 90 train engines, 10 engine còn lại chỉ được transform. Hình cho thấy chỉ số giảm dần và giảm nhanh ở cuối vòng đời: đây là biểu đồ xu hướng suy giảm mà đề tài yêu cầu.
 ARIMA fit 70% đầu chuỗi, dự báo 30% cuối. MAE trung bình 0,4110, thấp hơn drift 0,7469 và last-value 0,9478 (thang Health Index, không phải cycle).
 Giới hạn: ARIMA chỉ thấp hơn drift ở 7/10 engine; coverage khoảng dự đoán 95% dao động 21,43%–97,03%. Health Index forecast không phải RUL forecast; đây là phân tích phụ.</a:t>
@@ -2202,7 +2102,7 @@
           <a:p>
             <a:r>
               <a:rPr lang="en-US" dirty="0"/>
-              <a:t>Thời lượng: 1 phút 30 giây.
+              <a:t>Thời lượng: 45 giây.
 Sơ đồ trái: 100 train engines chia thành 5 nhóm 20 engine. Mỗi fold dùng một nhóm làm validation, bốn nhóm còn lại để fit.
 Vì sao không chia ngẫu nhiên theo dòng: hai window liền kề của cùng engine chồng lấn 29/30 cycle. Nếu một window ở train và window kề nó ở validation, metric sẽ lạc quan.
 Bốn bước bên phải: chọn model bằng mean engine-level MAE; đặt trọng số để tổng trọng số mỗi engine bằng 1, engine dài không chi phối loss; refit trên toàn bộ 17.731 train windows; dự đoán một điểm cho mỗi test engine rồi mới ghép nhãn.</a:t>
@@ -2293,11 +2193,11 @@
           <a:p>
             <a:r>
               <a:rPr lang="en-US" dirty="0"/>
-              <a:t>Thời lượng: 1 phút 15 giây.
-Ba ứng viên: median baseline (dự đoán hằng), Ridge với StandardScaler trong pipeline, HistGradientBoostingRegressor.
-Mean engine MAE: median 46,9543, Ridge 23,9922, HGB 20,2143 cycles. HGB được chọn.
-Baseline cho biết mô hình học được nhiều hơn một dự đoán hằng. Kết luận chỉ áp dụng trong ba ứng viên và protocol này; không nói HGB là tốt nhất cho mọi dataset.
-Lưu ý: MAE CV (khoảng 20) và MAE test (khoảng 15) không so trực tiếp: CV chấm mọi train window từ cycle 30 đến failure, còn test chỉ chấm một điểm cắt mỗi engine.</a:t>
+              <a:t>Thời lượng: 55 giây.
+Alignment audit chấm lại HGB126 và HGB169 trên cùng 17.731 dòng train, cùng khóa engine và cùng grouped folds. HGB126 gồm 126 rolling features; HGB169 thêm cycle và 42 history features, thành 169 features.
+Trajectory: MAE 20,2143 → 17,0009 và RMSE 33,6359 → 29,8068 cycles. Endpoint tại các mốc 0,5/0,7/0,9: MAE 15,2577 → 9,8913 cycles.
+Paired bootstrap trên prediction đã lưu: delta trajectory MAE -3,2134 cycles, CI 95% [-4,4586; -1,9220]. Đây chưa phải refit mù và chưa bao gồm seed/model-selection uncertainty.
+Vì vậy HGB169 là predictor candidate chính trong phạm vi audit; HGB126 vẫn giữ vai trò baseline lịch sử để báo cáo metric test ở slide 14.</a:t>
             </a:r>
             <a:endParaRPr lang="en-US" dirty="0"/>
           </a:p>
@@ -2385,9 +2285,10 @@
           <a:p>
             <a:r>
               <a:rPr lang="en-US" dirty="0"/>
-              <a:t>Thời lượng: 1 phút 45 giây.
-Kết quả chính của báo cáo: mean engine MAE 15,3490 cycles, RMSE 20,5413 cycles, NASA score 1.513,2577.
+              <a:t>Thời lượng: 1 phút 5 giây.
+Đây là metric test lịch sử của HGB126, không phải kết quả test độc lập của HGB169: mean engine MAE 15,3490 cycles, RMSE 20,5413 cycles, NASA score 1.513,2577.
 Bootstrap theo engine 10.000 lần: khoảng tin cậy 95% cho MAE là [12,7286; 18,0866].
+HGB169 được báo cáo ở slide 13 trên panel trajectory và endpoint chung; không trộn các metric đó với metric test lịch sử này.
 Đọc hình: trục ngang là RUL thật, trục dọc là RUL dự đoán; điểm càng gần đường chéo càng đúng. Vùng RUL thấp bám sát đường chéo hơn vùng RUL cao.
 Trên slide làm tròn 2 chữ số; số đầy đủ nằm trong notes và báo cáo. NASA score bất đối xứng, không có đơn vị cycle.</a:t>
             </a:r>
@@ -2477,8 +2378,8 @@
           <a:p>
             <a:r>
               <a:rPr lang="en-US" dirty="0"/>
-              <a:t>Thời lượng: 1 phút 30 giây.
-Hình: residual = dự đoán − thật theo RUL thật. Residual dương nghĩa là model nghĩ engine còn sống lâu hơn thực tế.
+              <a:t>Thời lượng: 45 giây.
+Hình là residual của metric test lịch sử HGB126: residual = dự đoán − thật theo RUL thật. Residual dương nghĩa là model nghĩ engine còn sống lâu hơn thực tế.
 74 dự đoán cao hơn RUL thật, 26 dự đoán thấp hơn. Sai số tăng khi RUL thật lớn: ở đầu vòng đời tín hiệu suy giảm còn yếu.
 Ví dụ engine 23: RUL thật 113, dự đoán 170,4768, sai 57,4768 cycles. Không loại engine này khỏi metric.
 Mười trường hợp sai lớn nhất chiếm 75,5% NASA score. Trên OOF, khi RUL thật 150–200 dự đoán trung bình 147,16; khi 200–400 là 145,36 cycles: model không phân biệt được các trạng thái còn khỏe (outputs/diagnostics/error_diagnostics.json).
@@ -2570,12 +2471,11 @@
           <a:p>
             <a:r>
               <a:rPr lang="en-US" dirty="0"/>
-              <a:t>Thời lượng: 2 phút.
-Đây là biểu đồ xu hướng cảnh báo sớm theo yêu cầu đề tài. Hình: engine 1, đường xanh là RUL thật, đường đỏ là RUL dự đoán OOF, đường cam là ngưỡng 30 cycles. Cảnh báo đầu tiên tại cycle 162, trước failure ở cycle 192 đúng 30 cycles.
-Trên 100 engine: 44 cảnh báo trước khi RUL thật chạm 30, 7 đúng ngưỡng, 49 sau ngưỡng nhưng vẫn trước failure; không engine nào thiếu cảnh báo.
-Lead time đến failure: trung vị 30 cycles, khoảng tứ phân vị 26–35, miền 19–55.
-Cảnh báo trễ tập trung ở engine ngắn đời: 49 engine cảnh báo sau ngưỡng có tuổi thọ trung bình 182,8 cycles, so với 229,1 ở nhóm cảnh báo trước ngưỡng; tương quan Pearson giữa tuổi thọ và độ trễ là -0,56.
-Giới hạn: OOF cũng đã dùng để chọn model, nên đây là mô tả nội bộ. Mọi train engine đều đi đến failure nên tỷ lệ cảnh báo sai cấp engine không xác định. Không có chi phí bảo trì nên chưa phải chính sách bảo trì.</a:t>
+              <a:t>Thời lượng: 1 phút 30 giây.
+Đây là biểu đồ xu hướng của HGB126 baseline ở threshold 30: đường xanh là RUL thật, đường đỏ là RUL dự đoán OOF, đường cam là ngưỡng 30 cycles. Cảnh báo đầu tiên tại cycle 162, trước failure ở cycle 192 đúng 30 cycles.
+Trên HGB126 threshold 30: 44 cảnh báo trước khi RUL thật chạm 30, 7 đúng ngưỡng, 49 sau ngưỡng nhưng vẫn trước failure. Lead time trung vị 30 cycles.
+Bảng bên phải là fixed-policy sensitivity trên cùng 100 engine: threshold 30 và 40, persistence 1, lead requirement 30. HGB126 và HGB169 không được chọn lại bằng warning policy này.
+Không tuyên bố cải thiện toàn bộ quy trình: threshold 30 HGB169 kém đúng thời điểm hơn; threshold 40 HGB169 nhỉnh hơn nhưng burden tăng nhẹ. Chưa có chi phí bảo trì nên đây chưa phải chính sách triển khai.</a:t>
             </a:r>
             <a:endParaRPr lang="en-US" dirty="0"/>
           </a:p>
@@ -2663,10 +2563,13 @@
           <a:p>
             <a:r>
               <a:rPr lang="en-US" dirty="0"/>
-              <a:t>Thời lượng: 1 phút 45 giây.
+              <a:t>Thời lượng: 1 phút 15 giây.
 Mục tiêu: giảm sai số khi RUL ≤ 30 và giảm cảnh báo trễ, không làm tăng MAE toàn bộ. Nested GroupKFold 5×3: vòng ngoài giữ riêng một nhóm engine để đánh giá; vòng trong chia phần còn lại thành 3 nhóm để chọn cấu hình.
-Vòng ngoài trên 17.731 dòng: MAE RUL thấp 3,6676 → 3,6730 cycles (Δ +0,0054, CI 95% [-0,0506; 0,0639]); cảnh báo trễ/bỏ lỡ 49 → 53. Không đạt tiêu chí, giữ baseline; test MAE vẫn 15,3490.
-Bảng dưới là inner CV dùng để chọn: hgb_08 giảm MAE RUL thấp khoảng 9,75% nhưng tăng MAE toàn bộ 0,32 cycles. Đây là đánh đổi, không phải bằng chứng ngoài mẫu. Đợt sau cần chốt mức đánh đổi chấp nhận được trước khi thử.</a:t>
+Vòng ngoài trên 17.731 dòng: MAE RUL thấp 3,6676 → 3,6730 cycles (Δ +0,0054, CI 95% [-0,0506; 0,0639]); cảnh báo trễ/bỏ lỡ 49 → 53. Không đạt tiêu chí, giữ baseline; metric test lịch sử HGB126 vẫn 15,3490.
+Bảng dưới là outer CV của đợt bổ sung: FD001 capped RUL/history, FD002/FD004 settings/condition normalization. FD002/FD004 là within-subset, không phải transfer. Test lịch sử đã được xem nên đây là exploratory follow-up.
+FD001: outer MAE 20,2143 → 20,2966, gate chưa đạt; test MAE 13,0460.
+FD002: outer MAE 29,2861 → 28,0390, gate đạt; test MAE 19,1797.
+FD004: outer MAE 36,7428 → 35,4491, gate đạt; test MAE 26,6123.</a:t>
             </a:r>
             <a:endParaRPr lang="en-US" dirty="0"/>
           </a:p>
@@ -2754,7 +2657,7 @@
           <a:p>
             <a:r>
               <a:rPr lang="en-US" dirty="0"/>
-              <a:t>Thời lượng: 1 phút 30 giây.
+              <a:t>Thời lượng: 55 giây.
 Câu hỏi: model FD001 có dùng được cho subset khác không. Chạy cùng pipeline với window 10 vì FD004 có test engine ngắn nhất chỉ 19 cycles. Không so các số này với MAE 15,3490 dùng window 30.
 Cột xanh nhạt: train và test cùng subset (FD002 22,3556, FD003 28,3255, FD004 27,2218). Cột cam: giữ model FD001 áp dụng sang test subset khác (60,3215, 47,3949, 58,5731). FD001 nội bộ với window 10 là 21,9258.
 Chẩn đoán: với FD002 và FD004 chỉ khoảng 15% và 14% giá trị sensor test nằm trong miền train FD001, dự đoán gần như hằng số (độ lệch chuẩn 13,3 và 12,7). FD003 có 95% giá trị trong miền nhưng dự đoán lệch cao trung bình 45,3 cycles.
@@ -2847,9 +2750,10 @@
             <a:r>
               <a:rPr lang="en-US" dirty="0"/>
               <a:t>Thời lượng: 1 phút 15 giây.
-Q1: có. 15/21 sensor thay đổi giữa đầu và cuối vòng đời; Health Index giảm rõ ở cuối vòng đời.
-Q2: MAE 15,3490 cycles, CI 95% [12,7286; 18,0866] trên 100 test engines FD001, window 30.
-Q3: với ngưỡng 30 cycles, lead time trung vị 30 cycles trên OOF, nhưng 49/100 cảnh báo đến sau ngưỡng thật. Model FD001 không chuyển trực tiếp sang subset khác.
+Q1: FD001 đạt kiểm tra schema, khóa và cycle; Q2: 15/21 sensor thay đổi giữa đầu và cuối vòng đời, Health Index giảm rõ ở cuối vòng đời.
+Q3: parity Pandas–PySpark đạt trên ba artifact với sai khác tuyệt đối tối đa bằng 0.
+Q4: HGB169 là predictor candidate chính có điều kiện; trajectory MAE 17,0009 so với 20,2143 của HGB126.
+Q5: warning policy threshold 30 đúng thời điểm 51% với HGB126 và 45% với HGB169; threshold 40 lần lượt 94% và 96%. Q6: FD001 không chuyển trực tiếp sang FD002–FD004.
 Đóng góp Big Data: batch ETL nhiều file, Parquet Silver/Gold, parity Pandas–PySpark, artifact có hash và run_info.</a:t>
             </a:r>
             <a:endParaRPr lang="en-US" dirty="0"/>
@@ -2938,9 +2842,9 @@
           <a:p>
             <a:r>
               <a:rPr lang="en-US" dirty="0"/>
-              <a:t>Thời lượng: 1 phút.
-Đọc nhanh 5 phần và thời lượng. Nhấn mạnh ba câu hỏi nghiên cứu; slide 19 sẽ trả lời lại từng câu bằng số liệu.
-Q1 gắn với yêu cầu trực quan hóa xu hướng suy giảm. Q2 gắn với dự đoán thời điểm cần bảo trì. Q3 gắn với biểu đồ cảnh báo sớm và câu hỏi tổng quát hóa.</a:t>
+              <a:t>Thời lượng: 25 giây.
+Đọc nhanh 5 phần và thời lượng. Nhấn mạnh sáu câu hỏi nghiên cứu; slide 19 sẽ trả lời lại từng câu bằng bằng chứng tương ứng. Demo dashboard dự kiến 3 phút ở cuối, chỉ trình diễn artifact đã tạo.
+Q1 kiểm tra dữ liệu; Q2 xu hướng sensor; Q3 parity ETL; Q4 so sánh HGB126/HGB169; Q5 cảnh báo; Q6 chuyển miền.</a:t>
             </a:r>
             <a:endParaRPr lang="en-US" dirty="0"/>
           </a:p>
@@ -3028,8 +2932,8 @@
           <a:p>
             <a:r>
               <a:rPr lang="en-US" dirty="0"/>
-              <a:t>Thời lượng: 45 giây, sau đó hỏi đáp.
-Nêu bốn giới hạn chính, không làm mạnh câu chữ. Bốn hướng tiếp theo lấy từ Mục 6.7 của báo cáo; là đề xuất, chưa triển khai. Hướng CNN/LSTM: RMSE báo cáo 20,54, Li và cộng sự (2018, Table 4) đạt 12,61 khi cắt nhãn ở 125 và 13,32 khi không cắt; hai kết quả không so trực tiếp.
+              <a:t>Thời lượng: 1 phút, sau đó hỏi đáp.
+HGB169 hiện là predictor candidate có điều kiện từ alignment audit; bước xác nhận cần refit mù độc lập. Warning policy phải được hiệu chuẩn riêng, vì threshold 30 và 40 cho trade-off khác nhau. Capped RUL, history features, condition normalization và benchmark local có I/O đã được kiểm tra; chưa mở thêm nhánh CNN/LSTM hoặc training mới.
 Nếu còn thời gian hoặc cô yêu cầu: mở dashboard theo handoff/DEMO_SCRIPT.md (khoảng 4 phút); không chạy lại training khi trình bày.
 Nguồn: report/sections/discussion.tex.</a:t>
             </a:r>
@@ -3119,7 +3023,7 @@
           <a:p>
             <a:r>
               <a:rPr lang="en-US" dirty="0"/>
-              <a:t>Thời lượng: 1 phút 30 giây.
+              <a:t>Thời lượng: 35 giây.
 Remaining Useful Life (RUL, tuổi thọ hữu ích còn lại) là số cycle vận hành còn lại trước failure. Đây là supervised regression.
 Ví dụ: engine kết thúc ở cycle 200, tại cycle 170 thì RUL = 30 cycles. Đơn vị là cycle; dữ liệu không có thông tin quy đổi ra giờ hoặc ngày.
 Bảng bên phải đối chiếu từng yêu cầu kỹ thuật của đề tài với phần đã làm và slide trình bày. Nói rõ: xử lý nhiễu được thực hiện qua thống kê trên window và Health Index; repository chưa dùng bộ lọc tín hiệu riêng.</a:t>
@@ -3210,7 +3114,7 @@
           <a:p>
             <a:r>
               <a:rPr lang="en-US" dirty="0"/>
-              <a:t>Thời lượng: 1 phút 30 giây.
+              <a:t>Thời lượng: 50 giây.
 C-MAPSS là dữ liệu mô phỏng động cơ turbofan của NASA. Mỗi subset có train (chạy đến failure), test (bị cắt trước failure) và file RUL_FD00x.txt chứa nhãn test.
 FD001: 1 điều kiện vận hành, 1 fault mode (HPC degradation), 100 train và 100 test engines, 33.727 observations.
 FD002 thêm 6 điều kiện vận hành; FD003 thêm fault mode Fan; FD004 có cả hai.
@@ -3302,7 +3206,7 @@
           <a:p>
             <a:r>
               <a:rPr lang="en-US" dirty="0"/>
-              <a:t>Thời lượng: 1 phút 30 giây.
+              <a:t>Thời lượng: 55 giây.
 Train: mỗi engine chạy đến failure nên nhãn suy ra trực tiếp: RUL = cycle cuối − cycle hiện tại. FD001 có 20.631 nhãn train.
 Test: chuỗi bị cắt trước failure. Không được lấy cycle cuối quan sát làm failure. Model tạo đúng một dự đoán tại cycle cuối quan sát của mỗi test engine; sau khi ghi final predictions mới ghép RUL_FD001.txt để chấm điểm. run_info ghi test_label_join.status = completed_after_final_predictions.
 Bên phải: ba kiểm soát cho nhãn test. final_metrics.json ghi test_label_sha256 để đối chiếu file nhãn đã dùng.</a:t>
@@ -3393,7 +3297,7 @@
           <a:p>
             <a:r>
               <a:rPr lang="en-US" dirty="0"/>
-              <a:t>Thời lượng: 2 phút.
+              <a:t>Thời lượng: 55 giây.
 Đọc sơ đồ từ trái sang phải. Bronze là file raw. Reader kiểm tra đúng 26 trường, kiểu dữ liệu, khóa duy nhất và cycle liên tục; train và test được union theo dòng (Pandas concat hoặc PySpark unionByName), không phải join.
 Silver lưu observations và train_targets dạng Parquet. Gold lưu engine_summary dạng Parquet và SQLite. Từ Silver, bước đặc trưng tạo trailing window 30 cycles.
 Modeling dùng GroupKFold, refit và tạo 100 dự đoán test. Hai nhánh phụ EDA/thống kê và Health Index chỉ dùng train.
@@ -3485,10 +3389,10 @@
           <a:p>
             <a:r>
               <a:rPr lang="en-US" dirty="0"/>
-              <a:t>Thời lượng: 2 phút.
+              <a:t>Thời lượng: 1 phút 5 giây.
 Bảng trái: cùng input, Pandas pipeline và PySpark pipeline cho cùng schema, khóa, số dòng và giá trị ở ba boundary; sai khác tuyệt đối lớn nhất bằng 0.
-Biểu đồ phải: nhân bản dữ liệu 1×, 10×, 100× rồi đo phép build_engine_summary bằng Pandas. 100× là 3.372.700 dòng, lần chạy cold mất 1,6752 giây.
-Giới hạn cần nói rõ: đây không phải benchmark PySpark, không đo I/O và không chạy trên cluster. PySpark hiện chạy local để kiểm tra parity. Không claim Airflow hoặc Power BI.</a:t>
+Biểu đồ phải: trung vị ba lượt đo trong process riêng, cùng input Parquet, 33.727 và 337.270 dòng. Pipeline gồm đọc, engine summary, rolling features, ghi file; startup Spark báo riêng. Peak RSS gồm Python và JVM.
+Spark local[4], bốn partition, driver/executor heap 4 GiB. Lượt heap mặc định bị OOM ở 10x được lưu riêng, không đưa vào median. Ghi Parquet qua PyArrow trên driver; thời gian Spark gồm cả toArrow. Chưa đo distributed writer hoặc cluster. Không xóa OS cache giữa lượt đo.</a:t>
             </a:r>
             <a:endParaRPr lang="en-US" dirty="0"/>
           </a:p>
@@ -3576,7 +3480,7 @@
           <a:p>
             <a:r>
               <a:rPr lang="en-US" dirty="0"/>
-              <a:t>Thời lượng: 1 phút.
+              <a:t>Thời lượng: 30 giây.
 Histogram và boxplot: tuổi thọ train từ 128 đến 362 cycles, trung vị 199, có vài engine dài bất thường ở đuôi phải.
 Bảy cột không đổi trong cả 100 engine: sensor 1, 5, 10, 16, 18, 19 và setting_3. sensor_6 không đổi trong 38/100 engine.
 Repository chưa làm feature selection dựa trên EDA; các cột này vẫn nằm trong 126 đặc trưng. Đây là quyết định có chủ đích để không dùng kết quả EDA làm bước chọn biến ngoài training fold.</a:t>
@@ -3667,7 +3571,7 @@
           <a:p>
             <a:r>
               <a:rPr lang="en-US" dirty="0"/>
-              <a:t>Thời lượng: 1 phút 45 giây.
+              <a:t>Thời lượng: 40 giây.
 Hai hình là quỹ đạo gốc của ba train engine có tuổi thọ 178, 199 và 229 cycles. sensor_4 tăng dần, sensor_7 giảm dần khi tiến gần failure; tín hiệu có nhiễu theo từng cycle.
 Kiểm định: với mỗi train engine, lấy mean 30 cycle cuối trừ mean 30 cycle đầu. Bootstrap theo engine 10.000 lần cho khoảng tin cậy, Wilcoxon signed-rank cho p-value, Benjamini–Hochberg với q = 0,05 cho 21 sensor.
 Kết quả: 15 sensor bác bỏ giả thuyết không; 6 sensor hằng số nên không kiểm định.
@@ -4350,7 +4254,7 @@
                 <a:ea typeface="Arial" pitchFamily="34" charset="-122"/>
                 <a:cs typeface="Arial" pitchFamily="34" charset="-120"/>
               </a:rPr>
-              <a:t>126</a:t>
+              <a:t>169</a:t>
             </a:r>
             <a:endParaRPr lang="en-US" sz="3000" dirty="0"/>
           </a:p>
@@ -4389,7 +4293,7 @@
                 <a:ea typeface="Arial" pitchFamily="34" charset="-122"/>
                 <a:cs typeface="Arial" pitchFamily="34" charset="-120"/>
               </a:rPr>
-              <a:t>đặc trưng từ window 30</a:t>
+              <a:t>features HGB169 · FD001</a:t>
             </a:r>
             <a:endParaRPr lang="en-US" sz="1300" dirty="0"/>
           </a:p>
@@ -4428,7 +4332,7 @@
                 <a:ea typeface="Arial" pitchFamily="34" charset="-122"/>
                 <a:cs typeface="Arial" pitchFamily="34" charset="-120"/>
               </a:rPr>
-              <a:t>15,35</a:t>
+              <a:t>17,00</a:t>
             </a:r>
             <a:endParaRPr lang="en-US" sz="3000" dirty="0"/>
           </a:p>
@@ -4467,7 +4371,7 @@
                 <a:ea typeface="Arial" pitchFamily="34" charset="-122"/>
                 <a:cs typeface="Arial" pitchFamily="34" charset="-120"/>
               </a:rPr>
-              <a:t>MAE (cycles) trên test</a:t>
+              <a:t>MAE trajectory candidate</a:t>
             </a:r>
             <a:endParaRPr lang="en-US" sz="1300" dirty="0"/>
           </a:p>
@@ -4545,7 +4449,7 @@
                 <a:ea typeface="Arial" pitchFamily="34" charset="-122"/>
                 <a:cs typeface="Arial" pitchFamily="34" charset="-120"/>
               </a:rPr>
-              <a:t>Học viên cao học ngành Khoa học máy tính · Tháng 9/2026</a:t>
+              <a:t>Học viên cao học ngành Khoa học máy tính · Tháng 10/2026</a:t>
             </a:r>
             <a:endParaRPr lang="en-US" sz="1300" dirty="0"/>
           </a:p>
@@ -8875,7 +8779,7 @@
                 <a:ea typeface="Arial" pitchFamily="34" charset="-122"/>
                 <a:cs typeface="Arial" pitchFamily="34" charset="-120"/>
               </a:rPr>
-              <a:t>HistGradientBoosting có MAE thấp nhất trong cross-validation</a:t>
+              <a:t>HGB169 là predictor candidate trên panel chung</a:t>
             </a:r>
             <a:endParaRPr lang="en-US" sz="2700" dirty="0"/>
           </a:p>
@@ -8914,7 +8818,7 @@
                 <a:ea typeface="Arial" pitchFamily="34" charset="-122"/>
                 <a:cs typeface="Arial" pitchFamily="34" charset="-120"/>
               </a:rPr>
-              <a:t>Ba ứng viên được so sánh trên cùng 5 fold và cùng metric đã định trước</a:t>
+              <a:t>HGB169 giảm MAE trajectory 3,2134 cycles; audit có điều kiện</a:t>
             </a:r>
             <a:endParaRPr lang="en-US" sz="1500" dirty="0"/>
           </a:p>
@@ -8953,7 +8857,7 @@
                 <a:ea typeface="Arial" pitchFamily="34" charset="-122"/>
                 <a:cs typeface="Arial" pitchFamily="34" charset="-120"/>
               </a:rPr>
-              <a:t>Nguồn: outputs/modeling/tables/model_metrics.csv; outputs/modeling/run_info.json</a:t>
+              <a:t>Nguồn: outputs/course_alignment/20261007/summary.json; outputs/course_alignment/20261007/paired_bootstrap_ci.csv</a:t>
             </a:r>
             <a:endParaRPr lang="en-US" sz="900" dirty="0"/>
           </a:p>
@@ -9029,18 +8933,20 @@
           </p:nvPr>
         </p:nvGraphicFramePr>
         <p:xfrm>
-          <a:off x="7680960" y="2011680"/>
-          <a:ext cx="3959352" cy="914400"/>
+          <a:off x="7452360" y="1920240"/>
+          <a:ext cx="4187952" cy="914400"/>
         </p:xfrm>
         <a:graphic>
           <a:graphicData uri="http://schemas.openxmlformats.org/drawingml/2006/table">
             <a:tbl>
               <a:tblPr/>
               <a:tblGrid>
-                <a:gridCol w="2130552"/>
-                <a:gridCol w="1828800"/>
+                <a:gridCol w="1508760"/>
+                <a:gridCol w="868680"/>
+                <a:gridCol w="868680"/>
+                <a:gridCol w="941832"/>
               </a:tblGrid>
-              <a:tr h="457200">
+              <a:tr h="438912">
                 <a:tc>
                   <a:txBody>
                     <a:bodyPr/>
@@ -9050,7 +8956,7 @@
                         <a:buNone/>
                       </a:pPr>
                       <a:r>
-                        <a:rPr lang="en-US" sz="1300" b="1" dirty="0">
+                        <a:rPr lang="en-US" sz="1150" b="1" dirty="0">
                           <a:solidFill>
                             <a:srgbClr val="FFFFFF"/>
                           </a:solidFill>
@@ -9058,9 +8964,9 @@
                           <a:ea typeface="Arial" pitchFamily="34" charset="-122"/>
                           <a:cs typeface="Arial" pitchFamily="34" charset="-120"/>
                         </a:rPr>
-                        <a:t>Model</a:t>
+                        <a:t>Panel / chỉ số</a:t>
                       </a:r>
-                      <a:endParaRPr lang="en-US" sz="1300" dirty="0">
+                      <a:endParaRPr lang="en-US" sz="1150" dirty="0">
                         <a:latin typeface="Arial" charset="0"/>
                         <a:ea typeface="Arial" charset="0"/>
                         <a:cs typeface="Arial" charset="0"/>
@@ -9118,7 +9024,7 @@
                         <a:buNone/>
                       </a:pPr>
                       <a:r>
-                        <a:rPr lang="en-US" sz="1300" b="1" dirty="0">
+                        <a:rPr lang="en-US" sz="1150" b="1" dirty="0">
                           <a:solidFill>
                             <a:srgbClr val="FFFFFF"/>
                           </a:solidFill>
@@ -9126,9 +9032,9 @@
                           <a:ea typeface="Arial" pitchFamily="34" charset="-122"/>
                           <a:cs typeface="Arial" pitchFamily="34" charset="-120"/>
                         </a:rPr>
-                        <a:t>MAE ± std giữa fold</a:t>
+                        <a:t>HGB126</a:t>
                       </a:r>
-                      <a:endParaRPr lang="en-US" sz="1300" dirty="0">
+                      <a:endParaRPr lang="en-US" sz="1150" dirty="0">
                         <a:latin typeface="Arial" charset="0"/>
                         <a:ea typeface="Arial" charset="0"/>
                         <a:cs typeface="Arial" charset="0"/>
@@ -9177,8 +9083,6 @@
                     </a:solidFill>
                   </a:tcPr>
                 </a:tc>
-              </a:tr>
-              <a:tr h="457200">
                 <a:tc>
                   <a:txBody>
                     <a:bodyPr/>
@@ -9188,7 +9092,145 @@
                         <a:buNone/>
                       </a:pPr>
                       <a:r>
-                        <a:rPr lang="en-US" sz="1300" b="1" dirty="0">
+                        <a:rPr lang="en-US" sz="1150" b="1" dirty="0">
+                          <a:solidFill>
+                            <a:srgbClr val="FFFFFF"/>
+                          </a:solidFill>
+                          <a:latin typeface="Arial" pitchFamily="34" charset="0"/>
+                          <a:ea typeface="Arial" pitchFamily="34" charset="-122"/>
+                          <a:cs typeface="Arial" pitchFamily="34" charset="-120"/>
+                        </a:rPr>
+                        <a:t>HGB169</a:t>
+                      </a:r>
+                      <a:endParaRPr lang="en-US" sz="1150" dirty="0">
+                        <a:latin typeface="Arial" charset="0"/>
+                        <a:ea typeface="Arial" charset="0"/>
+                        <a:cs typeface="Arial" charset="0"/>
+                      </a:endParaRPr>
+                    </a:p>
+                  </a:txBody>
+                  <a:tcPr marL="73152" marR="73152" marT="36576" marB="36576" anchor="ctr">
+                    <a:lnL w="9525" cap="flat" cmpd="sng" algn="ctr">
+                      <a:solidFill>
+                        <a:srgbClr val="C9D4DD"/>
+                      </a:solidFill>
+                      <a:prstDash val="solid"/>
+                      <a:round/>
+                      <a:headEnd type="none" w="med" len="med"/>
+                      <a:tailEnd type="none" w="med" len="med"/>
+                    </a:lnL>
+                    <a:lnR w="9525" cap="flat" cmpd="sng" algn="ctr">
+                      <a:solidFill>
+                        <a:srgbClr val="C9D4DD"/>
+                      </a:solidFill>
+                      <a:prstDash val="solid"/>
+                      <a:round/>
+                      <a:headEnd type="none" w="med" len="med"/>
+                      <a:tailEnd type="none" w="med" len="med"/>
+                    </a:lnR>
+                    <a:lnT w="9525" cap="flat" cmpd="sng" algn="ctr">
+                      <a:solidFill>
+                        <a:srgbClr val="C9D4DD"/>
+                      </a:solidFill>
+                      <a:prstDash val="solid"/>
+                      <a:round/>
+                      <a:headEnd type="none" w="med" len="med"/>
+                      <a:tailEnd type="none" w="med" len="med"/>
+                    </a:lnT>
+                    <a:lnB w="9525" cap="flat" cmpd="sng" algn="ctr">
+                      <a:solidFill>
+                        <a:srgbClr val="C9D4DD"/>
+                      </a:solidFill>
+                      <a:prstDash val="solid"/>
+                      <a:round/>
+                      <a:headEnd type="none" w="med" len="med"/>
+                      <a:tailEnd type="none" w="med" len="med"/>
+                    </a:lnB>
+                    <a:solidFill>
+                      <a:srgbClr val="0B2239"/>
+                    </a:solidFill>
+                  </a:tcPr>
+                </a:tc>
+                <a:tc>
+                  <a:txBody>
+                    <a:bodyPr/>
+                    <a:lstStyle/>
+                    <a:p>
+                      <a:pPr algn="l" indent="0" marL="0">
+                        <a:buNone/>
+                      </a:pPr>
+                      <a:r>
+                        <a:rPr lang="en-US" sz="1150" b="1" dirty="0">
+                          <a:solidFill>
+                            <a:srgbClr val="FFFFFF"/>
+                          </a:solidFill>
+                          <a:latin typeface="Arial" pitchFamily="34" charset="0"/>
+                          <a:ea typeface="Arial" pitchFamily="34" charset="-122"/>
+                          <a:cs typeface="Arial" pitchFamily="34" charset="-120"/>
+                        </a:rPr>
+                        <a:t>Delta</a:t>
+                      </a:r>
+                      <a:endParaRPr lang="en-US" sz="1150" dirty="0">
+                        <a:latin typeface="Arial" charset="0"/>
+                        <a:ea typeface="Arial" charset="0"/>
+                        <a:cs typeface="Arial" charset="0"/>
+                      </a:endParaRPr>
+                    </a:p>
+                  </a:txBody>
+                  <a:tcPr marL="73152" marR="73152" marT="36576" marB="36576" anchor="ctr">
+                    <a:lnL w="9525" cap="flat" cmpd="sng" algn="ctr">
+                      <a:solidFill>
+                        <a:srgbClr val="C9D4DD"/>
+                      </a:solidFill>
+                      <a:prstDash val="solid"/>
+                      <a:round/>
+                      <a:headEnd type="none" w="med" len="med"/>
+                      <a:tailEnd type="none" w="med" len="med"/>
+                    </a:lnL>
+                    <a:lnR w="9525" cap="flat" cmpd="sng" algn="ctr">
+                      <a:solidFill>
+                        <a:srgbClr val="C9D4DD"/>
+                      </a:solidFill>
+                      <a:prstDash val="solid"/>
+                      <a:round/>
+                      <a:headEnd type="none" w="med" len="med"/>
+                      <a:tailEnd type="none" w="med" len="med"/>
+                    </a:lnR>
+                    <a:lnT w="9525" cap="flat" cmpd="sng" algn="ctr">
+                      <a:solidFill>
+                        <a:srgbClr val="C9D4DD"/>
+                      </a:solidFill>
+                      <a:prstDash val="solid"/>
+                      <a:round/>
+                      <a:headEnd type="none" w="med" len="med"/>
+                      <a:tailEnd type="none" w="med" len="med"/>
+                    </a:lnT>
+                    <a:lnB w="9525" cap="flat" cmpd="sng" algn="ctr">
+                      <a:solidFill>
+                        <a:srgbClr val="C9D4DD"/>
+                      </a:solidFill>
+                      <a:prstDash val="solid"/>
+                      <a:round/>
+                      <a:headEnd type="none" w="med" len="med"/>
+                      <a:tailEnd type="none" w="med" len="med"/>
+                    </a:lnB>
+                    <a:solidFill>
+                      <a:srgbClr val="0B2239"/>
+                    </a:solidFill>
+                  </a:tcPr>
+                </a:tc>
+              </a:tr>
+              <a:tr h="438912">
+                <a:tc>
+                  <a:txBody>
+                    <a:bodyPr/>
+                    <a:lstStyle/>
+                    <a:p>
+                      <a:pPr algn="l" indent="0" marL="0">
+                        <a:buNone/>
+                      </a:pPr>
+                      <a:r>
+                        <a:rPr lang="en-US" sz="1150" dirty="0">
                           <a:solidFill>
                             <a:srgbClr val="1B2733"/>
                           </a:solidFill>
@@ -9196,9 +9238,557 @@
                           <a:ea typeface="Arial" pitchFamily="34" charset="-122"/>
                           <a:cs typeface="Arial" pitchFamily="34" charset="-120"/>
                         </a:rPr>
-                        <a:t>HistGradientBoosting</a:t>
+                        <a:t>Trajectory MAE</a:t>
                       </a:r>
-                      <a:endParaRPr lang="en-US" sz="1300" dirty="0">
+                      <a:endParaRPr lang="en-US" sz="1150" dirty="0">
+                        <a:latin typeface="Arial" charset="0"/>
+                        <a:ea typeface="Arial" charset="0"/>
+                        <a:cs typeface="Arial" charset="0"/>
+                      </a:endParaRPr>
+                    </a:p>
+                  </a:txBody>
+                  <a:tcPr marL="73152" marR="73152" marT="36576" marB="36576" anchor="ctr">
+                    <a:lnL w="9525" cap="flat" cmpd="sng" algn="ctr">
+                      <a:solidFill>
+                        <a:srgbClr val="C9D4DD"/>
+                      </a:solidFill>
+                      <a:prstDash val="solid"/>
+                      <a:round/>
+                      <a:headEnd type="none" w="med" len="med"/>
+                      <a:tailEnd type="none" w="med" len="med"/>
+                    </a:lnL>
+                    <a:lnR w="9525" cap="flat" cmpd="sng" algn="ctr">
+                      <a:solidFill>
+                        <a:srgbClr val="C9D4DD"/>
+                      </a:solidFill>
+                      <a:prstDash val="solid"/>
+                      <a:round/>
+                      <a:headEnd type="none" w="med" len="med"/>
+                      <a:tailEnd type="none" w="med" len="med"/>
+                    </a:lnR>
+                    <a:lnT w="9525" cap="flat" cmpd="sng" algn="ctr">
+                      <a:solidFill>
+                        <a:srgbClr val="C9D4DD"/>
+                      </a:solidFill>
+                      <a:prstDash val="solid"/>
+                      <a:round/>
+                      <a:headEnd type="none" w="med" len="med"/>
+                      <a:tailEnd type="none" w="med" len="med"/>
+                    </a:lnT>
+                    <a:lnB w="9525" cap="flat" cmpd="sng" algn="ctr">
+                      <a:solidFill>
+                        <a:srgbClr val="C9D4DD"/>
+                      </a:solidFill>
+                      <a:prstDash val="solid"/>
+                      <a:round/>
+                      <a:headEnd type="none" w="med" len="med"/>
+                      <a:tailEnd type="none" w="med" len="med"/>
+                    </a:lnB>
+                    <a:solidFill>
+                      <a:srgbClr val="FFFFFF"/>
+                    </a:solidFill>
+                  </a:tcPr>
+                </a:tc>
+                <a:tc>
+                  <a:txBody>
+                    <a:bodyPr/>
+                    <a:lstStyle/>
+                    <a:p>
+                      <a:pPr algn="l" indent="0" marL="0">
+                        <a:buNone/>
+                      </a:pPr>
+                      <a:r>
+                        <a:rPr lang="en-US" sz="1150" dirty="0">
+                          <a:solidFill>
+                            <a:srgbClr val="1B2733"/>
+                          </a:solidFill>
+                          <a:latin typeface="Arial" pitchFamily="34" charset="0"/>
+                          <a:ea typeface="Arial" pitchFamily="34" charset="-122"/>
+                          <a:cs typeface="Arial" pitchFamily="34" charset="-120"/>
+                        </a:rPr>
+                        <a:t>20,21</a:t>
+                      </a:r>
+                      <a:endParaRPr lang="en-US" sz="1150" dirty="0">
+                        <a:latin typeface="Arial" charset="0"/>
+                        <a:ea typeface="Arial" charset="0"/>
+                        <a:cs typeface="Arial" charset="0"/>
+                      </a:endParaRPr>
+                    </a:p>
+                  </a:txBody>
+                  <a:tcPr marL="73152" marR="73152" marT="36576" marB="36576" anchor="ctr">
+                    <a:lnL w="9525" cap="flat" cmpd="sng" algn="ctr">
+                      <a:solidFill>
+                        <a:srgbClr val="C9D4DD"/>
+                      </a:solidFill>
+                      <a:prstDash val="solid"/>
+                      <a:round/>
+                      <a:headEnd type="none" w="med" len="med"/>
+                      <a:tailEnd type="none" w="med" len="med"/>
+                    </a:lnL>
+                    <a:lnR w="9525" cap="flat" cmpd="sng" algn="ctr">
+                      <a:solidFill>
+                        <a:srgbClr val="C9D4DD"/>
+                      </a:solidFill>
+                      <a:prstDash val="solid"/>
+                      <a:round/>
+                      <a:headEnd type="none" w="med" len="med"/>
+                      <a:tailEnd type="none" w="med" len="med"/>
+                    </a:lnR>
+                    <a:lnT w="9525" cap="flat" cmpd="sng" algn="ctr">
+                      <a:solidFill>
+                        <a:srgbClr val="C9D4DD"/>
+                      </a:solidFill>
+                      <a:prstDash val="solid"/>
+                      <a:round/>
+                      <a:headEnd type="none" w="med" len="med"/>
+                      <a:tailEnd type="none" w="med" len="med"/>
+                    </a:lnT>
+                    <a:lnB w="9525" cap="flat" cmpd="sng" algn="ctr">
+                      <a:solidFill>
+                        <a:srgbClr val="C9D4DD"/>
+                      </a:solidFill>
+                      <a:prstDash val="solid"/>
+                      <a:round/>
+                      <a:headEnd type="none" w="med" len="med"/>
+                      <a:tailEnd type="none" w="med" len="med"/>
+                    </a:lnB>
+                    <a:solidFill>
+                      <a:srgbClr val="FFFFFF"/>
+                    </a:solidFill>
+                  </a:tcPr>
+                </a:tc>
+                <a:tc>
+                  <a:txBody>
+                    <a:bodyPr/>
+                    <a:lstStyle/>
+                    <a:p>
+                      <a:pPr algn="l" indent="0" marL="0">
+                        <a:buNone/>
+                      </a:pPr>
+                      <a:r>
+                        <a:rPr lang="en-US" sz="1150" dirty="0">
+                          <a:solidFill>
+                            <a:srgbClr val="1B2733"/>
+                          </a:solidFill>
+                          <a:latin typeface="Arial" pitchFamily="34" charset="0"/>
+                          <a:ea typeface="Arial" pitchFamily="34" charset="-122"/>
+                          <a:cs typeface="Arial" pitchFamily="34" charset="-120"/>
+                        </a:rPr>
+                        <a:t>17,00</a:t>
+                      </a:r>
+                      <a:endParaRPr lang="en-US" sz="1150" dirty="0">
+                        <a:latin typeface="Arial" charset="0"/>
+                        <a:ea typeface="Arial" charset="0"/>
+                        <a:cs typeface="Arial" charset="0"/>
+                      </a:endParaRPr>
+                    </a:p>
+                  </a:txBody>
+                  <a:tcPr marL="73152" marR="73152" marT="36576" marB="36576" anchor="ctr">
+                    <a:lnL w="9525" cap="flat" cmpd="sng" algn="ctr">
+                      <a:solidFill>
+                        <a:srgbClr val="C9D4DD"/>
+                      </a:solidFill>
+                      <a:prstDash val="solid"/>
+                      <a:round/>
+                      <a:headEnd type="none" w="med" len="med"/>
+                      <a:tailEnd type="none" w="med" len="med"/>
+                    </a:lnL>
+                    <a:lnR w="9525" cap="flat" cmpd="sng" algn="ctr">
+                      <a:solidFill>
+                        <a:srgbClr val="C9D4DD"/>
+                      </a:solidFill>
+                      <a:prstDash val="solid"/>
+                      <a:round/>
+                      <a:headEnd type="none" w="med" len="med"/>
+                      <a:tailEnd type="none" w="med" len="med"/>
+                    </a:lnR>
+                    <a:lnT w="9525" cap="flat" cmpd="sng" algn="ctr">
+                      <a:solidFill>
+                        <a:srgbClr val="C9D4DD"/>
+                      </a:solidFill>
+                      <a:prstDash val="solid"/>
+                      <a:round/>
+                      <a:headEnd type="none" w="med" len="med"/>
+                      <a:tailEnd type="none" w="med" len="med"/>
+                    </a:lnT>
+                    <a:lnB w="9525" cap="flat" cmpd="sng" algn="ctr">
+                      <a:solidFill>
+                        <a:srgbClr val="C9D4DD"/>
+                      </a:solidFill>
+                      <a:prstDash val="solid"/>
+                      <a:round/>
+                      <a:headEnd type="none" w="med" len="med"/>
+                      <a:tailEnd type="none" w="med" len="med"/>
+                    </a:lnB>
+                    <a:solidFill>
+                      <a:srgbClr val="FFFFFF"/>
+                    </a:solidFill>
+                  </a:tcPr>
+                </a:tc>
+                <a:tc>
+                  <a:txBody>
+                    <a:bodyPr/>
+                    <a:lstStyle/>
+                    <a:p>
+                      <a:pPr algn="l" indent="0" marL="0">
+                        <a:buNone/>
+                      </a:pPr>
+                      <a:r>
+                        <a:rPr lang="en-US" sz="1150" dirty="0">
+                          <a:solidFill>
+                            <a:srgbClr val="1B2733"/>
+                          </a:solidFill>
+                          <a:latin typeface="Arial" pitchFamily="34" charset="0"/>
+                          <a:ea typeface="Arial" pitchFamily="34" charset="-122"/>
+                          <a:cs typeface="Arial" pitchFamily="34" charset="-120"/>
+                        </a:rPr>
+                        <a:t>-3,21</a:t>
+                      </a:r>
+                      <a:endParaRPr lang="en-US" sz="1150" dirty="0">
+                        <a:latin typeface="Arial" charset="0"/>
+                        <a:ea typeface="Arial" charset="0"/>
+                        <a:cs typeface="Arial" charset="0"/>
+                      </a:endParaRPr>
+                    </a:p>
+                  </a:txBody>
+                  <a:tcPr marL="73152" marR="73152" marT="36576" marB="36576" anchor="ctr">
+                    <a:lnL w="9525" cap="flat" cmpd="sng" algn="ctr">
+                      <a:solidFill>
+                        <a:srgbClr val="C9D4DD"/>
+                      </a:solidFill>
+                      <a:prstDash val="solid"/>
+                      <a:round/>
+                      <a:headEnd type="none" w="med" len="med"/>
+                      <a:tailEnd type="none" w="med" len="med"/>
+                    </a:lnL>
+                    <a:lnR w="9525" cap="flat" cmpd="sng" algn="ctr">
+                      <a:solidFill>
+                        <a:srgbClr val="C9D4DD"/>
+                      </a:solidFill>
+                      <a:prstDash val="solid"/>
+                      <a:round/>
+                      <a:headEnd type="none" w="med" len="med"/>
+                      <a:tailEnd type="none" w="med" len="med"/>
+                    </a:lnR>
+                    <a:lnT w="9525" cap="flat" cmpd="sng" algn="ctr">
+                      <a:solidFill>
+                        <a:srgbClr val="C9D4DD"/>
+                      </a:solidFill>
+                      <a:prstDash val="solid"/>
+                      <a:round/>
+                      <a:headEnd type="none" w="med" len="med"/>
+                      <a:tailEnd type="none" w="med" len="med"/>
+                    </a:lnT>
+                    <a:lnB w="9525" cap="flat" cmpd="sng" algn="ctr">
+                      <a:solidFill>
+                        <a:srgbClr val="C9D4DD"/>
+                      </a:solidFill>
+                      <a:prstDash val="solid"/>
+                      <a:round/>
+                      <a:headEnd type="none" w="med" len="med"/>
+                      <a:tailEnd type="none" w="med" len="med"/>
+                    </a:lnB>
+                    <a:solidFill>
+                      <a:srgbClr val="FFFFFF"/>
+                    </a:solidFill>
+                  </a:tcPr>
+                </a:tc>
+              </a:tr>
+              <a:tr h="438912">
+                <a:tc>
+                  <a:txBody>
+                    <a:bodyPr/>
+                    <a:lstStyle/>
+                    <a:p>
+                      <a:pPr algn="l" indent="0" marL="0">
+                        <a:buNone/>
+                      </a:pPr>
+                      <a:r>
+                        <a:rPr lang="en-US" sz="1150" dirty="0">
+                          <a:solidFill>
+                            <a:srgbClr val="1B2733"/>
+                          </a:solidFill>
+                          <a:latin typeface="Arial" pitchFamily="34" charset="0"/>
+                          <a:ea typeface="Arial" pitchFamily="34" charset="-122"/>
+                          <a:cs typeface="Arial" pitchFamily="34" charset="-120"/>
+                        </a:rPr>
+                        <a:t>Trajectory RMSE</a:t>
+                      </a:r>
+                      <a:endParaRPr lang="en-US" sz="1150" dirty="0">
+                        <a:latin typeface="Arial" charset="0"/>
+                        <a:ea typeface="Arial" charset="0"/>
+                        <a:cs typeface="Arial" charset="0"/>
+                      </a:endParaRPr>
+                    </a:p>
+                  </a:txBody>
+                  <a:tcPr marL="73152" marR="73152" marT="36576" marB="36576" anchor="ctr">
+                    <a:lnL w="9525" cap="flat" cmpd="sng" algn="ctr">
+                      <a:solidFill>
+                        <a:srgbClr val="C9D4DD"/>
+                      </a:solidFill>
+                      <a:prstDash val="solid"/>
+                      <a:round/>
+                      <a:headEnd type="none" w="med" len="med"/>
+                      <a:tailEnd type="none" w="med" len="med"/>
+                    </a:lnL>
+                    <a:lnR w="9525" cap="flat" cmpd="sng" algn="ctr">
+                      <a:solidFill>
+                        <a:srgbClr val="C9D4DD"/>
+                      </a:solidFill>
+                      <a:prstDash val="solid"/>
+                      <a:round/>
+                      <a:headEnd type="none" w="med" len="med"/>
+                      <a:tailEnd type="none" w="med" len="med"/>
+                    </a:lnR>
+                    <a:lnT w="9525" cap="flat" cmpd="sng" algn="ctr">
+                      <a:solidFill>
+                        <a:srgbClr val="C9D4DD"/>
+                      </a:solidFill>
+                      <a:prstDash val="solid"/>
+                      <a:round/>
+                      <a:headEnd type="none" w="med" len="med"/>
+                      <a:tailEnd type="none" w="med" len="med"/>
+                    </a:lnT>
+                    <a:lnB w="9525" cap="flat" cmpd="sng" algn="ctr">
+                      <a:solidFill>
+                        <a:srgbClr val="C9D4DD"/>
+                      </a:solidFill>
+                      <a:prstDash val="solid"/>
+                      <a:round/>
+                      <a:headEnd type="none" w="med" len="med"/>
+                      <a:tailEnd type="none" w="med" len="med"/>
+                    </a:lnB>
+                    <a:solidFill>
+                      <a:srgbClr val="EEF3F6"/>
+                    </a:solidFill>
+                  </a:tcPr>
+                </a:tc>
+                <a:tc>
+                  <a:txBody>
+                    <a:bodyPr/>
+                    <a:lstStyle/>
+                    <a:p>
+                      <a:pPr algn="l" indent="0" marL="0">
+                        <a:buNone/>
+                      </a:pPr>
+                      <a:r>
+                        <a:rPr lang="en-US" sz="1150" dirty="0">
+                          <a:solidFill>
+                            <a:srgbClr val="1B2733"/>
+                          </a:solidFill>
+                          <a:latin typeface="Arial" pitchFamily="34" charset="0"/>
+                          <a:ea typeface="Arial" pitchFamily="34" charset="-122"/>
+                          <a:cs typeface="Arial" pitchFamily="34" charset="-120"/>
+                        </a:rPr>
+                        <a:t>33,64</a:t>
+                      </a:r>
+                      <a:endParaRPr lang="en-US" sz="1150" dirty="0">
+                        <a:latin typeface="Arial" charset="0"/>
+                        <a:ea typeface="Arial" charset="0"/>
+                        <a:cs typeface="Arial" charset="0"/>
+                      </a:endParaRPr>
+                    </a:p>
+                  </a:txBody>
+                  <a:tcPr marL="73152" marR="73152" marT="36576" marB="36576" anchor="ctr">
+                    <a:lnL w="9525" cap="flat" cmpd="sng" algn="ctr">
+                      <a:solidFill>
+                        <a:srgbClr val="C9D4DD"/>
+                      </a:solidFill>
+                      <a:prstDash val="solid"/>
+                      <a:round/>
+                      <a:headEnd type="none" w="med" len="med"/>
+                      <a:tailEnd type="none" w="med" len="med"/>
+                    </a:lnL>
+                    <a:lnR w="9525" cap="flat" cmpd="sng" algn="ctr">
+                      <a:solidFill>
+                        <a:srgbClr val="C9D4DD"/>
+                      </a:solidFill>
+                      <a:prstDash val="solid"/>
+                      <a:round/>
+                      <a:headEnd type="none" w="med" len="med"/>
+                      <a:tailEnd type="none" w="med" len="med"/>
+                    </a:lnR>
+                    <a:lnT w="9525" cap="flat" cmpd="sng" algn="ctr">
+                      <a:solidFill>
+                        <a:srgbClr val="C9D4DD"/>
+                      </a:solidFill>
+                      <a:prstDash val="solid"/>
+                      <a:round/>
+                      <a:headEnd type="none" w="med" len="med"/>
+                      <a:tailEnd type="none" w="med" len="med"/>
+                    </a:lnT>
+                    <a:lnB w="9525" cap="flat" cmpd="sng" algn="ctr">
+                      <a:solidFill>
+                        <a:srgbClr val="C9D4DD"/>
+                      </a:solidFill>
+                      <a:prstDash val="solid"/>
+                      <a:round/>
+                      <a:headEnd type="none" w="med" len="med"/>
+                      <a:tailEnd type="none" w="med" len="med"/>
+                    </a:lnB>
+                    <a:solidFill>
+                      <a:srgbClr val="EEF3F6"/>
+                    </a:solidFill>
+                  </a:tcPr>
+                </a:tc>
+                <a:tc>
+                  <a:txBody>
+                    <a:bodyPr/>
+                    <a:lstStyle/>
+                    <a:p>
+                      <a:pPr algn="l" indent="0" marL="0">
+                        <a:buNone/>
+                      </a:pPr>
+                      <a:r>
+                        <a:rPr lang="en-US" sz="1150" dirty="0">
+                          <a:solidFill>
+                            <a:srgbClr val="1B2733"/>
+                          </a:solidFill>
+                          <a:latin typeface="Arial" pitchFamily="34" charset="0"/>
+                          <a:ea typeface="Arial" pitchFamily="34" charset="-122"/>
+                          <a:cs typeface="Arial" pitchFamily="34" charset="-120"/>
+                        </a:rPr>
+                        <a:t>29,81</a:t>
+                      </a:r>
+                      <a:endParaRPr lang="en-US" sz="1150" dirty="0">
+                        <a:latin typeface="Arial" charset="0"/>
+                        <a:ea typeface="Arial" charset="0"/>
+                        <a:cs typeface="Arial" charset="0"/>
+                      </a:endParaRPr>
+                    </a:p>
+                  </a:txBody>
+                  <a:tcPr marL="73152" marR="73152" marT="36576" marB="36576" anchor="ctr">
+                    <a:lnL w="9525" cap="flat" cmpd="sng" algn="ctr">
+                      <a:solidFill>
+                        <a:srgbClr val="C9D4DD"/>
+                      </a:solidFill>
+                      <a:prstDash val="solid"/>
+                      <a:round/>
+                      <a:headEnd type="none" w="med" len="med"/>
+                      <a:tailEnd type="none" w="med" len="med"/>
+                    </a:lnL>
+                    <a:lnR w="9525" cap="flat" cmpd="sng" algn="ctr">
+                      <a:solidFill>
+                        <a:srgbClr val="C9D4DD"/>
+                      </a:solidFill>
+                      <a:prstDash val="solid"/>
+                      <a:round/>
+                      <a:headEnd type="none" w="med" len="med"/>
+                      <a:tailEnd type="none" w="med" len="med"/>
+                    </a:lnR>
+                    <a:lnT w="9525" cap="flat" cmpd="sng" algn="ctr">
+                      <a:solidFill>
+                        <a:srgbClr val="C9D4DD"/>
+                      </a:solidFill>
+                      <a:prstDash val="solid"/>
+                      <a:round/>
+                      <a:headEnd type="none" w="med" len="med"/>
+                      <a:tailEnd type="none" w="med" len="med"/>
+                    </a:lnT>
+                    <a:lnB w="9525" cap="flat" cmpd="sng" algn="ctr">
+                      <a:solidFill>
+                        <a:srgbClr val="C9D4DD"/>
+                      </a:solidFill>
+                      <a:prstDash val="solid"/>
+                      <a:round/>
+                      <a:headEnd type="none" w="med" len="med"/>
+                      <a:tailEnd type="none" w="med" len="med"/>
+                    </a:lnB>
+                    <a:solidFill>
+                      <a:srgbClr val="EEF3F6"/>
+                    </a:solidFill>
+                  </a:tcPr>
+                </a:tc>
+                <a:tc>
+                  <a:txBody>
+                    <a:bodyPr/>
+                    <a:lstStyle/>
+                    <a:p>
+                      <a:pPr algn="l" indent="0" marL="0">
+                        <a:buNone/>
+                      </a:pPr>
+                      <a:r>
+                        <a:rPr lang="en-US" sz="1150" dirty="0">
+                          <a:solidFill>
+                            <a:srgbClr val="1B2733"/>
+                          </a:solidFill>
+                          <a:latin typeface="Arial" pitchFamily="34" charset="0"/>
+                          <a:ea typeface="Arial" pitchFamily="34" charset="-122"/>
+                          <a:cs typeface="Arial" pitchFamily="34" charset="-120"/>
+                        </a:rPr>
+                        <a:t>-3,83</a:t>
+                      </a:r>
+                      <a:endParaRPr lang="en-US" sz="1150" dirty="0">
+                        <a:latin typeface="Arial" charset="0"/>
+                        <a:ea typeface="Arial" charset="0"/>
+                        <a:cs typeface="Arial" charset="0"/>
+                      </a:endParaRPr>
+                    </a:p>
+                  </a:txBody>
+                  <a:tcPr marL="73152" marR="73152" marT="36576" marB="36576" anchor="ctr">
+                    <a:lnL w="9525" cap="flat" cmpd="sng" algn="ctr">
+                      <a:solidFill>
+                        <a:srgbClr val="C9D4DD"/>
+                      </a:solidFill>
+                      <a:prstDash val="solid"/>
+                      <a:round/>
+                      <a:headEnd type="none" w="med" len="med"/>
+                      <a:tailEnd type="none" w="med" len="med"/>
+                    </a:lnL>
+                    <a:lnR w="9525" cap="flat" cmpd="sng" algn="ctr">
+                      <a:solidFill>
+                        <a:srgbClr val="C9D4DD"/>
+                      </a:solidFill>
+                      <a:prstDash val="solid"/>
+                      <a:round/>
+                      <a:headEnd type="none" w="med" len="med"/>
+                      <a:tailEnd type="none" w="med" len="med"/>
+                    </a:lnR>
+                    <a:lnT w="9525" cap="flat" cmpd="sng" algn="ctr">
+                      <a:solidFill>
+                        <a:srgbClr val="C9D4DD"/>
+                      </a:solidFill>
+                      <a:prstDash val="solid"/>
+                      <a:round/>
+                      <a:headEnd type="none" w="med" len="med"/>
+                      <a:tailEnd type="none" w="med" len="med"/>
+                    </a:lnT>
+                    <a:lnB w="9525" cap="flat" cmpd="sng" algn="ctr">
+                      <a:solidFill>
+                        <a:srgbClr val="C9D4DD"/>
+                      </a:solidFill>
+                      <a:prstDash val="solid"/>
+                      <a:round/>
+                      <a:headEnd type="none" w="med" len="med"/>
+                      <a:tailEnd type="none" w="med" len="med"/>
+                    </a:lnB>
+                    <a:solidFill>
+                      <a:srgbClr val="EEF3F6"/>
+                    </a:solidFill>
+                  </a:tcPr>
+                </a:tc>
+              </a:tr>
+              <a:tr h="438912">
+                <a:tc>
+                  <a:txBody>
+                    <a:bodyPr/>
+                    <a:lstStyle/>
+                    <a:p>
+                      <a:pPr algn="l" indent="0" marL="0">
+                        <a:buNone/>
+                      </a:pPr>
+                      <a:r>
+                        <a:rPr lang="en-US" sz="1150" b="1" dirty="0">
+                          <a:solidFill>
+                            <a:srgbClr val="1B2733"/>
+                          </a:solidFill>
+                          <a:latin typeface="Arial" pitchFamily="34" charset="0"/>
+                          <a:ea typeface="Arial" pitchFamily="34" charset="-122"/>
+                          <a:cs typeface="Arial" pitchFamily="34" charset="-120"/>
+                        </a:rPr>
+                        <a:t>Endpoint MAE</a:t>
+                      </a:r>
+                      <a:endParaRPr lang="en-US" sz="1150" dirty="0">
                         <a:latin typeface="Arial" charset="0"/>
                         <a:ea typeface="Arial" charset="0"/>
                         <a:cs typeface="Arial" charset="0"/>
@@ -9256,7 +9846,7 @@
                         <a:buNone/>
                       </a:pPr>
                       <a:r>
-                        <a:rPr lang="en-US" sz="1300" b="1" dirty="0">
+                        <a:rPr lang="en-US" sz="1150" b="1" dirty="0">
                           <a:solidFill>
                             <a:srgbClr val="1B2733"/>
                           </a:solidFill>
@@ -9264,9 +9854,9 @@
                           <a:ea typeface="Arial" pitchFamily="34" charset="-122"/>
                           <a:cs typeface="Arial" pitchFamily="34" charset="-120"/>
                         </a:rPr>
-                        <a:t>20,21 ± 0,98</a:t>
+                        <a:t>15,26</a:t>
                       </a:r>
-                      <a:endParaRPr lang="en-US" sz="1300" dirty="0">
+                      <a:endParaRPr lang="en-US" sz="1150" dirty="0">
                         <a:latin typeface="Arial" charset="0"/>
                         <a:ea typeface="Arial" charset="0"/>
                         <a:cs typeface="Arial" charset="0"/>
@@ -9315,8 +9905,6 @@
                     </a:solidFill>
                   </a:tcPr>
                 </a:tc>
-              </a:tr>
-              <a:tr h="457200">
                 <a:tc>
                   <a:txBody>
                     <a:bodyPr/>
@@ -9326,7 +9914,7 @@
                         <a:buNone/>
                       </a:pPr>
                       <a:r>
-                        <a:rPr lang="en-US" sz="1300" dirty="0">
+                        <a:rPr lang="en-US" sz="1150" b="1" dirty="0">
                           <a:solidFill>
                             <a:srgbClr val="1B2733"/>
                           </a:solidFill>
@@ -9334,9 +9922,147 @@
                           <a:ea typeface="Arial" pitchFamily="34" charset="-122"/>
                           <a:cs typeface="Arial" pitchFamily="34" charset="-120"/>
                         </a:rPr>
-                        <a:t>Ridge (α = 1)</a:t>
+                        <a:t>9,89</a:t>
                       </a:r>
-                      <a:endParaRPr lang="en-US" sz="1300" dirty="0">
+                      <a:endParaRPr lang="en-US" sz="1150" dirty="0">
+                        <a:latin typeface="Arial" charset="0"/>
+                        <a:ea typeface="Arial" charset="0"/>
+                        <a:cs typeface="Arial" charset="0"/>
+                      </a:endParaRPr>
+                    </a:p>
+                  </a:txBody>
+                  <a:tcPr marL="73152" marR="73152" marT="36576" marB="36576" anchor="ctr">
+                    <a:lnL w="9525" cap="flat" cmpd="sng" algn="ctr">
+                      <a:solidFill>
+                        <a:srgbClr val="C9D4DD"/>
+                      </a:solidFill>
+                      <a:prstDash val="solid"/>
+                      <a:round/>
+                      <a:headEnd type="none" w="med" len="med"/>
+                      <a:tailEnd type="none" w="med" len="med"/>
+                    </a:lnL>
+                    <a:lnR w="9525" cap="flat" cmpd="sng" algn="ctr">
+                      <a:solidFill>
+                        <a:srgbClr val="C9D4DD"/>
+                      </a:solidFill>
+                      <a:prstDash val="solid"/>
+                      <a:round/>
+                      <a:headEnd type="none" w="med" len="med"/>
+                      <a:tailEnd type="none" w="med" len="med"/>
+                    </a:lnR>
+                    <a:lnT w="9525" cap="flat" cmpd="sng" algn="ctr">
+                      <a:solidFill>
+                        <a:srgbClr val="C9D4DD"/>
+                      </a:solidFill>
+                      <a:prstDash val="solid"/>
+                      <a:round/>
+                      <a:headEnd type="none" w="med" len="med"/>
+                      <a:tailEnd type="none" w="med" len="med"/>
+                    </a:lnT>
+                    <a:lnB w="9525" cap="flat" cmpd="sng" algn="ctr">
+                      <a:solidFill>
+                        <a:srgbClr val="C9D4DD"/>
+                      </a:solidFill>
+                      <a:prstDash val="solid"/>
+                      <a:round/>
+                      <a:headEnd type="none" w="med" len="med"/>
+                      <a:tailEnd type="none" w="med" len="med"/>
+                    </a:lnB>
+                    <a:solidFill>
+                      <a:srgbClr val="DCEFEF"/>
+                    </a:solidFill>
+                  </a:tcPr>
+                </a:tc>
+                <a:tc>
+                  <a:txBody>
+                    <a:bodyPr/>
+                    <a:lstStyle/>
+                    <a:p>
+                      <a:pPr algn="l" indent="0" marL="0">
+                        <a:buNone/>
+                      </a:pPr>
+                      <a:r>
+                        <a:rPr lang="en-US" sz="1150" b="1" dirty="0">
+                          <a:solidFill>
+                            <a:srgbClr val="1B2733"/>
+                          </a:solidFill>
+                          <a:latin typeface="Arial" pitchFamily="34" charset="0"/>
+                          <a:ea typeface="Arial" pitchFamily="34" charset="-122"/>
+                          <a:cs typeface="Arial" pitchFamily="34" charset="-120"/>
+                        </a:rPr>
+                        <a:t>-5,37</a:t>
+                      </a:r>
+                      <a:endParaRPr lang="en-US" sz="1150" dirty="0">
+                        <a:latin typeface="Arial" charset="0"/>
+                        <a:ea typeface="Arial" charset="0"/>
+                        <a:cs typeface="Arial" charset="0"/>
+                      </a:endParaRPr>
+                    </a:p>
+                  </a:txBody>
+                  <a:tcPr marL="73152" marR="73152" marT="36576" marB="36576" anchor="ctr">
+                    <a:lnL w="9525" cap="flat" cmpd="sng" algn="ctr">
+                      <a:solidFill>
+                        <a:srgbClr val="C9D4DD"/>
+                      </a:solidFill>
+                      <a:prstDash val="solid"/>
+                      <a:round/>
+                      <a:headEnd type="none" w="med" len="med"/>
+                      <a:tailEnd type="none" w="med" len="med"/>
+                    </a:lnL>
+                    <a:lnR w="9525" cap="flat" cmpd="sng" algn="ctr">
+                      <a:solidFill>
+                        <a:srgbClr val="C9D4DD"/>
+                      </a:solidFill>
+                      <a:prstDash val="solid"/>
+                      <a:round/>
+                      <a:headEnd type="none" w="med" len="med"/>
+                      <a:tailEnd type="none" w="med" len="med"/>
+                    </a:lnR>
+                    <a:lnT w="9525" cap="flat" cmpd="sng" algn="ctr">
+                      <a:solidFill>
+                        <a:srgbClr val="C9D4DD"/>
+                      </a:solidFill>
+                      <a:prstDash val="solid"/>
+                      <a:round/>
+                      <a:headEnd type="none" w="med" len="med"/>
+                      <a:tailEnd type="none" w="med" len="med"/>
+                    </a:lnT>
+                    <a:lnB w="9525" cap="flat" cmpd="sng" algn="ctr">
+                      <a:solidFill>
+                        <a:srgbClr val="C9D4DD"/>
+                      </a:solidFill>
+                      <a:prstDash val="solid"/>
+                      <a:round/>
+                      <a:headEnd type="none" w="med" len="med"/>
+                      <a:tailEnd type="none" w="med" len="med"/>
+                    </a:lnB>
+                    <a:solidFill>
+                      <a:srgbClr val="DCEFEF"/>
+                    </a:solidFill>
+                  </a:tcPr>
+                </a:tc>
+              </a:tr>
+              <a:tr h="438912">
+                <a:tc>
+                  <a:txBody>
+                    <a:bodyPr/>
+                    <a:lstStyle/>
+                    <a:p>
+                      <a:pPr algn="l" indent="0" marL="0">
+                        <a:buNone/>
+                      </a:pPr>
+                      <a:r>
+                        <a:rPr lang="en-US" sz="1150" dirty="0">
+                          <a:solidFill>
+                            <a:srgbClr val="1B2733"/>
+                          </a:solidFill>
+                          <a:latin typeface="Arial" pitchFamily="34" charset="0"/>
+                          <a:ea typeface="Arial" pitchFamily="34" charset="-122"/>
+                          <a:cs typeface="Arial" pitchFamily="34" charset="-120"/>
+                        </a:rPr>
+                        <a:t>Endpoint RMSE</a:t>
+                      </a:r>
+                      <a:endParaRPr lang="en-US" sz="1150" dirty="0">
                         <a:latin typeface="Arial" charset="0"/>
                         <a:ea typeface="Arial" charset="0"/>
                         <a:cs typeface="Arial" charset="0"/>
@@ -9394,7 +10120,7 @@
                         <a:buNone/>
                       </a:pPr>
                       <a:r>
-                        <a:rPr lang="en-US" sz="1300" dirty="0">
+                        <a:rPr lang="en-US" sz="1150" dirty="0">
                           <a:solidFill>
                             <a:srgbClr val="1B2733"/>
                           </a:solidFill>
@@ -9402,9 +10128,9 @@
                           <a:ea typeface="Arial" pitchFamily="34" charset="-122"/>
                           <a:cs typeface="Arial" pitchFamily="34" charset="-120"/>
                         </a:rPr>
-                        <a:t>23,99 ± 0,95</a:t>
+                        <a:t>22,35</a:t>
                       </a:r>
-                      <a:endParaRPr lang="en-US" sz="1300" dirty="0">
+                      <a:endParaRPr lang="en-US" sz="1150" dirty="0">
                         <a:latin typeface="Arial" charset="0"/>
                         <a:ea typeface="Arial" charset="0"/>
                         <a:cs typeface="Arial" charset="0"/>
@@ -9450,76 +10176,6 @@
                     </a:lnB>
                     <a:solidFill>
                       <a:srgbClr val="EEF3F6"/>
-                    </a:solidFill>
-                  </a:tcPr>
-                </a:tc>
-              </a:tr>
-              <a:tr h="457200">
-                <a:tc>
-                  <a:txBody>
-                    <a:bodyPr/>
-                    <a:lstStyle/>
-                    <a:p>
-                      <a:pPr algn="l" indent="0" marL="0">
-                        <a:buNone/>
-                      </a:pPr>
-                      <a:r>
-                        <a:rPr lang="en-US" sz="1300" dirty="0">
-                          <a:solidFill>
-                            <a:srgbClr val="1B2733"/>
-                          </a:solidFill>
-                          <a:latin typeface="Arial" pitchFamily="34" charset="0"/>
-                          <a:ea typeface="Arial" pitchFamily="34" charset="-122"/>
-                          <a:cs typeface="Arial" pitchFamily="34" charset="-120"/>
-                        </a:rPr>
-                        <a:t>Median baseline</a:t>
-                      </a:r>
-                      <a:endParaRPr lang="en-US" sz="1300" dirty="0">
-                        <a:latin typeface="Arial" charset="0"/>
-                        <a:ea typeface="Arial" charset="0"/>
-                        <a:cs typeface="Arial" charset="0"/>
-                      </a:endParaRPr>
-                    </a:p>
-                  </a:txBody>
-                  <a:tcPr marL="73152" marR="73152" marT="36576" marB="36576" anchor="ctr">
-                    <a:lnL w="9525" cap="flat" cmpd="sng" algn="ctr">
-                      <a:solidFill>
-                        <a:srgbClr val="C9D4DD"/>
-                      </a:solidFill>
-                      <a:prstDash val="solid"/>
-                      <a:round/>
-                      <a:headEnd type="none" w="med" len="med"/>
-                      <a:tailEnd type="none" w="med" len="med"/>
-                    </a:lnL>
-                    <a:lnR w="9525" cap="flat" cmpd="sng" algn="ctr">
-                      <a:solidFill>
-                        <a:srgbClr val="C9D4DD"/>
-                      </a:solidFill>
-                      <a:prstDash val="solid"/>
-                      <a:round/>
-                      <a:headEnd type="none" w="med" len="med"/>
-                      <a:tailEnd type="none" w="med" len="med"/>
-                    </a:lnR>
-                    <a:lnT w="9525" cap="flat" cmpd="sng" algn="ctr">
-                      <a:solidFill>
-                        <a:srgbClr val="C9D4DD"/>
-                      </a:solidFill>
-                      <a:prstDash val="solid"/>
-                      <a:round/>
-                      <a:headEnd type="none" w="med" len="med"/>
-                      <a:tailEnd type="none" w="med" len="med"/>
-                    </a:lnT>
-                    <a:lnB w="9525" cap="flat" cmpd="sng" algn="ctr">
-                      <a:solidFill>
-                        <a:srgbClr val="C9D4DD"/>
-                      </a:solidFill>
-                      <a:prstDash val="solid"/>
-                      <a:round/>
-                      <a:headEnd type="none" w="med" len="med"/>
-                      <a:tailEnd type="none" w="med" len="med"/>
-                    </a:lnB>
-                    <a:solidFill>
-                      <a:srgbClr val="FFFFFF"/>
                     </a:solidFill>
                   </a:tcPr>
                 </a:tc>
@@ -9532,7 +10188,7 @@
                         <a:buNone/>
                       </a:pPr>
                       <a:r>
-                        <a:rPr lang="en-US" sz="1300" dirty="0">
+                        <a:rPr lang="en-US" sz="1150" dirty="0">
                           <a:solidFill>
                             <a:srgbClr val="1B2733"/>
                           </a:solidFill>
@@ -9540,9 +10196,9 @@
                           <a:ea typeface="Arial" pitchFamily="34" charset="-122"/>
                           <a:cs typeface="Arial" pitchFamily="34" charset="-120"/>
                         </a:rPr>
-                        <a:t>46,95 ± 0,12</a:t>
+                        <a:t>14,99</a:t>
                       </a:r>
-                      <a:endParaRPr lang="en-US" sz="1300" dirty="0">
+                      <a:endParaRPr lang="en-US" sz="1150" dirty="0">
                         <a:latin typeface="Arial" charset="0"/>
                         <a:ea typeface="Arial" charset="0"/>
                         <a:cs typeface="Arial" charset="0"/>
@@ -9587,7 +10243,75 @@
                       <a:tailEnd type="none" w="med" len="med"/>
                     </a:lnB>
                     <a:solidFill>
-                      <a:srgbClr val="FFFFFF"/>
+                      <a:srgbClr val="EEF3F6"/>
+                    </a:solidFill>
+                  </a:tcPr>
+                </a:tc>
+                <a:tc>
+                  <a:txBody>
+                    <a:bodyPr/>
+                    <a:lstStyle/>
+                    <a:p>
+                      <a:pPr algn="l" indent="0" marL="0">
+                        <a:buNone/>
+                      </a:pPr>
+                      <a:r>
+                        <a:rPr lang="en-US" sz="1150" dirty="0">
+                          <a:solidFill>
+                            <a:srgbClr val="1B2733"/>
+                          </a:solidFill>
+                          <a:latin typeface="Arial" pitchFamily="34" charset="0"/>
+                          <a:ea typeface="Arial" pitchFamily="34" charset="-122"/>
+                          <a:cs typeface="Arial" pitchFamily="34" charset="-120"/>
+                        </a:rPr>
+                        <a:t>-7,35</a:t>
+                      </a:r>
+                      <a:endParaRPr lang="en-US" sz="1150" dirty="0">
+                        <a:latin typeface="Arial" charset="0"/>
+                        <a:ea typeface="Arial" charset="0"/>
+                        <a:cs typeface="Arial" charset="0"/>
+                      </a:endParaRPr>
+                    </a:p>
+                  </a:txBody>
+                  <a:tcPr marL="73152" marR="73152" marT="36576" marB="36576" anchor="ctr">
+                    <a:lnL w="9525" cap="flat" cmpd="sng" algn="ctr">
+                      <a:solidFill>
+                        <a:srgbClr val="C9D4DD"/>
+                      </a:solidFill>
+                      <a:prstDash val="solid"/>
+                      <a:round/>
+                      <a:headEnd type="none" w="med" len="med"/>
+                      <a:tailEnd type="none" w="med" len="med"/>
+                    </a:lnL>
+                    <a:lnR w="9525" cap="flat" cmpd="sng" algn="ctr">
+                      <a:solidFill>
+                        <a:srgbClr val="C9D4DD"/>
+                      </a:solidFill>
+                      <a:prstDash val="solid"/>
+                      <a:round/>
+                      <a:headEnd type="none" w="med" len="med"/>
+                      <a:tailEnd type="none" w="med" len="med"/>
+                    </a:lnR>
+                    <a:lnT w="9525" cap="flat" cmpd="sng" algn="ctr">
+                      <a:solidFill>
+                        <a:srgbClr val="C9D4DD"/>
+                      </a:solidFill>
+                      <a:prstDash val="solid"/>
+                      <a:round/>
+                      <a:headEnd type="none" w="med" len="med"/>
+                      <a:tailEnd type="none" w="med" len="med"/>
+                    </a:lnT>
+                    <a:lnB w="9525" cap="flat" cmpd="sng" algn="ctr">
+                      <a:solidFill>
+                        <a:srgbClr val="C9D4DD"/>
+                      </a:solidFill>
+                      <a:prstDash val="solid"/>
+                      <a:round/>
+                      <a:headEnd type="none" w="med" len="med"/>
+                      <a:tailEnd type="none" w="med" len="med"/>
+                    </a:lnB>
+                    <a:solidFill>
+                      <a:srgbClr val="EEF3F6"/>
                     </a:solidFill>
                   </a:tcPr>
                 </a:tc>
@@ -9604,12 +10328,12 @@
         </p:nvSpPr>
         <p:spPr>
           <a:xfrm>
-            <a:off x="7680960" y="4160520"/>
-            <a:ext cx="3959352" cy="1828800"/>
+            <a:off x="7452360" y="4251960"/>
+            <a:ext cx="4187952" cy="1783080"/>
           </a:xfrm>
           <a:prstGeom prst="roundRect">
             <a:avLst>
-              <a:gd name="adj" fmla="val 4000"/>
+              <a:gd name="adj" fmla="val 4103"/>
             </a:avLst>
           </a:prstGeom>
           <a:solidFill>
@@ -9626,7 +10350,7 @@
         </p:nvSpPr>
         <p:spPr>
           <a:xfrm>
-            <a:off x="7863840" y="4297680"/>
+            <a:off x="7662672" y="4416552"/>
             <a:ext cx="3657600" cy="310896"/>
           </a:xfrm>
           <a:prstGeom prst="rect">
@@ -9651,7 +10375,7 @@
                 <a:ea typeface="Arial" pitchFamily="34" charset="-122"/>
                 <a:cs typeface="Arial" pitchFamily="34" charset="-120"/>
               </a:rPr>
-              <a:t>CV và test chấm trên tập điểm khác nhau</a:t>
+              <a:t>Cách đọc kết quả</a:t>
             </a:r>
             <a:endParaRPr lang="en-US" sz="1400" dirty="0"/>
           </a:p>
@@ -9665,8 +10389,8 @@
         </p:nvSpPr>
         <p:spPr>
           <a:xfrm>
-            <a:off x="7863840" y="4709160"/>
-            <a:ext cx="3611880" cy="1188720"/>
+            <a:off x="7662672" y="4800600"/>
+            <a:ext cx="3657600" cy="1005840"/>
           </a:xfrm>
           <a:prstGeom prst="rect">
             <a:avLst/>
@@ -9682,7 +10406,7 @@
               <a:buNone/>
             </a:pPr>
             <a:r>
-              <a:rPr lang="en-US" sz="1300" dirty="0">
+              <a:rPr lang="en-US" sz="1250" dirty="0">
                 <a:solidFill>
                   <a:srgbClr val="1B2733"/>
                 </a:solidFill>
@@ -9690,9 +10414,9 @@
                 <a:ea typeface="Arial" pitchFamily="34" charset="-122"/>
                 <a:cs typeface="Arial" pitchFamily="34" charset="-120"/>
               </a:rPr>
-              <a:t>CV chấm mọi train window từ cycle 30 đến failure; test chỉ chấm một điểm cắt mỗi engine. Không so trực tiếp hai con số.</a:t>
-            </a:r>
-            <a:endParaRPr lang="en-US" sz="1300" dirty="0"/>
+              <a:t>Âm ở cột Delta nghĩa là HGB169 thấp hơn HGB126. Hai panel dùng cùng engine, fold và prediction đã lưu; chưa có blind refit độc lập, còn historical test readout chỉ dùng để báo cáo.</a:t>
+            </a:r>
+            <a:endParaRPr lang="en-US" sz="1250" dirty="0"/>
           </a:p>
         </p:txBody>
       </p:sp>
@@ -9822,7 +10546,7 @@
                 <a:ea typeface="Arial" pitchFamily="34" charset="-122"/>
                 <a:cs typeface="Arial" pitchFamily="34" charset="-120"/>
               </a:rPr>
-              <a:t>Trên 100 test engines: MAE 15,35 cycles</a:t>
+              <a:t>Metric test lịch sử của HGB126: MAE 15,35 cycles</a:t>
             </a:r>
             <a:endParaRPr lang="en-US" sz="2700" dirty="0"/>
           </a:p>
@@ -9861,7 +10585,7 @@
                 <a:ea typeface="Arial" pitchFamily="34" charset="-122"/>
                 <a:cs typeface="Arial" pitchFamily="34" charset="-120"/>
               </a:rPr>
-              <a:t>Mỗi engine đóng góp một dự đoán tại cycle cuối được quan sát; nhãn test chỉ được dùng ở bước này</a:t>
+              <a:t>HGB126 là baseline lịch sử; metric test được giữ riêng vì HGB169 chưa có refit mù độc lập</a:t>
             </a:r>
             <a:endParaRPr lang="en-US" sz="1500" dirty="0"/>
           </a:p>
@@ -10512,7 +11236,7 @@
                 <a:ea typeface="Arial" pitchFamily="34" charset="-122"/>
                 <a:cs typeface="Arial" pitchFamily="34" charset="-120"/>
               </a:rPr>
-              <a:t>Sai số lớn tập trung ở dự đoán cao hơn RUL thật</a:t>
+              <a:t>Phân tích sai số của HGB126 baseline lịch sử</a:t>
             </a:r>
             <a:endParaRPr lang="en-US" sz="2700" dirty="0"/>
           </a:p>
@@ -11276,7 +12000,7 @@
                 <a:ea typeface="Arial" pitchFamily="34" charset="-122"/>
                 <a:cs typeface="Arial" pitchFamily="34" charset="-120"/>
               </a:rPr>
-              <a:t>Cảnh báo sớm: báo động khi RUL dự đoán ≤ 30 cycles</a:t>
+              <a:t>Warning policy phải được đánh giá riêng với predictor</a:t>
             </a:r>
             <a:endParaRPr lang="en-US" sz="2700" dirty="0"/>
           </a:p>
@@ -11315,7 +12039,7 @@
                 <a:ea typeface="Arial" pitchFamily="34" charset="-122"/>
                 <a:cs typeface="Arial" pitchFamily="34" charset="-120"/>
               </a:rPr>
-              <a:t>Trên dự đoán OOF của 100 train engines, mọi engine được cảnh báo trước failure; 49 engine cảnh báo sau ngưỡng thật</a:t>
+              <a:t>Threshold 30: HGB126 51%, HGB169 45%; threshold 40: 94% và 96%</a:t>
             </a:r>
             <a:endParaRPr lang="en-US" sz="1500" dirty="0"/>
           </a:p>
@@ -11354,7 +12078,7 @@
                 <a:ea typeface="Arial" pitchFamily="34" charset="-122"/>
                 <a:cs typeface="Arial" pitchFamily="34" charset="-120"/>
               </a:rPr>
-              <a:t>Nguồn: outputs/modeling/tables/warning_summary.json; outputs/modeling/figures/warning_trajectory.png; outputs/diagnostics/error_diagnostics.json</a:t>
+              <a:t>Nguồn: outputs/course_alignment/20261007/warning_fixed_policies.csv; outputs/modeling/figures/warning_trajectory.png</a:t>
             </a:r>
             <a:endParaRPr lang="en-US" sz="900" dirty="0"/>
           </a:p>
@@ -11425,17 +12149,1744 @@
       </p:pic>
       <p:graphicFrame>
         <p:nvGraphicFramePr>
-          <p:cNvPr id="10" name="Chart 0" descr=""/>
-          <p:cNvGraphicFramePr/>
-          <p:nvPr/>
+          <p:cNvPr id="17" name="Table 0"/>
+          <p:cNvGraphicFramePr>
+            <a:graphicFrameLocks noGrp="1"/>
+          </p:cNvGraphicFramePr>
+          <p:nvPr>
+            <p:extLst>
+              <p:ext uri="{D42A27DB-BD31-4B8C-83A1-F6EECF244321}">
+                <p14:modId xmlns:p14="http://schemas.microsoft.com/office/powerpoint/2010/main" val="1579011935"/>
+              </p:ext>
+            </p:extLst>
+          </p:nvPr>
         </p:nvGraphicFramePr>
         <p:xfrm>
-          <a:off x="7132320" y="1828800"/>
-          <a:ext cx="4507992" cy="2331720"/>
+          <a:off x="6995160" y="1874520"/>
+          <a:ext cx="4645152" cy="914400"/>
         </p:xfrm>
-        <a:graphic xmlns:a="http://schemas.openxmlformats.org/drawingml/2006/main">
-          <a:graphicData uri="http://schemas.openxmlformats.org/drawingml/2006/chart">
-            <c:chart xmlns:c="http://schemas.openxmlformats.org/drawingml/2006/chart" r:id="rId2"/>
+        <a:graphic>
+          <a:graphicData uri="http://schemas.openxmlformats.org/drawingml/2006/table">
+            <a:tbl>
+              <a:tblPr/>
+              <a:tblGrid>
+                <a:gridCol w="914400"/>
+                <a:gridCol w="685800"/>
+                <a:gridCol w="1005840"/>
+                <a:gridCol w="1051560"/>
+                <a:gridCol w="987552"/>
+              </a:tblGrid>
+              <a:tr h="420624">
+                <a:tc>
+                  <a:txBody>
+                    <a:bodyPr/>
+                    <a:lstStyle/>
+                    <a:p>
+                      <a:pPr algn="l" indent="0" marL="0">
+                        <a:buNone/>
+                      </a:pPr>
+                      <a:r>
+                        <a:rPr lang="en-US" sz="1050" b="1" dirty="0">
+                          <a:solidFill>
+                            <a:srgbClr val="FFFFFF"/>
+                          </a:solidFill>
+                          <a:latin typeface="Arial" pitchFamily="34" charset="0"/>
+                          <a:ea typeface="Arial" pitchFamily="34" charset="-122"/>
+                          <a:cs typeface="Arial" pitchFamily="34" charset="-120"/>
+                        </a:rPr>
+                        <a:t>Model</a:t>
+                      </a:r>
+                      <a:endParaRPr lang="en-US" sz="1050" dirty="0">
+                        <a:latin typeface="Arial" charset="0"/>
+                        <a:ea typeface="Arial" charset="0"/>
+                        <a:cs typeface="Arial" charset="0"/>
+                      </a:endParaRPr>
+                    </a:p>
+                  </a:txBody>
+                  <a:tcPr marL="73152" marR="73152" marT="36576" marB="36576" anchor="ctr">
+                    <a:lnL w="9525" cap="flat" cmpd="sng" algn="ctr">
+                      <a:solidFill>
+                        <a:srgbClr val="C9D4DD"/>
+                      </a:solidFill>
+                      <a:prstDash val="solid"/>
+                      <a:round/>
+                      <a:headEnd type="none" w="med" len="med"/>
+                      <a:tailEnd type="none" w="med" len="med"/>
+                    </a:lnL>
+                    <a:lnR w="9525" cap="flat" cmpd="sng" algn="ctr">
+                      <a:solidFill>
+                        <a:srgbClr val="C9D4DD"/>
+                      </a:solidFill>
+                      <a:prstDash val="solid"/>
+                      <a:round/>
+                      <a:headEnd type="none" w="med" len="med"/>
+                      <a:tailEnd type="none" w="med" len="med"/>
+                    </a:lnR>
+                    <a:lnT w="9525" cap="flat" cmpd="sng" algn="ctr">
+                      <a:solidFill>
+                        <a:srgbClr val="C9D4DD"/>
+                      </a:solidFill>
+                      <a:prstDash val="solid"/>
+                      <a:round/>
+                      <a:headEnd type="none" w="med" len="med"/>
+                      <a:tailEnd type="none" w="med" len="med"/>
+                    </a:lnT>
+                    <a:lnB w="9525" cap="flat" cmpd="sng" algn="ctr">
+                      <a:solidFill>
+                        <a:srgbClr val="C9D4DD"/>
+                      </a:solidFill>
+                      <a:prstDash val="solid"/>
+                      <a:round/>
+                      <a:headEnd type="none" w="med" len="med"/>
+                      <a:tailEnd type="none" w="med" len="med"/>
+                    </a:lnB>
+                    <a:solidFill>
+                      <a:srgbClr val="0B2239"/>
+                    </a:solidFill>
+                  </a:tcPr>
+                </a:tc>
+                <a:tc>
+                  <a:txBody>
+                    <a:bodyPr/>
+                    <a:lstStyle/>
+                    <a:p>
+                      <a:pPr algn="l" indent="0" marL="0">
+                        <a:buNone/>
+                      </a:pPr>
+                      <a:r>
+                        <a:rPr lang="en-US" sz="1050" b="1" dirty="0">
+                          <a:solidFill>
+                            <a:srgbClr val="FFFFFF"/>
+                          </a:solidFill>
+                          <a:latin typeface="Arial" pitchFamily="34" charset="0"/>
+                          <a:ea typeface="Arial" pitchFamily="34" charset="-122"/>
+                          <a:cs typeface="Arial" pitchFamily="34" charset="-120"/>
+                        </a:rPr>
+                        <a:t>Ngưỡng</a:t>
+                      </a:r>
+                      <a:endParaRPr lang="en-US" sz="1050" dirty="0">
+                        <a:latin typeface="Arial" charset="0"/>
+                        <a:ea typeface="Arial" charset="0"/>
+                        <a:cs typeface="Arial" charset="0"/>
+                      </a:endParaRPr>
+                    </a:p>
+                  </a:txBody>
+                  <a:tcPr marL="73152" marR="73152" marT="36576" marB="36576" anchor="ctr">
+                    <a:lnL w="9525" cap="flat" cmpd="sng" algn="ctr">
+                      <a:solidFill>
+                        <a:srgbClr val="C9D4DD"/>
+                      </a:solidFill>
+                      <a:prstDash val="solid"/>
+                      <a:round/>
+                      <a:headEnd type="none" w="med" len="med"/>
+                      <a:tailEnd type="none" w="med" len="med"/>
+                    </a:lnL>
+                    <a:lnR w="9525" cap="flat" cmpd="sng" algn="ctr">
+                      <a:solidFill>
+                        <a:srgbClr val="C9D4DD"/>
+                      </a:solidFill>
+                      <a:prstDash val="solid"/>
+                      <a:round/>
+                      <a:headEnd type="none" w="med" len="med"/>
+                      <a:tailEnd type="none" w="med" len="med"/>
+                    </a:lnR>
+                    <a:lnT w="9525" cap="flat" cmpd="sng" algn="ctr">
+                      <a:solidFill>
+                        <a:srgbClr val="C9D4DD"/>
+                      </a:solidFill>
+                      <a:prstDash val="solid"/>
+                      <a:round/>
+                      <a:headEnd type="none" w="med" len="med"/>
+                      <a:tailEnd type="none" w="med" len="med"/>
+                    </a:lnT>
+                    <a:lnB w="9525" cap="flat" cmpd="sng" algn="ctr">
+                      <a:solidFill>
+                        <a:srgbClr val="C9D4DD"/>
+                      </a:solidFill>
+                      <a:prstDash val="solid"/>
+                      <a:round/>
+                      <a:headEnd type="none" w="med" len="med"/>
+                      <a:tailEnd type="none" w="med" len="med"/>
+                    </a:lnB>
+                    <a:solidFill>
+                      <a:srgbClr val="0B2239"/>
+                    </a:solidFill>
+                  </a:tcPr>
+                </a:tc>
+                <a:tc>
+                  <a:txBody>
+                    <a:bodyPr/>
+                    <a:lstStyle/>
+                    <a:p>
+                      <a:pPr algn="l" indent="0" marL="0">
+                        <a:buNone/>
+                      </a:pPr>
+                      <a:r>
+                        <a:rPr lang="en-US" sz="1050" b="1" dirty="0">
+                          <a:solidFill>
+                            <a:srgbClr val="FFFFFF"/>
+                          </a:solidFill>
+                          <a:latin typeface="Arial" pitchFamily="34" charset="0"/>
+                          <a:ea typeface="Arial" pitchFamily="34" charset="-122"/>
+                          <a:cs typeface="Arial" pitchFamily="34" charset="-120"/>
+                        </a:rPr>
+                        <a:t>Đúng lúc</a:t>
+                      </a:r>
+                      <a:endParaRPr lang="en-US" sz="1050" dirty="0">
+                        <a:latin typeface="Arial" charset="0"/>
+                        <a:ea typeface="Arial" charset="0"/>
+                        <a:cs typeface="Arial" charset="0"/>
+                      </a:endParaRPr>
+                    </a:p>
+                  </a:txBody>
+                  <a:tcPr marL="73152" marR="73152" marT="36576" marB="36576" anchor="ctr">
+                    <a:lnL w="9525" cap="flat" cmpd="sng" algn="ctr">
+                      <a:solidFill>
+                        <a:srgbClr val="C9D4DD"/>
+                      </a:solidFill>
+                      <a:prstDash val="solid"/>
+                      <a:round/>
+                      <a:headEnd type="none" w="med" len="med"/>
+                      <a:tailEnd type="none" w="med" len="med"/>
+                    </a:lnL>
+                    <a:lnR w="9525" cap="flat" cmpd="sng" algn="ctr">
+                      <a:solidFill>
+                        <a:srgbClr val="C9D4DD"/>
+                      </a:solidFill>
+                      <a:prstDash val="solid"/>
+                      <a:round/>
+                      <a:headEnd type="none" w="med" len="med"/>
+                      <a:tailEnd type="none" w="med" len="med"/>
+                    </a:lnR>
+                    <a:lnT w="9525" cap="flat" cmpd="sng" algn="ctr">
+                      <a:solidFill>
+                        <a:srgbClr val="C9D4DD"/>
+                      </a:solidFill>
+                      <a:prstDash val="solid"/>
+                      <a:round/>
+                      <a:headEnd type="none" w="med" len="med"/>
+                      <a:tailEnd type="none" w="med" len="med"/>
+                    </a:lnT>
+                    <a:lnB w="9525" cap="flat" cmpd="sng" algn="ctr">
+                      <a:solidFill>
+                        <a:srgbClr val="C9D4DD"/>
+                      </a:solidFill>
+                      <a:prstDash val="solid"/>
+                      <a:round/>
+                      <a:headEnd type="none" w="med" len="med"/>
+                      <a:tailEnd type="none" w="med" len="med"/>
+                    </a:lnB>
+                    <a:solidFill>
+                      <a:srgbClr val="0B2239"/>
+                    </a:solidFill>
+                  </a:tcPr>
+                </a:tc>
+                <a:tc>
+                  <a:txBody>
+                    <a:bodyPr/>
+                    <a:lstStyle/>
+                    <a:p>
+                      <a:pPr algn="l" indent="0" marL="0">
+                        <a:buNone/>
+                      </a:pPr>
+                      <a:r>
+                        <a:rPr lang="en-US" sz="1050" b="1" dirty="0">
+                          <a:solidFill>
+                            <a:srgbClr val="FFFFFF"/>
+                          </a:solidFill>
+                          <a:latin typeface="Arial" pitchFamily="34" charset="0"/>
+                          <a:ea typeface="Arial" pitchFamily="34" charset="-122"/>
+                          <a:cs typeface="Arial" pitchFamily="34" charset="-120"/>
+                        </a:rPr>
+                        <a:t>Trễ/bỏ lỡ</a:t>
+                      </a:r>
+                      <a:endParaRPr lang="en-US" sz="1050" dirty="0">
+                        <a:latin typeface="Arial" charset="0"/>
+                        <a:ea typeface="Arial" charset="0"/>
+                        <a:cs typeface="Arial" charset="0"/>
+                      </a:endParaRPr>
+                    </a:p>
+                  </a:txBody>
+                  <a:tcPr marL="73152" marR="73152" marT="36576" marB="36576" anchor="ctr">
+                    <a:lnL w="9525" cap="flat" cmpd="sng" algn="ctr">
+                      <a:solidFill>
+                        <a:srgbClr val="C9D4DD"/>
+                      </a:solidFill>
+                      <a:prstDash val="solid"/>
+                      <a:round/>
+                      <a:headEnd type="none" w="med" len="med"/>
+                      <a:tailEnd type="none" w="med" len="med"/>
+                    </a:lnL>
+                    <a:lnR w="9525" cap="flat" cmpd="sng" algn="ctr">
+                      <a:solidFill>
+                        <a:srgbClr val="C9D4DD"/>
+                      </a:solidFill>
+                      <a:prstDash val="solid"/>
+                      <a:round/>
+                      <a:headEnd type="none" w="med" len="med"/>
+                      <a:tailEnd type="none" w="med" len="med"/>
+                    </a:lnR>
+                    <a:lnT w="9525" cap="flat" cmpd="sng" algn="ctr">
+                      <a:solidFill>
+                        <a:srgbClr val="C9D4DD"/>
+                      </a:solidFill>
+                      <a:prstDash val="solid"/>
+                      <a:round/>
+                      <a:headEnd type="none" w="med" len="med"/>
+                      <a:tailEnd type="none" w="med" len="med"/>
+                    </a:lnT>
+                    <a:lnB w="9525" cap="flat" cmpd="sng" algn="ctr">
+                      <a:solidFill>
+                        <a:srgbClr val="C9D4DD"/>
+                      </a:solidFill>
+                      <a:prstDash val="solid"/>
+                      <a:round/>
+                      <a:headEnd type="none" w="med" len="med"/>
+                      <a:tailEnd type="none" w="med" len="med"/>
+                    </a:lnB>
+                    <a:solidFill>
+                      <a:srgbClr val="0B2239"/>
+                    </a:solidFill>
+                  </a:tcPr>
+                </a:tc>
+                <a:tc>
+                  <a:txBody>
+                    <a:bodyPr/>
+                    <a:lstStyle/>
+                    <a:p>
+                      <a:pPr algn="l" indent="0" marL="0">
+                        <a:buNone/>
+                      </a:pPr>
+                      <a:r>
+                        <a:rPr lang="en-US" sz="1050" b="1" dirty="0">
+                          <a:solidFill>
+                            <a:srgbClr val="FFFFFF"/>
+                          </a:solidFill>
+                          <a:latin typeface="Arial" pitchFamily="34" charset="0"/>
+                          <a:ea typeface="Arial" pitchFamily="34" charset="-122"/>
+                          <a:cs typeface="Arial" pitchFamily="34" charset="-120"/>
+                        </a:rPr>
+                        <a:t>Burden</a:t>
+                      </a:r>
+                      <a:endParaRPr lang="en-US" sz="1050" dirty="0">
+                        <a:latin typeface="Arial" charset="0"/>
+                        <a:ea typeface="Arial" charset="0"/>
+                        <a:cs typeface="Arial" charset="0"/>
+                      </a:endParaRPr>
+                    </a:p>
+                  </a:txBody>
+                  <a:tcPr marL="73152" marR="73152" marT="36576" marB="36576" anchor="ctr">
+                    <a:lnL w="9525" cap="flat" cmpd="sng" algn="ctr">
+                      <a:solidFill>
+                        <a:srgbClr val="C9D4DD"/>
+                      </a:solidFill>
+                      <a:prstDash val="solid"/>
+                      <a:round/>
+                      <a:headEnd type="none" w="med" len="med"/>
+                      <a:tailEnd type="none" w="med" len="med"/>
+                    </a:lnL>
+                    <a:lnR w="9525" cap="flat" cmpd="sng" algn="ctr">
+                      <a:solidFill>
+                        <a:srgbClr val="C9D4DD"/>
+                      </a:solidFill>
+                      <a:prstDash val="solid"/>
+                      <a:round/>
+                      <a:headEnd type="none" w="med" len="med"/>
+                      <a:tailEnd type="none" w="med" len="med"/>
+                    </a:lnR>
+                    <a:lnT w="9525" cap="flat" cmpd="sng" algn="ctr">
+                      <a:solidFill>
+                        <a:srgbClr val="C9D4DD"/>
+                      </a:solidFill>
+                      <a:prstDash val="solid"/>
+                      <a:round/>
+                      <a:headEnd type="none" w="med" len="med"/>
+                      <a:tailEnd type="none" w="med" len="med"/>
+                    </a:lnT>
+                    <a:lnB w="9525" cap="flat" cmpd="sng" algn="ctr">
+                      <a:solidFill>
+                        <a:srgbClr val="C9D4DD"/>
+                      </a:solidFill>
+                      <a:prstDash val="solid"/>
+                      <a:round/>
+                      <a:headEnd type="none" w="med" len="med"/>
+                      <a:tailEnd type="none" w="med" len="med"/>
+                    </a:lnB>
+                    <a:solidFill>
+                      <a:srgbClr val="0B2239"/>
+                    </a:solidFill>
+                  </a:tcPr>
+                </a:tc>
+              </a:tr>
+              <a:tr h="420624">
+                <a:tc>
+                  <a:txBody>
+                    <a:bodyPr/>
+                    <a:lstStyle/>
+                    <a:p>
+                      <a:pPr algn="l" indent="0" marL="0">
+                        <a:buNone/>
+                      </a:pPr>
+                      <a:r>
+                        <a:rPr lang="en-US" sz="1050" dirty="0">
+                          <a:solidFill>
+                            <a:srgbClr val="1B2733"/>
+                          </a:solidFill>
+                          <a:latin typeface="Arial" pitchFamily="34" charset="0"/>
+                          <a:ea typeface="Arial" pitchFamily="34" charset="-122"/>
+                          <a:cs typeface="Arial" pitchFamily="34" charset="-120"/>
+                        </a:rPr>
+                        <a:t>HGB126</a:t>
+                      </a:r>
+                      <a:endParaRPr lang="en-US" sz="1050" dirty="0">
+                        <a:latin typeface="Arial" charset="0"/>
+                        <a:ea typeface="Arial" charset="0"/>
+                        <a:cs typeface="Arial" charset="0"/>
+                      </a:endParaRPr>
+                    </a:p>
+                  </a:txBody>
+                  <a:tcPr marL="73152" marR="73152" marT="36576" marB="36576" anchor="ctr">
+                    <a:lnL w="9525" cap="flat" cmpd="sng" algn="ctr">
+                      <a:solidFill>
+                        <a:srgbClr val="C9D4DD"/>
+                      </a:solidFill>
+                      <a:prstDash val="solid"/>
+                      <a:round/>
+                      <a:headEnd type="none" w="med" len="med"/>
+                      <a:tailEnd type="none" w="med" len="med"/>
+                    </a:lnL>
+                    <a:lnR w="9525" cap="flat" cmpd="sng" algn="ctr">
+                      <a:solidFill>
+                        <a:srgbClr val="C9D4DD"/>
+                      </a:solidFill>
+                      <a:prstDash val="solid"/>
+                      <a:round/>
+                      <a:headEnd type="none" w="med" len="med"/>
+                      <a:tailEnd type="none" w="med" len="med"/>
+                    </a:lnR>
+                    <a:lnT w="9525" cap="flat" cmpd="sng" algn="ctr">
+                      <a:solidFill>
+                        <a:srgbClr val="C9D4DD"/>
+                      </a:solidFill>
+                      <a:prstDash val="solid"/>
+                      <a:round/>
+                      <a:headEnd type="none" w="med" len="med"/>
+                      <a:tailEnd type="none" w="med" len="med"/>
+                    </a:lnT>
+                    <a:lnB w="9525" cap="flat" cmpd="sng" algn="ctr">
+                      <a:solidFill>
+                        <a:srgbClr val="C9D4DD"/>
+                      </a:solidFill>
+                      <a:prstDash val="solid"/>
+                      <a:round/>
+                      <a:headEnd type="none" w="med" len="med"/>
+                      <a:tailEnd type="none" w="med" len="med"/>
+                    </a:lnB>
+                    <a:solidFill>
+                      <a:srgbClr val="FFFFFF"/>
+                    </a:solidFill>
+                  </a:tcPr>
+                </a:tc>
+                <a:tc>
+                  <a:txBody>
+                    <a:bodyPr/>
+                    <a:lstStyle/>
+                    <a:p>
+                      <a:pPr algn="l" indent="0" marL="0">
+                        <a:buNone/>
+                      </a:pPr>
+                      <a:r>
+                        <a:rPr lang="en-US" sz="1050" dirty="0">
+                          <a:solidFill>
+                            <a:srgbClr val="1B2733"/>
+                          </a:solidFill>
+                          <a:latin typeface="Arial" pitchFamily="34" charset="0"/>
+                          <a:ea typeface="Arial" pitchFamily="34" charset="-122"/>
+                          <a:cs typeface="Arial" pitchFamily="34" charset="-120"/>
+                        </a:rPr>
+                        <a:t>30</a:t>
+                      </a:r>
+                      <a:endParaRPr lang="en-US" sz="1050" dirty="0">
+                        <a:latin typeface="Arial" charset="0"/>
+                        <a:ea typeface="Arial" charset="0"/>
+                        <a:cs typeface="Arial" charset="0"/>
+                      </a:endParaRPr>
+                    </a:p>
+                  </a:txBody>
+                  <a:tcPr marL="73152" marR="73152" marT="36576" marB="36576" anchor="ctr">
+                    <a:lnL w="9525" cap="flat" cmpd="sng" algn="ctr">
+                      <a:solidFill>
+                        <a:srgbClr val="C9D4DD"/>
+                      </a:solidFill>
+                      <a:prstDash val="solid"/>
+                      <a:round/>
+                      <a:headEnd type="none" w="med" len="med"/>
+                      <a:tailEnd type="none" w="med" len="med"/>
+                    </a:lnL>
+                    <a:lnR w="9525" cap="flat" cmpd="sng" algn="ctr">
+                      <a:solidFill>
+                        <a:srgbClr val="C9D4DD"/>
+                      </a:solidFill>
+                      <a:prstDash val="solid"/>
+                      <a:round/>
+                      <a:headEnd type="none" w="med" len="med"/>
+                      <a:tailEnd type="none" w="med" len="med"/>
+                    </a:lnR>
+                    <a:lnT w="9525" cap="flat" cmpd="sng" algn="ctr">
+                      <a:solidFill>
+                        <a:srgbClr val="C9D4DD"/>
+                      </a:solidFill>
+                      <a:prstDash val="solid"/>
+                      <a:round/>
+                      <a:headEnd type="none" w="med" len="med"/>
+                      <a:tailEnd type="none" w="med" len="med"/>
+                    </a:lnT>
+                    <a:lnB w="9525" cap="flat" cmpd="sng" algn="ctr">
+                      <a:solidFill>
+                        <a:srgbClr val="C9D4DD"/>
+                      </a:solidFill>
+                      <a:prstDash val="solid"/>
+                      <a:round/>
+                      <a:headEnd type="none" w="med" len="med"/>
+                      <a:tailEnd type="none" w="med" len="med"/>
+                    </a:lnB>
+                    <a:solidFill>
+                      <a:srgbClr val="FFFFFF"/>
+                    </a:solidFill>
+                  </a:tcPr>
+                </a:tc>
+                <a:tc>
+                  <a:txBody>
+                    <a:bodyPr/>
+                    <a:lstStyle/>
+                    <a:p>
+                      <a:pPr algn="l" indent="0" marL="0">
+                        <a:buNone/>
+                      </a:pPr>
+                      <a:r>
+                        <a:rPr lang="en-US" sz="1050" dirty="0">
+                          <a:solidFill>
+                            <a:srgbClr val="1B2733"/>
+                          </a:solidFill>
+                          <a:latin typeface="Arial" pitchFamily="34" charset="0"/>
+                          <a:ea typeface="Arial" pitchFamily="34" charset="-122"/>
+                          <a:cs typeface="Arial" pitchFamily="34" charset="-120"/>
+                        </a:rPr>
+                        <a:t>51%</a:t>
+                      </a:r>
+                      <a:endParaRPr lang="en-US" sz="1050" dirty="0">
+                        <a:latin typeface="Arial" charset="0"/>
+                        <a:ea typeface="Arial" charset="0"/>
+                        <a:cs typeface="Arial" charset="0"/>
+                      </a:endParaRPr>
+                    </a:p>
+                  </a:txBody>
+                  <a:tcPr marL="73152" marR="73152" marT="36576" marB="36576" anchor="ctr">
+                    <a:lnL w="9525" cap="flat" cmpd="sng" algn="ctr">
+                      <a:solidFill>
+                        <a:srgbClr val="C9D4DD"/>
+                      </a:solidFill>
+                      <a:prstDash val="solid"/>
+                      <a:round/>
+                      <a:headEnd type="none" w="med" len="med"/>
+                      <a:tailEnd type="none" w="med" len="med"/>
+                    </a:lnL>
+                    <a:lnR w="9525" cap="flat" cmpd="sng" algn="ctr">
+                      <a:solidFill>
+                        <a:srgbClr val="C9D4DD"/>
+                      </a:solidFill>
+                      <a:prstDash val="solid"/>
+                      <a:round/>
+                      <a:headEnd type="none" w="med" len="med"/>
+                      <a:tailEnd type="none" w="med" len="med"/>
+                    </a:lnR>
+                    <a:lnT w="9525" cap="flat" cmpd="sng" algn="ctr">
+                      <a:solidFill>
+                        <a:srgbClr val="C9D4DD"/>
+                      </a:solidFill>
+                      <a:prstDash val="solid"/>
+                      <a:round/>
+                      <a:headEnd type="none" w="med" len="med"/>
+                      <a:tailEnd type="none" w="med" len="med"/>
+                    </a:lnT>
+                    <a:lnB w="9525" cap="flat" cmpd="sng" algn="ctr">
+                      <a:solidFill>
+                        <a:srgbClr val="C9D4DD"/>
+                      </a:solidFill>
+                      <a:prstDash val="solid"/>
+                      <a:round/>
+                      <a:headEnd type="none" w="med" len="med"/>
+                      <a:tailEnd type="none" w="med" len="med"/>
+                    </a:lnB>
+                    <a:solidFill>
+                      <a:srgbClr val="FFFFFF"/>
+                    </a:solidFill>
+                  </a:tcPr>
+                </a:tc>
+                <a:tc>
+                  <a:txBody>
+                    <a:bodyPr/>
+                    <a:lstStyle/>
+                    <a:p>
+                      <a:pPr algn="l" indent="0" marL="0">
+                        <a:buNone/>
+                      </a:pPr>
+                      <a:r>
+                        <a:rPr lang="en-US" sz="1050" dirty="0">
+                          <a:solidFill>
+                            <a:srgbClr val="1B2733"/>
+                          </a:solidFill>
+                          <a:latin typeface="Arial" pitchFamily="34" charset="0"/>
+                          <a:ea typeface="Arial" pitchFamily="34" charset="-122"/>
+                          <a:cs typeface="Arial" pitchFamily="34" charset="-120"/>
+                        </a:rPr>
+                        <a:t>49%</a:t>
+                      </a:r>
+                      <a:endParaRPr lang="en-US" sz="1050" dirty="0">
+                        <a:latin typeface="Arial" charset="0"/>
+                        <a:ea typeface="Arial" charset="0"/>
+                        <a:cs typeface="Arial" charset="0"/>
+                      </a:endParaRPr>
+                    </a:p>
+                  </a:txBody>
+                  <a:tcPr marL="73152" marR="73152" marT="36576" marB="36576" anchor="ctr">
+                    <a:lnL w="9525" cap="flat" cmpd="sng" algn="ctr">
+                      <a:solidFill>
+                        <a:srgbClr val="C9D4DD"/>
+                      </a:solidFill>
+                      <a:prstDash val="solid"/>
+                      <a:round/>
+                      <a:headEnd type="none" w="med" len="med"/>
+                      <a:tailEnd type="none" w="med" len="med"/>
+                    </a:lnL>
+                    <a:lnR w="9525" cap="flat" cmpd="sng" algn="ctr">
+                      <a:solidFill>
+                        <a:srgbClr val="C9D4DD"/>
+                      </a:solidFill>
+                      <a:prstDash val="solid"/>
+                      <a:round/>
+                      <a:headEnd type="none" w="med" len="med"/>
+                      <a:tailEnd type="none" w="med" len="med"/>
+                    </a:lnR>
+                    <a:lnT w="9525" cap="flat" cmpd="sng" algn="ctr">
+                      <a:solidFill>
+                        <a:srgbClr val="C9D4DD"/>
+                      </a:solidFill>
+                      <a:prstDash val="solid"/>
+                      <a:round/>
+                      <a:headEnd type="none" w="med" len="med"/>
+                      <a:tailEnd type="none" w="med" len="med"/>
+                    </a:lnT>
+                    <a:lnB w="9525" cap="flat" cmpd="sng" algn="ctr">
+                      <a:solidFill>
+                        <a:srgbClr val="C9D4DD"/>
+                      </a:solidFill>
+                      <a:prstDash val="solid"/>
+                      <a:round/>
+                      <a:headEnd type="none" w="med" len="med"/>
+                      <a:tailEnd type="none" w="med" len="med"/>
+                    </a:lnB>
+                    <a:solidFill>
+                      <a:srgbClr val="FFFFFF"/>
+                    </a:solidFill>
+                  </a:tcPr>
+                </a:tc>
+                <a:tc>
+                  <a:txBody>
+                    <a:bodyPr/>
+                    <a:lstStyle/>
+                    <a:p>
+                      <a:pPr algn="l" indent="0" marL="0">
+                        <a:buNone/>
+                      </a:pPr>
+                      <a:r>
+                        <a:rPr lang="en-US" sz="1050" dirty="0">
+                          <a:solidFill>
+                            <a:srgbClr val="1B2733"/>
+                          </a:solidFill>
+                          <a:latin typeface="Arial" pitchFamily="34" charset="0"/>
+                          <a:ea typeface="Arial" pitchFamily="34" charset="-122"/>
+                          <a:cs typeface="Arial" pitchFamily="34" charset="-120"/>
+                        </a:rPr>
+                        <a:t>1,293%</a:t>
+                      </a:r>
+                      <a:endParaRPr lang="en-US" sz="1050" dirty="0">
+                        <a:latin typeface="Arial" charset="0"/>
+                        <a:ea typeface="Arial" charset="0"/>
+                        <a:cs typeface="Arial" charset="0"/>
+                      </a:endParaRPr>
+                    </a:p>
+                  </a:txBody>
+                  <a:tcPr marL="73152" marR="73152" marT="36576" marB="36576" anchor="ctr">
+                    <a:lnL w="9525" cap="flat" cmpd="sng" algn="ctr">
+                      <a:solidFill>
+                        <a:srgbClr val="C9D4DD"/>
+                      </a:solidFill>
+                      <a:prstDash val="solid"/>
+                      <a:round/>
+                      <a:headEnd type="none" w="med" len="med"/>
+                      <a:tailEnd type="none" w="med" len="med"/>
+                    </a:lnL>
+                    <a:lnR w="9525" cap="flat" cmpd="sng" algn="ctr">
+                      <a:solidFill>
+                        <a:srgbClr val="C9D4DD"/>
+                      </a:solidFill>
+                      <a:prstDash val="solid"/>
+                      <a:round/>
+                      <a:headEnd type="none" w="med" len="med"/>
+                      <a:tailEnd type="none" w="med" len="med"/>
+                    </a:lnR>
+                    <a:lnT w="9525" cap="flat" cmpd="sng" algn="ctr">
+                      <a:solidFill>
+                        <a:srgbClr val="C9D4DD"/>
+                      </a:solidFill>
+                      <a:prstDash val="solid"/>
+                      <a:round/>
+                      <a:headEnd type="none" w="med" len="med"/>
+                      <a:tailEnd type="none" w="med" len="med"/>
+                    </a:lnT>
+                    <a:lnB w="9525" cap="flat" cmpd="sng" algn="ctr">
+                      <a:solidFill>
+                        <a:srgbClr val="C9D4DD"/>
+                      </a:solidFill>
+                      <a:prstDash val="solid"/>
+                      <a:round/>
+                      <a:headEnd type="none" w="med" len="med"/>
+                      <a:tailEnd type="none" w="med" len="med"/>
+                    </a:lnB>
+                    <a:solidFill>
+                      <a:srgbClr val="FFFFFF"/>
+                    </a:solidFill>
+                  </a:tcPr>
+                </a:tc>
+              </a:tr>
+              <a:tr h="420624">
+                <a:tc>
+                  <a:txBody>
+                    <a:bodyPr/>
+                    <a:lstStyle/>
+                    <a:p>
+                      <a:pPr algn="l" indent="0" marL="0">
+                        <a:buNone/>
+                      </a:pPr>
+                      <a:r>
+                        <a:rPr lang="en-US" sz="1050" dirty="0">
+                          <a:solidFill>
+                            <a:srgbClr val="1B2733"/>
+                          </a:solidFill>
+                          <a:latin typeface="Arial" pitchFamily="34" charset="0"/>
+                          <a:ea typeface="Arial" pitchFamily="34" charset="-122"/>
+                          <a:cs typeface="Arial" pitchFamily="34" charset="-120"/>
+                        </a:rPr>
+                        <a:t>HGB169</a:t>
+                      </a:r>
+                      <a:endParaRPr lang="en-US" sz="1050" dirty="0">
+                        <a:latin typeface="Arial" charset="0"/>
+                        <a:ea typeface="Arial" charset="0"/>
+                        <a:cs typeface="Arial" charset="0"/>
+                      </a:endParaRPr>
+                    </a:p>
+                  </a:txBody>
+                  <a:tcPr marL="73152" marR="73152" marT="36576" marB="36576" anchor="ctr">
+                    <a:lnL w="9525" cap="flat" cmpd="sng" algn="ctr">
+                      <a:solidFill>
+                        <a:srgbClr val="C9D4DD"/>
+                      </a:solidFill>
+                      <a:prstDash val="solid"/>
+                      <a:round/>
+                      <a:headEnd type="none" w="med" len="med"/>
+                      <a:tailEnd type="none" w="med" len="med"/>
+                    </a:lnL>
+                    <a:lnR w="9525" cap="flat" cmpd="sng" algn="ctr">
+                      <a:solidFill>
+                        <a:srgbClr val="C9D4DD"/>
+                      </a:solidFill>
+                      <a:prstDash val="solid"/>
+                      <a:round/>
+                      <a:headEnd type="none" w="med" len="med"/>
+                      <a:tailEnd type="none" w="med" len="med"/>
+                    </a:lnR>
+                    <a:lnT w="9525" cap="flat" cmpd="sng" algn="ctr">
+                      <a:solidFill>
+                        <a:srgbClr val="C9D4DD"/>
+                      </a:solidFill>
+                      <a:prstDash val="solid"/>
+                      <a:round/>
+                      <a:headEnd type="none" w="med" len="med"/>
+                      <a:tailEnd type="none" w="med" len="med"/>
+                    </a:lnT>
+                    <a:lnB w="9525" cap="flat" cmpd="sng" algn="ctr">
+                      <a:solidFill>
+                        <a:srgbClr val="C9D4DD"/>
+                      </a:solidFill>
+                      <a:prstDash val="solid"/>
+                      <a:round/>
+                      <a:headEnd type="none" w="med" len="med"/>
+                      <a:tailEnd type="none" w="med" len="med"/>
+                    </a:lnB>
+                    <a:solidFill>
+                      <a:srgbClr val="EEF3F6"/>
+                    </a:solidFill>
+                  </a:tcPr>
+                </a:tc>
+                <a:tc>
+                  <a:txBody>
+                    <a:bodyPr/>
+                    <a:lstStyle/>
+                    <a:p>
+                      <a:pPr algn="l" indent="0" marL="0">
+                        <a:buNone/>
+                      </a:pPr>
+                      <a:r>
+                        <a:rPr lang="en-US" sz="1050" dirty="0">
+                          <a:solidFill>
+                            <a:srgbClr val="1B2733"/>
+                          </a:solidFill>
+                          <a:latin typeface="Arial" pitchFamily="34" charset="0"/>
+                          <a:ea typeface="Arial" pitchFamily="34" charset="-122"/>
+                          <a:cs typeface="Arial" pitchFamily="34" charset="-120"/>
+                        </a:rPr>
+                        <a:t>30</a:t>
+                      </a:r>
+                      <a:endParaRPr lang="en-US" sz="1050" dirty="0">
+                        <a:latin typeface="Arial" charset="0"/>
+                        <a:ea typeface="Arial" charset="0"/>
+                        <a:cs typeface="Arial" charset="0"/>
+                      </a:endParaRPr>
+                    </a:p>
+                  </a:txBody>
+                  <a:tcPr marL="73152" marR="73152" marT="36576" marB="36576" anchor="ctr">
+                    <a:lnL w="9525" cap="flat" cmpd="sng" algn="ctr">
+                      <a:solidFill>
+                        <a:srgbClr val="C9D4DD"/>
+                      </a:solidFill>
+                      <a:prstDash val="solid"/>
+                      <a:round/>
+                      <a:headEnd type="none" w="med" len="med"/>
+                      <a:tailEnd type="none" w="med" len="med"/>
+                    </a:lnL>
+                    <a:lnR w="9525" cap="flat" cmpd="sng" algn="ctr">
+                      <a:solidFill>
+                        <a:srgbClr val="C9D4DD"/>
+                      </a:solidFill>
+                      <a:prstDash val="solid"/>
+                      <a:round/>
+                      <a:headEnd type="none" w="med" len="med"/>
+                      <a:tailEnd type="none" w="med" len="med"/>
+                    </a:lnR>
+                    <a:lnT w="9525" cap="flat" cmpd="sng" algn="ctr">
+                      <a:solidFill>
+                        <a:srgbClr val="C9D4DD"/>
+                      </a:solidFill>
+                      <a:prstDash val="solid"/>
+                      <a:round/>
+                      <a:headEnd type="none" w="med" len="med"/>
+                      <a:tailEnd type="none" w="med" len="med"/>
+                    </a:lnT>
+                    <a:lnB w="9525" cap="flat" cmpd="sng" algn="ctr">
+                      <a:solidFill>
+                        <a:srgbClr val="C9D4DD"/>
+                      </a:solidFill>
+                      <a:prstDash val="solid"/>
+                      <a:round/>
+                      <a:headEnd type="none" w="med" len="med"/>
+                      <a:tailEnd type="none" w="med" len="med"/>
+                    </a:lnB>
+                    <a:solidFill>
+                      <a:srgbClr val="EEF3F6"/>
+                    </a:solidFill>
+                  </a:tcPr>
+                </a:tc>
+                <a:tc>
+                  <a:txBody>
+                    <a:bodyPr/>
+                    <a:lstStyle/>
+                    <a:p>
+                      <a:pPr algn="l" indent="0" marL="0">
+                        <a:buNone/>
+                      </a:pPr>
+                      <a:r>
+                        <a:rPr lang="en-US" sz="1050" dirty="0">
+                          <a:solidFill>
+                            <a:srgbClr val="1B2733"/>
+                          </a:solidFill>
+                          <a:latin typeface="Arial" pitchFamily="34" charset="0"/>
+                          <a:ea typeface="Arial" pitchFamily="34" charset="-122"/>
+                          <a:cs typeface="Arial" pitchFamily="34" charset="-120"/>
+                        </a:rPr>
+                        <a:t>45%</a:t>
+                      </a:r>
+                      <a:endParaRPr lang="en-US" sz="1050" dirty="0">
+                        <a:latin typeface="Arial" charset="0"/>
+                        <a:ea typeface="Arial" charset="0"/>
+                        <a:cs typeface="Arial" charset="0"/>
+                      </a:endParaRPr>
+                    </a:p>
+                  </a:txBody>
+                  <a:tcPr marL="73152" marR="73152" marT="36576" marB="36576" anchor="ctr">
+                    <a:lnL w="9525" cap="flat" cmpd="sng" algn="ctr">
+                      <a:solidFill>
+                        <a:srgbClr val="C9D4DD"/>
+                      </a:solidFill>
+                      <a:prstDash val="solid"/>
+                      <a:round/>
+                      <a:headEnd type="none" w="med" len="med"/>
+                      <a:tailEnd type="none" w="med" len="med"/>
+                    </a:lnL>
+                    <a:lnR w="9525" cap="flat" cmpd="sng" algn="ctr">
+                      <a:solidFill>
+                        <a:srgbClr val="C9D4DD"/>
+                      </a:solidFill>
+                      <a:prstDash val="solid"/>
+                      <a:round/>
+                      <a:headEnd type="none" w="med" len="med"/>
+                      <a:tailEnd type="none" w="med" len="med"/>
+                    </a:lnR>
+                    <a:lnT w="9525" cap="flat" cmpd="sng" algn="ctr">
+                      <a:solidFill>
+                        <a:srgbClr val="C9D4DD"/>
+                      </a:solidFill>
+                      <a:prstDash val="solid"/>
+                      <a:round/>
+                      <a:headEnd type="none" w="med" len="med"/>
+                      <a:tailEnd type="none" w="med" len="med"/>
+                    </a:lnT>
+                    <a:lnB w="9525" cap="flat" cmpd="sng" algn="ctr">
+                      <a:solidFill>
+                        <a:srgbClr val="C9D4DD"/>
+                      </a:solidFill>
+                      <a:prstDash val="solid"/>
+                      <a:round/>
+                      <a:headEnd type="none" w="med" len="med"/>
+                      <a:tailEnd type="none" w="med" len="med"/>
+                    </a:lnB>
+                    <a:solidFill>
+                      <a:srgbClr val="EEF3F6"/>
+                    </a:solidFill>
+                  </a:tcPr>
+                </a:tc>
+                <a:tc>
+                  <a:txBody>
+                    <a:bodyPr/>
+                    <a:lstStyle/>
+                    <a:p>
+                      <a:pPr algn="l" indent="0" marL="0">
+                        <a:buNone/>
+                      </a:pPr>
+                      <a:r>
+                        <a:rPr lang="en-US" sz="1050" dirty="0">
+                          <a:solidFill>
+                            <a:srgbClr val="1B2733"/>
+                          </a:solidFill>
+                          <a:latin typeface="Arial" pitchFamily="34" charset="0"/>
+                          <a:ea typeface="Arial" pitchFamily="34" charset="-122"/>
+                          <a:cs typeface="Arial" pitchFamily="34" charset="-120"/>
+                        </a:rPr>
+                        <a:t>55%</a:t>
+                      </a:r>
+                      <a:endParaRPr lang="en-US" sz="1050" dirty="0">
+                        <a:latin typeface="Arial" charset="0"/>
+                        <a:ea typeface="Arial" charset="0"/>
+                        <a:cs typeface="Arial" charset="0"/>
+                      </a:endParaRPr>
+                    </a:p>
+                  </a:txBody>
+                  <a:tcPr marL="73152" marR="73152" marT="36576" marB="36576" anchor="ctr">
+                    <a:lnL w="9525" cap="flat" cmpd="sng" algn="ctr">
+                      <a:solidFill>
+                        <a:srgbClr val="C9D4DD"/>
+                      </a:solidFill>
+                      <a:prstDash val="solid"/>
+                      <a:round/>
+                      <a:headEnd type="none" w="med" len="med"/>
+                      <a:tailEnd type="none" w="med" len="med"/>
+                    </a:lnL>
+                    <a:lnR w="9525" cap="flat" cmpd="sng" algn="ctr">
+                      <a:solidFill>
+                        <a:srgbClr val="C9D4DD"/>
+                      </a:solidFill>
+                      <a:prstDash val="solid"/>
+                      <a:round/>
+                      <a:headEnd type="none" w="med" len="med"/>
+                      <a:tailEnd type="none" w="med" len="med"/>
+                    </a:lnR>
+                    <a:lnT w="9525" cap="flat" cmpd="sng" algn="ctr">
+                      <a:solidFill>
+                        <a:srgbClr val="C9D4DD"/>
+                      </a:solidFill>
+                      <a:prstDash val="solid"/>
+                      <a:round/>
+                      <a:headEnd type="none" w="med" len="med"/>
+                      <a:tailEnd type="none" w="med" len="med"/>
+                    </a:lnT>
+                    <a:lnB w="9525" cap="flat" cmpd="sng" algn="ctr">
+                      <a:solidFill>
+                        <a:srgbClr val="C9D4DD"/>
+                      </a:solidFill>
+                      <a:prstDash val="solid"/>
+                      <a:round/>
+                      <a:headEnd type="none" w="med" len="med"/>
+                      <a:tailEnd type="none" w="med" len="med"/>
+                    </a:lnB>
+                    <a:solidFill>
+                      <a:srgbClr val="EEF3F6"/>
+                    </a:solidFill>
+                  </a:tcPr>
+                </a:tc>
+                <a:tc>
+                  <a:txBody>
+                    <a:bodyPr/>
+                    <a:lstStyle/>
+                    <a:p>
+                      <a:pPr algn="l" indent="0" marL="0">
+                        <a:buNone/>
+                      </a:pPr>
+                      <a:r>
+                        <a:rPr lang="en-US" sz="1050" dirty="0">
+                          <a:solidFill>
+                            <a:srgbClr val="1B2733"/>
+                          </a:solidFill>
+                          <a:latin typeface="Arial" pitchFamily="34" charset="0"/>
+                          <a:ea typeface="Arial" pitchFamily="34" charset="-122"/>
+                          <a:cs typeface="Arial" pitchFamily="34" charset="-120"/>
+                        </a:rPr>
+                        <a:t>1,070%</a:t>
+                      </a:r>
+                      <a:endParaRPr lang="en-US" sz="1050" dirty="0">
+                        <a:latin typeface="Arial" charset="0"/>
+                        <a:ea typeface="Arial" charset="0"/>
+                        <a:cs typeface="Arial" charset="0"/>
+                      </a:endParaRPr>
+                    </a:p>
+                  </a:txBody>
+                  <a:tcPr marL="73152" marR="73152" marT="36576" marB="36576" anchor="ctr">
+                    <a:lnL w="9525" cap="flat" cmpd="sng" algn="ctr">
+                      <a:solidFill>
+                        <a:srgbClr val="C9D4DD"/>
+                      </a:solidFill>
+                      <a:prstDash val="solid"/>
+                      <a:round/>
+                      <a:headEnd type="none" w="med" len="med"/>
+                      <a:tailEnd type="none" w="med" len="med"/>
+                    </a:lnL>
+                    <a:lnR w="9525" cap="flat" cmpd="sng" algn="ctr">
+                      <a:solidFill>
+                        <a:srgbClr val="C9D4DD"/>
+                      </a:solidFill>
+                      <a:prstDash val="solid"/>
+                      <a:round/>
+                      <a:headEnd type="none" w="med" len="med"/>
+                      <a:tailEnd type="none" w="med" len="med"/>
+                    </a:lnR>
+                    <a:lnT w="9525" cap="flat" cmpd="sng" algn="ctr">
+                      <a:solidFill>
+                        <a:srgbClr val="C9D4DD"/>
+                      </a:solidFill>
+                      <a:prstDash val="solid"/>
+                      <a:round/>
+                      <a:headEnd type="none" w="med" len="med"/>
+                      <a:tailEnd type="none" w="med" len="med"/>
+                    </a:lnT>
+                    <a:lnB w="9525" cap="flat" cmpd="sng" algn="ctr">
+                      <a:solidFill>
+                        <a:srgbClr val="C9D4DD"/>
+                      </a:solidFill>
+                      <a:prstDash val="solid"/>
+                      <a:round/>
+                      <a:headEnd type="none" w="med" len="med"/>
+                      <a:tailEnd type="none" w="med" len="med"/>
+                    </a:lnB>
+                    <a:solidFill>
+                      <a:srgbClr val="EEF3F6"/>
+                    </a:solidFill>
+                  </a:tcPr>
+                </a:tc>
+              </a:tr>
+              <a:tr h="420624">
+                <a:tc>
+                  <a:txBody>
+                    <a:bodyPr/>
+                    <a:lstStyle/>
+                    <a:p>
+                      <a:pPr algn="l" indent="0" marL="0">
+                        <a:buNone/>
+                      </a:pPr>
+                      <a:r>
+                        <a:rPr lang="en-US" sz="1050" dirty="0">
+                          <a:solidFill>
+                            <a:srgbClr val="1B2733"/>
+                          </a:solidFill>
+                          <a:latin typeface="Arial" pitchFamily="34" charset="0"/>
+                          <a:ea typeface="Arial" pitchFamily="34" charset="-122"/>
+                          <a:cs typeface="Arial" pitchFamily="34" charset="-120"/>
+                        </a:rPr>
+                        <a:t>HGB126</a:t>
+                      </a:r>
+                      <a:endParaRPr lang="en-US" sz="1050" dirty="0">
+                        <a:latin typeface="Arial" charset="0"/>
+                        <a:ea typeface="Arial" charset="0"/>
+                        <a:cs typeface="Arial" charset="0"/>
+                      </a:endParaRPr>
+                    </a:p>
+                  </a:txBody>
+                  <a:tcPr marL="73152" marR="73152" marT="36576" marB="36576" anchor="ctr">
+                    <a:lnL w="9525" cap="flat" cmpd="sng" algn="ctr">
+                      <a:solidFill>
+                        <a:srgbClr val="C9D4DD"/>
+                      </a:solidFill>
+                      <a:prstDash val="solid"/>
+                      <a:round/>
+                      <a:headEnd type="none" w="med" len="med"/>
+                      <a:tailEnd type="none" w="med" len="med"/>
+                    </a:lnL>
+                    <a:lnR w="9525" cap="flat" cmpd="sng" algn="ctr">
+                      <a:solidFill>
+                        <a:srgbClr val="C9D4DD"/>
+                      </a:solidFill>
+                      <a:prstDash val="solid"/>
+                      <a:round/>
+                      <a:headEnd type="none" w="med" len="med"/>
+                      <a:tailEnd type="none" w="med" len="med"/>
+                    </a:lnR>
+                    <a:lnT w="9525" cap="flat" cmpd="sng" algn="ctr">
+                      <a:solidFill>
+                        <a:srgbClr val="C9D4DD"/>
+                      </a:solidFill>
+                      <a:prstDash val="solid"/>
+                      <a:round/>
+                      <a:headEnd type="none" w="med" len="med"/>
+                      <a:tailEnd type="none" w="med" len="med"/>
+                    </a:lnT>
+                    <a:lnB w="9525" cap="flat" cmpd="sng" algn="ctr">
+                      <a:solidFill>
+                        <a:srgbClr val="C9D4DD"/>
+                      </a:solidFill>
+                      <a:prstDash val="solid"/>
+                      <a:round/>
+                      <a:headEnd type="none" w="med" len="med"/>
+                      <a:tailEnd type="none" w="med" len="med"/>
+                    </a:lnB>
+                    <a:solidFill>
+                      <a:srgbClr val="FFFFFF"/>
+                    </a:solidFill>
+                  </a:tcPr>
+                </a:tc>
+                <a:tc>
+                  <a:txBody>
+                    <a:bodyPr/>
+                    <a:lstStyle/>
+                    <a:p>
+                      <a:pPr algn="l" indent="0" marL="0">
+                        <a:buNone/>
+                      </a:pPr>
+                      <a:r>
+                        <a:rPr lang="en-US" sz="1050" dirty="0">
+                          <a:solidFill>
+                            <a:srgbClr val="1B2733"/>
+                          </a:solidFill>
+                          <a:latin typeface="Arial" pitchFamily="34" charset="0"/>
+                          <a:ea typeface="Arial" pitchFamily="34" charset="-122"/>
+                          <a:cs typeface="Arial" pitchFamily="34" charset="-120"/>
+                        </a:rPr>
+                        <a:t>40</a:t>
+                      </a:r>
+                      <a:endParaRPr lang="en-US" sz="1050" dirty="0">
+                        <a:latin typeface="Arial" charset="0"/>
+                        <a:ea typeface="Arial" charset="0"/>
+                        <a:cs typeface="Arial" charset="0"/>
+                      </a:endParaRPr>
+                    </a:p>
+                  </a:txBody>
+                  <a:tcPr marL="73152" marR="73152" marT="36576" marB="36576" anchor="ctr">
+                    <a:lnL w="9525" cap="flat" cmpd="sng" algn="ctr">
+                      <a:solidFill>
+                        <a:srgbClr val="C9D4DD"/>
+                      </a:solidFill>
+                      <a:prstDash val="solid"/>
+                      <a:round/>
+                      <a:headEnd type="none" w="med" len="med"/>
+                      <a:tailEnd type="none" w="med" len="med"/>
+                    </a:lnL>
+                    <a:lnR w="9525" cap="flat" cmpd="sng" algn="ctr">
+                      <a:solidFill>
+                        <a:srgbClr val="C9D4DD"/>
+                      </a:solidFill>
+                      <a:prstDash val="solid"/>
+                      <a:round/>
+                      <a:headEnd type="none" w="med" len="med"/>
+                      <a:tailEnd type="none" w="med" len="med"/>
+                    </a:lnR>
+                    <a:lnT w="9525" cap="flat" cmpd="sng" algn="ctr">
+                      <a:solidFill>
+                        <a:srgbClr val="C9D4DD"/>
+                      </a:solidFill>
+                      <a:prstDash val="solid"/>
+                      <a:round/>
+                      <a:headEnd type="none" w="med" len="med"/>
+                      <a:tailEnd type="none" w="med" len="med"/>
+                    </a:lnT>
+                    <a:lnB w="9525" cap="flat" cmpd="sng" algn="ctr">
+                      <a:solidFill>
+                        <a:srgbClr val="C9D4DD"/>
+                      </a:solidFill>
+                      <a:prstDash val="solid"/>
+                      <a:round/>
+                      <a:headEnd type="none" w="med" len="med"/>
+                      <a:tailEnd type="none" w="med" len="med"/>
+                    </a:lnB>
+                    <a:solidFill>
+                      <a:srgbClr val="FFFFFF"/>
+                    </a:solidFill>
+                  </a:tcPr>
+                </a:tc>
+                <a:tc>
+                  <a:txBody>
+                    <a:bodyPr/>
+                    <a:lstStyle/>
+                    <a:p>
+                      <a:pPr algn="l" indent="0" marL="0">
+                        <a:buNone/>
+                      </a:pPr>
+                      <a:r>
+                        <a:rPr lang="en-US" sz="1050" dirty="0">
+                          <a:solidFill>
+                            <a:srgbClr val="1B2733"/>
+                          </a:solidFill>
+                          <a:latin typeface="Arial" pitchFamily="34" charset="0"/>
+                          <a:ea typeface="Arial" pitchFamily="34" charset="-122"/>
+                          <a:cs typeface="Arial" pitchFamily="34" charset="-120"/>
+                        </a:rPr>
+                        <a:t>94%</a:t>
+                      </a:r>
+                      <a:endParaRPr lang="en-US" sz="1050" dirty="0">
+                        <a:latin typeface="Arial" charset="0"/>
+                        <a:ea typeface="Arial" charset="0"/>
+                        <a:cs typeface="Arial" charset="0"/>
+                      </a:endParaRPr>
+                    </a:p>
+                  </a:txBody>
+                  <a:tcPr marL="73152" marR="73152" marT="36576" marB="36576" anchor="ctr">
+                    <a:lnL w="9525" cap="flat" cmpd="sng" algn="ctr">
+                      <a:solidFill>
+                        <a:srgbClr val="C9D4DD"/>
+                      </a:solidFill>
+                      <a:prstDash val="solid"/>
+                      <a:round/>
+                      <a:headEnd type="none" w="med" len="med"/>
+                      <a:tailEnd type="none" w="med" len="med"/>
+                    </a:lnL>
+                    <a:lnR w="9525" cap="flat" cmpd="sng" algn="ctr">
+                      <a:solidFill>
+                        <a:srgbClr val="C9D4DD"/>
+                      </a:solidFill>
+                      <a:prstDash val="solid"/>
+                      <a:round/>
+                      <a:headEnd type="none" w="med" len="med"/>
+                      <a:tailEnd type="none" w="med" len="med"/>
+                    </a:lnR>
+                    <a:lnT w="9525" cap="flat" cmpd="sng" algn="ctr">
+                      <a:solidFill>
+                        <a:srgbClr val="C9D4DD"/>
+                      </a:solidFill>
+                      <a:prstDash val="solid"/>
+                      <a:round/>
+                      <a:headEnd type="none" w="med" len="med"/>
+                      <a:tailEnd type="none" w="med" len="med"/>
+                    </a:lnT>
+                    <a:lnB w="9525" cap="flat" cmpd="sng" algn="ctr">
+                      <a:solidFill>
+                        <a:srgbClr val="C9D4DD"/>
+                      </a:solidFill>
+                      <a:prstDash val="solid"/>
+                      <a:round/>
+                      <a:headEnd type="none" w="med" len="med"/>
+                      <a:tailEnd type="none" w="med" len="med"/>
+                    </a:lnB>
+                    <a:solidFill>
+                      <a:srgbClr val="FFFFFF"/>
+                    </a:solidFill>
+                  </a:tcPr>
+                </a:tc>
+                <a:tc>
+                  <a:txBody>
+                    <a:bodyPr/>
+                    <a:lstStyle/>
+                    <a:p>
+                      <a:pPr algn="l" indent="0" marL="0">
+                        <a:buNone/>
+                      </a:pPr>
+                      <a:r>
+                        <a:rPr lang="en-US" sz="1050" dirty="0">
+                          <a:solidFill>
+                            <a:srgbClr val="1B2733"/>
+                          </a:solidFill>
+                          <a:latin typeface="Arial" pitchFamily="34" charset="0"/>
+                          <a:ea typeface="Arial" pitchFamily="34" charset="-122"/>
+                          <a:cs typeface="Arial" pitchFamily="34" charset="-120"/>
+                        </a:rPr>
+                        <a:t>6%</a:t>
+                      </a:r>
+                      <a:endParaRPr lang="en-US" sz="1050" dirty="0">
+                        <a:latin typeface="Arial" charset="0"/>
+                        <a:ea typeface="Arial" charset="0"/>
+                        <a:cs typeface="Arial" charset="0"/>
+                      </a:endParaRPr>
+                    </a:p>
+                  </a:txBody>
+                  <a:tcPr marL="73152" marR="73152" marT="36576" marB="36576" anchor="ctr">
+                    <a:lnL w="9525" cap="flat" cmpd="sng" algn="ctr">
+                      <a:solidFill>
+                        <a:srgbClr val="C9D4DD"/>
+                      </a:solidFill>
+                      <a:prstDash val="solid"/>
+                      <a:round/>
+                      <a:headEnd type="none" w="med" len="med"/>
+                      <a:tailEnd type="none" w="med" len="med"/>
+                    </a:lnL>
+                    <a:lnR w="9525" cap="flat" cmpd="sng" algn="ctr">
+                      <a:solidFill>
+                        <a:srgbClr val="C9D4DD"/>
+                      </a:solidFill>
+                      <a:prstDash val="solid"/>
+                      <a:round/>
+                      <a:headEnd type="none" w="med" len="med"/>
+                      <a:tailEnd type="none" w="med" len="med"/>
+                    </a:lnR>
+                    <a:lnT w="9525" cap="flat" cmpd="sng" algn="ctr">
+                      <a:solidFill>
+                        <a:srgbClr val="C9D4DD"/>
+                      </a:solidFill>
+                      <a:prstDash val="solid"/>
+                      <a:round/>
+                      <a:headEnd type="none" w="med" len="med"/>
+                      <a:tailEnd type="none" w="med" len="med"/>
+                    </a:lnT>
+                    <a:lnB w="9525" cap="flat" cmpd="sng" algn="ctr">
+                      <a:solidFill>
+                        <a:srgbClr val="C9D4DD"/>
+                      </a:solidFill>
+                      <a:prstDash val="solid"/>
+                      <a:round/>
+                      <a:headEnd type="none" w="med" len="med"/>
+                      <a:tailEnd type="none" w="med" len="med"/>
+                    </a:lnB>
+                    <a:solidFill>
+                      <a:srgbClr val="FFFFFF"/>
+                    </a:solidFill>
+                  </a:tcPr>
+                </a:tc>
+                <a:tc>
+                  <a:txBody>
+                    <a:bodyPr/>
+                    <a:lstStyle/>
+                    <a:p>
+                      <a:pPr algn="l" indent="0" marL="0">
+                        <a:buNone/>
+                      </a:pPr>
+                      <a:r>
+                        <a:rPr lang="en-US" sz="1050" dirty="0">
+                          <a:solidFill>
+                            <a:srgbClr val="1B2733"/>
+                          </a:solidFill>
+                          <a:latin typeface="Arial" pitchFamily="34" charset="0"/>
+                          <a:ea typeface="Arial" pitchFamily="34" charset="-122"/>
+                          <a:cs typeface="Arial" pitchFamily="34" charset="-120"/>
+                        </a:rPr>
+                        <a:t>5,329%</a:t>
+                      </a:r>
+                      <a:endParaRPr lang="en-US" sz="1050" dirty="0">
+                        <a:latin typeface="Arial" charset="0"/>
+                        <a:ea typeface="Arial" charset="0"/>
+                        <a:cs typeface="Arial" charset="0"/>
+                      </a:endParaRPr>
+                    </a:p>
+                  </a:txBody>
+                  <a:tcPr marL="73152" marR="73152" marT="36576" marB="36576" anchor="ctr">
+                    <a:lnL w="9525" cap="flat" cmpd="sng" algn="ctr">
+                      <a:solidFill>
+                        <a:srgbClr val="C9D4DD"/>
+                      </a:solidFill>
+                      <a:prstDash val="solid"/>
+                      <a:round/>
+                      <a:headEnd type="none" w="med" len="med"/>
+                      <a:tailEnd type="none" w="med" len="med"/>
+                    </a:lnL>
+                    <a:lnR w="9525" cap="flat" cmpd="sng" algn="ctr">
+                      <a:solidFill>
+                        <a:srgbClr val="C9D4DD"/>
+                      </a:solidFill>
+                      <a:prstDash val="solid"/>
+                      <a:round/>
+                      <a:headEnd type="none" w="med" len="med"/>
+                      <a:tailEnd type="none" w="med" len="med"/>
+                    </a:lnR>
+                    <a:lnT w="9525" cap="flat" cmpd="sng" algn="ctr">
+                      <a:solidFill>
+                        <a:srgbClr val="C9D4DD"/>
+                      </a:solidFill>
+                      <a:prstDash val="solid"/>
+                      <a:round/>
+                      <a:headEnd type="none" w="med" len="med"/>
+                      <a:tailEnd type="none" w="med" len="med"/>
+                    </a:lnT>
+                    <a:lnB w="9525" cap="flat" cmpd="sng" algn="ctr">
+                      <a:solidFill>
+                        <a:srgbClr val="C9D4DD"/>
+                      </a:solidFill>
+                      <a:prstDash val="solid"/>
+                      <a:round/>
+                      <a:headEnd type="none" w="med" len="med"/>
+                      <a:tailEnd type="none" w="med" len="med"/>
+                    </a:lnB>
+                    <a:solidFill>
+                      <a:srgbClr val="FFFFFF"/>
+                    </a:solidFill>
+                  </a:tcPr>
+                </a:tc>
+              </a:tr>
+              <a:tr h="420624">
+                <a:tc>
+                  <a:txBody>
+                    <a:bodyPr/>
+                    <a:lstStyle/>
+                    <a:p>
+                      <a:pPr algn="l" indent="0" marL="0">
+                        <a:buNone/>
+                      </a:pPr>
+                      <a:r>
+                        <a:rPr lang="en-US" sz="1050" dirty="0">
+                          <a:solidFill>
+                            <a:srgbClr val="1B2733"/>
+                          </a:solidFill>
+                          <a:latin typeface="Arial" pitchFamily="34" charset="0"/>
+                          <a:ea typeface="Arial" pitchFamily="34" charset="-122"/>
+                          <a:cs typeface="Arial" pitchFamily="34" charset="-120"/>
+                        </a:rPr>
+                        <a:t>HGB169</a:t>
+                      </a:r>
+                      <a:endParaRPr lang="en-US" sz="1050" dirty="0">
+                        <a:latin typeface="Arial" charset="0"/>
+                        <a:ea typeface="Arial" charset="0"/>
+                        <a:cs typeface="Arial" charset="0"/>
+                      </a:endParaRPr>
+                    </a:p>
+                  </a:txBody>
+                  <a:tcPr marL="73152" marR="73152" marT="36576" marB="36576" anchor="ctr">
+                    <a:lnL w="9525" cap="flat" cmpd="sng" algn="ctr">
+                      <a:solidFill>
+                        <a:srgbClr val="C9D4DD"/>
+                      </a:solidFill>
+                      <a:prstDash val="solid"/>
+                      <a:round/>
+                      <a:headEnd type="none" w="med" len="med"/>
+                      <a:tailEnd type="none" w="med" len="med"/>
+                    </a:lnL>
+                    <a:lnR w="9525" cap="flat" cmpd="sng" algn="ctr">
+                      <a:solidFill>
+                        <a:srgbClr val="C9D4DD"/>
+                      </a:solidFill>
+                      <a:prstDash val="solid"/>
+                      <a:round/>
+                      <a:headEnd type="none" w="med" len="med"/>
+                      <a:tailEnd type="none" w="med" len="med"/>
+                    </a:lnR>
+                    <a:lnT w="9525" cap="flat" cmpd="sng" algn="ctr">
+                      <a:solidFill>
+                        <a:srgbClr val="C9D4DD"/>
+                      </a:solidFill>
+                      <a:prstDash val="solid"/>
+                      <a:round/>
+                      <a:headEnd type="none" w="med" len="med"/>
+                      <a:tailEnd type="none" w="med" len="med"/>
+                    </a:lnT>
+                    <a:lnB w="9525" cap="flat" cmpd="sng" algn="ctr">
+                      <a:solidFill>
+                        <a:srgbClr val="C9D4DD"/>
+                      </a:solidFill>
+                      <a:prstDash val="solid"/>
+                      <a:round/>
+                      <a:headEnd type="none" w="med" len="med"/>
+                      <a:tailEnd type="none" w="med" len="med"/>
+                    </a:lnB>
+                    <a:solidFill>
+                      <a:srgbClr val="EEF3F6"/>
+                    </a:solidFill>
+                  </a:tcPr>
+                </a:tc>
+                <a:tc>
+                  <a:txBody>
+                    <a:bodyPr/>
+                    <a:lstStyle/>
+                    <a:p>
+                      <a:pPr algn="l" indent="0" marL="0">
+                        <a:buNone/>
+                      </a:pPr>
+                      <a:r>
+                        <a:rPr lang="en-US" sz="1050" dirty="0">
+                          <a:solidFill>
+                            <a:srgbClr val="1B2733"/>
+                          </a:solidFill>
+                          <a:latin typeface="Arial" pitchFamily="34" charset="0"/>
+                          <a:ea typeface="Arial" pitchFamily="34" charset="-122"/>
+                          <a:cs typeface="Arial" pitchFamily="34" charset="-120"/>
+                        </a:rPr>
+                        <a:t>40</a:t>
+                      </a:r>
+                      <a:endParaRPr lang="en-US" sz="1050" dirty="0">
+                        <a:latin typeface="Arial" charset="0"/>
+                        <a:ea typeface="Arial" charset="0"/>
+                        <a:cs typeface="Arial" charset="0"/>
+                      </a:endParaRPr>
+                    </a:p>
+                  </a:txBody>
+                  <a:tcPr marL="73152" marR="73152" marT="36576" marB="36576" anchor="ctr">
+                    <a:lnL w="9525" cap="flat" cmpd="sng" algn="ctr">
+                      <a:solidFill>
+                        <a:srgbClr val="C9D4DD"/>
+                      </a:solidFill>
+                      <a:prstDash val="solid"/>
+                      <a:round/>
+                      <a:headEnd type="none" w="med" len="med"/>
+                      <a:tailEnd type="none" w="med" len="med"/>
+                    </a:lnL>
+                    <a:lnR w="9525" cap="flat" cmpd="sng" algn="ctr">
+                      <a:solidFill>
+                        <a:srgbClr val="C9D4DD"/>
+                      </a:solidFill>
+                      <a:prstDash val="solid"/>
+                      <a:round/>
+                      <a:headEnd type="none" w="med" len="med"/>
+                      <a:tailEnd type="none" w="med" len="med"/>
+                    </a:lnR>
+                    <a:lnT w="9525" cap="flat" cmpd="sng" algn="ctr">
+                      <a:solidFill>
+                        <a:srgbClr val="C9D4DD"/>
+                      </a:solidFill>
+                      <a:prstDash val="solid"/>
+                      <a:round/>
+                      <a:headEnd type="none" w="med" len="med"/>
+                      <a:tailEnd type="none" w="med" len="med"/>
+                    </a:lnT>
+                    <a:lnB w="9525" cap="flat" cmpd="sng" algn="ctr">
+                      <a:solidFill>
+                        <a:srgbClr val="C9D4DD"/>
+                      </a:solidFill>
+                      <a:prstDash val="solid"/>
+                      <a:round/>
+                      <a:headEnd type="none" w="med" len="med"/>
+                      <a:tailEnd type="none" w="med" len="med"/>
+                    </a:lnB>
+                    <a:solidFill>
+                      <a:srgbClr val="EEF3F6"/>
+                    </a:solidFill>
+                  </a:tcPr>
+                </a:tc>
+                <a:tc>
+                  <a:txBody>
+                    <a:bodyPr/>
+                    <a:lstStyle/>
+                    <a:p>
+                      <a:pPr algn="l" indent="0" marL="0">
+                        <a:buNone/>
+                      </a:pPr>
+                      <a:r>
+                        <a:rPr lang="en-US" sz="1050" dirty="0">
+                          <a:solidFill>
+                            <a:srgbClr val="1B2733"/>
+                          </a:solidFill>
+                          <a:latin typeface="Arial" pitchFamily="34" charset="0"/>
+                          <a:ea typeface="Arial" pitchFamily="34" charset="-122"/>
+                          <a:cs typeface="Arial" pitchFamily="34" charset="-120"/>
+                        </a:rPr>
+                        <a:t>96%</a:t>
+                      </a:r>
+                      <a:endParaRPr lang="en-US" sz="1050" dirty="0">
+                        <a:latin typeface="Arial" charset="0"/>
+                        <a:ea typeface="Arial" charset="0"/>
+                        <a:cs typeface="Arial" charset="0"/>
+                      </a:endParaRPr>
+                    </a:p>
+                  </a:txBody>
+                  <a:tcPr marL="73152" marR="73152" marT="36576" marB="36576" anchor="ctr">
+                    <a:lnL w="9525" cap="flat" cmpd="sng" algn="ctr">
+                      <a:solidFill>
+                        <a:srgbClr val="C9D4DD"/>
+                      </a:solidFill>
+                      <a:prstDash val="solid"/>
+                      <a:round/>
+                      <a:headEnd type="none" w="med" len="med"/>
+                      <a:tailEnd type="none" w="med" len="med"/>
+                    </a:lnL>
+                    <a:lnR w="9525" cap="flat" cmpd="sng" algn="ctr">
+                      <a:solidFill>
+                        <a:srgbClr val="C9D4DD"/>
+                      </a:solidFill>
+                      <a:prstDash val="solid"/>
+                      <a:round/>
+                      <a:headEnd type="none" w="med" len="med"/>
+                      <a:tailEnd type="none" w="med" len="med"/>
+                    </a:lnR>
+                    <a:lnT w="9525" cap="flat" cmpd="sng" algn="ctr">
+                      <a:solidFill>
+                        <a:srgbClr val="C9D4DD"/>
+                      </a:solidFill>
+                      <a:prstDash val="solid"/>
+                      <a:round/>
+                      <a:headEnd type="none" w="med" len="med"/>
+                      <a:tailEnd type="none" w="med" len="med"/>
+                    </a:lnT>
+                    <a:lnB w="9525" cap="flat" cmpd="sng" algn="ctr">
+                      <a:solidFill>
+                        <a:srgbClr val="C9D4DD"/>
+                      </a:solidFill>
+                      <a:prstDash val="solid"/>
+                      <a:round/>
+                      <a:headEnd type="none" w="med" len="med"/>
+                      <a:tailEnd type="none" w="med" len="med"/>
+                    </a:lnB>
+                    <a:solidFill>
+                      <a:srgbClr val="EEF3F6"/>
+                    </a:solidFill>
+                  </a:tcPr>
+                </a:tc>
+                <a:tc>
+                  <a:txBody>
+                    <a:bodyPr/>
+                    <a:lstStyle/>
+                    <a:p>
+                      <a:pPr algn="l" indent="0" marL="0">
+                        <a:buNone/>
+                      </a:pPr>
+                      <a:r>
+                        <a:rPr lang="en-US" sz="1050" dirty="0">
+                          <a:solidFill>
+                            <a:srgbClr val="1B2733"/>
+                          </a:solidFill>
+                          <a:latin typeface="Arial" pitchFamily="34" charset="0"/>
+                          <a:ea typeface="Arial" pitchFamily="34" charset="-122"/>
+                          <a:cs typeface="Arial" pitchFamily="34" charset="-120"/>
+                        </a:rPr>
+                        <a:t>4%</a:t>
+                      </a:r>
+                      <a:endParaRPr lang="en-US" sz="1050" dirty="0">
+                        <a:latin typeface="Arial" charset="0"/>
+                        <a:ea typeface="Arial" charset="0"/>
+                        <a:cs typeface="Arial" charset="0"/>
+                      </a:endParaRPr>
+                    </a:p>
+                  </a:txBody>
+                  <a:tcPr marL="73152" marR="73152" marT="36576" marB="36576" anchor="ctr">
+                    <a:lnL w="9525" cap="flat" cmpd="sng" algn="ctr">
+                      <a:solidFill>
+                        <a:srgbClr val="C9D4DD"/>
+                      </a:solidFill>
+                      <a:prstDash val="solid"/>
+                      <a:round/>
+                      <a:headEnd type="none" w="med" len="med"/>
+                      <a:tailEnd type="none" w="med" len="med"/>
+                    </a:lnL>
+                    <a:lnR w="9525" cap="flat" cmpd="sng" algn="ctr">
+                      <a:solidFill>
+                        <a:srgbClr val="C9D4DD"/>
+                      </a:solidFill>
+                      <a:prstDash val="solid"/>
+                      <a:round/>
+                      <a:headEnd type="none" w="med" len="med"/>
+                      <a:tailEnd type="none" w="med" len="med"/>
+                    </a:lnR>
+                    <a:lnT w="9525" cap="flat" cmpd="sng" algn="ctr">
+                      <a:solidFill>
+                        <a:srgbClr val="C9D4DD"/>
+                      </a:solidFill>
+                      <a:prstDash val="solid"/>
+                      <a:round/>
+                      <a:headEnd type="none" w="med" len="med"/>
+                      <a:tailEnd type="none" w="med" len="med"/>
+                    </a:lnT>
+                    <a:lnB w="9525" cap="flat" cmpd="sng" algn="ctr">
+                      <a:solidFill>
+                        <a:srgbClr val="C9D4DD"/>
+                      </a:solidFill>
+                      <a:prstDash val="solid"/>
+                      <a:round/>
+                      <a:headEnd type="none" w="med" len="med"/>
+                      <a:tailEnd type="none" w="med" len="med"/>
+                    </a:lnB>
+                    <a:solidFill>
+                      <a:srgbClr val="EEF3F6"/>
+                    </a:solidFill>
+                  </a:tcPr>
+                </a:tc>
+                <a:tc>
+                  <a:txBody>
+                    <a:bodyPr/>
+                    <a:lstStyle/>
+                    <a:p>
+                      <a:pPr algn="l" indent="0" marL="0">
+                        <a:buNone/>
+                      </a:pPr>
+                      <a:r>
+                        <a:rPr lang="en-US" sz="1050" dirty="0">
+                          <a:solidFill>
+                            <a:srgbClr val="1B2733"/>
+                          </a:solidFill>
+                          <a:latin typeface="Arial" pitchFamily="34" charset="0"/>
+                          <a:ea typeface="Arial" pitchFamily="34" charset="-122"/>
+                          <a:cs typeface="Arial" pitchFamily="34" charset="-120"/>
+                        </a:rPr>
+                        <a:t>5,553%</a:t>
+                      </a:r>
+                      <a:endParaRPr lang="en-US" sz="1050" dirty="0">
+                        <a:latin typeface="Arial" charset="0"/>
+                        <a:ea typeface="Arial" charset="0"/>
+                        <a:cs typeface="Arial" charset="0"/>
+                      </a:endParaRPr>
+                    </a:p>
+                  </a:txBody>
+                  <a:tcPr marL="73152" marR="73152" marT="36576" marB="36576" anchor="ctr">
+                    <a:lnL w="9525" cap="flat" cmpd="sng" algn="ctr">
+                      <a:solidFill>
+                        <a:srgbClr val="C9D4DD"/>
+                      </a:solidFill>
+                      <a:prstDash val="solid"/>
+                      <a:round/>
+                      <a:headEnd type="none" w="med" len="med"/>
+                      <a:tailEnd type="none" w="med" len="med"/>
+                    </a:lnL>
+                    <a:lnR w="9525" cap="flat" cmpd="sng" algn="ctr">
+                      <a:solidFill>
+                        <a:srgbClr val="C9D4DD"/>
+                      </a:solidFill>
+                      <a:prstDash val="solid"/>
+                      <a:round/>
+                      <a:headEnd type="none" w="med" len="med"/>
+                      <a:tailEnd type="none" w="med" len="med"/>
+                    </a:lnR>
+                    <a:lnT w="9525" cap="flat" cmpd="sng" algn="ctr">
+                      <a:solidFill>
+                        <a:srgbClr val="C9D4DD"/>
+                      </a:solidFill>
+                      <a:prstDash val="solid"/>
+                      <a:round/>
+                      <a:headEnd type="none" w="med" len="med"/>
+                      <a:tailEnd type="none" w="med" len="med"/>
+                    </a:lnT>
+                    <a:lnB w="9525" cap="flat" cmpd="sng" algn="ctr">
+                      <a:solidFill>
+                        <a:srgbClr val="C9D4DD"/>
+                      </a:solidFill>
+                      <a:prstDash val="solid"/>
+                      <a:round/>
+                      <a:headEnd type="none" w="med" len="med"/>
+                      <a:tailEnd type="none" w="med" len="med"/>
+                    </a:lnB>
+                    <a:solidFill>
+                      <a:srgbClr val="EEF3F6"/>
+                    </a:solidFill>
+                  </a:tcPr>
+                </a:tc>
+              </a:tr>
+            </a:tbl>
           </a:graphicData>
         </a:graphic>
       </p:graphicFrame>
@@ -11447,8 +13898,8 @@
         </p:nvSpPr>
         <p:spPr>
           <a:xfrm>
-            <a:off x="7132320" y="4251960"/>
-            <a:ext cx="1481328" cy="457200"/>
+            <a:off x="6995160" y="4160520"/>
+            <a:ext cx="4572000" cy="274320"/>
           </a:xfrm>
           <a:prstGeom prst="rect">
             <a:avLst/>
@@ -11464,7 +13915,7 @@
               <a:buNone/>
             </a:pPr>
             <a:r>
-              <a:rPr lang="en-US" sz="2200" b="1" dirty="0">
+              <a:rPr lang="en-US" sz="1350" b="1" dirty="0">
                 <a:solidFill>
                   <a:srgbClr val="0B2239"/>
                 </a:solidFill>
@@ -11472,9 +13923,9 @@
                 <a:ea typeface="Arial" pitchFamily="34" charset="-122"/>
                 <a:cs typeface="Arial" pitchFamily="34" charset="-120"/>
               </a:rPr>
-              <a:t>30 cycles</a:t>
-            </a:r>
-            <a:endParaRPr lang="en-US" sz="2200" dirty="0"/>
+              <a:t>Fixed-policy sensitivity trên cùng prediction panel</a:t>
+            </a:r>
+            <a:endParaRPr lang="en-US" sz="1350" dirty="0"/>
           </a:p>
         </p:txBody>
       </p:sp>
@@ -11486,8 +13937,8 @@
         </p:nvSpPr>
         <p:spPr>
           <a:xfrm>
-            <a:off x="7132320" y="4709160"/>
-            <a:ext cx="1481328" cy="274320"/>
+            <a:off x="6995160" y="4526280"/>
+            <a:ext cx="4572000" cy="640080"/>
           </a:xfrm>
           <a:prstGeom prst="rect">
             <a:avLst/>
@@ -11503,190 +13954,34 @@
               <a:buNone/>
             </a:pPr>
             <a:r>
-              <a:rPr lang="en-US" sz="1100" dirty="0">
-                <a:solidFill>
-                  <a:srgbClr val="5A6B7B"/>
-                </a:solidFill>
-                <a:latin typeface="Arial" pitchFamily="34" charset="0"/>
-                <a:ea typeface="Arial" pitchFamily="34" charset="-122"/>
-                <a:cs typeface="Arial" pitchFamily="34" charset="-120"/>
-              </a:rPr>
-              <a:t>Trung vị lead time</a:t>
-            </a:r>
-            <a:endParaRPr lang="en-US" sz="1100" dirty="0"/>
-          </a:p>
-        </p:txBody>
-      </p:sp>
-      <p:sp>
-        <p:nvSpPr>
-          <p:cNvPr id="13" name="Text 8"/>
-          <p:cNvSpPr txBox="1"/>
-          <p:nvPr/>
-        </p:nvSpPr>
-        <p:spPr>
-          <a:xfrm>
-            <a:off x="8650224" y="4251960"/>
-            <a:ext cx="1481328" cy="457200"/>
-          </a:xfrm>
-          <a:prstGeom prst="rect">
-            <a:avLst/>
-          </a:prstGeom>
-          <a:noFill/>
-          <a:ln/>
-        </p:spPr>
-        <p:txBody>
-          <a:bodyPr wrap="square" lIns="0" tIns="0" rIns="0" bIns="0" rtlCol="0" anchor="t"/>
-          <a:lstStyle/>
-          <a:p>
-            <a:pPr indent="0" marL="0">
-              <a:buNone/>
-            </a:pPr>
-            <a:r>
-              <a:rPr lang="en-US" sz="2000" b="1" dirty="0">
-                <a:solidFill>
-                  <a:srgbClr val="0B2239"/>
-                </a:solidFill>
-                <a:latin typeface="Arial" pitchFamily="34" charset="0"/>
-                <a:ea typeface="Arial" pitchFamily="34" charset="-122"/>
-                <a:cs typeface="Arial" pitchFamily="34" charset="-120"/>
-              </a:rPr>
-              <a:t>26–35</a:t>
-            </a:r>
-            <a:endParaRPr lang="en-US" sz="2000" dirty="0"/>
-          </a:p>
-        </p:txBody>
-      </p:sp>
-      <p:sp>
-        <p:nvSpPr>
-          <p:cNvPr id="14" name="Text 9"/>
-          <p:cNvSpPr txBox="1"/>
-          <p:nvPr/>
-        </p:nvSpPr>
-        <p:spPr>
-          <a:xfrm>
-            <a:off x="8650224" y="4709160"/>
-            <a:ext cx="1481328" cy="274320"/>
-          </a:xfrm>
-          <a:prstGeom prst="rect">
-            <a:avLst/>
-          </a:prstGeom>
-          <a:noFill/>
-          <a:ln/>
-        </p:spPr>
-        <p:txBody>
-          <a:bodyPr wrap="square" lIns="0" tIns="0" rIns="0" bIns="0" rtlCol="0" anchor="t"/>
-          <a:lstStyle/>
-          <a:p>
-            <a:pPr indent="0" marL="0">
-              <a:buNone/>
-            </a:pPr>
-            <a:r>
-              <a:rPr lang="en-US" sz="1100" dirty="0">
-                <a:solidFill>
-                  <a:srgbClr val="5A6B7B"/>
-                </a:solidFill>
-                <a:latin typeface="Arial" pitchFamily="34" charset="0"/>
-                <a:ea typeface="Arial" pitchFamily="34" charset="-122"/>
-                <a:cs typeface="Arial" pitchFamily="34" charset="-120"/>
-              </a:rPr>
-              <a:t>Tứ phân vị</a:t>
-            </a:r>
-            <a:endParaRPr lang="en-US" sz="1100" dirty="0"/>
-          </a:p>
-        </p:txBody>
-      </p:sp>
-      <p:sp>
-        <p:nvSpPr>
-          <p:cNvPr id="15" name="Text 10"/>
-          <p:cNvSpPr txBox="1"/>
-          <p:nvPr/>
-        </p:nvSpPr>
-        <p:spPr>
-          <a:xfrm>
-            <a:off x="10168128" y="4251960"/>
-            <a:ext cx="1481328" cy="457200"/>
-          </a:xfrm>
-          <a:prstGeom prst="rect">
-            <a:avLst/>
-          </a:prstGeom>
-          <a:noFill/>
-          <a:ln/>
-        </p:spPr>
-        <p:txBody>
-          <a:bodyPr wrap="square" lIns="0" tIns="0" rIns="0" bIns="0" rtlCol="0" anchor="t"/>
-          <a:lstStyle/>
-          <a:p>
-            <a:pPr indent="0" marL="0">
-              <a:buNone/>
-            </a:pPr>
-            <a:r>
-              <a:rPr lang="en-US" sz="2000" b="1" dirty="0">
-                <a:solidFill>
-                  <a:srgbClr val="0B2239"/>
-                </a:solidFill>
-                <a:latin typeface="Arial" pitchFamily="34" charset="0"/>
-                <a:ea typeface="Arial" pitchFamily="34" charset="-122"/>
-                <a:cs typeface="Arial" pitchFamily="34" charset="-120"/>
-              </a:rPr>
-              <a:t>19–55</a:t>
-            </a:r>
-            <a:endParaRPr lang="en-US" sz="2000" dirty="0"/>
-          </a:p>
-        </p:txBody>
-      </p:sp>
-      <p:sp>
-        <p:nvSpPr>
-          <p:cNvPr id="16" name="Text 11"/>
-          <p:cNvSpPr txBox="1"/>
-          <p:nvPr/>
-        </p:nvSpPr>
-        <p:spPr>
-          <a:xfrm>
-            <a:off x="10168128" y="4709160"/>
-            <a:ext cx="1481328" cy="274320"/>
-          </a:xfrm>
-          <a:prstGeom prst="rect">
-            <a:avLst/>
-          </a:prstGeom>
-          <a:noFill/>
-          <a:ln/>
-        </p:spPr>
-        <p:txBody>
-          <a:bodyPr wrap="square" lIns="0" tIns="0" rIns="0" bIns="0" rtlCol="0" anchor="t"/>
-          <a:lstStyle/>
-          <a:p>
-            <a:pPr indent="0" marL="0">
-              <a:buNone/>
-            </a:pPr>
-            <a:r>
-              <a:rPr lang="en-US" sz="1100" dirty="0">
-                <a:solidFill>
-                  <a:srgbClr val="5A6B7B"/>
-                </a:solidFill>
-                <a:latin typeface="Arial" pitchFamily="34" charset="0"/>
-                <a:ea typeface="Arial" pitchFamily="34" charset="-122"/>
-                <a:cs typeface="Arial" pitchFamily="34" charset="-120"/>
-              </a:rPr>
-              <a:t>Miền</a:t>
-            </a:r>
-            <a:endParaRPr lang="en-US" sz="1100" dirty="0"/>
-          </a:p>
-        </p:txBody>
-      </p:sp>
-      <p:sp>
-        <p:nvSpPr>
-          <p:cNvPr id="17" name="Shape 12"/>
+              <a:rPr lang="en-US" sz="1250" dirty="0">
+                <a:solidFill>
+                  <a:srgbClr val="1B2733"/>
+                </a:solidFill>
+                <a:latin typeface="Arial" pitchFamily="34" charset="0"/>
+                <a:ea typeface="Arial" pitchFamily="34" charset="-122"/>
+                <a:cs typeface="Arial" pitchFamily="34" charset="-120"/>
+              </a:rPr>
+              <a:t>Burden = tỷ lệ cảnh báo sớm; threshold chưa được hiệu chuẩn theo chi phí. Predictor selection và warning policy là hai quyết định riêng.</a:t>
+            </a:r>
+            <a:endParaRPr lang="en-US" sz="1250" dirty="0"/>
+          </a:p>
+        </p:txBody>
+      </p:sp>
+      <p:sp>
+        <p:nvSpPr>
+          <p:cNvPr id="13" name="Shape 8"/>
           <p:cNvSpPr/>
           <p:nvPr/>
         </p:nvSpPr>
         <p:spPr>
           <a:xfrm>
-            <a:off x="7132320" y="5120640"/>
-            <a:ext cx="4507992" cy="1051560"/>
+            <a:off x="6995160" y="5257800"/>
+            <a:ext cx="4645152" cy="841248"/>
           </a:xfrm>
           <a:prstGeom prst="roundRect">
             <a:avLst>
-              <a:gd name="adj" fmla="val 6957"/>
+              <a:gd name="adj" fmla="val 8696"/>
             </a:avLst>
           </a:prstGeom>
           <a:solidFill>
@@ -11697,14 +13992,14 @@
       </p:sp>
       <p:sp>
         <p:nvSpPr>
-          <p:cNvPr id="18" name="Text 13"/>
-          <p:cNvSpPr txBox="1"/>
-          <p:nvPr/>
-        </p:nvSpPr>
-        <p:spPr>
-          <a:xfrm>
-            <a:off x="7296912" y="5175504"/>
-            <a:ext cx="4206240" cy="950976"/>
+          <p:cNvPr id="14" name="Text 9"/>
+          <p:cNvSpPr txBox="1"/>
+          <p:nvPr/>
+        </p:nvSpPr>
+        <p:spPr>
+          <a:xfrm>
+            <a:off x="7205472" y="5340096"/>
+            <a:ext cx="4206240" cy="685800"/>
           </a:xfrm>
           <a:prstGeom prst="rect">
             <a:avLst/>
@@ -11718,12 +14013,12 @@
           <a:p>
             <a:pPr indent="0" marL="0">
               <a:spcAft>
-                <a:spcPts val="400"/>
+                <a:spcPts val="300"/>
               </a:spcAft>
               <a:buNone/>
             </a:pPr>
             <a:r>
-              <a:rPr lang="en-US" sz="1200" b="1" dirty="0">
+              <a:rPr lang="en-US" sz="1150" b="1" dirty="0">
                 <a:solidFill>
                   <a:srgbClr val="1B2733"/>
                 </a:solidFill>
@@ -11731,19 +14026,19 @@
                 <a:ea typeface="Arial" pitchFamily="34" charset="-122"/>
                 <a:cs typeface="Arial" pitchFamily="34" charset="-120"/>
               </a:rPr>
-              <a:t>Cảnh báo trễ tập trung ở engine ngắn đời: tuổi thọ TB 182,8 so với 229,1 cycles (r = -0,56).</a:t>
-            </a:r>
-            <a:endParaRPr lang="en-US" sz="1200" dirty="0"/>
+              <a:t>HGB126 threshold 30: 51/100 đúng lúc; median lead 30 cycles.</a:t>
+            </a:r>
+            <a:endParaRPr lang="en-US" sz="1150" dirty="0"/>
           </a:p>
           <a:p>
             <a:pPr indent="0" marL="0">
               <a:spcAft>
-                <a:spcPts val="400"/>
+                <a:spcPts val="300"/>
               </a:spcAft>
               <a:buNone/>
             </a:pPr>
             <a:r>
-              <a:rPr lang="en-US" sz="1200" dirty="0">
+              <a:rPr lang="en-US" sz="1150" dirty="0">
                 <a:solidFill>
                   <a:srgbClr val="1B2733"/>
                 </a:solidFill>
@@ -11751,15 +14046,15 @@
                 <a:ea typeface="Arial" pitchFamily="34" charset="-122"/>
                 <a:cs typeface="Arial" pitchFamily="34" charset="-120"/>
               </a:rPr>
-              <a:t>OOF đã dùng để chọn model; chưa có chi phí bảo trì.</a:t>
-            </a:r>
-            <a:endParaRPr lang="en-US" sz="1200" dirty="0"/>
-          </a:p>
-        </p:txBody>
-      </p:sp>
-      <p:sp>
-        <p:nvSpPr>
-          <p:cNvPr id="19" name="Text 14"/>
+              <a:t>Hình bên trái là mô tả nội bộ trên OOF.</a:t>
+            </a:r>
+            <a:endParaRPr lang="en-US" sz="1150" dirty="0"/>
+          </a:p>
+        </p:txBody>
+      </p:sp>
+      <p:sp>
+        <p:nvSpPr>
+          <p:cNvPr id="15" name="Text 10"/>
           <p:cNvSpPr txBox="1"/>
           <p:nvPr/>
         </p:nvSpPr>
@@ -11922,7 +14217,7 @@
                 <a:ea typeface="Arial" pitchFamily="34" charset="-122"/>
                 <a:cs typeface="Arial" pitchFamily="34" charset="-120"/>
               </a:rPr>
-              <a:t>Thử cải thiện bằng nested CV: chưa đạt tiêu chí, giữ baseline</a:t>
+              <a:t>Nested CV: kiểm tra cải thiện trên engine được giữ riêng</a:t>
             </a:r>
             <a:endParaRPr lang="en-US" sz="2700" dirty="0"/>
           </a:p>
@@ -11961,7 +14256,7 @@
                 <a:ea typeface="Arial" pitchFamily="34" charset="-122"/>
                 <a:cs typeface="Arial" pitchFamily="34" charset="-120"/>
               </a:rPr>
-              <a:t>Window 10/20/30, 24 cấu hình HGB, 3 cách đặt trọng số; test không dùng để chọn cấu hình</a:t>
+              <a:t>Kết quả gốc và thí nghiệm bổ sung; chỉ thay baseline khi đạt tiêu chí đã chốt trước</a:t>
             </a:r>
             <a:endParaRPr lang="en-US" sz="1500" dirty="0"/>
           </a:p>
@@ -12000,7 +14295,7 @@
                 <a:ea typeface="Arial" pitchFamily="34" charset="-122"/>
                 <a:cs typeface="Arial" pitchFamily="34" charset="-120"/>
               </a:rPr>
-              <a:t>Nguồn: outputs/experiments/rul_improvement/20260927_full/ (ablation_metrics.csv, paired_comparison.csv, final_selection_metrics.csv, decision.json)</a:t>
+              <a:t>Nguồn: outputs/experiments/rul_improvement/20260928_rebuild/; outputs/experiments/followup/20260929/</a:t>
             </a:r>
             <a:endParaRPr lang="en-US" sz="900" dirty="0"/>
           </a:p>
@@ -12178,7 +14473,7 @@
                 <a:ea typeface="Arial" pitchFamily="34" charset="-122"/>
                 <a:cs typeface="Arial" pitchFamily="34" charset="-120"/>
               </a:rPr>
-              <a:t>giữ riêng 20 engine để đánh giá</a:t>
+              <a:t>giữ riêng một nhóm engine</a:t>
             </a:r>
             <a:endParaRPr lang="en-US" sz="1200" dirty="0"/>
           </a:p>
@@ -12302,7 +14597,7 @@
                 <a:ea typeface="Arial" pitchFamily="34" charset="-122"/>
                 <a:cs typeface="Arial" pitchFamily="34" charset="-120"/>
               </a:rPr>
-              <a:t>chọn window, tham số, trọng số</a:t>
+              <a:t>chọn cấu hình chỉ từ train</a:t>
             </a:r>
             <a:endParaRPr lang="en-US" sz="1200" dirty="0"/>
           </a:p>
@@ -12387,7 +14682,7 @@
                 <a:ea typeface="Arial" pitchFamily="34" charset="-122"/>
                 <a:cs typeface="Arial" pitchFamily="34" charset="-120"/>
               </a:rPr>
-              <a:t>So với baseline</a:t>
+              <a:t>CI nghiên cứu gốc</a:t>
             </a:r>
             <a:endParaRPr lang="en-US" sz="1500" dirty="0"/>
           </a:p>
@@ -12482,7 +14777,7 @@
                 <a:ea typeface="Arial" pitchFamily="34" charset="-122"/>
                 <a:cs typeface="Arial" pitchFamily="34" charset="-120"/>
               </a:rPr>
-              <a:t>Vòng ngoài: đánh giá cả quy trình chọn</a:t>
+              <a:t>FD001 gốc: thử window, tham số và trọng số</a:t>
             </a:r>
             <a:endParaRPr lang="en-US" sz="1400" dirty="0"/>
           </a:p>
@@ -13376,7 +15671,7 @@
                 <a:ea typeface="Arial" pitchFamily="34" charset="-122"/>
                 <a:cs typeface="Arial" pitchFamily="34" charset="-120"/>
               </a:rPr>
-              <a:t>Inner CV trên toàn train: đánh đổi giữa các chỉ số</a:t>
+              <a:t>Bổ sung 29/09: outer MAE của quy trình chọn (cycles)</a:t>
             </a:r>
             <a:endParaRPr lang="en-US" sz="1400" dirty="0"/>
           </a:p>
@@ -13428,7 +15723,7 @@
                           <a:ea typeface="Arial" pitchFamily="34" charset="-122"/>
                           <a:cs typeface="Arial" pitchFamily="34" charset="-120"/>
                         </a:rPr>
-                        <a:t>Ứng viên</a:t>
+                        <a:t>Dataset</a:t>
                       </a:r>
                       <a:endParaRPr lang="en-US" sz="1250" dirty="0">
                         <a:latin typeface="Arial" charset="0"/>
@@ -13496,7 +15791,7 @@
                           <a:ea typeface="Arial" pitchFamily="34" charset="-122"/>
                           <a:cs typeface="Arial" pitchFamily="34" charset="-120"/>
                         </a:rPr>
-                        <a:t>MAE toàn bộ</a:t>
+                        <a:t>Baseline</a:t>
                       </a:r>
                       <a:endParaRPr lang="en-US" sz="1250" dirty="0">
                         <a:latin typeface="Arial" charset="0"/>
@@ -13564,7 +15859,7 @@
                           <a:ea typeface="Arial" pitchFamily="34" charset="-122"/>
                           <a:cs typeface="Arial" pitchFamily="34" charset="-120"/>
                         </a:rPr>
-                        <a:t>MAE RUL ≤ 30</a:t>
+                        <a:t>Quy trình chọn</a:t>
                       </a:r>
                       <a:endParaRPr lang="en-US" sz="1250" dirty="0">
                         <a:latin typeface="Arial" charset="0"/>
@@ -13632,7 +15927,7 @@
                           <a:ea typeface="Arial" pitchFamily="34" charset="-122"/>
                           <a:cs typeface="Arial" pitchFamily="34" charset="-120"/>
                         </a:rPr>
-                        <a:t>Trễ/bỏ lỡ</a:t>
+                        <a:t>Tiêu chí</a:t>
                       </a:r>
                       <a:endParaRPr lang="en-US" sz="1250" dirty="0">
                         <a:latin typeface="Arial" charset="0"/>
@@ -13702,7 +15997,7 @@
                           <a:ea typeface="Arial" pitchFamily="34" charset="-122"/>
                           <a:cs typeface="Arial" pitchFamily="34" charset="-120"/>
                         </a:rPr>
-                        <a:t>Baseline</a:t>
+                        <a:t>FD001</a:t>
                       </a:r>
                       <a:endParaRPr lang="en-US" sz="1250" dirty="0">
                         <a:latin typeface="Arial" charset="0"/>
@@ -13770,7 +16065,7 @@
                           <a:ea typeface="Arial" pitchFamily="34" charset="-122"/>
                           <a:cs typeface="Arial" pitchFamily="34" charset="-120"/>
                         </a:rPr>
-                        <a:t>20,36</a:t>
+                        <a:t>20,21</a:t>
                       </a:r>
                       <a:endParaRPr lang="en-US" sz="1250" dirty="0">
                         <a:latin typeface="Arial" charset="0"/>
@@ -13838,7 +16133,7 @@
                           <a:ea typeface="Arial" pitchFamily="34" charset="-122"/>
                           <a:cs typeface="Arial" pitchFamily="34" charset="-120"/>
                         </a:rPr>
-                        <a:t>3,61</a:t>
+                        <a:t>20,30</a:t>
                       </a:r>
                       <a:endParaRPr lang="en-US" sz="1250" dirty="0">
                         <a:latin typeface="Arial" charset="0"/>
@@ -13906,7 +16201,7 @@
                           <a:ea typeface="Arial" pitchFamily="34" charset="-122"/>
                           <a:cs typeface="Arial" pitchFamily="34" charset="-120"/>
                         </a:rPr>
-                        <a:t>50/100</a:t>
+                        <a:t>Chưa đạt</a:t>
                       </a:r>
                       <a:endParaRPr lang="en-US" sz="1250" dirty="0">
                         <a:latin typeface="Arial" charset="0"/>
@@ -13976,7 +16271,7 @@
                           <a:ea typeface="Arial" pitchFamily="34" charset="-122"/>
                           <a:cs typeface="Arial" pitchFamily="34" charset="-120"/>
                         </a:rPr>
-                        <a:t>hgb_08</a:t>
+                        <a:t>FD002</a:t>
                       </a:r>
                       <a:endParaRPr lang="en-US" sz="1250" dirty="0">
                         <a:latin typeface="Arial" charset="0"/>
@@ -14044,7 +16339,7 @@
                           <a:ea typeface="Arial" pitchFamily="34" charset="-122"/>
                           <a:cs typeface="Arial" pitchFamily="34" charset="-120"/>
                         </a:rPr>
-                        <a:t>20,68</a:t>
+                        <a:t>29,29</a:t>
                       </a:r>
                       <a:endParaRPr lang="en-US" sz="1250" dirty="0">
                         <a:latin typeface="Arial" charset="0"/>
@@ -14112,7 +16407,7 @@
                           <a:ea typeface="Arial" pitchFamily="34" charset="-122"/>
                           <a:cs typeface="Arial" pitchFamily="34" charset="-120"/>
                         </a:rPr>
-                        <a:t>3,26</a:t>
+                        <a:t>28,04</a:t>
                       </a:r>
                       <a:endParaRPr lang="en-US" sz="1250" dirty="0">
                         <a:latin typeface="Arial" charset="0"/>
@@ -14180,7 +16475,7 @@
                           <a:ea typeface="Arial" pitchFamily="34" charset="-122"/>
                           <a:cs typeface="Arial" pitchFamily="34" charset="-120"/>
                         </a:rPr>
-                        <a:t>49/100</a:t>
+                        <a:t>Đạt</a:t>
                       </a:r>
                       <a:endParaRPr lang="en-US" sz="1250" dirty="0">
                         <a:latin typeface="Arial" charset="0"/>
@@ -14250,7 +16545,7 @@
                           <a:ea typeface="Arial" pitchFamily="34" charset="-122"/>
                           <a:cs typeface="Arial" pitchFamily="34" charset="-120"/>
                         </a:rPr>
-                        <a:t>Trọng số RUL thấp cao</a:t>
+                        <a:t>FD004</a:t>
                       </a:r>
                       <a:endParaRPr lang="en-US" sz="1250" dirty="0">
                         <a:latin typeface="Arial" charset="0"/>
@@ -14318,7 +16613,7 @@
                           <a:ea typeface="Arial" pitchFamily="34" charset="-122"/>
                           <a:cs typeface="Arial" pitchFamily="34" charset="-120"/>
                         </a:rPr>
-                        <a:t>20,41</a:t>
+                        <a:t>36,74</a:t>
                       </a:r>
                       <a:endParaRPr lang="en-US" sz="1250" dirty="0">
                         <a:latin typeface="Arial" charset="0"/>
@@ -14386,7 +16681,7 @@
                           <a:ea typeface="Arial" pitchFamily="34" charset="-122"/>
                           <a:cs typeface="Arial" pitchFamily="34" charset="-120"/>
                         </a:rPr>
-                        <a:t>3,39</a:t>
+                        <a:t>35,45</a:t>
                       </a:r>
                       <a:endParaRPr lang="en-US" sz="1250" dirty="0">
                         <a:latin typeface="Arial" charset="0"/>
@@ -14454,7 +16749,7 @@
                           <a:ea typeface="Arial" pitchFamily="34" charset="-122"/>
                           <a:cs typeface="Arial" pitchFamily="34" charset="-120"/>
                         </a:rPr>
-                        <a:t>47/100</a:t>
+                        <a:t>Đạt</a:t>
                       </a:r>
                       <a:endParaRPr lang="en-US" sz="1250" dirty="0">
                         <a:latin typeface="Arial" charset="0"/>
@@ -14543,7 +16838,7 @@
                 <a:ea typeface="Arial" pitchFamily="34" charset="-122"/>
                 <a:cs typeface="Arial" pitchFamily="34" charset="-120"/>
               </a:rPr>
-              <a:t>hgb_08 giảm MAE RUL thấp khoảng 9,75% nhưng tăng MAE toàn bộ 0,32 cycles.</a:t>
+              <a:t>FD001: window 30; FD002/FD004: window 10, huấn luyện trong từng subset.</a:t>
             </a:r>
             <a:endParaRPr lang="en-US" sz="1300" dirty="0"/>
           </a:p>
@@ -15352,7 +17647,7 @@
                 <a:ea typeface="Arial" pitchFamily="34" charset="-122"/>
                 <a:cs typeface="Arial" pitchFamily="34" charset="-120"/>
               </a:rPr>
-              <a:t>Trả lời ba câu hỏi nghiên cứu</a:t>
+              <a:t>Trả lời sáu câu hỏi nghiên cứu</a:t>
             </a:r>
             <a:endParaRPr lang="en-US" sz="2700" dirty="0"/>
           </a:p>
@@ -15483,12 +17778,12 @@
         </p:nvSpPr>
         <p:spPr>
           <a:xfrm>
-            <a:off x="548640" y="1920240"/>
-            <a:ext cx="3566160" cy="2788920"/>
+            <a:off x="548640" y="1874520"/>
+            <a:ext cx="3566160" cy="1755648"/>
           </a:xfrm>
           <a:prstGeom prst="roundRect">
             <a:avLst>
-              <a:gd name="adj" fmla="val 2623"/>
+              <a:gd name="adj" fmla="val 4167"/>
             </a:avLst>
           </a:prstGeom>
           <a:solidFill>
@@ -15505,8 +17800,8 @@
         </p:nvSpPr>
         <p:spPr>
           <a:xfrm>
-            <a:off x="777240" y="2103120"/>
-            <a:ext cx="502920" cy="502920"/>
+            <a:off x="749808" y="2057400"/>
+            <a:ext cx="438912" cy="438912"/>
           </a:xfrm>
           <a:prstGeom prst="ellipse">
             <a:avLst/>
@@ -15525,8 +17820,8 @@
         </p:nvSpPr>
         <p:spPr>
           <a:xfrm>
-            <a:off x="777240" y="2103120"/>
-            <a:ext cx="502920" cy="502920"/>
+            <a:off x="749808" y="2057400"/>
+            <a:ext cx="438912" cy="438912"/>
           </a:xfrm>
           <a:prstGeom prst="rect">
             <a:avLst/>
@@ -15542,7 +17837,7 @@
               <a:buNone/>
             </a:pPr>
             <a:r>
-              <a:rPr lang="en-US" sz="1300" b="1" dirty="0">
+              <a:rPr lang="en-US" sz="1100" b="1" dirty="0">
                 <a:solidFill>
                   <a:srgbClr val="FFFFFF"/>
                 </a:solidFill>
@@ -15552,7 +17847,7 @@
               </a:rPr>
               <a:t>Q1</a:t>
             </a:r>
-            <a:endParaRPr lang="en-US" sz="1300" dirty="0"/>
+            <a:endParaRPr lang="en-US" sz="1100" dirty="0"/>
           </a:p>
         </p:txBody>
       </p:sp>
@@ -15564,8 +17859,8 @@
         </p:nvSpPr>
         <p:spPr>
           <a:xfrm>
-            <a:off x="1417320" y="2103120"/>
-            <a:ext cx="2560320" cy="502920"/>
+            <a:off x="1325880" y="2057400"/>
+            <a:ext cx="2560320" cy="347472"/>
           </a:xfrm>
           <a:prstGeom prst="rect">
             <a:avLst/>
@@ -15581,7 +17876,7 @@
               <a:buNone/>
             </a:pPr>
             <a:r>
-              <a:rPr lang="en-US" sz="1500" b="1" dirty="0">
+              <a:rPr lang="en-US" sz="1400" b="1" dirty="0">
                 <a:solidFill>
                   <a:srgbClr val="0B2239"/>
                 </a:solidFill>
@@ -15589,9 +17884,9 @@
                 <a:ea typeface="Arial" pitchFamily="34" charset="-122"/>
                 <a:cs typeface="Arial" pitchFamily="34" charset="-120"/>
               </a:rPr>
-              <a:t>Xu hướng suy giảm</a:t>
-            </a:r>
-            <a:endParaRPr lang="en-US" sz="1500" dirty="0"/>
+              <a:t>Dữ liệu hợp lệ</a:t>
+            </a:r>
+            <a:endParaRPr lang="en-US" sz="1400" dirty="0"/>
           </a:p>
         </p:txBody>
       </p:sp>
@@ -15603,8 +17898,8 @@
         </p:nvSpPr>
         <p:spPr>
           <a:xfrm>
-            <a:off x="777240" y="2788920"/>
-            <a:ext cx="3108960" cy="731520"/>
+            <a:off x="749808" y="2587752"/>
+            <a:ext cx="3108960" cy="420624"/>
           </a:xfrm>
           <a:prstGeom prst="rect">
             <a:avLst/>
@@ -15620,7 +17915,7 @@
               <a:buNone/>
             </a:pPr>
             <a:r>
-              <a:rPr lang="en-US" sz="4000" b="1" dirty="0">
+              <a:rPr lang="en-US" sz="2400" b="1" dirty="0">
                 <a:solidFill>
                   <a:srgbClr val="0B2239"/>
                 </a:solidFill>
@@ -15628,9 +17923,9 @@
                 <a:ea typeface="Arial" pitchFamily="34" charset="-122"/>
                 <a:cs typeface="Arial" pitchFamily="34" charset="-120"/>
               </a:rPr>
-              <a:t>15/21</a:t>
-            </a:r>
-            <a:endParaRPr lang="en-US" sz="4000" dirty="0"/>
+              <a:t>Đạt</a:t>
+            </a:r>
+            <a:endParaRPr lang="en-US" sz="2400" dirty="0"/>
           </a:p>
         </p:txBody>
       </p:sp>
@@ -15642,8 +17937,8 @@
         </p:nvSpPr>
         <p:spPr>
           <a:xfrm>
-            <a:off x="777240" y="3611880"/>
-            <a:ext cx="3154680" cy="1234440"/>
+            <a:off x="749808" y="3044952"/>
+            <a:ext cx="3127248" cy="438912"/>
           </a:xfrm>
           <a:prstGeom prst="rect">
             <a:avLst/>
@@ -15659,7 +17954,7 @@
               <a:buNone/>
             </a:pPr>
             <a:r>
-              <a:rPr lang="en-US" sz="1300" dirty="0">
+              <a:rPr lang="en-US" sz="1150" dirty="0">
                 <a:solidFill>
                   <a:srgbClr val="1B2733"/>
                 </a:solidFill>
@@ -15667,9 +17962,9 @@
                 <a:ea typeface="Arial" pitchFamily="34" charset="-122"/>
                 <a:cs typeface="Arial" pitchFamily="34" charset="-120"/>
               </a:rPr>
-              <a:t>sensor thay đổi đầu/cuối vòng đời; Health Index giảm rõ ở cuối vòng đời</a:t>
-            </a:r>
-            <a:endParaRPr lang="en-US" sz="1300" dirty="0"/>
+              <a:t>Schema, khóa và cycle của FD001 qua kiểm tra</a:t>
+            </a:r>
+            <a:endParaRPr lang="en-US" sz="1150" dirty="0"/>
           </a:p>
         </p:txBody>
       </p:sp>
@@ -15681,12 +17976,12 @@
         </p:nvSpPr>
         <p:spPr>
           <a:xfrm>
-            <a:off x="4297680" y="1920240"/>
-            <a:ext cx="3566160" cy="2788920"/>
+            <a:off x="4297680" y="1874520"/>
+            <a:ext cx="3566160" cy="1755648"/>
           </a:xfrm>
           <a:prstGeom prst="roundRect">
             <a:avLst>
-              <a:gd name="adj" fmla="val 2623"/>
+              <a:gd name="adj" fmla="val 4167"/>
             </a:avLst>
           </a:prstGeom>
           <a:solidFill>
@@ -15703,8 +17998,8 @@
         </p:nvSpPr>
         <p:spPr>
           <a:xfrm>
-            <a:off x="4526280" y="2103120"/>
-            <a:ext cx="502920" cy="502920"/>
+            <a:off x="4498848" y="2057400"/>
+            <a:ext cx="438912" cy="438912"/>
           </a:xfrm>
           <a:prstGeom prst="ellipse">
             <a:avLst/>
@@ -15723,8 +18018,8 @@
         </p:nvSpPr>
         <p:spPr>
           <a:xfrm>
-            <a:off x="4526280" y="2103120"/>
-            <a:ext cx="502920" cy="502920"/>
+            <a:off x="4498848" y="2057400"/>
+            <a:ext cx="438912" cy="438912"/>
           </a:xfrm>
           <a:prstGeom prst="rect">
             <a:avLst/>
@@ -15740,7 +18035,7 @@
               <a:buNone/>
             </a:pPr>
             <a:r>
-              <a:rPr lang="en-US" sz="1300" b="1" dirty="0">
+              <a:rPr lang="en-US" sz="1100" b="1" dirty="0">
                 <a:solidFill>
                   <a:srgbClr val="FFFFFF"/>
                 </a:solidFill>
@@ -15750,7 +18045,7 @@
               </a:rPr>
               <a:t>Q2</a:t>
             </a:r>
-            <a:endParaRPr lang="en-US" sz="1300" dirty="0"/>
+            <a:endParaRPr lang="en-US" sz="1100" dirty="0"/>
           </a:p>
         </p:txBody>
       </p:sp>
@@ -15762,8 +18057,8 @@
         </p:nvSpPr>
         <p:spPr>
           <a:xfrm>
-            <a:off x="5166360" y="2103120"/>
-            <a:ext cx="2560320" cy="502920"/>
+            <a:off x="5074920" y="2057400"/>
+            <a:ext cx="2560320" cy="347472"/>
           </a:xfrm>
           <a:prstGeom prst="rect">
             <a:avLst/>
@@ -15779,7 +18074,7 @@
               <a:buNone/>
             </a:pPr>
             <a:r>
-              <a:rPr lang="en-US" sz="1500" b="1" dirty="0">
+              <a:rPr lang="en-US" sz="1400" b="1" dirty="0">
                 <a:solidFill>
                   <a:srgbClr val="0B2239"/>
                 </a:solidFill>
@@ -15787,9 +18082,9 @@
                 <a:ea typeface="Arial" pitchFamily="34" charset="-122"/>
                 <a:cs typeface="Arial" pitchFamily="34" charset="-120"/>
               </a:rPr>
-              <a:t>Dự đoán RUL</a:t>
-            </a:r>
-            <a:endParaRPr lang="en-US" sz="1500" dirty="0"/>
+              <a:t>Xu hướng sensor</a:t>
+            </a:r>
+            <a:endParaRPr lang="en-US" sz="1400" dirty="0"/>
           </a:p>
         </p:txBody>
       </p:sp>
@@ -15801,8 +18096,8 @@
         </p:nvSpPr>
         <p:spPr>
           <a:xfrm>
-            <a:off x="4526280" y="2788920"/>
-            <a:ext cx="3108960" cy="731520"/>
+            <a:off x="4498848" y="2587752"/>
+            <a:ext cx="3108960" cy="420624"/>
           </a:xfrm>
           <a:prstGeom prst="rect">
             <a:avLst/>
@@ -15818,7 +18113,7 @@
               <a:buNone/>
             </a:pPr>
             <a:r>
-              <a:rPr lang="en-US" sz="4000" b="1" dirty="0">
+              <a:rPr lang="en-US" sz="2400" b="1" dirty="0">
                 <a:solidFill>
                   <a:srgbClr val="0B2239"/>
                 </a:solidFill>
@@ -15826,9 +18121,9 @@
                 <a:ea typeface="Arial" pitchFamily="34" charset="-122"/>
                 <a:cs typeface="Arial" pitchFamily="34" charset="-120"/>
               </a:rPr>
-              <a:t>15,35</a:t>
-            </a:r>
-            <a:endParaRPr lang="en-US" sz="4000" dirty="0"/>
+              <a:t>15/21</a:t>
+            </a:r>
+            <a:endParaRPr lang="en-US" sz="2400" dirty="0"/>
           </a:p>
         </p:txBody>
       </p:sp>
@@ -15840,8 +18135,8 @@
         </p:nvSpPr>
         <p:spPr>
           <a:xfrm>
-            <a:off x="4526280" y="3611880"/>
-            <a:ext cx="3154680" cy="1234440"/>
+            <a:off x="4498848" y="3044952"/>
+            <a:ext cx="3127248" cy="438912"/>
           </a:xfrm>
           <a:prstGeom prst="rect">
             <a:avLst/>
@@ -15857,7 +18152,7 @@
               <a:buNone/>
             </a:pPr>
             <a:r>
-              <a:rPr lang="en-US" sz="1300" dirty="0">
+              <a:rPr lang="en-US" sz="1150" dirty="0">
                 <a:solidFill>
                   <a:srgbClr val="1B2733"/>
                 </a:solidFill>
@@ -15865,9 +18160,9 @@
                 <a:ea typeface="Arial" pitchFamily="34" charset="-122"/>
                 <a:cs typeface="Arial" pitchFamily="34" charset="-120"/>
               </a:rPr>
-              <a:t>cycles MAE trên 100 test engines; CI 95% [12,73; 18,09]</a:t>
-            </a:r>
-            <a:endParaRPr lang="en-US" sz="1300" dirty="0"/>
+              <a:t>sensor thay đổi đầu/cuối; Health Index giảm rõ</a:t>
+            </a:r>
+            <a:endParaRPr lang="en-US" sz="1150" dirty="0"/>
           </a:p>
         </p:txBody>
       </p:sp>
@@ -15879,12 +18174,12 @@
         </p:nvSpPr>
         <p:spPr>
           <a:xfrm>
-            <a:off x="8046720" y="1920240"/>
-            <a:ext cx="3566160" cy="2788920"/>
+            <a:off x="8046720" y="1874520"/>
+            <a:ext cx="3566160" cy="1755648"/>
           </a:xfrm>
           <a:prstGeom prst="roundRect">
             <a:avLst>
-              <a:gd name="adj" fmla="val 2623"/>
+              <a:gd name="adj" fmla="val 4167"/>
             </a:avLst>
           </a:prstGeom>
           <a:solidFill>
@@ -15901,8 +18196,8 @@
         </p:nvSpPr>
         <p:spPr>
           <a:xfrm>
-            <a:off x="8275320" y="2103120"/>
-            <a:ext cx="502920" cy="502920"/>
+            <a:off x="8247888" y="2057400"/>
+            <a:ext cx="438912" cy="438912"/>
           </a:xfrm>
           <a:prstGeom prst="ellipse">
             <a:avLst/>
@@ -15921,8 +18216,8 @@
         </p:nvSpPr>
         <p:spPr>
           <a:xfrm>
-            <a:off x="8275320" y="2103120"/>
-            <a:ext cx="502920" cy="502920"/>
+            <a:off x="8247888" y="2057400"/>
+            <a:ext cx="438912" cy="438912"/>
           </a:xfrm>
           <a:prstGeom prst="rect">
             <a:avLst/>
@@ -15938,7 +18233,7 @@
               <a:buNone/>
             </a:pPr>
             <a:r>
-              <a:rPr lang="en-US" sz="1300" b="1" dirty="0">
+              <a:rPr lang="en-US" sz="1100" b="1" dirty="0">
                 <a:solidFill>
                   <a:srgbClr val="FFFFFF"/>
                 </a:solidFill>
@@ -15948,7 +18243,7 @@
               </a:rPr>
               <a:t>Q3</a:t>
             </a:r>
-            <a:endParaRPr lang="en-US" sz="1300" dirty="0"/>
+            <a:endParaRPr lang="en-US" sz="1100" dirty="0"/>
           </a:p>
         </p:txBody>
       </p:sp>
@@ -15960,8 +18255,8 @@
         </p:nvSpPr>
         <p:spPr>
           <a:xfrm>
-            <a:off x="8915400" y="2103120"/>
-            <a:ext cx="2560320" cy="502920"/>
+            <a:off x="8823960" y="2057400"/>
+            <a:ext cx="2560320" cy="347472"/>
           </a:xfrm>
           <a:prstGeom prst="rect">
             <a:avLst/>
@@ -15977,7 +18272,7 @@
               <a:buNone/>
             </a:pPr>
             <a:r>
-              <a:rPr lang="en-US" sz="1500" b="1" dirty="0">
+              <a:rPr lang="en-US" sz="1400" b="1" dirty="0">
                 <a:solidFill>
                   <a:srgbClr val="0B2239"/>
                 </a:solidFill>
@@ -15985,9 +18280,9 @@
                 <a:ea typeface="Arial" pitchFamily="34" charset="-122"/>
                 <a:cs typeface="Arial" pitchFamily="34" charset="-120"/>
               </a:rPr>
-              <a:t>Cảnh báo và chuyển miền</a:t>
-            </a:r>
-            <a:endParaRPr lang="en-US" sz="1500" dirty="0"/>
+              <a:t>Parity ETL</a:t>
+            </a:r>
+            <a:endParaRPr lang="en-US" sz="1400" dirty="0"/>
           </a:p>
         </p:txBody>
       </p:sp>
@@ -15999,8 +18294,8 @@
         </p:nvSpPr>
         <p:spPr>
           <a:xfrm>
-            <a:off x="8275320" y="2788920"/>
-            <a:ext cx="3108960" cy="731520"/>
+            <a:off x="8247888" y="2587752"/>
+            <a:ext cx="3108960" cy="420624"/>
           </a:xfrm>
           <a:prstGeom prst="rect">
             <a:avLst/>
@@ -16016,7 +18311,7 @@
               <a:buNone/>
             </a:pPr>
             <a:r>
-              <a:rPr lang="en-US" sz="4000" b="1" dirty="0">
+              <a:rPr lang="en-US" sz="2400" b="1" dirty="0">
                 <a:solidFill>
                   <a:srgbClr val="0B2239"/>
                 </a:solidFill>
@@ -16024,9 +18319,9 @@
                 <a:ea typeface="Arial" pitchFamily="34" charset="-122"/>
                 <a:cs typeface="Arial" pitchFamily="34" charset="-120"/>
               </a:rPr>
-              <a:t>30</a:t>
-            </a:r>
-            <a:endParaRPr lang="en-US" sz="4000" dirty="0"/>
+              <a:t>0 sai khác</a:t>
+            </a:r>
+            <a:endParaRPr lang="en-US" sz="2400" dirty="0"/>
           </a:p>
         </p:txBody>
       </p:sp>
@@ -16038,8 +18333,8 @@
         </p:nvSpPr>
         <p:spPr>
           <a:xfrm>
-            <a:off x="8275320" y="3611880"/>
-            <a:ext cx="3154680" cy="1234440"/>
+            <a:off x="8247888" y="3044952"/>
+            <a:ext cx="3127248" cy="438912"/>
           </a:xfrm>
           <a:prstGeom prst="rect">
             <a:avLst/>
@@ -16055,7 +18350,7 @@
               <a:buNone/>
             </a:pPr>
             <a:r>
-              <a:rPr lang="en-US" sz="1300" dirty="0">
+              <a:rPr lang="en-US" sz="1150" dirty="0">
                 <a:solidFill>
                   <a:srgbClr val="1B2733"/>
                 </a:solidFill>
@@ -16063,9 +18358,9 @@
                 <a:ea typeface="Arial" pitchFamily="34" charset="-122"/>
                 <a:cs typeface="Arial" pitchFamily="34" charset="-120"/>
               </a:rPr>
-              <a:t>cycles lead time trung vị (OOF); 49/100 cảnh báo sau ngưỡng; không chuyển trực tiếp sang FD002–FD004</a:t>
-            </a:r>
-            <a:endParaRPr lang="en-US" sz="1300" dirty="0"/>
+              <a:t>Ba artifact Pandas–PySpark khớp tuyệt đối</a:t>
+            </a:r>
+            <a:endParaRPr lang="en-US" sz="1150" dirty="0"/>
           </a:p>
         </p:txBody>
       </p:sp>
@@ -16077,30 +18372,50 @@
         </p:nvSpPr>
         <p:spPr>
           <a:xfrm>
-            <a:off x="548640" y="4983480"/>
-            <a:ext cx="11091672" cy="960120"/>
+            <a:off x="548640" y="3840480"/>
+            <a:ext cx="3566160" cy="1755648"/>
           </a:xfrm>
           <a:prstGeom prst="roundRect">
             <a:avLst>
-              <a:gd name="adj" fmla="val 7619"/>
+              <a:gd name="adj" fmla="val 4167"/>
             </a:avLst>
           </a:prstGeom>
           <a:solidFill>
-            <a:srgbClr val="0B2239"/>
+            <a:srgbClr val="EEF3F6"/>
           </a:solidFill>
           <a:ln/>
         </p:spPr>
       </p:sp>
       <p:sp>
         <p:nvSpPr>
-          <p:cNvPr id="28" name="Text 25"/>
-          <p:cNvSpPr txBox="1"/>
-          <p:nvPr/>
-        </p:nvSpPr>
-        <p:spPr>
-          <a:xfrm>
-            <a:off x="777240" y="4983480"/>
-            <a:ext cx="10698480" cy="960120"/>
+          <p:cNvPr id="28" name="Shape 25"/>
+          <p:cNvSpPr/>
+          <p:nvPr/>
+        </p:nvSpPr>
+        <p:spPr>
+          <a:xfrm>
+            <a:off x="749808" y="4023360"/>
+            <a:ext cx="438912" cy="438912"/>
+          </a:xfrm>
+          <a:prstGeom prst="ellipse">
+            <a:avLst/>
+          </a:prstGeom>
+          <a:solidFill>
+            <a:srgbClr val="C8701E"/>
+          </a:solidFill>
+          <a:ln/>
+        </p:spPr>
+      </p:sp>
+      <p:sp>
+        <p:nvSpPr>
+          <p:cNvPr id="29" name="Text 26"/>
+          <p:cNvSpPr txBox="1"/>
+          <p:nvPr/>
+        </p:nvSpPr>
+        <p:spPr>
+          <a:xfrm>
+            <a:off x="749808" y="4023360"/>
+            <a:ext cx="438912" cy="438912"/>
           </a:xfrm>
           <a:prstGeom prst="rect">
             <a:avLst/>
@@ -16112,11 +18427,209 @@
           <a:bodyPr wrap="square" lIns="0" tIns="0" rIns="0" bIns="0" rtlCol="0" anchor="ctr"/>
           <a:lstStyle/>
           <a:p>
+            <a:pPr algn="ctr" indent="0" marL="0">
+              <a:buNone/>
+            </a:pPr>
+            <a:r>
+              <a:rPr lang="en-US" sz="1100" b="1" dirty="0">
+                <a:solidFill>
+                  <a:srgbClr val="FFFFFF"/>
+                </a:solidFill>
+                <a:latin typeface="Arial" pitchFamily="34" charset="0"/>
+                <a:ea typeface="Arial" pitchFamily="34" charset="-122"/>
+                <a:cs typeface="Arial" pitchFamily="34" charset="-120"/>
+              </a:rPr>
+              <a:t>Q4</a:t>
+            </a:r>
+            <a:endParaRPr lang="en-US" sz="1100" dirty="0"/>
+          </a:p>
+        </p:txBody>
+      </p:sp>
+      <p:sp>
+        <p:nvSpPr>
+          <p:cNvPr id="30" name="Text 27"/>
+          <p:cNvSpPr txBox="1"/>
+          <p:nvPr/>
+        </p:nvSpPr>
+        <p:spPr>
+          <a:xfrm>
+            <a:off x="1325880" y="4023360"/>
+            <a:ext cx="2560320" cy="347472"/>
+          </a:xfrm>
+          <a:prstGeom prst="rect">
+            <a:avLst/>
+          </a:prstGeom>
+          <a:noFill/>
+          <a:ln/>
+        </p:spPr>
+        <p:txBody>
+          <a:bodyPr wrap="square" lIns="0" tIns="0" rIns="0" bIns="0" rtlCol="0" anchor="ctr"/>
+          <a:lstStyle/>
+          <a:p>
             <a:pPr indent="0" marL="0">
               <a:buNone/>
             </a:pPr>
             <a:r>
-              <a:rPr lang="en-US" sz="1500" b="1" dirty="0">
+              <a:rPr lang="en-US" sz="1400" b="1" dirty="0">
+                <a:solidFill>
+                  <a:srgbClr val="0B2239"/>
+                </a:solidFill>
+                <a:latin typeface="Arial" pitchFamily="34" charset="0"/>
+                <a:ea typeface="Arial" pitchFamily="34" charset="-122"/>
+                <a:cs typeface="Arial" pitchFamily="34" charset="-120"/>
+              </a:rPr>
+              <a:t>HGB comparison</a:t>
+            </a:r>
+            <a:endParaRPr lang="en-US" sz="1400" dirty="0"/>
+          </a:p>
+        </p:txBody>
+      </p:sp>
+      <p:sp>
+        <p:nvSpPr>
+          <p:cNvPr id="31" name="Text 28"/>
+          <p:cNvSpPr txBox="1"/>
+          <p:nvPr/>
+        </p:nvSpPr>
+        <p:spPr>
+          <a:xfrm>
+            <a:off x="749808" y="4553712"/>
+            <a:ext cx="3108960" cy="420624"/>
+          </a:xfrm>
+          <a:prstGeom prst="rect">
+            <a:avLst/>
+          </a:prstGeom>
+          <a:noFill/>
+          <a:ln/>
+        </p:spPr>
+        <p:txBody>
+          <a:bodyPr wrap="square" lIns="0" tIns="0" rIns="0" bIns="0" rtlCol="0" anchor="t"/>
+          <a:lstStyle/>
+          <a:p>
+            <a:pPr indent="0" marL="0">
+              <a:buNone/>
+            </a:pPr>
+            <a:r>
+              <a:rPr lang="en-US" sz="2400" b="1" dirty="0">
+                <a:solidFill>
+                  <a:srgbClr val="0B2239"/>
+                </a:solidFill>
+                <a:latin typeface="Arial" pitchFamily="34" charset="0"/>
+                <a:ea typeface="Arial" pitchFamily="34" charset="-122"/>
+                <a:cs typeface="Arial" pitchFamily="34" charset="-120"/>
+              </a:rPr>
+              <a:t>-3,21</a:t>
+            </a:r>
+            <a:endParaRPr lang="en-US" sz="2400" dirty="0"/>
+          </a:p>
+        </p:txBody>
+      </p:sp>
+      <p:sp>
+        <p:nvSpPr>
+          <p:cNvPr id="32" name="Text 29"/>
+          <p:cNvSpPr txBox="1"/>
+          <p:nvPr/>
+        </p:nvSpPr>
+        <p:spPr>
+          <a:xfrm>
+            <a:off x="749808" y="5010912"/>
+            <a:ext cx="3127248" cy="438912"/>
+          </a:xfrm>
+          <a:prstGeom prst="rect">
+            <a:avLst/>
+          </a:prstGeom>
+          <a:noFill/>
+          <a:ln/>
+        </p:spPr>
+        <p:txBody>
+          <a:bodyPr wrap="square" lIns="0" tIns="0" rIns="0" bIns="0" rtlCol="0" anchor="t"/>
+          <a:lstStyle/>
+          <a:p>
+            <a:pPr indent="0" marL="0">
+              <a:buNone/>
+            </a:pPr>
+            <a:r>
+              <a:rPr lang="en-US" sz="1150" dirty="0">
+                <a:solidFill>
+                  <a:srgbClr val="1B2733"/>
+                </a:solidFill>
+                <a:latin typeface="Arial" pitchFamily="34" charset="0"/>
+                <a:ea typeface="Arial" pitchFamily="34" charset="-122"/>
+                <a:cs typeface="Arial" pitchFamily="34" charset="-120"/>
+              </a:rPr>
+              <a:t>delta trajectory MAE; HGB169 là candidate có điều kiện</a:t>
+            </a:r>
+            <a:endParaRPr lang="en-US" sz="1150" dirty="0"/>
+          </a:p>
+        </p:txBody>
+      </p:sp>
+      <p:sp>
+        <p:nvSpPr>
+          <p:cNvPr id="33" name="Shape 30"/>
+          <p:cNvSpPr/>
+          <p:nvPr/>
+        </p:nvSpPr>
+        <p:spPr>
+          <a:xfrm>
+            <a:off x="4297680" y="3840480"/>
+            <a:ext cx="3566160" cy="1755648"/>
+          </a:xfrm>
+          <a:prstGeom prst="roundRect">
+            <a:avLst>
+              <a:gd name="adj" fmla="val 4167"/>
+            </a:avLst>
+          </a:prstGeom>
+          <a:solidFill>
+            <a:srgbClr val="EEF3F6"/>
+          </a:solidFill>
+          <a:ln/>
+        </p:spPr>
+      </p:sp>
+      <p:sp>
+        <p:nvSpPr>
+          <p:cNvPr id="34" name="Shape 31"/>
+          <p:cNvSpPr/>
+          <p:nvPr/>
+        </p:nvSpPr>
+        <p:spPr>
+          <a:xfrm>
+            <a:off x="4498848" y="4023360"/>
+            <a:ext cx="438912" cy="438912"/>
+          </a:xfrm>
+          <a:prstGeom prst="ellipse">
+            <a:avLst/>
+          </a:prstGeom>
+          <a:solidFill>
+            <a:srgbClr val="C8701E"/>
+          </a:solidFill>
+          <a:ln/>
+        </p:spPr>
+      </p:sp>
+      <p:sp>
+        <p:nvSpPr>
+          <p:cNvPr id="35" name="Text 32"/>
+          <p:cNvSpPr txBox="1"/>
+          <p:nvPr/>
+        </p:nvSpPr>
+        <p:spPr>
+          <a:xfrm>
+            <a:off x="4498848" y="4023360"/>
+            <a:ext cx="438912" cy="438912"/>
+          </a:xfrm>
+          <a:prstGeom prst="rect">
+            <a:avLst/>
+          </a:prstGeom>
+          <a:noFill/>
+          <a:ln/>
+        </p:spPr>
+        <p:txBody>
+          <a:bodyPr wrap="square" lIns="0" tIns="0" rIns="0" bIns="0" rtlCol="0" anchor="ctr"/>
+          <a:lstStyle/>
+          <a:p>
+            <a:pPr algn="ctr" indent="0" marL="0">
+              <a:buNone/>
+            </a:pPr>
+            <a:r>
+              <a:rPr lang="en-US" sz="1100" b="1" dirty="0">
                 <a:solidFill>
                   <a:srgbClr val="FFFFFF"/>
                 </a:solidFill>
@@ -16124,23 +18637,363 @@
                 <a:ea typeface="Arial" pitchFamily="34" charset="-122"/>
                 <a:cs typeface="Arial" pitchFamily="34" charset="-120"/>
               </a:rPr>
-              <a:t>Đóng góp Big Data: </a:t>
-            </a:r>
+              <a:t>Q5</a:t>
+            </a:r>
+            <a:endParaRPr lang="en-US" sz="1100" dirty="0"/>
+          </a:p>
+        </p:txBody>
+      </p:sp>
+      <p:sp>
+        <p:nvSpPr>
+          <p:cNvPr id="36" name="Text 33"/>
+          <p:cNvSpPr txBox="1"/>
+          <p:nvPr/>
+        </p:nvSpPr>
+        <p:spPr>
+          <a:xfrm>
+            <a:off x="5074920" y="4023360"/>
+            <a:ext cx="2560320" cy="347472"/>
+          </a:xfrm>
+          <a:prstGeom prst="rect">
+            <a:avLst/>
+          </a:prstGeom>
+          <a:noFill/>
+          <a:ln/>
+        </p:spPr>
+        <p:txBody>
+          <a:bodyPr wrap="square" lIns="0" tIns="0" rIns="0" bIns="0" rtlCol="0" anchor="ctr"/>
+          <a:lstStyle/>
+          <a:p>
             <a:pPr indent="0" marL="0">
               <a:buNone/>
             </a:pPr>
             <a:r>
-              <a:rPr lang="en-US" sz="1500" dirty="0">
-                <a:solidFill>
-                  <a:srgbClr val="BFD9E3"/>
-                </a:solidFill>
-                <a:latin typeface="Arial" pitchFamily="34" charset="0"/>
-                <a:ea typeface="Arial" pitchFamily="34" charset="-122"/>
-                <a:cs typeface="Arial" pitchFamily="34" charset="-120"/>
-              </a:rPr>
-              <a:t>batch ETL nhiều file, Parquet Silver/Gold, parity Pandas–PySpark và artifact có hash, run_info để tái lập.</a:t>
-            </a:r>
-            <a:endParaRPr lang="en-US" sz="1500" dirty="0"/>
+              <a:rPr lang="en-US" sz="1400" b="1" dirty="0">
+                <a:solidFill>
+                  <a:srgbClr val="0B2239"/>
+                </a:solidFill>
+                <a:latin typeface="Arial" pitchFamily="34" charset="0"/>
+                <a:ea typeface="Arial" pitchFamily="34" charset="-122"/>
+                <a:cs typeface="Arial" pitchFamily="34" charset="-120"/>
+              </a:rPr>
+              <a:t>Warning policy</a:t>
+            </a:r>
+            <a:endParaRPr lang="en-US" sz="1400" dirty="0"/>
+          </a:p>
+        </p:txBody>
+      </p:sp>
+      <p:sp>
+        <p:nvSpPr>
+          <p:cNvPr id="37" name="Text 34"/>
+          <p:cNvSpPr txBox="1"/>
+          <p:nvPr/>
+        </p:nvSpPr>
+        <p:spPr>
+          <a:xfrm>
+            <a:off x="4498848" y="4553712"/>
+            <a:ext cx="3108960" cy="420624"/>
+          </a:xfrm>
+          <a:prstGeom prst="rect">
+            <a:avLst/>
+          </a:prstGeom>
+          <a:noFill/>
+          <a:ln/>
+        </p:spPr>
+        <p:txBody>
+          <a:bodyPr wrap="square" lIns="0" tIns="0" rIns="0" bIns="0" rtlCol="0" anchor="t"/>
+          <a:lstStyle/>
+          <a:p>
+            <a:pPr indent="0" marL="0">
+              <a:buNone/>
+            </a:pPr>
+            <a:r>
+              <a:rPr lang="en-US" sz="2400" b="1" dirty="0">
+                <a:solidFill>
+                  <a:srgbClr val="0B2239"/>
+                </a:solidFill>
+                <a:latin typeface="Arial" pitchFamily="34" charset="0"/>
+                <a:ea typeface="Arial" pitchFamily="34" charset="-122"/>
+                <a:cs typeface="Arial" pitchFamily="34" charset="-120"/>
+              </a:rPr>
+              <a:t>51% / 45%</a:t>
+            </a:r>
+            <a:endParaRPr lang="en-US" sz="2400" dirty="0"/>
+          </a:p>
+        </p:txBody>
+      </p:sp>
+      <p:sp>
+        <p:nvSpPr>
+          <p:cNvPr id="38" name="Text 35"/>
+          <p:cNvSpPr txBox="1"/>
+          <p:nvPr/>
+        </p:nvSpPr>
+        <p:spPr>
+          <a:xfrm>
+            <a:off x="4498848" y="5010912"/>
+            <a:ext cx="3127248" cy="438912"/>
+          </a:xfrm>
+          <a:prstGeom prst="rect">
+            <a:avLst/>
+          </a:prstGeom>
+          <a:noFill/>
+          <a:ln/>
+        </p:spPr>
+        <p:txBody>
+          <a:bodyPr wrap="square" lIns="0" tIns="0" rIns="0" bIns="0" rtlCol="0" anchor="t"/>
+          <a:lstStyle/>
+          <a:p>
+            <a:pPr indent="0" marL="0">
+              <a:buNone/>
+            </a:pPr>
+            <a:r>
+              <a:rPr lang="en-US" sz="1150" dirty="0">
+                <a:solidFill>
+                  <a:srgbClr val="1B2733"/>
+                </a:solidFill>
+                <a:latin typeface="Arial" pitchFamily="34" charset="0"/>
+                <a:ea typeface="Arial" pitchFamily="34" charset="-122"/>
+                <a:cs typeface="Arial" pitchFamily="34" charset="-120"/>
+              </a:rPr>
+              <a:t>threshold 30: HGB126 / HGB169; policy tách khỏi predictor</a:t>
+            </a:r>
+            <a:endParaRPr lang="en-US" sz="1150" dirty="0"/>
+          </a:p>
+        </p:txBody>
+      </p:sp>
+      <p:sp>
+        <p:nvSpPr>
+          <p:cNvPr id="39" name="Shape 36"/>
+          <p:cNvSpPr/>
+          <p:nvPr/>
+        </p:nvSpPr>
+        <p:spPr>
+          <a:xfrm>
+            <a:off x="8046720" y="3840480"/>
+            <a:ext cx="3566160" cy="1755648"/>
+          </a:xfrm>
+          <a:prstGeom prst="roundRect">
+            <a:avLst>
+              <a:gd name="adj" fmla="val 4167"/>
+            </a:avLst>
+          </a:prstGeom>
+          <a:solidFill>
+            <a:srgbClr val="EEF3F6"/>
+          </a:solidFill>
+          <a:ln/>
+        </p:spPr>
+      </p:sp>
+      <p:sp>
+        <p:nvSpPr>
+          <p:cNvPr id="40" name="Shape 37"/>
+          <p:cNvSpPr/>
+          <p:nvPr/>
+        </p:nvSpPr>
+        <p:spPr>
+          <a:xfrm>
+            <a:off x="8247888" y="4023360"/>
+            <a:ext cx="438912" cy="438912"/>
+          </a:xfrm>
+          <a:prstGeom prst="ellipse">
+            <a:avLst/>
+          </a:prstGeom>
+          <a:solidFill>
+            <a:srgbClr val="C8701E"/>
+          </a:solidFill>
+          <a:ln/>
+        </p:spPr>
+      </p:sp>
+      <p:sp>
+        <p:nvSpPr>
+          <p:cNvPr id="41" name="Text 38"/>
+          <p:cNvSpPr txBox="1"/>
+          <p:nvPr/>
+        </p:nvSpPr>
+        <p:spPr>
+          <a:xfrm>
+            <a:off x="8247888" y="4023360"/>
+            <a:ext cx="438912" cy="438912"/>
+          </a:xfrm>
+          <a:prstGeom prst="rect">
+            <a:avLst/>
+          </a:prstGeom>
+          <a:noFill/>
+          <a:ln/>
+        </p:spPr>
+        <p:txBody>
+          <a:bodyPr wrap="square" lIns="0" tIns="0" rIns="0" bIns="0" rtlCol="0" anchor="ctr"/>
+          <a:lstStyle/>
+          <a:p>
+            <a:pPr algn="ctr" indent="0" marL="0">
+              <a:buNone/>
+            </a:pPr>
+            <a:r>
+              <a:rPr lang="en-US" sz="1100" b="1" dirty="0">
+                <a:solidFill>
+                  <a:srgbClr val="FFFFFF"/>
+                </a:solidFill>
+                <a:latin typeface="Arial" pitchFamily="34" charset="0"/>
+                <a:ea typeface="Arial" pitchFamily="34" charset="-122"/>
+                <a:cs typeface="Arial" pitchFamily="34" charset="-120"/>
+              </a:rPr>
+              <a:t>Q6</a:t>
+            </a:r>
+            <a:endParaRPr lang="en-US" sz="1100" dirty="0"/>
+          </a:p>
+        </p:txBody>
+      </p:sp>
+      <p:sp>
+        <p:nvSpPr>
+          <p:cNvPr id="42" name="Text 39"/>
+          <p:cNvSpPr txBox="1"/>
+          <p:nvPr/>
+        </p:nvSpPr>
+        <p:spPr>
+          <a:xfrm>
+            <a:off x="8823960" y="4023360"/>
+            <a:ext cx="2560320" cy="347472"/>
+          </a:xfrm>
+          <a:prstGeom prst="rect">
+            <a:avLst/>
+          </a:prstGeom>
+          <a:noFill/>
+          <a:ln/>
+        </p:spPr>
+        <p:txBody>
+          <a:bodyPr wrap="square" lIns="0" tIns="0" rIns="0" bIns="0" rtlCol="0" anchor="ctr"/>
+          <a:lstStyle/>
+          <a:p>
+            <a:pPr indent="0" marL="0">
+              <a:buNone/>
+            </a:pPr>
+            <a:r>
+              <a:rPr lang="en-US" sz="1400" b="1" dirty="0">
+                <a:solidFill>
+                  <a:srgbClr val="0B2239"/>
+                </a:solidFill>
+                <a:latin typeface="Arial" pitchFamily="34" charset="0"/>
+                <a:ea typeface="Arial" pitchFamily="34" charset="-122"/>
+                <a:cs typeface="Arial" pitchFamily="34" charset="-120"/>
+              </a:rPr>
+              <a:t>Chuyển miền</a:t>
+            </a:r>
+            <a:endParaRPr lang="en-US" sz="1400" dirty="0"/>
+          </a:p>
+        </p:txBody>
+      </p:sp>
+      <p:sp>
+        <p:nvSpPr>
+          <p:cNvPr id="43" name="Text 40"/>
+          <p:cNvSpPr txBox="1"/>
+          <p:nvPr/>
+        </p:nvSpPr>
+        <p:spPr>
+          <a:xfrm>
+            <a:off x="8247888" y="4553712"/>
+            <a:ext cx="3108960" cy="420624"/>
+          </a:xfrm>
+          <a:prstGeom prst="rect">
+            <a:avLst/>
+          </a:prstGeom>
+          <a:noFill/>
+          <a:ln/>
+        </p:spPr>
+        <p:txBody>
+          <a:bodyPr wrap="square" lIns="0" tIns="0" rIns="0" bIns="0" rtlCol="0" anchor="t"/>
+          <a:lstStyle/>
+          <a:p>
+            <a:pPr indent="0" marL="0">
+              <a:buNone/>
+            </a:pPr>
+            <a:r>
+              <a:rPr lang="en-US" sz="2400" b="1" dirty="0">
+                <a:solidFill>
+                  <a:srgbClr val="0B2239"/>
+                </a:solidFill>
+                <a:latin typeface="Arial" pitchFamily="34" charset="0"/>
+                <a:ea typeface="Arial" pitchFamily="34" charset="-122"/>
+                <a:cs typeface="Arial" pitchFamily="34" charset="-120"/>
+              </a:rPr>
+              <a:t>Không</a:t>
+            </a:r>
+            <a:endParaRPr lang="en-US" sz="2400" dirty="0"/>
+          </a:p>
+        </p:txBody>
+      </p:sp>
+      <p:sp>
+        <p:nvSpPr>
+          <p:cNvPr id="44" name="Text 41"/>
+          <p:cNvSpPr txBox="1"/>
+          <p:nvPr/>
+        </p:nvSpPr>
+        <p:spPr>
+          <a:xfrm>
+            <a:off x="8247888" y="5010912"/>
+            <a:ext cx="3127248" cy="438912"/>
+          </a:xfrm>
+          <a:prstGeom prst="rect">
+            <a:avLst/>
+          </a:prstGeom>
+          <a:noFill/>
+          <a:ln/>
+        </p:spPr>
+        <p:txBody>
+          <a:bodyPr wrap="square" lIns="0" tIns="0" rIns="0" bIns="0" rtlCol="0" anchor="t"/>
+          <a:lstStyle/>
+          <a:p>
+            <a:pPr indent="0" marL="0">
+              <a:buNone/>
+            </a:pPr>
+            <a:r>
+              <a:rPr lang="en-US" sz="1150" dirty="0">
+                <a:solidFill>
+                  <a:srgbClr val="1B2733"/>
+                </a:solidFill>
+                <a:latin typeface="Arial" pitchFamily="34" charset="0"/>
+                <a:ea typeface="Arial" pitchFamily="34" charset="-122"/>
+                <a:cs typeface="Arial" pitchFamily="34" charset="-120"/>
+              </a:rPr>
+              <a:t>FD001 cần huấn luyện lại hoặc domain adaptation</a:t>
+            </a:r>
+            <a:endParaRPr lang="en-US" sz="1150" dirty="0"/>
+          </a:p>
+        </p:txBody>
+      </p:sp>
+      <p:sp>
+        <p:nvSpPr>
+          <p:cNvPr id="45" name="Text 42"/>
+          <p:cNvSpPr txBox="1"/>
+          <p:nvPr/>
+        </p:nvSpPr>
+        <p:spPr>
+          <a:xfrm>
+            <a:off x="548640" y="5897880"/>
+            <a:ext cx="11064240" cy="320040"/>
+          </a:xfrm>
+          <a:prstGeom prst="rect">
+            <a:avLst/>
+          </a:prstGeom>
+          <a:noFill/>
+          <a:ln/>
+        </p:spPr>
+        <p:txBody>
+          <a:bodyPr wrap="square" lIns="0" tIns="0" rIns="0" bIns="0" rtlCol="0" anchor="t"/>
+          <a:lstStyle/>
+          <a:p>
+            <a:pPr indent="0" marL="0">
+              <a:buNone/>
+            </a:pPr>
+            <a:r>
+              <a:rPr lang="en-US" sz="1250" b="1" dirty="0">
+                <a:solidFill>
+                  <a:srgbClr val="0B2239"/>
+                </a:solidFill>
+                <a:latin typeface="Arial" pitchFamily="34" charset="0"/>
+                <a:ea typeface="Arial" pitchFamily="34" charset="-122"/>
+                <a:cs typeface="Arial" pitchFamily="34" charset="-120"/>
+              </a:rPr>
+              <a:t>Đóng góp Big Data: batch ETL nhiều file, Parquet Silver/Gold, parity Pandas–PySpark và artifact có hash, run_info để tái lập.</a:t>
+            </a:r>
+            <a:endParaRPr lang="en-US" sz="1250" dirty="0"/>
           </a:p>
         </p:txBody>
       </p:sp>
@@ -16270,7 +19123,7 @@
                 <a:ea typeface="Arial" pitchFamily="34" charset="-122"/>
                 <a:cs typeface="Arial" pitchFamily="34" charset="-120"/>
               </a:rPr>
-              <a:t>Nội dung trình bày và ba câu hỏi nghiên cứu</a:t>
+              <a:t>Nội dung trình bày và sáu câu hỏi nghiên cứu</a:t>
             </a:r>
             <a:endParaRPr lang="en-US" sz="2700" dirty="0"/>
           </a:p>
@@ -16309,7 +19162,7 @@
                 <a:ea typeface="Arial" pitchFamily="34" charset="-122"/>
                 <a:cs typeface="Arial" pitchFamily="34" charset="-120"/>
               </a:rPr>
-              <a:t>30 phút, 5 phần; kết luận ở cuối trả lời lần lượt từng câu hỏi</a:t>
+              <a:t>18–20 phút gồm demo dashboard; kết luận ở slide 19 trả lời lần lượt Q1–Q6</a:t>
             </a:r>
             <a:endParaRPr lang="en-US" sz="1500" dirty="0"/>
           </a:p>
@@ -16401,8 +19254,8 @@
         </p:nvSpPr>
         <p:spPr>
           <a:xfrm>
-            <a:off x="548640" y="2011680"/>
-            <a:ext cx="548640" cy="548640"/>
+            <a:off x="548640" y="1938528"/>
+            <a:ext cx="438912" cy="438912"/>
           </a:xfrm>
           <a:prstGeom prst="ellipse">
             <a:avLst/>
@@ -16421,8 +19274,8 @@
         </p:nvSpPr>
         <p:spPr>
           <a:xfrm>
-            <a:off x="548640" y="2011680"/>
-            <a:ext cx="548640" cy="548640"/>
+            <a:off x="548640" y="1938528"/>
+            <a:ext cx="438912" cy="438912"/>
           </a:xfrm>
           <a:prstGeom prst="rect">
             <a:avLst/>
@@ -16438,7 +19291,7 @@
               <a:buNone/>
             </a:pPr>
             <a:r>
-              <a:rPr lang="en-US" sz="1600" b="1" dirty="0">
+              <a:rPr lang="en-US" sz="1200" b="1" dirty="0">
                 <a:solidFill>
                   <a:srgbClr val="FFFFFF"/>
                 </a:solidFill>
@@ -16448,7 +19301,7 @@
               </a:rPr>
               <a:t>1</a:t>
             </a:r>
-            <a:endParaRPr lang="en-US" sz="1600" dirty="0"/>
+            <a:endParaRPr lang="en-US" sz="1200" dirty="0"/>
           </a:p>
         </p:txBody>
       </p:sp>
@@ -16460,8 +19313,8 @@
         </p:nvSpPr>
         <p:spPr>
           <a:xfrm>
-            <a:off x="1280160" y="2029968"/>
-            <a:ext cx="4206240" cy="310896"/>
+            <a:off x="1143000" y="1929384"/>
+            <a:ext cx="4389120" cy="256032"/>
           </a:xfrm>
           <a:prstGeom prst="rect">
             <a:avLst/>
@@ -16477,7 +19330,7 @@
               <a:buNone/>
             </a:pPr>
             <a:r>
-              <a:rPr lang="en-US" sz="1800" b="1" dirty="0">
+              <a:rPr lang="en-US" sz="1550" b="1" dirty="0">
                 <a:solidFill>
                   <a:srgbClr val="1B2733"/>
                 </a:solidFill>
@@ -16487,7 +19340,7 @@
               </a:rPr>
               <a:t>Bài toán và dữ liệu</a:t>
             </a:r>
-            <a:endParaRPr lang="en-US" sz="1800" dirty="0"/>
+            <a:endParaRPr lang="en-US" sz="1550" dirty="0"/>
           </a:p>
         </p:txBody>
       </p:sp>
@@ -16499,8 +19352,8 @@
         </p:nvSpPr>
         <p:spPr>
           <a:xfrm>
-            <a:off x="1280160" y="2340864"/>
-            <a:ext cx="4206240" cy="237744"/>
+            <a:off x="1143000" y="2203704"/>
+            <a:ext cx="4389120" cy="210312"/>
           </a:xfrm>
           <a:prstGeom prst="rect">
             <a:avLst/>
@@ -16516,7 +19369,7 @@
               <a:buNone/>
             </a:pPr>
             <a:r>
-              <a:rPr lang="en-US" sz="1250" dirty="0">
+              <a:rPr lang="en-US" sz="1150" dirty="0">
                 <a:solidFill>
                   <a:srgbClr val="5A6B7B"/>
                 </a:solidFill>
@@ -16524,9 +19377,9 @@
                 <a:ea typeface="Arial" pitchFamily="34" charset="-122"/>
                 <a:cs typeface="Arial" pitchFamily="34" charset="-120"/>
               </a:rPr>
-              <a:t>Slide 2–5 · 6 phút</a:t>
-            </a:r>
-            <a:endParaRPr lang="en-US" sz="1250" dirty="0"/>
+              <a:t>Slide 2–5 · 3 phút</a:t>
+            </a:r>
+            <a:endParaRPr lang="en-US" sz="1150" dirty="0"/>
           </a:p>
         </p:txBody>
       </p:sp>
@@ -16538,8 +19391,8 @@
         </p:nvSpPr>
         <p:spPr>
           <a:xfrm>
-            <a:off x="548640" y="2834640"/>
-            <a:ext cx="548640" cy="548640"/>
+            <a:off x="548640" y="2560320"/>
+            <a:ext cx="438912" cy="438912"/>
           </a:xfrm>
           <a:prstGeom prst="ellipse">
             <a:avLst/>
@@ -16558,8 +19411,8 @@
         </p:nvSpPr>
         <p:spPr>
           <a:xfrm>
-            <a:off x="548640" y="2834640"/>
-            <a:ext cx="548640" cy="548640"/>
+            <a:off x="548640" y="2560320"/>
+            <a:ext cx="438912" cy="438912"/>
           </a:xfrm>
           <a:prstGeom prst="rect">
             <a:avLst/>
@@ -16575,7 +19428,7 @@
               <a:buNone/>
             </a:pPr>
             <a:r>
-              <a:rPr lang="en-US" sz="1600" b="1" dirty="0">
+              <a:rPr lang="en-US" sz="1200" b="1" dirty="0">
                 <a:solidFill>
                   <a:srgbClr val="FFFFFF"/>
                 </a:solidFill>
@@ -16585,7 +19438,7 @@
               </a:rPr>
               <a:t>2</a:t>
             </a:r>
-            <a:endParaRPr lang="en-US" sz="1600" dirty="0"/>
+            <a:endParaRPr lang="en-US" sz="1200" dirty="0"/>
           </a:p>
         </p:txBody>
       </p:sp>
@@ -16597,8 +19450,8 @@
         </p:nvSpPr>
         <p:spPr>
           <a:xfrm>
-            <a:off x="1280160" y="2852928"/>
-            <a:ext cx="4206240" cy="310896"/>
+            <a:off x="1143000" y="2551176"/>
+            <a:ext cx="4389120" cy="256032"/>
           </a:xfrm>
           <a:prstGeom prst="rect">
             <a:avLst/>
@@ -16614,7 +19467,7 @@
               <a:buNone/>
             </a:pPr>
             <a:r>
-              <a:rPr lang="en-US" sz="1800" b="1" dirty="0">
+              <a:rPr lang="en-US" sz="1550" b="1" dirty="0">
                 <a:solidFill>
                   <a:srgbClr val="1B2733"/>
                 </a:solidFill>
@@ -16624,7 +19477,7 @@
               </a:rPr>
               <a:t>Pipeline Big Data</a:t>
             </a:r>
-            <a:endParaRPr lang="en-US" sz="1800" dirty="0"/>
+            <a:endParaRPr lang="en-US" sz="1550" dirty="0"/>
           </a:p>
         </p:txBody>
       </p:sp>
@@ -16636,8 +19489,8 @@
         </p:nvSpPr>
         <p:spPr>
           <a:xfrm>
-            <a:off x="1280160" y="3163824"/>
-            <a:ext cx="4206240" cy="237744"/>
+            <a:off x="1143000" y="2825496"/>
+            <a:ext cx="4389120" cy="210312"/>
           </a:xfrm>
           <a:prstGeom prst="rect">
             <a:avLst/>
@@ -16653,7 +19506,7 @@
               <a:buNone/>
             </a:pPr>
             <a:r>
-              <a:rPr lang="en-US" sz="1250" dirty="0">
+              <a:rPr lang="en-US" sz="1150" dirty="0">
                 <a:solidFill>
                   <a:srgbClr val="5A6B7B"/>
                 </a:solidFill>
@@ -16661,9 +19514,9 @@
                 <a:ea typeface="Arial" pitchFamily="34" charset="-122"/>
                 <a:cs typeface="Arial" pitchFamily="34" charset="-120"/>
               </a:rPr>
-              <a:t>Slide 6–7 · 4 phút</a:t>
-            </a:r>
-            <a:endParaRPr lang="en-US" sz="1250" dirty="0"/>
+              <a:t>Slide 6–7 · 3 phút</a:t>
+            </a:r>
+            <a:endParaRPr lang="en-US" sz="1150" dirty="0"/>
           </a:p>
         </p:txBody>
       </p:sp>
@@ -16675,8 +19528,8 @@
         </p:nvSpPr>
         <p:spPr>
           <a:xfrm>
-            <a:off x="548640" y="3657600"/>
-            <a:ext cx="548640" cy="548640"/>
+            <a:off x="548640" y="3182112"/>
+            <a:ext cx="438912" cy="438912"/>
           </a:xfrm>
           <a:prstGeom prst="ellipse">
             <a:avLst/>
@@ -16695,8 +19548,8 @@
         </p:nvSpPr>
         <p:spPr>
           <a:xfrm>
-            <a:off x="548640" y="3657600"/>
-            <a:ext cx="548640" cy="548640"/>
+            <a:off x="548640" y="3182112"/>
+            <a:ext cx="438912" cy="438912"/>
           </a:xfrm>
           <a:prstGeom prst="rect">
             <a:avLst/>
@@ -16712,7 +19565,7 @@
               <a:buNone/>
             </a:pPr>
             <a:r>
-              <a:rPr lang="en-US" sz="1600" b="1" dirty="0">
+              <a:rPr lang="en-US" sz="1200" b="1" dirty="0">
                 <a:solidFill>
                   <a:srgbClr val="FFFFFF"/>
                 </a:solidFill>
@@ -16722,7 +19575,7 @@
               </a:rPr>
               <a:t>3</a:t>
             </a:r>
-            <a:endParaRPr lang="en-US" sz="1600" dirty="0"/>
+            <a:endParaRPr lang="en-US" sz="1200" dirty="0"/>
           </a:p>
         </p:txBody>
       </p:sp>
@@ -16734,8 +19587,8 @@
         </p:nvSpPr>
         <p:spPr>
           <a:xfrm>
-            <a:off x="1280160" y="3675888"/>
-            <a:ext cx="4206240" cy="310896"/>
+            <a:off x="1143000" y="3172968"/>
+            <a:ext cx="4389120" cy="256032"/>
           </a:xfrm>
           <a:prstGeom prst="rect">
             <a:avLst/>
@@ -16751,7 +19604,7 @@
               <a:buNone/>
             </a:pPr>
             <a:r>
-              <a:rPr lang="en-US" sz="1800" b="1" dirty="0">
+              <a:rPr lang="en-US" sz="1550" b="1" dirty="0">
                 <a:solidFill>
                   <a:srgbClr val="1B2733"/>
                 </a:solidFill>
@@ -16761,7 +19614,7 @@
               </a:rPr>
               <a:t>Phân tích chuỗi thời gian</a:t>
             </a:r>
-            <a:endParaRPr lang="en-US" sz="1800" dirty="0"/>
+            <a:endParaRPr lang="en-US" sz="1550" dirty="0"/>
           </a:p>
         </p:txBody>
       </p:sp>
@@ -16773,8 +19626,8 @@
         </p:nvSpPr>
         <p:spPr>
           <a:xfrm>
-            <a:off x="1280160" y="3986784"/>
-            <a:ext cx="4206240" cy="237744"/>
+            <a:off x="1143000" y="3447288"/>
+            <a:ext cx="4389120" cy="210312"/>
           </a:xfrm>
           <a:prstGeom prst="rect">
             <a:avLst/>
@@ -16790,7 +19643,7 @@
               <a:buNone/>
             </a:pPr>
             <a:r>
-              <a:rPr lang="en-US" sz="1250" dirty="0">
+              <a:rPr lang="en-US" sz="1150" dirty="0">
                 <a:solidFill>
                   <a:srgbClr val="5A6B7B"/>
                 </a:solidFill>
@@ -16798,9 +19651,9 @@
                 <a:ea typeface="Arial" pitchFamily="34" charset="-122"/>
                 <a:cs typeface="Arial" pitchFamily="34" charset="-120"/>
               </a:rPr>
-              <a:t>Slide 8–11 · 6 phút</a:t>
-            </a:r>
-            <a:endParaRPr lang="en-US" sz="1250" dirty="0"/>
+              <a:t>Slide 8–11 · 3 phút</a:t>
+            </a:r>
+            <a:endParaRPr lang="en-US" sz="1150" dirty="0"/>
           </a:p>
         </p:txBody>
       </p:sp>
@@ -16812,8 +19665,8 @@
         </p:nvSpPr>
         <p:spPr>
           <a:xfrm>
-            <a:off x="548640" y="4480560"/>
-            <a:ext cx="548640" cy="548640"/>
+            <a:off x="548640" y="3803904"/>
+            <a:ext cx="438912" cy="438912"/>
           </a:xfrm>
           <a:prstGeom prst="ellipse">
             <a:avLst/>
@@ -16832,8 +19685,8 @@
         </p:nvSpPr>
         <p:spPr>
           <a:xfrm>
-            <a:off x="548640" y="4480560"/>
-            <a:ext cx="548640" cy="548640"/>
+            <a:off x="548640" y="3803904"/>
+            <a:ext cx="438912" cy="438912"/>
           </a:xfrm>
           <a:prstGeom prst="rect">
             <a:avLst/>
@@ -16849,7 +19702,7 @@
               <a:buNone/>
             </a:pPr>
             <a:r>
-              <a:rPr lang="en-US" sz="1600" b="1" dirty="0">
+              <a:rPr lang="en-US" sz="1200" b="1" dirty="0">
                 <a:solidFill>
                   <a:srgbClr val="FFFFFF"/>
                 </a:solidFill>
@@ -16859,7 +19712,7 @@
               </a:rPr>
               <a:t>4</a:t>
             </a:r>
-            <a:endParaRPr lang="en-US" sz="1600" dirty="0"/>
+            <a:endParaRPr lang="en-US" sz="1200" dirty="0"/>
           </a:p>
         </p:txBody>
       </p:sp>
@@ -16871,8 +19724,8 @@
         </p:nvSpPr>
         <p:spPr>
           <a:xfrm>
-            <a:off x="1280160" y="4498848"/>
-            <a:ext cx="4206240" cy="310896"/>
+            <a:off x="1143000" y="3794760"/>
+            <a:ext cx="4389120" cy="256032"/>
           </a:xfrm>
           <a:prstGeom prst="rect">
             <a:avLst/>
@@ -16888,7 +19741,7 @@
               <a:buNone/>
             </a:pPr>
             <a:r>
-              <a:rPr lang="en-US" sz="1800" b="1" dirty="0">
+              <a:rPr lang="en-US" sz="1550" b="1" dirty="0">
                 <a:solidFill>
                   <a:srgbClr val="1B2733"/>
                 </a:solidFill>
@@ -16898,7 +19751,7 @@
               </a:rPr>
               <a:t>Mô hình và đánh giá</a:t>
             </a:r>
-            <a:endParaRPr lang="en-US" sz="1800" dirty="0"/>
+            <a:endParaRPr lang="en-US" sz="1550" dirty="0"/>
           </a:p>
         </p:txBody>
       </p:sp>
@@ -16910,8 +19763,8 @@
         </p:nvSpPr>
         <p:spPr>
           <a:xfrm>
-            <a:off x="1280160" y="4809744"/>
-            <a:ext cx="4206240" cy="237744"/>
+            <a:off x="1143000" y="4069080"/>
+            <a:ext cx="4389120" cy="210312"/>
           </a:xfrm>
           <a:prstGeom prst="rect">
             <a:avLst/>
@@ -16927,7 +19780,7 @@
               <a:buNone/>
             </a:pPr>
             <a:r>
-              <a:rPr lang="en-US" sz="1250" dirty="0">
+              <a:rPr lang="en-US" sz="1150" dirty="0">
                 <a:solidFill>
                   <a:srgbClr val="5A6B7B"/>
                 </a:solidFill>
@@ -16935,9 +19788,9 @@
                 <a:ea typeface="Arial" pitchFamily="34" charset="-122"/>
                 <a:cs typeface="Arial" pitchFamily="34" charset="-120"/>
               </a:rPr>
-              <a:t>Slide 12–16 · 8 phút</a:t>
-            </a:r>
-            <a:endParaRPr lang="en-US" sz="1250" dirty="0"/>
+              <a:t>Slide 12–16 · 5 phút</a:t>
+            </a:r>
+            <a:endParaRPr lang="en-US" sz="1150" dirty="0"/>
           </a:p>
         </p:txBody>
       </p:sp>
@@ -16949,8 +19802,8 @@
         </p:nvSpPr>
         <p:spPr>
           <a:xfrm>
-            <a:off x="548640" y="5303520"/>
-            <a:ext cx="548640" cy="548640"/>
+            <a:off x="548640" y="4425696"/>
+            <a:ext cx="438912" cy="438912"/>
           </a:xfrm>
           <a:prstGeom prst="ellipse">
             <a:avLst/>
@@ -16969,8 +19822,8 @@
         </p:nvSpPr>
         <p:spPr>
           <a:xfrm>
-            <a:off x="548640" y="5303520"/>
-            <a:ext cx="548640" cy="548640"/>
+            <a:off x="548640" y="4425696"/>
+            <a:ext cx="438912" cy="438912"/>
           </a:xfrm>
           <a:prstGeom prst="rect">
             <a:avLst/>
@@ -16986,7 +19839,7 @@
               <a:buNone/>
             </a:pPr>
             <a:r>
-              <a:rPr lang="en-US" sz="1600" b="1" dirty="0">
+              <a:rPr lang="en-US" sz="1200" b="1" dirty="0">
                 <a:solidFill>
                   <a:srgbClr val="FFFFFF"/>
                 </a:solidFill>
@@ -16996,7 +19849,7 @@
               </a:rPr>
               <a:t>5</a:t>
             </a:r>
-            <a:endParaRPr lang="en-US" sz="1600" dirty="0"/>
+            <a:endParaRPr lang="en-US" sz="1200" dirty="0"/>
           </a:p>
         </p:txBody>
       </p:sp>
@@ -17008,8 +19861,8 @@
         </p:nvSpPr>
         <p:spPr>
           <a:xfrm>
-            <a:off x="1280160" y="5321808"/>
-            <a:ext cx="4206240" cy="310896"/>
+            <a:off x="1143000" y="4416552"/>
+            <a:ext cx="4389120" cy="256032"/>
           </a:xfrm>
           <a:prstGeom prst="rect">
             <a:avLst/>
@@ -17025,7 +19878,7 @@
               <a:buNone/>
             </a:pPr>
             <a:r>
-              <a:rPr lang="en-US" sz="1800" b="1" dirty="0">
+              <a:rPr lang="en-US" sz="1550" b="1" dirty="0">
                 <a:solidFill>
                   <a:srgbClr val="1B2733"/>
                 </a:solidFill>
@@ -17035,7 +19888,7 @@
               </a:rPr>
               <a:t>Mở rộng và kết luận</a:t>
             </a:r>
-            <a:endParaRPr lang="en-US" sz="1800" dirty="0"/>
+            <a:endParaRPr lang="en-US" sz="1550" dirty="0"/>
           </a:p>
         </p:txBody>
       </p:sp>
@@ -17047,8 +19900,8 @@
         </p:nvSpPr>
         <p:spPr>
           <a:xfrm>
-            <a:off x="1280160" y="5632704"/>
-            <a:ext cx="4206240" cy="237744"/>
+            <a:off x="1143000" y="4690872"/>
+            <a:ext cx="4389120" cy="210312"/>
           </a:xfrm>
           <a:prstGeom prst="rect">
             <a:avLst/>
@@ -17064,7 +19917,7 @@
               <a:buNone/>
             </a:pPr>
             <a:r>
-              <a:rPr lang="en-US" sz="1250" dirty="0">
+              <a:rPr lang="en-US" sz="1150" dirty="0">
                 <a:solidFill>
                   <a:srgbClr val="5A6B7B"/>
                 </a:solidFill>
@@ -17072,15 +19925,152 @@
                 <a:ea typeface="Arial" pitchFamily="34" charset="-122"/>
                 <a:cs typeface="Arial" pitchFamily="34" charset="-120"/>
               </a:rPr>
-              <a:t>Slide 17–20 · 5 phút</a:t>
-            </a:r>
-            <a:endParaRPr lang="en-US" sz="1250" dirty="0"/>
+              <a:t>Slide 17–20 · 3 phút</a:t>
+            </a:r>
+            <a:endParaRPr lang="en-US" sz="1150" dirty="0"/>
           </a:p>
         </p:txBody>
       </p:sp>
       <p:sp>
         <p:nvSpPr>
           <p:cNvPr id="29" name="Shape 26"/>
+          <p:cNvSpPr/>
+          <p:nvPr/>
+        </p:nvSpPr>
+        <p:spPr>
+          <a:xfrm>
+            <a:off x="548640" y="5047488"/>
+            <a:ext cx="438912" cy="438912"/>
+          </a:xfrm>
+          <a:prstGeom prst="ellipse">
+            <a:avLst/>
+          </a:prstGeom>
+          <a:solidFill>
+            <a:srgbClr val="C8701E"/>
+          </a:solidFill>
+          <a:ln/>
+        </p:spPr>
+      </p:sp>
+      <p:sp>
+        <p:nvSpPr>
+          <p:cNvPr id="30" name="Text 27"/>
+          <p:cNvSpPr txBox="1"/>
+          <p:nvPr/>
+        </p:nvSpPr>
+        <p:spPr>
+          <a:xfrm>
+            <a:off x="548640" y="5047488"/>
+            <a:ext cx="438912" cy="438912"/>
+          </a:xfrm>
+          <a:prstGeom prst="rect">
+            <a:avLst/>
+          </a:prstGeom>
+          <a:noFill/>
+          <a:ln/>
+        </p:spPr>
+        <p:txBody>
+          <a:bodyPr wrap="square" lIns="0" tIns="0" rIns="0" bIns="0" rtlCol="0" anchor="ctr"/>
+          <a:lstStyle/>
+          <a:p>
+            <a:pPr algn="ctr" indent="0" marL="0">
+              <a:buNone/>
+            </a:pPr>
+            <a:r>
+              <a:rPr lang="en-US" sz="1200" b="1" dirty="0">
+                <a:solidFill>
+                  <a:srgbClr val="FFFFFF"/>
+                </a:solidFill>
+                <a:latin typeface="Arial" pitchFamily="34" charset="0"/>
+                <a:ea typeface="Arial" pitchFamily="34" charset="-122"/>
+                <a:cs typeface="Arial" pitchFamily="34" charset="-120"/>
+              </a:rPr>
+              <a:t>6</a:t>
+            </a:r>
+            <a:endParaRPr lang="en-US" sz="1200" dirty="0"/>
+          </a:p>
+        </p:txBody>
+      </p:sp>
+      <p:sp>
+        <p:nvSpPr>
+          <p:cNvPr id="31" name="Text 28"/>
+          <p:cNvSpPr txBox="1"/>
+          <p:nvPr/>
+        </p:nvSpPr>
+        <p:spPr>
+          <a:xfrm>
+            <a:off x="1143000" y="5038344"/>
+            <a:ext cx="4389120" cy="256032"/>
+          </a:xfrm>
+          <a:prstGeom prst="rect">
+            <a:avLst/>
+          </a:prstGeom>
+          <a:noFill/>
+          <a:ln/>
+        </p:spPr>
+        <p:txBody>
+          <a:bodyPr wrap="square" lIns="0" tIns="0" rIns="0" bIns="0" rtlCol="0" anchor="t"/>
+          <a:lstStyle/>
+          <a:p>
+            <a:pPr indent="0" marL="0">
+              <a:buNone/>
+            </a:pPr>
+            <a:r>
+              <a:rPr lang="en-US" sz="1550" b="1" dirty="0">
+                <a:solidFill>
+                  <a:srgbClr val="1B2733"/>
+                </a:solidFill>
+                <a:latin typeface="Arial" pitchFamily="34" charset="0"/>
+                <a:ea typeface="Arial" pitchFamily="34" charset="-122"/>
+                <a:cs typeface="Arial" pitchFamily="34" charset="-120"/>
+              </a:rPr>
+              <a:t>Demo dashboard</a:t>
+            </a:r>
+            <a:endParaRPr lang="en-US" sz="1550" dirty="0"/>
+          </a:p>
+        </p:txBody>
+      </p:sp>
+      <p:sp>
+        <p:nvSpPr>
+          <p:cNvPr id="32" name="Text 29"/>
+          <p:cNvSpPr txBox="1"/>
+          <p:nvPr/>
+        </p:nvSpPr>
+        <p:spPr>
+          <a:xfrm>
+            <a:off x="1143000" y="5312664"/>
+            <a:ext cx="4389120" cy="210312"/>
+          </a:xfrm>
+          <a:prstGeom prst="rect">
+            <a:avLst/>
+          </a:prstGeom>
+          <a:noFill/>
+          <a:ln/>
+        </p:spPr>
+        <p:txBody>
+          <a:bodyPr wrap="square" lIns="0" tIns="0" rIns="0" bIns="0" rtlCol="0" anchor="t"/>
+          <a:lstStyle/>
+          <a:p>
+            <a:pPr indent="0" marL="0">
+              <a:buNone/>
+            </a:pPr>
+            <a:r>
+              <a:rPr lang="en-US" sz="1150" dirty="0">
+                <a:solidFill>
+                  <a:srgbClr val="5A6B7B"/>
+                </a:solidFill>
+                <a:latin typeface="Arial" pitchFamily="34" charset="0"/>
+                <a:ea typeface="Arial" pitchFamily="34" charset="-122"/>
+                <a:cs typeface="Arial" pitchFamily="34" charset="-120"/>
+              </a:rPr>
+              <a:t>Artifact đã tạo · 3 phút</a:t>
+            </a:r>
+            <a:endParaRPr lang="en-US" sz="1150" dirty="0"/>
+          </a:p>
+        </p:txBody>
+      </p:sp>
+      <p:sp>
+        <p:nvSpPr>
+          <p:cNvPr id="33" name="Shape 30"/>
           <p:cNvSpPr/>
           <p:nvPr/>
         </p:nvSpPr>
@@ -17102,7 +20092,7 @@
       </p:sp>
       <p:sp>
         <p:nvSpPr>
-          <p:cNvPr id="30" name="Text 27"/>
+          <p:cNvPr id="34" name="Text 31"/>
           <p:cNvSpPr txBox="1"/>
           <p:nvPr/>
         </p:nvSpPr>
@@ -17141,14 +20131,14 @@
       </p:sp>
       <p:sp>
         <p:nvSpPr>
-          <p:cNvPr id="31" name="Shape 28"/>
+          <p:cNvPr id="35" name="Shape 32"/>
           <p:cNvSpPr/>
           <p:nvPr/>
         </p:nvSpPr>
         <p:spPr>
           <a:xfrm>
-            <a:off x="6492240" y="2697480"/>
-            <a:ext cx="475488" cy="475488"/>
+            <a:off x="6492240" y="2615184"/>
+            <a:ext cx="384048" cy="384048"/>
           </a:xfrm>
           <a:prstGeom prst="ellipse">
             <a:avLst/>
@@ -17161,14 +20151,14 @@
       </p:sp>
       <p:sp>
         <p:nvSpPr>
-          <p:cNvPr id="32" name="Text 29"/>
-          <p:cNvSpPr txBox="1"/>
-          <p:nvPr/>
-        </p:nvSpPr>
-        <p:spPr>
-          <a:xfrm>
-            <a:off x="6492240" y="2697480"/>
-            <a:ext cx="475488" cy="475488"/>
+          <p:cNvPr id="36" name="Text 33"/>
+          <p:cNvSpPr txBox="1"/>
+          <p:nvPr/>
+        </p:nvSpPr>
+        <p:spPr>
+          <a:xfrm>
+            <a:off x="6492240" y="2615184"/>
+            <a:ext cx="384048" cy="384048"/>
           </a:xfrm>
           <a:prstGeom prst="rect">
             <a:avLst/>
@@ -17184,7 +20174,7 @@
               <a:buNone/>
             </a:pPr>
             <a:r>
-              <a:rPr lang="en-US" sz="1300" b="1" dirty="0">
+              <a:rPr lang="en-US" sz="1050" b="1" dirty="0">
                 <a:solidFill>
                   <a:srgbClr val="FFFFFF"/>
                 </a:solidFill>
@@ -17194,36 +20184,36 @@
               </a:rPr>
               <a:t>Q1</a:t>
             </a:r>
-            <a:endParaRPr lang="en-US" sz="1300" dirty="0"/>
-          </a:p>
-        </p:txBody>
-      </p:sp>
-      <p:sp>
-        <p:nvSpPr>
-          <p:cNvPr id="33" name="Text 30"/>
-          <p:cNvSpPr txBox="1"/>
-          <p:nvPr/>
-        </p:nvSpPr>
-        <p:spPr>
-          <a:xfrm>
-            <a:off x="7178040" y="2679192"/>
-            <a:ext cx="4206240" cy="960120"/>
-          </a:xfrm>
-          <a:prstGeom prst="rect">
-            <a:avLst/>
-          </a:prstGeom>
-          <a:noFill/>
-          <a:ln/>
-        </p:spPr>
-        <p:txBody>
-          <a:bodyPr wrap="square" lIns="0" tIns="0" rIns="0" bIns="0" rtlCol="0" anchor="t"/>
+            <a:endParaRPr lang="en-US" sz="1050" dirty="0"/>
+          </a:p>
+        </p:txBody>
+      </p:sp>
+      <p:sp>
+        <p:nvSpPr>
+          <p:cNvPr id="37" name="Text 34"/>
+          <p:cNvSpPr txBox="1"/>
+          <p:nvPr/>
+        </p:nvSpPr>
+        <p:spPr>
+          <a:xfrm>
+            <a:off x="7059168" y="2606040"/>
+            <a:ext cx="4224528" cy="457200"/>
+          </a:xfrm>
+          <a:prstGeom prst="rect">
+            <a:avLst/>
+          </a:prstGeom>
+          <a:noFill/>
+          <a:ln/>
+        </p:spPr>
+        <p:txBody>
+          <a:bodyPr wrap="square" lIns="0" tIns="0" rIns="0" bIns="0" rtlCol="0" anchor="ctr"/>
           <a:lstStyle/>
           <a:p>
             <a:pPr indent="0" marL="0">
               <a:buNone/>
             </a:pPr>
             <a:r>
-              <a:rPr lang="en-US" sz="1500" dirty="0">
+              <a:rPr lang="en-US" sz="1250" dirty="0">
                 <a:solidFill>
                   <a:srgbClr val="1B2733"/>
                 </a:solidFill>
@@ -17231,22 +20221,22 @@
                 <a:ea typeface="Arial" pitchFamily="34" charset="-122"/>
                 <a:cs typeface="Arial" pitchFamily="34" charset="-120"/>
               </a:rPr>
-              <a:t>Dữ liệu sensor có thể hiện xu hướng suy giảm theo vòng đời engine không?</a:t>
-            </a:r>
-            <a:endParaRPr lang="en-US" sz="1500" dirty="0"/>
-          </a:p>
-        </p:txBody>
-      </p:sp>
-      <p:sp>
-        <p:nvSpPr>
-          <p:cNvPr id="34" name="Shape 31"/>
+              <a:t>FD001 có hợp lệ về schema, khóa và tính liên tục của cycle không?</a:t>
+            </a:r>
+            <a:endParaRPr lang="en-US" sz="1250" dirty="0"/>
+          </a:p>
+        </p:txBody>
+      </p:sp>
+      <p:sp>
+        <p:nvSpPr>
+          <p:cNvPr id="38" name="Shape 35"/>
           <p:cNvSpPr/>
           <p:nvPr/>
         </p:nvSpPr>
         <p:spPr>
           <a:xfrm>
-            <a:off x="6492240" y="3813048"/>
-            <a:ext cx="475488" cy="475488"/>
+            <a:off x="6492240" y="3172968"/>
+            <a:ext cx="384048" cy="384048"/>
           </a:xfrm>
           <a:prstGeom prst="ellipse">
             <a:avLst/>
@@ -17259,14 +20249,14 @@
       </p:sp>
       <p:sp>
         <p:nvSpPr>
-          <p:cNvPr id="35" name="Text 32"/>
-          <p:cNvSpPr txBox="1"/>
-          <p:nvPr/>
-        </p:nvSpPr>
-        <p:spPr>
-          <a:xfrm>
-            <a:off x="6492240" y="3813048"/>
-            <a:ext cx="475488" cy="475488"/>
+          <p:cNvPr id="39" name="Text 36"/>
+          <p:cNvSpPr txBox="1"/>
+          <p:nvPr/>
+        </p:nvSpPr>
+        <p:spPr>
+          <a:xfrm>
+            <a:off x="6492240" y="3172968"/>
+            <a:ext cx="384048" cy="384048"/>
           </a:xfrm>
           <a:prstGeom prst="rect">
             <a:avLst/>
@@ -17282,7 +20272,7 @@
               <a:buNone/>
             </a:pPr>
             <a:r>
-              <a:rPr lang="en-US" sz="1300" b="1" dirty="0">
+              <a:rPr lang="en-US" sz="1050" b="1" dirty="0">
                 <a:solidFill>
                   <a:srgbClr val="FFFFFF"/>
                 </a:solidFill>
@@ -17292,36 +20282,36 @@
               </a:rPr>
               <a:t>Q2</a:t>
             </a:r>
-            <a:endParaRPr lang="en-US" sz="1300" dirty="0"/>
-          </a:p>
-        </p:txBody>
-      </p:sp>
-      <p:sp>
-        <p:nvSpPr>
-          <p:cNvPr id="36" name="Text 33"/>
-          <p:cNvSpPr txBox="1"/>
-          <p:nvPr/>
-        </p:nvSpPr>
-        <p:spPr>
-          <a:xfrm>
-            <a:off x="7178040" y="3794760"/>
-            <a:ext cx="4206240" cy="960120"/>
-          </a:xfrm>
-          <a:prstGeom prst="rect">
-            <a:avLst/>
-          </a:prstGeom>
-          <a:noFill/>
-          <a:ln/>
-        </p:spPr>
-        <p:txBody>
-          <a:bodyPr wrap="square" lIns="0" tIns="0" rIns="0" bIns="0" rtlCol="0" anchor="t"/>
+            <a:endParaRPr lang="en-US" sz="1050" dirty="0"/>
+          </a:p>
+        </p:txBody>
+      </p:sp>
+      <p:sp>
+        <p:nvSpPr>
+          <p:cNvPr id="40" name="Text 37"/>
+          <p:cNvSpPr txBox="1"/>
+          <p:nvPr/>
+        </p:nvSpPr>
+        <p:spPr>
+          <a:xfrm>
+            <a:off x="7059168" y="3163824"/>
+            <a:ext cx="4224528" cy="457200"/>
+          </a:xfrm>
+          <a:prstGeom prst="rect">
+            <a:avLst/>
+          </a:prstGeom>
+          <a:noFill/>
+          <a:ln/>
+        </p:spPr>
+        <p:txBody>
+          <a:bodyPr wrap="square" lIns="0" tIns="0" rIns="0" bIns="0" rtlCol="0" anchor="ctr"/>
           <a:lstStyle/>
           <a:p>
             <a:pPr indent="0" marL="0">
               <a:buNone/>
             </a:pPr>
             <a:r>
-              <a:rPr lang="en-US" sz="1500" dirty="0">
+              <a:rPr lang="en-US" sz="1250" dirty="0">
                 <a:solidFill>
                   <a:srgbClr val="1B2733"/>
                 </a:solidFill>
@@ -17329,22 +20319,22 @@
                 <a:ea typeface="Arial" pitchFamily="34" charset="-122"/>
                 <a:cs typeface="Arial" pitchFamily="34" charset="-120"/>
               </a:rPr>
-              <a:t>Từ 30 cycle gần nhất, RUL của engine chưa thấy được dự đoán với sai số bao nhiêu?</a:t>
-            </a:r>
-            <a:endParaRPr lang="en-US" sz="1500" dirty="0"/>
-          </a:p>
-        </p:txBody>
-      </p:sp>
-      <p:sp>
-        <p:nvSpPr>
-          <p:cNvPr id="37" name="Shape 34"/>
+              <a:t>Sensor thay đổi thế nào giữa đầu và cuối vòng đời engine?</a:t>
+            </a:r>
+            <a:endParaRPr lang="en-US" sz="1250" dirty="0"/>
+          </a:p>
+        </p:txBody>
+      </p:sp>
+      <p:sp>
+        <p:nvSpPr>
+          <p:cNvPr id="41" name="Shape 38"/>
           <p:cNvSpPr/>
           <p:nvPr/>
         </p:nvSpPr>
         <p:spPr>
           <a:xfrm>
-            <a:off x="6492240" y="4928616"/>
-            <a:ext cx="475488" cy="475488"/>
+            <a:off x="6492240" y="3730752"/>
+            <a:ext cx="384048" cy="384048"/>
           </a:xfrm>
           <a:prstGeom prst="ellipse">
             <a:avLst/>
@@ -17357,14 +20347,14 @@
       </p:sp>
       <p:sp>
         <p:nvSpPr>
-          <p:cNvPr id="38" name="Text 35"/>
-          <p:cNvSpPr txBox="1"/>
-          <p:nvPr/>
-        </p:nvSpPr>
-        <p:spPr>
-          <a:xfrm>
-            <a:off x="6492240" y="4928616"/>
-            <a:ext cx="475488" cy="475488"/>
+          <p:cNvPr id="42" name="Text 39"/>
+          <p:cNvSpPr txBox="1"/>
+          <p:nvPr/>
+        </p:nvSpPr>
+        <p:spPr>
+          <a:xfrm>
+            <a:off x="6492240" y="3730752"/>
+            <a:ext cx="384048" cy="384048"/>
           </a:xfrm>
           <a:prstGeom prst="rect">
             <a:avLst/>
@@ -17380,7 +20370,7 @@
               <a:buNone/>
             </a:pPr>
             <a:r>
-              <a:rPr lang="en-US" sz="1300" b="1" dirty="0">
+              <a:rPr lang="en-US" sz="1050" b="1" dirty="0">
                 <a:solidFill>
                   <a:srgbClr val="FFFFFF"/>
                 </a:solidFill>
@@ -17390,36 +20380,36 @@
               </a:rPr>
               <a:t>Q3</a:t>
             </a:r>
-            <a:endParaRPr lang="en-US" sz="1300" dirty="0"/>
-          </a:p>
-        </p:txBody>
-      </p:sp>
-      <p:sp>
-        <p:nvSpPr>
-          <p:cNvPr id="39" name="Text 36"/>
-          <p:cNvSpPr txBox="1"/>
-          <p:nvPr/>
-        </p:nvSpPr>
-        <p:spPr>
-          <a:xfrm>
-            <a:off x="7178040" y="4910328"/>
-            <a:ext cx="4206240" cy="960120"/>
-          </a:xfrm>
-          <a:prstGeom prst="rect">
-            <a:avLst/>
-          </a:prstGeom>
-          <a:noFill/>
-          <a:ln/>
-        </p:spPr>
-        <p:txBody>
-          <a:bodyPr wrap="square" lIns="0" tIns="0" rIns="0" bIns="0" rtlCol="0" anchor="t"/>
+            <a:endParaRPr lang="en-US" sz="1050" dirty="0"/>
+          </a:p>
+        </p:txBody>
+      </p:sp>
+      <p:sp>
+        <p:nvSpPr>
+          <p:cNvPr id="43" name="Text 40"/>
+          <p:cNvSpPr txBox="1"/>
+          <p:nvPr/>
+        </p:nvSpPr>
+        <p:spPr>
+          <a:xfrm>
+            <a:off x="7059168" y="3721608"/>
+            <a:ext cx="4224528" cy="457200"/>
+          </a:xfrm>
+          <a:prstGeom prst="rect">
+            <a:avLst/>
+          </a:prstGeom>
+          <a:noFill/>
+          <a:ln/>
+        </p:spPr>
+        <p:txBody>
+          <a:bodyPr wrap="square" lIns="0" tIns="0" rIns="0" bIns="0" rtlCol="0" anchor="ctr"/>
           <a:lstStyle/>
           <a:p>
             <a:pPr indent="0" marL="0">
               <a:buNone/>
             </a:pPr>
             <a:r>
-              <a:rPr lang="en-US" sz="1500" dirty="0">
+              <a:rPr lang="en-US" sz="1250" dirty="0">
                 <a:solidFill>
                   <a:srgbClr val="1B2733"/>
                 </a:solidFill>
@@ -17427,9 +20417,303 @@
                 <a:ea typeface="Arial" pitchFamily="34" charset="-122"/>
                 <a:cs typeface="Arial" pitchFamily="34" charset="-120"/>
               </a:rPr>
-              <a:t>Có thể phát cảnh báo trước khi RUL xuống dưới 30 cycles không, và model có dùng được cho subset khác không?</a:t>
-            </a:r>
-            <a:endParaRPr lang="en-US" sz="1500" dirty="0"/>
+              <a:t>ETL bằng Pandas và PySpark có cho kết quả giống nhau không?</a:t>
+            </a:r>
+            <a:endParaRPr lang="en-US" sz="1250" dirty="0"/>
+          </a:p>
+        </p:txBody>
+      </p:sp>
+      <p:sp>
+        <p:nvSpPr>
+          <p:cNvPr id="44" name="Shape 41"/>
+          <p:cNvSpPr/>
+          <p:nvPr/>
+        </p:nvSpPr>
+        <p:spPr>
+          <a:xfrm>
+            <a:off x="6492240" y="4288536"/>
+            <a:ext cx="384048" cy="384048"/>
+          </a:xfrm>
+          <a:prstGeom prst="ellipse">
+            <a:avLst/>
+          </a:prstGeom>
+          <a:solidFill>
+            <a:srgbClr val="C8701E"/>
+          </a:solidFill>
+          <a:ln/>
+        </p:spPr>
+      </p:sp>
+      <p:sp>
+        <p:nvSpPr>
+          <p:cNvPr id="45" name="Text 42"/>
+          <p:cNvSpPr txBox="1"/>
+          <p:nvPr/>
+        </p:nvSpPr>
+        <p:spPr>
+          <a:xfrm>
+            <a:off x="6492240" y="4288536"/>
+            <a:ext cx="384048" cy="384048"/>
+          </a:xfrm>
+          <a:prstGeom prst="rect">
+            <a:avLst/>
+          </a:prstGeom>
+          <a:noFill/>
+          <a:ln/>
+        </p:spPr>
+        <p:txBody>
+          <a:bodyPr wrap="square" lIns="0" tIns="0" rIns="0" bIns="0" rtlCol="0" anchor="ctr"/>
+          <a:lstStyle/>
+          <a:p>
+            <a:pPr algn="ctr" indent="0" marL="0">
+              <a:buNone/>
+            </a:pPr>
+            <a:r>
+              <a:rPr lang="en-US" sz="1050" b="1" dirty="0">
+                <a:solidFill>
+                  <a:srgbClr val="FFFFFF"/>
+                </a:solidFill>
+                <a:latin typeface="Arial" pitchFamily="34" charset="0"/>
+                <a:ea typeface="Arial" pitchFamily="34" charset="-122"/>
+                <a:cs typeface="Arial" pitchFamily="34" charset="-120"/>
+              </a:rPr>
+              <a:t>Q4</a:t>
+            </a:r>
+            <a:endParaRPr lang="en-US" sz="1050" dirty="0"/>
+          </a:p>
+        </p:txBody>
+      </p:sp>
+      <p:sp>
+        <p:nvSpPr>
+          <p:cNvPr id="46" name="Text 43"/>
+          <p:cNvSpPr txBox="1"/>
+          <p:nvPr/>
+        </p:nvSpPr>
+        <p:spPr>
+          <a:xfrm>
+            <a:off x="7059168" y="4279392"/>
+            <a:ext cx="4224528" cy="457200"/>
+          </a:xfrm>
+          <a:prstGeom prst="rect">
+            <a:avLst/>
+          </a:prstGeom>
+          <a:noFill/>
+          <a:ln/>
+        </p:spPr>
+        <p:txBody>
+          <a:bodyPr wrap="square" lIns="0" tIns="0" rIns="0" bIns="0" rtlCol="0" anchor="ctr"/>
+          <a:lstStyle/>
+          <a:p>
+            <a:pPr indent="0" marL="0">
+              <a:buNone/>
+            </a:pPr>
+            <a:r>
+              <a:rPr lang="en-US" sz="1250" dirty="0">
+                <a:solidFill>
+                  <a:srgbClr val="1B2733"/>
+                </a:solidFill>
+                <a:latin typeface="Arial" pitchFamily="34" charset="0"/>
+                <a:ea typeface="Arial" pitchFamily="34" charset="-122"/>
+                <a:cs typeface="Arial" pitchFamily="34" charset="-120"/>
+              </a:rPr>
+              <a:t>HGB126 hay HGB169 ổn định hơn trên cùng panel và các mốc vòng đời?</a:t>
+            </a:r>
+            <a:endParaRPr lang="en-US" sz="1250" dirty="0"/>
+          </a:p>
+        </p:txBody>
+      </p:sp>
+      <p:sp>
+        <p:nvSpPr>
+          <p:cNvPr id="47" name="Shape 44"/>
+          <p:cNvSpPr/>
+          <p:nvPr/>
+        </p:nvSpPr>
+        <p:spPr>
+          <a:xfrm>
+            <a:off x="6492240" y="4846320"/>
+            <a:ext cx="384048" cy="384048"/>
+          </a:xfrm>
+          <a:prstGeom prst="ellipse">
+            <a:avLst/>
+          </a:prstGeom>
+          <a:solidFill>
+            <a:srgbClr val="C8701E"/>
+          </a:solidFill>
+          <a:ln/>
+        </p:spPr>
+      </p:sp>
+      <p:sp>
+        <p:nvSpPr>
+          <p:cNvPr id="48" name="Text 45"/>
+          <p:cNvSpPr txBox="1"/>
+          <p:nvPr/>
+        </p:nvSpPr>
+        <p:spPr>
+          <a:xfrm>
+            <a:off x="6492240" y="4846320"/>
+            <a:ext cx="384048" cy="384048"/>
+          </a:xfrm>
+          <a:prstGeom prst="rect">
+            <a:avLst/>
+          </a:prstGeom>
+          <a:noFill/>
+          <a:ln/>
+        </p:spPr>
+        <p:txBody>
+          <a:bodyPr wrap="square" lIns="0" tIns="0" rIns="0" bIns="0" rtlCol="0" anchor="ctr"/>
+          <a:lstStyle/>
+          <a:p>
+            <a:pPr algn="ctr" indent="0" marL="0">
+              <a:buNone/>
+            </a:pPr>
+            <a:r>
+              <a:rPr lang="en-US" sz="1050" b="1" dirty="0">
+                <a:solidFill>
+                  <a:srgbClr val="FFFFFF"/>
+                </a:solidFill>
+                <a:latin typeface="Arial" pitchFamily="34" charset="0"/>
+                <a:ea typeface="Arial" pitchFamily="34" charset="-122"/>
+                <a:cs typeface="Arial" pitchFamily="34" charset="-120"/>
+              </a:rPr>
+              <a:t>Q5</a:t>
+            </a:r>
+            <a:endParaRPr lang="en-US" sz="1050" dirty="0"/>
+          </a:p>
+        </p:txBody>
+      </p:sp>
+      <p:sp>
+        <p:nvSpPr>
+          <p:cNvPr id="49" name="Text 46"/>
+          <p:cNvSpPr txBox="1"/>
+          <p:nvPr/>
+        </p:nvSpPr>
+        <p:spPr>
+          <a:xfrm>
+            <a:off x="7059168" y="4837176"/>
+            <a:ext cx="4224528" cy="457200"/>
+          </a:xfrm>
+          <a:prstGeom prst="rect">
+            <a:avLst/>
+          </a:prstGeom>
+          <a:noFill/>
+          <a:ln/>
+        </p:spPr>
+        <p:txBody>
+          <a:bodyPr wrap="square" lIns="0" tIns="0" rIns="0" bIns="0" rtlCol="0" anchor="ctr"/>
+          <a:lstStyle/>
+          <a:p>
+            <a:pPr indent="0" marL="0">
+              <a:buNone/>
+            </a:pPr>
+            <a:r>
+              <a:rPr lang="en-US" sz="1250" dirty="0">
+                <a:solidFill>
+                  <a:srgbClr val="1B2733"/>
+                </a:solidFill>
+                <a:latin typeface="Arial" pitchFamily="34" charset="0"/>
+                <a:ea typeface="Arial" pitchFamily="34" charset="-122"/>
+                <a:cs typeface="Arial" pitchFamily="34" charset="-120"/>
+              </a:rPr>
+              <a:t>RUL có chuyển thành cảnh báo sớm với chất lượng chấp nhận được không?</a:t>
+            </a:r>
+            <a:endParaRPr lang="en-US" sz="1250" dirty="0"/>
+          </a:p>
+        </p:txBody>
+      </p:sp>
+      <p:sp>
+        <p:nvSpPr>
+          <p:cNvPr id="50" name="Shape 47"/>
+          <p:cNvSpPr/>
+          <p:nvPr/>
+        </p:nvSpPr>
+        <p:spPr>
+          <a:xfrm>
+            <a:off x="6492240" y="5404104"/>
+            <a:ext cx="384048" cy="384048"/>
+          </a:xfrm>
+          <a:prstGeom prst="ellipse">
+            <a:avLst/>
+          </a:prstGeom>
+          <a:solidFill>
+            <a:srgbClr val="C8701E"/>
+          </a:solidFill>
+          <a:ln/>
+        </p:spPr>
+      </p:sp>
+      <p:sp>
+        <p:nvSpPr>
+          <p:cNvPr id="51" name="Text 48"/>
+          <p:cNvSpPr txBox="1"/>
+          <p:nvPr/>
+        </p:nvSpPr>
+        <p:spPr>
+          <a:xfrm>
+            <a:off x="6492240" y="5404104"/>
+            <a:ext cx="384048" cy="384048"/>
+          </a:xfrm>
+          <a:prstGeom prst="rect">
+            <a:avLst/>
+          </a:prstGeom>
+          <a:noFill/>
+          <a:ln/>
+        </p:spPr>
+        <p:txBody>
+          <a:bodyPr wrap="square" lIns="0" tIns="0" rIns="0" bIns="0" rtlCol="0" anchor="ctr"/>
+          <a:lstStyle/>
+          <a:p>
+            <a:pPr algn="ctr" indent="0" marL="0">
+              <a:buNone/>
+            </a:pPr>
+            <a:r>
+              <a:rPr lang="en-US" sz="1050" b="1" dirty="0">
+                <a:solidFill>
+                  <a:srgbClr val="FFFFFF"/>
+                </a:solidFill>
+                <a:latin typeface="Arial" pitchFamily="34" charset="0"/>
+                <a:ea typeface="Arial" pitchFamily="34" charset="-122"/>
+                <a:cs typeface="Arial" pitchFamily="34" charset="-120"/>
+              </a:rPr>
+              <a:t>Q6</a:t>
+            </a:r>
+            <a:endParaRPr lang="en-US" sz="1050" dirty="0"/>
+          </a:p>
+        </p:txBody>
+      </p:sp>
+      <p:sp>
+        <p:nvSpPr>
+          <p:cNvPr id="52" name="Text 49"/>
+          <p:cNvSpPr txBox="1"/>
+          <p:nvPr/>
+        </p:nvSpPr>
+        <p:spPr>
+          <a:xfrm>
+            <a:off x="7059168" y="5394960"/>
+            <a:ext cx="4224528" cy="457200"/>
+          </a:xfrm>
+          <a:prstGeom prst="rect">
+            <a:avLst/>
+          </a:prstGeom>
+          <a:noFill/>
+          <a:ln/>
+        </p:spPr>
+        <p:txBody>
+          <a:bodyPr wrap="square" lIns="0" tIns="0" rIns="0" bIns="0" rtlCol="0" anchor="ctr"/>
+          <a:lstStyle/>
+          <a:p>
+            <a:pPr indent="0" marL="0">
+              <a:buNone/>
+            </a:pPr>
+            <a:r>
+              <a:rPr lang="en-US" sz="1250" dirty="0">
+                <a:solidFill>
+                  <a:srgbClr val="1B2733"/>
+                </a:solidFill>
+                <a:latin typeface="Arial" pitchFamily="34" charset="0"/>
+                <a:ea typeface="Arial" pitchFamily="34" charset="-122"/>
+                <a:cs typeface="Arial" pitchFamily="34" charset="-120"/>
+              </a:rPr>
+              <a:t>Model huấn luyện trên FD001 hoạt động thế nào khi áp dụng FD002–FD004?</a:t>
+            </a:r>
+            <a:endParaRPr lang="en-US" sz="1250" dirty="0"/>
           </a:p>
         </p:txBody>
       </p:sp>
@@ -17682,7 +20966,7 @@
                 <a:ea typeface="Arial" pitchFamily="34" charset="-122"/>
                 <a:cs typeface="Arial" pitchFamily="34" charset="-120"/>
               </a:rPr>
-              <a:t>PySpark chạy local để kiểm tra parity; benchmark chỉ đo Pandas.</a:t>
+              <a:t>Benchmark Pandas/PySpark chạy local; ghi qua driver, chưa đo cluster.</a:t>
             </a:r>
             <a:endParaRPr lang="en-US" sz="1500" dirty="0"/>
           </a:p>
@@ -17721,7 +21005,7 @@
                 <a:ea typeface="Arial" pitchFamily="34" charset="-122"/>
                 <a:cs typeface="Arial" pitchFamily="34" charset="-120"/>
               </a:rPr>
-              <a:t>Hướng tiếp theo (đề xuất, chưa thực hiện)</a:t>
+              <a:t>Đã bổ sung và hướng tiếp theo</a:t>
             </a:r>
             <a:endParaRPr lang="en-US" sz="1700" dirty="0"/>
           </a:p>
@@ -17764,7 +21048,7 @@
                 <a:ea typeface="Arial" pitchFamily="34" charset="-122"/>
                 <a:cs typeface="Arial" pitchFamily="34" charset="-120"/>
               </a:rPr>
-              <a:t>Cắt ngưỡng nhãn RUL, chọn ngưỡng trong vòng trong của nested CV.</a:t>
+              <a:t>Refit mù HGB169 trên cùng protocol để xác nhận candidate bằng một lần chạy độc lập.</a:t>
             </a:r>
             <a:endParaRPr lang="en-US" sz="1500" dirty="0"/>
           </a:p>
@@ -17785,7 +21069,7 @@
                 <a:ea typeface="Arial" pitchFamily="34" charset="-122"/>
                 <a:cs typeface="Arial" pitchFamily="34" charset="-120"/>
               </a:rPr>
-              <a:t>Chuẩn hóa sensor theo điều kiện vận hành cho FD002 và FD004.</a:t>
+              <a:t>Hiệu chuẩn warning policy riêng với chi phí báo sớm, báo trễ và tiêu chí vận hành.</a:t>
             </a:r>
             <a:endParaRPr lang="en-US" sz="1500" dirty="0"/>
           </a:p>
@@ -17806,7 +21090,7 @@
                 <a:ea typeface="Arial" pitchFamily="34" charset="-122"/>
                 <a:cs typeface="Arial" pitchFamily="34" charset="-120"/>
               </a:rPr>
-              <a:t>So sánh CNN 1D hoặc LSTM với HGB trên cùng fold và cùng cách xử lý nhãn.</a:t>
+              <a:t>Đánh giá sai số theo toàn quỹ đạo trên engine chưa thấy và kèm khoảng không chắc chắn.</a:t>
             </a:r>
             <a:endParaRPr lang="en-US" sz="1500" dirty="0"/>
           </a:p>
@@ -17827,7 +21111,7 @@
                 <a:ea typeface="Arial" pitchFamily="34" charset="-122"/>
                 <a:cs typeface="Arial" pitchFamily="34" charset="-120"/>
               </a:rPr>
-              <a:t>Chuyển bước tạo đặc trưng sang PySpark, đo cả pipeline gồm I/O.</a:t>
+              <a:t>Benchmark PySpark trên cluster thực; benchmark local hiện chỉ là bằng chứng khả năng chạy.</a:t>
             </a:r>
             <a:endParaRPr lang="en-US" sz="1500" dirty="0"/>
           </a:p>
@@ -24099,7 +27383,7 @@
                 <a:ea typeface="Arial" pitchFamily="34" charset="-122"/>
                 <a:cs typeface="Arial" pitchFamily="34" charset="-120"/>
               </a:rPr>
-              <a:t>Thử nghiệm khả năng mở rộng hiện chỉ đo Pandas in-memory; chưa có benchmark Spark hoặc cluster</a:t>
+              <a:t>Đã bổ sung parity 126 rolling features và benchmark local 1×/10×: đọc, tổng hợp, tạo feature, ghi file</a:t>
             </a:r>
             <a:endParaRPr lang="en-US" sz="1500" dirty="0"/>
           </a:p>
@@ -24138,7 +27422,7 @@
                 <a:ea typeface="Arial" pitchFamily="34" charset="-122"/>
                 <a:cs typeface="Arial" pitchFamily="34" charset="-120"/>
               </a:rPr>
-              <a:t>Nguồn: outputs/etl/parity.json; outputs/etl/benchmark.json; handoff/DATA_WALKTHROUGH.md</a:t>
+              <a:t>Nguồn: outputs/etl/parity.json; outputs/benchmarks/20260929/{measurements.csv,run_info.json}</a:t>
             </a:r>
             <a:endParaRPr lang="en-US" sz="900" dirty="0"/>
           </a:p>
@@ -25405,7 +28689,7 @@
                 <a:ea typeface="Arial" pitchFamily="34" charset="-122"/>
                 <a:cs typeface="Arial" pitchFamily="34" charset="-120"/>
               </a:rPr>
-              <a:t>So khớp schema, khóa (split, engine_id, cycle), số dòng và giá trị số. PySpark chạy local; modeling và rolling features dùng Pandas/scikit-learn.</a:t>
+              <a:t>Rolling features: so toàn bộ 27.927 dòng × 126 features, tolerance 10⁻⁷. Cùng window 30, std ddof=1 và slope nhân quả theo từng engine.</a:t>
             </a:r>
             <a:endParaRPr lang="en-US" sz="1300" dirty="0"/>
           </a:p>
@@ -25460,7 +28744,7 @@
                 <a:ea typeface="Arial" pitchFamily="34" charset="-122"/>
                 <a:cs typeface="Arial" pitchFamily="34" charset="-120"/>
               </a:rPr>
-              <a:t>Số dòng tăng 100×, thời gian tăng khoảng 86× (0,0195 → 1,6752 giây).</a:t>
+              <a:t>Chưa gồm startup Spark. Ghi qua Arrow trên driver; chưa suy rộng hiệu năng sang cluster.</a:t>
             </a:r>
             <a:endParaRPr lang="en-US" sz="1300" dirty="0"/>
           </a:p>
